--- a/unilever-aerchain/Unilever_Aerchain_Infosys_Deck.pptx
+++ b/unilever-aerchain/Unilever_Aerchain_Infosys_Deck.pptx
@@ -3105,9 +3105,17 @@
           <a:prstGeom prst="rect">
             <a:avLst/>
           </a:prstGeom>
-          <a:solidFill>
-            <a:srgbClr val="7C3AED"/>
-          </a:solidFill>
+          <a:gradFill rotWithShape="1">
+            <a:gsLst>
+              <a:gs pos="0">
+                <a:srgbClr val="7C3AED"/>
+              </a:gs>
+              <a:gs pos="100000">
+                <a:srgbClr val="6D28D9"/>
+              </a:gs>
+            </a:gsLst>
+            <a:lin scaled="0" ang="18900000"/>
+          </a:gradFill>
           <a:ln>
             <a:noFill/>
           </a:ln>
@@ -3144,7 +3152,7 @@
         <p:spPr>
           <a:xfrm>
             <a:off x="0" y="0"/>
-            <a:ext cx="18288000" cy="914400"/>
+            <a:ext cx="18288000" cy="960120"/>
           </a:xfrm>
           <a:prstGeom prst="rect">
             <a:avLst/>
@@ -3187,7 +3195,7 @@
         </p:nvCxnSpPr>
         <p:spPr>
           <a:xfrm>
-            <a:off x="0" y="914400"/>
+            <a:off x="0" y="960120"/>
             <a:ext cx="18288000" cy="0"/>
           </a:xfrm>
           <a:prstGeom prst="bentConnector3">
@@ -3231,7 +3239,7 @@
         </p:blipFill>
         <p:spPr>
           <a:xfrm>
-            <a:off x="758952" y="274320"/>
+            <a:off x="758952" y="292608"/>
             <a:ext cx="2542032" cy="365760"/>
           </a:xfrm>
           <a:prstGeom prst="rect">
@@ -3248,7 +3256,7 @@
         <p:spPr>
           <a:xfrm>
             <a:off x="3456432" y="0"/>
-            <a:ext cx="457200" cy="914400"/>
+            <a:ext cx="457200" cy="960120"/>
           </a:xfrm>
           <a:prstGeom prst="rect">
             <a:avLst/>
@@ -3300,8 +3308,8 @@
         </p:blipFill>
         <p:spPr>
           <a:xfrm>
-            <a:off x="3977639" y="320040"/>
-            <a:ext cx="960120" cy="283464"/>
+            <a:off x="3977639" y="338328"/>
+            <a:ext cx="749808" cy="292608"/>
           </a:xfrm>
           <a:prstGeom prst="rect">
             <a:avLst/>
@@ -3316,8 +3324,8 @@
         </p:nvSpPr>
         <p:spPr>
           <a:xfrm>
-            <a:off x="5513832" y="0"/>
-            <a:ext cx="8229600" cy="914400"/>
+            <a:off x="5285232" y="0"/>
+            <a:ext cx="8229600" cy="960120"/>
           </a:xfrm>
           <a:prstGeom prst="rect">
             <a:avLst/>
@@ -3342,7 +3350,7 @@
               </a:spcAft>
             </a:pPr>
             <a:r>
-              <a:rPr sz="1100" b="1" i="0" spc="120">
+              <a:rPr sz="1200" b="1" i="0" spc="120">
                 <a:solidFill>
                   <a:srgbClr val="6A707B"/>
                 </a:solidFill>
@@ -3361,8 +3369,8 @@
         </p:nvSpPr>
         <p:spPr>
           <a:xfrm>
-            <a:off x="15087600" y="0"/>
-            <a:ext cx="1554480" cy="914400"/>
+            <a:off x="14996159" y="0"/>
+            <a:ext cx="1645920" cy="960120"/>
           </a:xfrm>
           <a:prstGeom prst="rect">
             <a:avLst/>
@@ -3387,7 +3395,7 @@
               </a:spcAft>
             </a:pPr>
             <a:r>
-              <a:rPr sz="1200" b="1" i="0">
+              <a:rPr sz="1300" b="1" i="0">
                 <a:solidFill>
                   <a:srgbClr val="1B1F26"/>
                 </a:solidFill>
@@ -3396,7 +3404,7 @@
               <a:t>01</a:t>
             </a:r>
             <a:r>
-              <a:rPr sz="1200" b="1" i="0">
+              <a:rPr sz="1300" b="1" i="0">
                 <a:solidFill>
                   <a:srgbClr val="6A707B"/>
                 </a:solidFill>
@@ -3423,8 +3431,8 @@
         </p:blipFill>
         <p:spPr>
           <a:xfrm>
-            <a:off x="16962120" y="246888"/>
-            <a:ext cx="411480" cy="457200"/>
+            <a:off x="16916400" y="256032"/>
+            <a:ext cx="457200" cy="475488"/>
           </a:xfrm>
           <a:prstGeom prst="rect">
             <a:avLst/>
@@ -3439,7 +3447,7 @@
         </p:nvSpPr>
         <p:spPr>
           <a:xfrm>
-            <a:off x="914400" y="1783080"/>
+            <a:off x="914400" y="1810512"/>
             <a:ext cx="14630400" cy="274320"/>
           </a:xfrm>
           <a:prstGeom prst="rect">
@@ -3519,7 +3527,7 @@
               </a:spcAft>
             </a:pPr>
             <a:r>
-              <a:rPr sz="7800" b="0" i="0">
+              <a:rPr sz="8000" b="0" i="0">
                 <a:solidFill>
                   <a:srgbClr val="FFFFFF"/>
                 </a:solidFill>
@@ -3541,7 +3549,7 @@
               </a:spcAft>
             </a:pPr>
             <a:r>
-              <a:rPr sz="7800" b="0" i="0">
+              <a:rPr sz="8000" b="0" i="0">
                 <a:solidFill>
                   <a:srgbClr val="FFFFFF"/>
                 </a:solidFill>
@@ -3563,7 +3571,7 @@
               </a:spcAft>
             </a:pPr>
             <a:r>
-              <a:rPr sz="6600" b="0" i="0">
+              <a:rPr sz="6800" b="0" i="0">
                 <a:solidFill>
                   <a:srgbClr val="FFFFFF"/>
                 </a:solidFill>
@@ -3582,8 +3590,8 @@
         </p:nvSpPr>
         <p:spPr>
           <a:xfrm>
-            <a:off x="914400" y="6720840"/>
-            <a:ext cx="14173200" cy="822960"/>
+            <a:off x="914400" y="6629400"/>
+            <a:ext cx="15087600" cy="914400"/>
           </a:xfrm>
           <a:prstGeom prst="rect">
             <a:avLst/>
@@ -3598,17 +3606,17 @@
           <a:p>
             <a:pPr algn="l">
               <a:lnSpc>
-                <a:spcPct val="122000"/>
-              </a:lnSpc>
-              <a:spcBef>
-                <a:spcPts val="0"/>
-              </a:spcBef>
-              <a:spcAft>
-                <a:spcPts val="0"/>
-              </a:spcAft>
-            </a:pPr>
-            <a:r>
-              <a:rPr sz="1600" b="0" i="0">
+                <a:spcPct val="125000"/>
+              </a:lnSpc>
+              <a:spcBef>
+                <a:spcPts val="0"/>
+              </a:spcBef>
+              <a:spcAft>
+                <a:spcPts val="0"/>
+              </a:spcAft>
+            </a:pPr>
+            <a:r>
+              <a:rPr sz="1800" b="0" i="0">
                 <a:solidFill>
                   <a:srgbClr val="E0CFFA"/>
                 </a:solidFill>
@@ -3627,7 +3635,7 @@
         </p:nvCxnSpPr>
         <p:spPr>
           <a:xfrm>
-            <a:off x="914400" y="7818120"/>
+            <a:off x="914400" y="7863840"/>
             <a:ext cx="16459200" cy="0"/>
           </a:xfrm>
           <a:prstGeom prst="bentConnector3">
@@ -3663,8 +3671,8 @@
         </p:nvSpPr>
         <p:spPr>
           <a:xfrm>
-            <a:off x="914400" y="8092440"/>
-            <a:ext cx="3840480" cy="713232"/>
+            <a:off x="914400" y="8156448"/>
+            <a:ext cx="3931920" cy="749808"/>
           </a:xfrm>
           <a:prstGeom prst="rect">
             <a:avLst/>
@@ -3689,7 +3697,7 @@
               </a:spcAft>
             </a:pPr>
             <a:r>
-              <a:rPr sz="4400" b="0" i="0">
+              <a:rPr sz="4600" b="0" i="0">
                 <a:solidFill>
                   <a:srgbClr val="FFFFFF"/>
                 </a:solidFill>
@@ -3708,8 +3716,8 @@
         </p:nvSpPr>
         <p:spPr>
           <a:xfrm>
-            <a:off x="914400" y="8796528"/>
-            <a:ext cx="3840480" cy="566928"/>
+            <a:off x="914400" y="8942832"/>
+            <a:ext cx="3931920" cy="548640"/>
           </a:xfrm>
           <a:prstGeom prst="rect">
             <a:avLst/>
@@ -3724,17 +3732,17 @@
           <a:p>
             <a:pPr algn="l">
               <a:lnSpc>
-                <a:spcPct val="110000"/>
-              </a:lnSpc>
-              <a:spcBef>
-                <a:spcPts val="0"/>
-              </a:spcBef>
-              <a:spcAft>
-                <a:spcPts val="0"/>
-              </a:spcAft>
-            </a:pPr>
-            <a:r>
-              <a:rPr sz="1200" b="0" i="0">
+                <a:spcPct val="112000"/>
+              </a:lnSpc>
+              <a:spcBef>
+                <a:spcPts val="0"/>
+              </a:spcBef>
+              <a:spcAft>
+                <a:spcPts val="0"/>
+              </a:spcAft>
+            </a:pPr>
+            <a:r>
+              <a:rPr sz="1350" b="0" i="0">
                 <a:solidFill>
                   <a:srgbClr val="E0CFFA"/>
                 </a:solidFill>
@@ -3753,8 +3761,8 @@
         </p:nvSpPr>
         <p:spPr>
           <a:xfrm>
-            <a:off x="5029200" y="8092440"/>
-            <a:ext cx="3840480" cy="713232"/>
+            <a:off x="5029200" y="8156448"/>
+            <a:ext cx="3931920" cy="749808"/>
           </a:xfrm>
           <a:prstGeom prst="rect">
             <a:avLst/>
@@ -3779,7 +3787,7 @@
               </a:spcAft>
             </a:pPr>
             <a:r>
-              <a:rPr sz="4400" b="0" i="0">
+              <a:rPr sz="4600" b="0" i="0">
                 <a:solidFill>
                   <a:srgbClr val="FFFFFF"/>
                 </a:solidFill>
@@ -3798,8 +3806,8 @@
         </p:nvSpPr>
         <p:spPr>
           <a:xfrm>
-            <a:off x="5029200" y="8796528"/>
-            <a:ext cx="3840480" cy="566928"/>
+            <a:off x="5029200" y="8942832"/>
+            <a:ext cx="3931920" cy="548640"/>
           </a:xfrm>
           <a:prstGeom prst="rect">
             <a:avLst/>
@@ -3814,17 +3822,17 @@
           <a:p>
             <a:pPr algn="l">
               <a:lnSpc>
-                <a:spcPct val="110000"/>
-              </a:lnSpc>
-              <a:spcBef>
-                <a:spcPts val="0"/>
-              </a:spcBef>
-              <a:spcAft>
-                <a:spcPts val="0"/>
-              </a:spcAft>
-            </a:pPr>
-            <a:r>
-              <a:rPr sz="1200" b="0" i="0">
+                <a:spcPct val="112000"/>
+              </a:lnSpc>
+              <a:spcBef>
+                <a:spcPts val="0"/>
+              </a:spcBef>
+              <a:spcAft>
+                <a:spcPts val="0"/>
+              </a:spcAft>
+            </a:pPr>
+            <a:r>
+              <a:rPr sz="1350" b="0" i="0">
                 <a:solidFill>
                   <a:srgbClr val="E0CFFA"/>
                 </a:solidFill>
@@ -3843,8 +3851,8 @@
         </p:nvSpPr>
         <p:spPr>
           <a:xfrm>
-            <a:off x="9144000" y="8092440"/>
-            <a:ext cx="3840480" cy="713232"/>
+            <a:off x="9144000" y="8156448"/>
+            <a:ext cx="3931920" cy="749808"/>
           </a:xfrm>
           <a:prstGeom prst="rect">
             <a:avLst/>
@@ -3869,7 +3877,7 @@
               </a:spcAft>
             </a:pPr>
             <a:r>
-              <a:rPr sz="4400" b="0" i="0">
+              <a:rPr sz="4600" b="0" i="0">
                 <a:solidFill>
                   <a:srgbClr val="FFFFFF"/>
                 </a:solidFill>
@@ -3888,8 +3896,8 @@
         </p:nvSpPr>
         <p:spPr>
           <a:xfrm>
-            <a:off x="9144000" y="8796528"/>
-            <a:ext cx="3840480" cy="566928"/>
+            <a:off x="9144000" y="8942832"/>
+            <a:ext cx="3931920" cy="548640"/>
           </a:xfrm>
           <a:prstGeom prst="rect">
             <a:avLst/>
@@ -3904,17 +3912,17 @@
           <a:p>
             <a:pPr algn="l">
               <a:lnSpc>
-                <a:spcPct val="110000"/>
-              </a:lnSpc>
-              <a:spcBef>
-                <a:spcPts val="0"/>
-              </a:spcBef>
-              <a:spcAft>
-                <a:spcPts val="0"/>
-              </a:spcAft>
-            </a:pPr>
-            <a:r>
-              <a:rPr sz="1200" b="0" i="0">
+                <a:spcPct val="112000"/>
+              </a:lnSpc>
+              <a:spcBef>
+                <a:spcPts val="0"/>
+              </a:spcBef>
+              <a:spcAft>
+                <a:spcPts val="0"/>
+              </a:spcAft>
+            </a:pPr>
+            <a:r>
+              <a:rPr sz="1350" b="0" i="0">
                 <a:solidFill>
                   <a:srgbClr val="E0CFFA"/>
                 </a:solidFill>
@@ -3933,8 +3941,8 @@
         </p:nvSpPr>
         <p:spPr>
           <a:xfrm>
-            <a:off x="13258800" y="8092440"/>
-            <a:ext cx="3840480" cy="713232"/>
+            <a:off x="13258800" y="8156448"/>
+            <a:ext cx="3931920" cy="749808"/>
           </a:xfrm>
           <a:prstGeom prst="rect">
             <a:avLst/>
@@ -3959,7 +3967,7 @@
               </a:spcAft>
             </a:pPr>
             <a:r>
-              <a:rPr sz="4400" b="0" i="0">
+              <a:rPr sz="4600" b="0" i="0">
                 <a:solidFill>
                   <a:srgbClr val="FFFFFF"/>
                 </a:solidFill>
@@ -3978,8 +3986,8 @@
         </p:nvSpPr>
         <p:spPr>
           <a:xfrm>
-            <a:off x="13258800" y="8796528"/>
-            <a:ext cx="3840480" cy="566928"/>
+            <a:off x="13258800" y="8942832"/>
+            <a:ext cx="3931920" cy="548640"/>
           </a:xfrm>
           <a:prstGeom prst="rect">
             <a:avLst/>
@@ -3994,17 +4002,17 @@
           <a:p>
             <a:pPr algn="l">
               <a:lnSpc>
-                <a:spcPct val="110000"/>
-              </a:lnSpc>
-              <a:spcBef>
-                <a:spcPts val="0"/>
-              </a:spcBef>
-              <a:spcAft>
-                <a:spcPts val="0"/>
-              </a:spcAft>
-            </a:pPr>
-            <a:r>
-              <a:rPr sz="1200" b="0" i="0">
+                <a:spcPct val="112000"/>
+              </a:lnSpc>
+              <a:spcBef>
+                <a:spcPts val="0"/>
+              </a:spcBef>
+              <a:spcAft>
+                <a:spcPts val="0"/>
+              </a:spcAft>
+            </a:pPr>
+            <a:r>
+              <a:rPr sz="1350" b="0" i="0">
                 <a:solidFill>
                   <a:srgbClr val="E0CFFA"/>
                 </a:solidFill>
@@ -4129,7 +4137,7 @@
               </a:spcAft>
             </a:pPr>
             <a:r>
-              <a:rPr sz="800" b="1" i="0" spc="80">
+              <a:rPr sz="900" b="1" i="0" spc="80">
                 <a:solidFill>
                   <a:srgbClr val="6A707B"/>
                 </a:solidFill>
@@ -4174,7 +4182,7 @@
               </a:spcAft>
             </a:pPr>
             <a:r>
-              <a:rPr sz="800" b="1" i="0" spc="80">
+              <a:rPr sz="900" b="1" i="0" spc="80">
                 <a:solidFill>
                   <a:srgbClr val="6A707B"/>
                 </a:solidFill>
@@ -4256,7 +4264,7 @@
         <p:spPr>
           <a:xfrm>
             <a:off x="0" y="0"/>
-            <a:ext cx="18288000" cy="914400"/>
+            <a:ext cx="18288000" cy="960120"/>
           </a:xfrm>
           <a:prstGeom prst="rect">
             <a:avLst/>
@@ -4299,7 +4307,7 @@
         </p:nvCxnSpPr>
         <p:spPr>
           <a:xfrm>
-            <a:off x="0" y="914400"/>
+            <a:off x="0" y="960120"/>
             <a:ext cx="18288000" cy="0"/>
           </a:xfrm>
           <a:prstGeom prst="bentConnector3">
@@ -4343,7 +4351,7 @@
         </p:blipFill>
         <p:spPr>
           <a:xfrm>
-            <a:off x="758952" y="274320"/>
+            <a:off x="758952" y="292608"/>
             <a:ext cx="2542032" cy="365760"/>
           </a:xfrm>
           <a:prstGeom prst="rect">
@@ -4360,7 +4368,7 @@
         <p:spPr>
           <a:xfrm>
             <a:off x="3456432" y="0"/>
-            <a:ext cx="457200" cy="914400"/>
+            <a:ext cx="457200" cy="960120"/>
           </a:xfrm>
           <a:prstGeom prst="rect">
             <a:avLst/>
@@ -4412,8 +4420,8 @@
         </p:blipFill>
         <p:spPr>
           <a:xfrm>
-            <a:off x="3977639" y="320040"/>
-            <a:ext cx="960120" cy="283464"/>
+            <a:off x="3977639" y="338328"/>
+            <a:ext cx="749808" cy="292608"/>
           </a:xfrm>
           <a:prstGeom prst="rect">
             <a:avLst/>
@@ -4428,8 +4436,8 @@
         </p:nvCxnSpPr>
         <p:spPr>
           <a:xfrm>
-            <a:off x="5321808" y="320040"/>
-            <a:ext cx="0" cy="274319"/>
+            <a:off x="5074920" y="338328"/>
+            <a:ext cx="0" cy="283464"/>
           </a:xfrm>
           <a:prstGeom prst="bentConnector3">
             <a:avLst/>
@@ -4464,8 +4472,8 @@
         </p:nvSpPr>
         <p:spPr>
           <a:xfrm>
-            <a:off x="5513832" y="0"/>
-            <a:ext cx="8229600" cy="914400"/>
+            <a:off x="5285232" y="0"/>
+            <a:ext cx="8686800" cy="960120"/>
           </a:xfrm>
           <a:prstGeom prst="rect">
             <a:avLst/>
@@ -4490,7 +4498,7 @@
               </a:spcAft>
             </a:pPr>
             <a:r>
-              <a:rPr sz="1100" b="1" i="0" spc="120">
+              <a:rPr sz="1200" b="1" i="0" spc="120">
                 <a:solidFill>
                   <a:srgbClr val="6A707B"/>
                 </a:solidFill>
@@ -4509,8 +4517,8 @@
         </p:nvSpPr>
         <p:spPr>
           <a:xfrm>
-            <a:off x="15087600" y="0"/>
-            <a:ext cx="1554480" cy="914400"/>
+            <a:off x="14996159" y="0"/>
+            <a:ext cx="1645920" cy="960120"/>
           </a:xfrm>
           <a:prstGeom prst="rect">
             <a:avLst/>
@@ -4535,7 +4543,7 @@
               </a:spcAft>
             </a:pPr>
             <a:r>
-              <a:rPr sz="1200" b="1" i="0">
+              <a:rPr sz="1300" b="1" i="0">
                 <a:solidFill>
                   <a:srgbClr val="1B1F26"/>
                 </a:solidFill>
@@ -4544,7 +4552,7 @@
               <a:t>02</a:t>
             </a:r>
             <a:r>
-              <a:rPr sz="1200" b="1" i="0">
+              <a:rPr sz="1300" b="1" i="0">
                 <a:solidFill>
                   <a:srgbClr val="6A707B"/>
                 </a:solidFill>
@@ -4571,8 +4579,8 @@
         </p:blipFill>
         <p:spPr>
           <a:xfrm>
-            <a:off x="16962120" y="246888"/>
-            <a:ext cx="411480" cy="457200"/>
+            <a:off x="16916400" y="256032"/>
+            <a:ext cx="457200" cy="475488"/>
           </a:xfrm>
           <a:prstGeom prst="rect">
             <a:avLst/>
@@ -4587,8 +4595,8 @@
         </p:nvSpPr>
         <p:spPr>
           <a:xfrm>
-            <a:off x="758952" y="1179576"/>
-            <a:ext cx="402336" cy="402336"/>
+            <a:off x="758952" y="1216152"/>
+            <a:ext cx="420624" cy="420624"/>
           </a:xfrm>
           <a:prstGeom prst="rect">
             <a:avLst/>
@@ -4631,8 +4639,8 @@
         </p:nvSpPr>
         <p:spPr>
           <a:xfrm>
-            <a:off x="758952" y="1179576"/>
-            <a:ext cx="402336" cy="402336"/>
+            <a:off x="758952" y="1216152"/>
+            <a:ext cx="420624" cy="420624"/>
           </a:xfrm>
           <a:prstGeom prst="rect">
             <a:avLst/>
@@ -4657,7 +4665,7 @@
               </a:spcAft>
             </a:pPr>
             <a:r>
-              <a:rPr sz="1200" b="1" i="0">
+              <a:rPr sz="1300" b="1" i="0">
                 <a:solidFill>
                   <a:srgbClr val="FFFFFF"/>
                 </a:solidFill>
@@ -4676,8 +4684,8 @@
         </p:nvSpPr>
         <p:spPr>
           <a:xfrm>
-            <a:off x="1325880" y="1179576"/>
-            <a:ext cx="10972800" cy="402336"/>
+            <a:off x="1353312" y="1216152"/>
+            <a:ext cx="10972800" cy="420624"/>
           </a:xfrm>
           <a:prstGeom prst="rect">
             <a:avLst/>
@@ -4702,7 +4710,7 @@
               </a:spcAft>
             </a:pPr>
             <a:r>
-              <a:rPr sz="1100" b="1" i="0" spc="120">
+              <a:rPr sz="1200" b="1" i="0" spc="120">
                 <a:solidFill>
                   <a:srgbClr val="7C3AED"/>
                 </a:solidFill>
@@ -4721,8 +4729,8 @@
         </p:nvSpPr>
         <p:spPr>
           <a:xfrm>
-            <a:off x="758952" y="1627632"/>
-            <a:ext cx="16770096" cy="640080"/>
+            <a:off x="758952" y="1719072"/>
+            <a:ext cx="16770096" cy="658368"/>
           </a:xfrm>
           <a:prstGeom prst="rect">
             <a:avLst/>
@@ -4747,7 +4755,7 @@
               </a:spcAft>
             </a:pPr>
             <a:r>
-              <a:rPr sz="3600" b="0" i="0">
+              <a:rPr sz="4000" b="0" i="0">
                 <a:solidFill>
                   <a:srgbClr val="1B1F26"/>
                 </a:solidFill>
@@ -4756,7 +4764,7 @@
               <a:t>From classical sourcing to </a:t>
             </a:r>
             <a:r>
-              <a:rPr sz="3600" b="0" i="0">
+              <a:rPr sz="4000" b="0" i="0">
                 <a:solidFill>
                   <a:srgbClr val="7C3AED"/>
                 </a:solidFill>
@@ -4765,7 +4773,7 @@
               <a:t>autonomous sourcing</a:t>
             </a:r>
             <a:r>
-              <a:rPr sz="3600" b="0" i="0">
+              <a:rPr sz="4000" b="0" i="0">
                 <a:solidFill>
                   <a:srgbClr val="1B1F26"/>
                 </a:solidFill>
@@ -4784,8 +4792,8 @@
         </p:nvSpPr>
         <p:spPr>
           <a:xfrm>
-            <a:off x="758952" y="2286000"/>
-            <a:ext cx="16093440" cy="548640"/>
+            <a:off x="758952" y="2450592"/>
+            <a:ext cx="16093440" cy="502920"/>
           </a:xfrm>
           <a:prstGeom prst="rect">
             <a:avLst/>
@@ -4810,7 +4818,7 @@
               </a:spcAft>
             </a:pPr>
             <a:r>
-              <a:rPr sz="1300" b="0" i="0">
+              <a:rPr sz="1500" b="0" i="0">
                 <a:solidFill>
                   <a:srgbClr val="484E59"/>
                 </a:solidFill>
@@ -4829,7 +4837,7 @@
         </p:nvCxnSpPr>
         <p:spPr>
           <a:xfrm>
-            <a:off x="758952" y="2944368"/>
+            <a:off x="758952" y="3054096"/>
             <a:ext cx="16770096" cy="0"/>
           </a:xfrm>
           <a:prstGeom prst="bentConnector3">
@@ -4865,12 +4873,12 @@
         </p:nvSpPr>
         <p:spPr>
           <a:xfrm>
-            <a:off x="758952" y="3200400"/>
-            <a:ext cx="3611880" cy="6309360"/>
+            <a:off x="758952" y="3246120"/>
+            <a:ext cx="3456432" cy="6355080"/>
           </a:xfrm>
           <a:prstGeom prst="roundRect">
             <a:avLst>
-              <a:gd name="adj" fmla="val 2531"/>
+              <a:gd name="adj" fmla="val 2645"/>
             </a:avLst>
           </a:prstGeom>
           <a:solidFill>
@@ -4913,8 +4921,8 @@
         </p:nvSpPr>
         <p:spPr>
           <a:xfrm>
-            <a:off x="758952" y="3200400"/>
-            <a:ext cx="3611880" cy="54864"/>
+            <a:off x="758952" y="3246120"/>
+            <a:ext cx="3456432" cy="64008"/>
           </a:xfrm>
           <a:prstGeom prst="rect">
             <a:avLst/>
@@ -4957,8 +4965,8 @@
         </p:nvSpPr>
         <p:spPr>
           <a:xfrm>
-            <a:off x="987552" y="3474720"/>
-            <a:ext cx="3154680" cy="182880"/>
+            <a:off x="1014983" y="3557015"/>
+            <a:ext cx="2944368" cy="228600"/>
           </a:xfrm>
           <a:prstGeom prst="rect">
             <a:avLst/>
@@ -4983,7 +4991,7 @@
               </a:spcAft>
             </a:pPr>
             <a:r>
-              <a:rPr sz="1000" b="1" i="0" spc="150">
+              <a:rPr sz="1100" b="1" i="0" spc="150">
                 <a:solidFill>
                   <a:srgbClr val="6A707B"/>
                 </a:solidFill>
@@ -5002,8 +5010,8 @@
         </p:nvSpPr>
         <p:spPr>
           <a:xfrm>
-            <a:off x="987552" y="3703320"/>
-            <a:ext cx="3154680" cy="457200"/>
+            <a:off x="1014983" y="3831335"/>
+            <a:ext cx="2944368" cy="457200"/>
           </a:xfrm>
           <a:prstGeom prst="rect">
             <a:avLst/>
@@ -5028,27 +5036,117 @@
               </a:spcAft>
             </a:pPr>
             <a:r>
+              <a:rPr sz="1800" b="0" i="0">
+                <a:solidFill>
+                  <a:srgbClr val="1B1F26"/>
+                </a:solidFill>
+                <a:latin typeface="Montserrat Medium"/>
+              </a:rPr>
+              <a:t>Classical sourcing</a:t>
+            </a:r>
+          </a:p>
+        </p:txBody>
+      </p:sp>
+      <p:sp>
+        <p:nvSpPr>
+          <p:cNvPr id="22" name="TextBox 21"/>
+          <p:cNvSpPr txBox="1"/>
+          <p:nvPr/>
+        </p:nvSpPr>
+        <p:spPr>
+          <a:xfrm>
+            <a:off x="1014983" y="4663440"/>
+            <a:ext cx="310896" cy="365760"/>
+          </a:xfrm>
+          <a:prstGeom prst="rect">
+            <a:avLst/>
+          </a:prstGeom>
+          <a:noFill/>
+        </p:spPr>
+        <p:txBody>
+          <a:bodyPr wrap="square" lIns="0" rIns="0" tIns="0" bIns="0" anchor="t">
+            <a:noAutofit/>
+          </a:bodyPr>
+          <a:lstStyle/>
+          <a:p>
+            <a:pPr algn="l">
+              <a:lnSpc>
+                <a:spcPct val="100000"/>
+              </a:lnSpc>
+              <a:spcBef>
+                <a:spcPts val="0"/>
+              </a:spcBef>
+              <a:spcAft>
+                <a:spcPts val="0"/>
+              </a:spcAft>
+            </a:pPr>
+            <a:r>
+              <a:rPr sz="1300" b="0" i="0">
+                <a:solidFill>
+                  <a:srgbClr val="6A707B"/>
+                </a:solidFill>
+                <a:latin typeface="Montserrat SemiBold"/>
+              </a:rPr>
+              <a:t>✕</a:t>
+            </a:r>
+          </a:p>
+        </p:txBody>
+      </p:sp>
+      <p:sp>
+        <p:nvSpPr>
+          <p:cNvPr id="23" name="TextBox 22"/>
+          <p:cNvSpPr txBox="1"/>
+          <p:nvPr/>
+        </p:nvSpPr>
+        <p:spPr>
+          <a:xfrm>
+            <a:off x="1380744" y="4645152"/>
+            <a:ext cx="2578608" cy="548640"/>
+          </a:xfrm>
+          <a:prstGeom prst="rect">
+            <a:avLst/>
+          </a:prstGeom>
+          <a:noFill/>
+        </p:spPr>
+        <p:txBody>
+          <a:bodyPr wrap="square" lIns="0" rIns="0" tIns="0" bIns="0" anchor="t">
+            <a:noAutofit/>
+          </a:bodyPr>
+          <a:lstStyle/>
+          <a:p>
+            <a:pPr algn="l">
+              <a:lnSpc>
+                <a:spcPct val="105000"/>
+              </a:lnSpc>
+              <a:spcBef>
+                <a:spcPts val="0"/>
+              </a:spcBef>
+              <a:spcAft>
+                <a:spcPts val="0"/>
+              </a:spcAft>
+            </a:pPr>
+            <a:r>
               <a:rPr sz="1500" b="0" i="0">
                 <a:solidFill>
-                  <a:srgbClr val="1B1F26"/>
-                </a:solidFill>
-                <a:latin typeface="Montserrat Medium"/>
-              </a:rPr>
-              <a:t>Unilever, classical sourcing</a:t>
-            </a:r>
-          </a:p>
-        </p:txBody>
-      </p:sp>
-      <p:sp>
-        <p:nvSpPr>
-          <p:cNvPr id="22" name="TextBox 21"/>
-          <p:cNvSpPr txBox="1"/>
-          <p:nvPr/>
-        </p:nvSpPr>
-        <p:spPr>
-          <a:xfrm>
-            <a:off x="987552" y="4434840"/>
-            <a:ext cx="274320" cy="365760"/>
+                  <a:srgbClr val="484E59"/>
+                </a:solidFill>
+                <a:latin typeface="Montserrat"/>
+              </a:rPr>
+              <a:t>Classical, manual sourcing</a:t>
+            </a:r>
+          </a:p>
+        </p:txBody>
+      </p:sp>
+      <p:sp>
+        <p:nvSpPr>
+          <p:cNvPr id="24" name="TextBox 23"/>
+          <p:cNvSpPr txBox="1"/>
+          <p:nvPr/>
+        </p:nvSpPr>
+        <p:spPr>
+          <a:xfrm>
+            <a:off x="1014983" y="5449824"/>
+            <a:ext cx="310896" cy="365760"/>
           </a:xfrm>
           <a:prstGeom prst="rect">
             <a:avLst/>
@@ -5073,7 +5171,7 @@
               </a:spcAft>
             </a:pPr>
             <a:r>
-              <a:rPr sz="1100" b="0" i="0">
+              <a:rPr sz="1300" b="0" i="0">
                 <a:solidFill>
                   <a:srgbClr val="6A707B"/>
                 </a:solidFill>
@@ -5086,14 +5184,14 @@
       </p:sp>
       <p:sp>
         <p:nvSpPr>
-          <p:cNvPr id="23" name="TextBox 22"/>
-          <p:cNvSpPr txBox="1"/>
-          <p:nvPr/>
-        </p:nvSpPr>
-        <p:spPr>
-          <a:xfrm>
-            <a:off x="1307592" y="4416552"/>
-            <a:ext cx="2862072" cy="502920"/>
+          <p:cNvPr id="25" name="TextBox 24"/>
+          <p:cNvSpPr txBox="1"/>
+          <p:nvPr/>
+        </p:nvSpPr>
+        <p:spPr>
+          <a:xfrm>
+            <a:off x="1380744" y="5431536"/>
+            <a:ext cx="2578608" cy="548640"/>
           </a:xfrm>
           <a:prstGeom prst="rect">
             <a:avLst/>
@@ -5118,27 +5216,27 @@
               </a:spcAft>
             </a:pPr>
             <a:r>
-              <a:rPr sz="1250" b="0" i="0">
+              <a:rPr sz="1500" b="0" i="0">
                 <a:solidFill>
                   <a:srgbClr val="484E59"/>
                 </a:solidFill>
                 <a:latin typeface="Montserrat"/>
               </a:rPr>
-              <a:t>Classical, manual sourcing</a:t>
-            </a:r>
-          </a:p>
-        </p:txBody>
-      </p:sp>
-      <p:sp>
-        <p:nvSpPr>
-          <p:cNvPr id="24" name="TextBox 23"/>
-          <p:cNvSpPr txBox="1"/>
-          <p:nvPr/>
-        </p:nvSpPr>
-        <p:spPr>
-          <a:xfrm>
-            <a:off x="987552" y="5148072"/>
-            <a:ext cx="274320" cy="365760"/>
+              <a:t>Heavy Excel dependency</a:t>
+            </a:r>
+          </a:p>
+        </p:txBody>
+      </p:sp>
+      <p:sp>
+        <p:nvSpPr>
+          <p:cNvPr id="26" name="TextBox 25"/>
+          <p:cNvSpPr txBox="1"/>
+          <p:nvPr/>
+        </p:nvSpPr>
+        <p:spPr>
+          <a:xfrm>
+            <a:off x="1014983" y="6236208"/>
+            <a:ext cx="310896" cy="365760"/>
           </a:xfrm>
           <a:prstGeom prst="rect">
             <a:avLst/>
@@ -5163,7 +5261,7 @@
               </a:spcAft>
             </a:pPr>
             <a:r>
-              <a:rPr sz="1100" b="0" i="0">
+              <a:rPr sz="1300" b="0" i="0">
                 <a:solidFill>
                   <a:srgbClr val="6A707B"/>
                 </a:solidFill>
@@ -5176,14 +5274,14 @@
       </p:sp>
       <p:sp>
         <p:nvSpPr>
-          <p:cNvPr id="25" name="TextBox 24"/>
-          <p:cNvSpPr txBox="1"/>
-          <p:nvPr/>
-        </p:nvSpPr>
-        <p:spPr>
-          <a:xfrm>
-            <a:off x="1307592" y="5129784"/>
-            <a:ext cx="2862072" cy="502920"/>
+          <p:cNvPr id="27" name="TextBox 26"/>
+          <p:cNvSpPr txBox="1"/>
+          <p:nvPr/>
+        </p:nvSpPr>
+        <p:spPr>
+          <a:xfrm>
+            <a:off x="1380744" y="6217920"/>
+            <a:ext cx="2578608" cy="548640"/>
           </a:xfrm>
           <a:prstGeom prst="rect">
             <a:avLst/>
@@ -5208,27 +5306,27 @@
               </a:spcAft>
             </a:pPr>
             <a:r>
-              <a:rPr sz="1250" b="0" i="0">
+              <a:rPr sz="1500" b="0" i="0">
                 <a:solidFill>
                   <a:srgbClr val="484E59"/>
                 </a:solidFill>
                 <a:latin typeface="Montserrat"/>
               </a:rPr>
-              <a:t>Heavy Excel dependency</a:t>
-            </a:r>
-          </a:p>
-        </p:txBody>
-      </p:sp>
-      <p:sp>
-        <p:nvSpPr>
-          <p:cNvPr id="26" name="TextBox 25"/>
-          <p:cNvSpPr txBox="1"/>
-          <p:nvPr/>
-        </p:nvSpPr>
-        <p:spPr>
-          <a:xfrm>
-            <a:off x="987552" y="5861304"/>
-            <a:ext cx="274320" cy="365760"/>
+              <a:t>Time &amp; resource constraints</a:t>
+            </a:r>
+          </a:p>
+        </p:txBody>
+      </p:sp>
+      <p:sp>
+        <p:nvSpPr>
+          <p:cNvPr id="28" name="TextBox 27"/>
+          <p:cNvSpPr txBox="1"/>
+          <p:nvPr/>
+        </p:nvSpPr>
+        <p:spPr>
+          <a:xfrm>
+            <a:off x="1014983" y="7022592"/>
+            <a:ext cx="310896" cy="365760"/>
           </a:xfrm>
           <a:prstGeom prst="rect">
             <a:avLst/>
@@ -5253,7 +5351,7 @@
               </a:spcAft>
             </a:pPr>
             <a:r>
-              <a:rPr sz="1100" b="0" i="0">
+              <a:rPr sz="1300" b="0" i="0">
                 <a:solidFill>
                   <a:srgbClr val="6A707B"/>
                 </a:solidFill>
@@ -5266,14 +5364,14 @@
       </p:sp>
       <p:sp>
         <p:nvSpPr>
-          <p:cNvPr id="27" name="TextBox 26"/>
-          <p:cNvSpPr txBox="1"/>
-          <p:nvPr/>
-        </p:nvSpPr>
-        <p:spPr>
-          <a:xfrm>
-            <a:off x="1307592" y="5843016"/>
-            <a:ext cx="2862072" cy="502920"/>
+          <p:cNvPr id="29" name="TextBox 28"/>
+          <p:cNvSpPr txBox="1"/>
+          <p:nvPr/>
+        </p:nvSpPr>
+        <p:spPr>
+          <a:xfrm>
+            <a:off x="1380744" y="7004304"/>
+            <a:ext cx="2578608" cy="548640"/>
           </a:xfrm>
           <a:prstGeom prst="rect">
             <a:avLst/>
@@ -5298,27 +5396,27 @@
               </a:spcAft>
             </a:pPr>
             <a:r>
-              <a:rPr sz="1250" b="0" i="0">
+              <a:rPr sz="1500" b="0" i="0">
                 <a:solidFill>
                   <a:srgbClr val="484E59"/>
                 </a:solidFill>
                 <a:latin typeface="Montserrat"/>
               </a:rPr>
-              <a:t>Time &amp; resource constraints</a:t>
-            </a:r>
-          </a:p>
-        </p:txBody>
-      </p:sp>
-      <p:sp>
-        <p:nvSpPr>
-          <p:cNvPr id="28" name="TextBox 27"/>
-          <p:cNvSpPr txBox="1"/>
-          <p:nvPr/>
-        </p:nvSpPr>
-        <p:spPr>
-          <a:xfrm>
-            <a:off x="987552" y="6574536"/>
-            <a:ext cx="274320" cy="365760"/>
+              <a:t>Gaps in category expertise</a:t>
+            </a:r>
+          </a:p>
+        </p:txBody>
+      </p:sp>
+      <p:sp>
+        <p:nvSpPr>
+          <p:cNvPr id="30" name="TextBox 29"/>
+          <p:cNvSpPr txBox="1"/>
+          <p:nvPr/>
+        </p:nvSpPr>
+        <p:spPr>
+          <a:xfrm>
+            <a:off x="1014983" y="7808976"/>
+            <a:ext cx="310896" cy="365760"/>
           </a:xfrm>
           <a:prstGeom prst="rect">
             <a:avLst/>
@@ -5343,7 +5441,7 @@
               </a:spcAft>
             </a:pPr>
             <a:r>
-              <a:rPr sz="1100" b="0" i="0">
+              <a:rPr sz="1300" b="0" i="0">
                 <a:solidFill>
                   <a:srgbClr val="6A707B"/>
                 </a:solidFill>
@@ -5356,14 +5454,14 @@
       </p:sp>
       <p:sp>
         <p:nvSpPr>
-          <p:cNvPr id="29" name="TextBox 28"/>
-          <p:cNvSpPr txBox="1"/>
-          <p:nvPr/>
-        </p:nvSpPr>
-        <p:spPr>
-          <a:xfrm>
-            <a:off x="1307592" y="6556248"/>
-            <a:ext cx="2862072" cy="502920"/>
+          <p:cNvPr id="31" name="TextBox 30"/>
+          <p:cNvSpPr txBox="1"/>
+          <p:nvPr/>
+        </p:nvSpPr>
+        <p:spPr>
+          <a:xfrm>
+            <a:off x="1380744" y="7790688"/>
+            <a:ext cx="2578608" cy="548640"/>
           </a:xfrm>
           <a:prstGeom prst="rect">
             <a:avLst/>
@@ -5388,27 +5486,27 @@
               </a:spcAft>
             </a:pPr>
             <a:r>
-              <a:rPr sz="1250" b="0" i="0">
+              <a:rPr sz="1500" b="0" i="0">
                 <a:solidFill>
                   <a:srgbClr val="484E59"/>
                 </a:solidFill>
                 <a:latin typeface="Montserrat"/>
               </a:rPr>
-              <a:t>Gaps in category expertise</a:t>
-            </a:r>
-          </a:p>
-        </p:txBody>
-      </p:sp>
-      <p:sp>
-        <p:nvSpPr>
-          <p:cNvPr id="30" name="TextBox 29"/>
-          <p:cNvSpPr txBox="1"/>
-          <p:nvPr/>
-        </p:nvSpPr>
-        <p:spPr>
-          <a:xfrm>
-            <a:off x="987552" y="7287768"/>
-            <a:ext cx="274320" cy="365760"/>
+              <a:t>Limited negotiation leverage</a:t>
+            </a:r>
+          </a:p>
+        </p:txBody>
+      </p:sp>
+      <p:sp>
+        <p:nvSpPr>
+          <p:cNvPr id="32" name="TextBox 31"/>
+          <p:cNvSpPr txBox="1"/>
+          <p:nvPr/>
+        </p:nvSpPr>
+        <p:spPr>
+          <a:xfrm>
+            <a:off x="1014983" y="8595360"/>
+            <a:ext cx="310896" cy="365760"/>
           </a:xfrm>
           <a:prstGeom prst="rect">
             <a:avLst/>
@@ -5433,7 +5531,7 @@
               </a:spcAft>
             </a:pPr>
             <a:r>
-              <a:rPr sz="1100" b="0" i="0">
+              <a:rPr sz="1300" b="0" i="0">
                 <a:solidFill>
                   <a:srgbClr val="6A707B"/>
                 </a:solidFill>
@@ -5446,14 +5544,14 @@
       </p:sp>
       <p:sp>
         <p:nvSpPr>
-          <p:cNvPr id="31" name="TextBox 30"/>
-          <p:cNvSpPr txBox="1"/>
-          <p:nvPr/>
-        </p:nvSpPr>
-        <p:spPr>
-          <a:xfrm>
-            <a:off x="1307592" y="7269480"/>
-            <a:ext cx="2862072" cy="502920"/>
+          <p:cNvPr id="33" name="TextBox 32"/>
+          <p:cNvSpPr txBox="1"/>
+          <p:nvPr/>
+        </p:nvSpPr>
+        <p:spPr>
+          <a:xfrm>
+            <a:off x="1380744" y="8577072"/>
+            <a:ext cx="2578608" cy="548640"/>
           </a:xfrm>
           <a:prstGeom prst="rect">
             <a:avLst/>
@@ -5478,97 +5576,7 @@
               </a:spcAft>
             </a:pPr>
             <a:r>
-              <a:rPr sz="1250" b="0" i="0">
-                <a:solidFill>
-                  <a:srgbClr val="484E59"/>
-                </a:solidFill>
-                <a:latin typeface="Montserrat"/>
-              </a:rPr>
-              <a:t>Limited negotiation leverage</a:t>
-            </a:r>
-          </a:p>
-        </p:txBody>
-      </p:sp>
-      <p:sp>
-        <p:nvSpPr>
-          <p:cNvPr id="32" name="TextBox 31"/>
-          <p:cNvSpPr txBox="1"/>
-          <p:nvPr/>
-        </p:nvSpPr>
-        <p:spPr>
-          <a:xfrm>
-            <a:off x="987552" y="8001000"/>
-            <a:ext cx="274320" cy="365760"/>
-          </a:xfrm>
-          <a:prstGeom prst="rect">
-            <a:avLst/>
-          </a:prstGeom>
-          <a:noFill/>
-        </p:spPr>
-        <p:txBody>
-          <a:bodyPr wrap="square" lIns="0" rIns="0" tIns="0" bIns="0" anchor="t">
-            <a:noAutofit/>
-          </a:bodyPr>
-          <a:lstStyle/>
-          <a:p>
-            <a:pPr algn="l">
-              <a:lnSpc>
-                <a:spcPct val="100000"/>
-              </a:lnSpc>
-              <a:spcBef>
-                <a:spcPts val="0"/>
-              </a:spcBef>
-              <a:spcAft>
-                <a:spcPts val="0"/>
-              </a:spcAft>
-            </a:pPr>
-            <a:r>
-              <a:rPr sz="1100" b="0" i="0">
-                <a:solidFill>
-                  <a:srgbClr val="6A707B"/>
-                </a:solidFill>
-                <a:latin typeface="Montserrat SemiBold"/>
-              </a:rPr>
-              <a:t>✕</a:t>
-            </a:r>
-          </a:p>
-        </p:txBody>
-      </p:sp>
-      <p:sp>
-        <p:nvSpPr>
-          <p:cNvPr id="33" name="TextBox 32"/>
-          <p:cNvSpPr txBox="1"/>
-          <p:nvPr/>
-        </p:nvSpPr>
-        <p:spPr>
-          <a:xfrm>
-            <a:off x="1307592" y="7982712"/>
-            <a:ext cx="2862072" cy="502920"/>
-          </a:xfrm>
-          <a:prstGeom prst="rect">
-            <a:avLst/>
-          </a:prstGeom>
-          <a:noFill/>
-        </p:spPr>
-        <p:txBody>
-          <a:bodyPr wrap="square" lIns="0" rIns="0" tIns="0" bIns="0" anchor="t">
-            <a:noAutofit/>
-          </a:bodyPr>
-          <a:lstStyle/>
-          <a:p>
-            <a:pPr algn="l">
-              <a:lnSpc>
-                <a:spcPct val="105000"/>
-              </a:lnSpc>
-              <a:spcBef>
-                <a:spcPts val="0"/>
-              </a:spcBef>
-              <a:spcAft>
-                <a:spcPts val="0"/>
-              </a:spcAft>
-            </a:pPr>
-            <a:r>
-              <a:rPr sz="1250" b="0" i="0">
+              <a:rPr sz="1500" b="0" i="0">
                 <a:solidFill>
                   <a:srgbClr val="484E59"/>
                 </a:solidFill>
@@ -5587,12 +5595,12 @@
         </p:nvSpPr>
         <p:spPr>
           <a:xfrm>
-            <a:off x="4526280" y="3200400"/>
-            <a:ext cx="3794760" cy="6309360"/>
+            <a:off x="4370832" y="3246120"/>
+            <a:ext cx="3584448" cy="6355080"/>
           </a:xfrm>
           <a:prstGeom prst="roundRect">
             <a:avLst>
-              <a:gd name="adj" fmla="val 2409"/>
+              <a:gd name="adj" fmla="val 2551"/>
             </a:avLst>
           </a:prstGeom>
           <a:solidFill>
@@ -5635,8 +5643,8 @@
         </p:nvSpPr>
         <p:spPr>
           <a:xfrm>
-            <a:off x="4526280" y="3200400"/>
-            <a:ext cx="3794760" cy="54864"/>
+            <a:off x="4370832" y="3246120"/>
+            <a:ext cx="3584448" cy="64008"/>
           </a:xfrm>
           <a:prstGeom prst="rect">
             <a:avLst/>
@@ -5679,8 +5687,8 @@
         </p:nvSpPr>
         <p:spPr>
           <a:xfrm>
-            <a:off x="4754880" y="3474720"/>
-            <a:ext cx="3337560" cy="182880"/>
+            <a:off x="4626864" y="3557015"/>
+            <a:ext cx="3072384" cy="228600"/>
           </a:xfrm>
           <a:prstGeom prst="rect">
             <a:avLst/>
@@ -5705,7 +5713,7 @@
               </a:spcAft>
             </a:pPr>
             <a:r>
-              <a:rPr sz="1000" b="1" i="0" spc="120">
+              <a:rPr sz="1100" b="1" i="0" spc="100">
                 <a:solidFill>
                   <a:srgbClr val="7C3AED"/>
                 </a:solidFill>
@@ -5724,8 +5732,8 @@
         </p:nvSpPr>
         <p:spPr>
           <a:xfrm>
-            <a:off x="4754880" y="3703320"/>
-            <a:ext cx="3337560" cy="457200"/>
+            <a:off x="4626864" y="3831335"/>
+            <a:ext cx="3072384" cy="457200"/>
           </a:xfrm>
           <a:prstGeom prst="rect">
             <a:avLst/>
@@ -5750,27 +5758,117 @@
               </a:spcAft>
             </a:pPr>
             <a:r>
+              <a:rPr sz="1800" b="0" i="0">
+                <a:solidFill>
+                  <a:srgbClr val="1B1F26"/>
+                </a:solidFill>
+                <a:latin typeface="Montserrat Medium"/>
+              </a:rPr>
+              <a:t>Autonomous sourcing</a:t>
+            </a:r>
+          </a:p>
+        </p:txBody>
+      </p:sp>
+      <p:sp>
+        <p:nvSpPr>
+          <p:cNvPr id="38" name="TextBox 37"/>
+          <p:cNvSpPr txBox="1"/>
+          <p:nvPr/>
+        </p:nvSpPr>
+        <p:spPr>
+          <a:xfrm>
+            <a:off x="4626864" y="4663440"/>
+            <a:ext cx="310896" cy="365760"/>
+          </a:xfrm>
+          <a:prstGeom prst="rect">
+            <a:avLst/>
+          </a:prstGeom>
+          <a:noFill/>
+        </p:spPr>
+        <p:txBody>
+          <a:bodyPr wrap="square" lIns="0" rIns="0" tIns="0" bIns="0" anchor="t">
+            <a:noAutofit/>
+          </a:bodyPr>
+          <a:lstStyle/>
+          <a:p>
+            <a:pPr algn="l">
+              <a:lnSpc>
+                <a:spcPct val="100000"/>
+              </a:lnSpc>
+              <a:spcBef>
+                <a:spcPts val="0"/>
+              </a:spcBef>
+              <a:spcAft>
+                <a:spcPts val="0"/>
+              </a:spcAft>
+            </a:pPr>
+            <a:r>
+              <a:rPr sz="1400" b="0" i="0">
+                <a:solidFill>
+                  <a:srgbClr val="7C3AED"/>
+                </a:solidFill>
+                <a:latin typeface="Montserrat"/>
+              </a:rPr>
+              <a:t>✓</a:t>
+            </a:r>
+          </a:p>
+        </p:txBody>
+      </p:sp>
+      <p:sp>
+        <p:nvSpPr>
+          <p:cNvPr id="39" name="TextBox 38"/>
+          <p:cNvSpPr txBox="1"/>
+          <p:nvPr/>
+        </p:nvSpPr>
+        <p:spPr>
+          <a:xfrm>
+            <a:off x="5010912" y="4645152"/>
+            <a:ext cx="2688336" cy="548640"/>
+          </a:xfrm>
+          <a:prstGeom prst="rect">
+            <a:avLst/>
+          </a:prstGeom>
+          <a:noFill/>
+        </p:spPr>
+        <p:txBody>
+          <a:bodyPr wrap="square" lIns="0" rIns="0" tIns="0" bIns="0" anchor="t">
+            <a:noAutofit/>
+          </a:bodyPr>
+          <a:lstStyle/>
+          <a:p>
+            <a:pPr algn="l">
+              <a:lnSpc>
+                <a:spcPct val="105000"/>
+              </a:lnSpc>
+              <a:spcBef>
+                <a:spcPts val="0"/>
+              </a:spcBef>
+              <a:spcAft>
+                <a:spcPts val="0"/>
+              </a:spcAft>
+            </a:pPr>
+            <a:r>
               <a:rPr sz="1500" b="0" i="0">
                 <a:solidFill>
                   <a:srgbClr val="1B1F26"/>
                 </a:solidFill>
-                <a:latin typeface="Montserrat Medium"/>
-              </a:rPr>
-              <a:t>Autonomous, agent-run sourcing</a:t>
-            </a:r>
-          </a:p>
-        </p:txBody>
-      </p:sp>
-      <p:sp>
-        <p:nvSpPr>
-          <p:cNvPr id="38" name="TextBox 37"/>
-          <p:cNvSpPr txBox="1"/>
-          <p:nvPr/>
-        </p:nvSpPr>
-        <p:spPr>
-          <a:xfrm>
-            <a:off x="4754880" y="4434840"/>
-            <a:ext cx="274320" cy="365760"/>
+                <a:latin typeface="Montserrat"/>
+              </a:rPr>
+              <a:t>AI-driven, time-saving sourcing</a:t>
+            </a:r>
+          </a:p>
+        </p:txBody>
+      </p:sp>
+      <p:sp>
+        <p:nvSpPr>
+          <p:cNvPr id="40" name="TextBox 39"/>
+          <p:cNvSpPr txBox="1"/>
+          <p:nvPr/>
+        </p:nvSpPr>
+        <p:spPr>
+          <a:xfrm>
+            <a:off x="4626864" y="5449824"/>
+            <a:ext cx="310896" cy="365760"/>
           </a:xfrm>
           <a:prstGeom prst="rect">
             <a:avLst/>
@@ -5795,7 +5893,7 @@
               </a:spcAft>
             </a:pPr>
             <a:r>
-              <a:rPr sz="1200" b="0" i="0">
+              <a:rPr sz="1400" b="0" i="0">
                 <a:solidFill>
                   <a:srgbClr val="7C3AED"/>
                 </a:solidFill>
@@ -5808,14 +5906,14 @@
       </p:sp>
       <p:sp>
         <p:nvSpPr>
-          <p:cNvPr id="39" name="TextBox 38"/>
-          <p:cNvSpPr txBox="1"/>
-          <p:nvPr/>
-        </p:nvSpPr>
-        <p:spPr>
-          <a:xfrm>
-            <a:off x="5093208" y="4416552"/>
-            <a:ext cx="3026664" cy="502920"/>
+          <p:cNvPr id="41" name="TextBox 40"/>
+          <p:cNvSpPr txBox="1"/>
+          <p:nvPr/>
+        </p:nvSpPr>
+        <p:spPr>
+          <a:xfrm>
+            <a:off x="5010912" y="5431536"/>
+            <a:ext cx="2688336" cy="548640"/>
           </a:xfrm>
           <a:prstGeom prst="rect">
             <a:avLst/>
@@ -5840,27 +5938,27 @@
               </a:spcAft>
             </a:pPr>
             <a:r>
-              <a:rPr sz="1250" b="0" i="0">
+              <a:rPr sz="1500" b="0" i="0">
                 <a:solidFill>
                   <a:srgbClr val="1B1F26"/>
                 </a:solidFill>
                 <a:latin typeface="Montserrat"/>
               </a:rPr>
-              <a:t>AI-driven, time-saving sourcing</a:t>
-            </a:r>
-          </a:p>
-        </p:txBody>
-      </p:sp>
-      <p:sp>
-        <p:nvSpPr>
-          <p:cNvPr id="40" name="TextBox 39"/>
-          <p:cNvSpPr txBox="1"/>
-          <p:nvPr/>
-        </p:nvSpPr>
-        <p:spPr>
-          <a:xfrm>
-            <a:off x="4754880" y="5148072"/>
-            <a:ext cx="274320" cy="365760"/>
+              <a:t>Automated quotes, RFx &amp; questionnaires</a:t>
+            </a:r>
+          </a:p>
+        </p:txBody>
+      </p:sp>
+      <p:sp>
+        <p:nvSpPr>
+          <p:cNvPr id="42" name="TextBox 41"/>
+          <p:cNvSpPr txBox="1"/>
+          <p:nvPr/>
+        </p:nvSpPr>
+        <p:spPr>
+          <a:xfrm>
+            <a:off x="4626864" y="6236208"/>
+            <a:ext cx="310896" cy="365760"/>
           </a:xfrm>
           <a:prstGeom prst="rect">
             <a:avLst/>
@@ -5885,7 +5983,7 @@
               </a:spcAft>
             </a:pPr>
             <a:r>
-              <a:rPr sz="1200" b="0" i="0">
+              <a:rPr sz="1400" b="0" i="0">
                 <a:solidFill>
                   <a:srgbClr val="7C3AED"/>
                 </a:solidFill>
@@ -5898,14 +5996,14 @@
       </p:sp>
       <p:sp>
         <p:nvSpPr>
-          <p:cNvPr id="41" name="TextBox 40"/>
-          <p:cNvSpPr txBox="1"/>
-          <p:nvPr/>
-        </p:nvSpPr>
-        <p:spPr>
-          <a:xfrm>
-            <a:off x="5093208" y="5129784"/>
-            <a:ext cx="3026664" cy="502920"/>
+          <p:cNvPr id="43" name="TextBox 42"/>
+          <p:cNvSpPr txBox="1"/>
+          <p:nvPr/>
+        </p:nvSpPr>
+        <p:spPr>
+          <a:xfrm>
+            <a:off x="5010912" y="6217920"/>
+            <a:ext cx="2688336" cy="548640"/>
           </a:xfrm>
           <a:prstGeom prst="rect">
             <a:avLst/>
@@ -5930,27 +6028,27 @@
               </a:spcAft>
             </a:pPr>
             <a:r>
-              <a:rPr sz="1250" b="0" i="0">
+              <a:rPr sz="1500" b="0" i="0">
                 <a:solidFill>
                   <a:srgbClr val="1B1F26"/>
                 </a:solidFill>
                 <a:latin typeface="Montserrat"/>
               </a:rPr>
-              <a:t>Automated quotes, RFx &amp; questionnaires</a:t>
-            </a:r>
-          </a:p>
-        </p:txBody>
-      </p:sp>
-      <p:sp>
-        <p:nvSpPr>
-          <p:cNvPr id="42" name="TextBox 41"/>
-          <p:cNvSpPr txBox="1"/>
-          <p:nvPr/>
-        </p:nvSpPr>
-        <p:spPr>
-          <a:xfrm>
-            <a:off x="4754880" y="5861304"/>
-            <a:ext cx="274320" cy="365760"/>
+              <a:t>Intelligent supplier ranking</a:t>
+            </a:r>
+          </a:p>
+        </p:txBody>
+      </p:sp>
+      <p:sp>
+        <p:nvSpPr>
+          <p:cNvPr id="44" name="TextBox 43"/>
+          <p:cNvSpPr txBox="1"/>
+          <p:nvPr/>
+        </p:nvSpPr>
+        <p:spPr>
+          <a:xfrm>
+            <a:off x="4626864" y="7022592"/>
+            <a:ext cx="310896" cy="365760"/>
           </a:xfrm>
           <a:prstGeom prst="rect">
             <a:avLst/>
@@ -5975,7 +6073,7 @@
               </a:spcAft>
             </a:pPr>
             <a:r>
-              <a:rPr sz="1200" b="0" i="0">
+              <a:rPr sz="1400" b="0" i="0">
                 <a:solidFill>
                   <a:srgbClr val="7C3AED"/>
                 </a:solidFill>
@@ -5988,14 +6086,14 @@
       </p:sp>
       <p:sp>
         <p:nvSpPr>
-          <p:cNvPr id="43" name="TextBox 42"/>
-          <p:cNvSpPr txBox="1"/>
-          <p:nvPr/>
-        </p:nvSpPr>
-        <p:spPr>
-          <a:xfrm>
-            <a:off x="5093208" y="5843016"/>
-            <a:ext cx="3026664" cy="502920"/>
+          <p:cNvPr id="45" name="TextBox 44"/>
+          <p:cNvSpPr txBox="1"/>
+          <p:nvPr/>
+        </p:nvSpPr>
+        <p:spPr>
+          <a:xfrm>
+            <a:off x="5010912" y="7004304"/>
+            <a:ext cx="2688336" cy="548640"/>
           </a:xfrm>
           <a:prstGeom prst="rect">
             <a:avLst/>
@@ -6020,27 +6118,27 @@
               </a:spcAft>
             </a:pPr>
             <a:r>
-              <a:rPr sz="1250" b="0" i="0">
+              <a:rPr sz="1500" b="0" i="0">
                 <a:solidFill>
                   <a:srgbClr val="1B1F26"/>
                 </a:solidFill>
                 <a:latin typeface="Montserrat"/>
               </a:rPr>
-              <a:t>Intelligent supplier ranking</a:t>
-            </a:r>
-          </a:p>
-        </p:txBody>
-      </p:sp>
-      <p:sp>
-        <p:nvSpPr>
-          <p:cNvPr id="44" name="TextBox 43"/>
-          <p:cNvSpPr txBox="1"/>
-          <p:nvPr/>
-        </p:nvSpPr>
-        <p:spPr>
-          <a:xfrm>
-            <a:off x="4754880" y="6574536"/>
-            <a:ext cx="274320" cy="365760"/>
+              <a:t>Automated comms, live tracking</a:t>
+            </a:r>
+          </a:p>
+        </p:txBody>
+      </p:sp>
+      <p:sp>
+        <p:nvSpPr>
+          <p:cNvPr id="46" name="TextBox 45"/>
+          <p:cNvSpPr txBox="1"/>
+          <p:nvPr/>
+        </p:nvSpPr>
+        <p:spPr>
+          <a:xfrm>
+            <a:off x="4626864" y="7808976"/>
+            <a:ext cx="310896" cy="365760"/>
           </a:xfrm>
           <a:prstGeom prst="rect">
             <a:avLst/>
@@ -6065,7 +6163,7 @@
               </a:spcAft>
             </a:pPr>
             <a:r>
-              <a:rPr sz="1200" b="0" i="0">
+              <a:rPr sz="1400" b="0" i="0">
                 <a:solidFill>
                   <a:srgbClr val="7C3AED"/>
                 </a:solidFill>
@@ -6078,14 +6176,14 @@
       </p:sp>
       <p:sp>
         <p:nvSpPr>
-          <p:cNvPr id="45" name="TextBox 44"/>
-          <p:cNvSpPr txBox="1"/>
-          <p:nvPr/>
-        </p:nvSpPr>
-        <p:spPr>
-          <a:xfrm>
-            <a:off x="5093208" y="6556248"/>
-            <a:ext cx="3026664" cy="502920"/>
+          <p:cNvPr id="47" name="TextBox 46"/>
+          <p:cNvSpPr txBox="1"/>
+          <p:nvPr/>
+        </p:nvSpPr>
+        <p:spPr>
+          <a:xfrm>
+            <a:off x="5010912" y="7790688"/>
+            <a:ext cx="2688336" cy="548640"/>
           </a:xfrm>
           <a:prstGeom prst="rect">
             <a:avLst/>
@@ -6110,27 +6208,27 @@
               </a:spcAft>
             </a:pPr>
             <a:r>
-              <a:rPr sz="1250" b="0" i="0">
+              <a:rPr sz="1500" b="0" i="0">
                 <a:solidFill>
                   <a:srgbClr val="1B1F26"/>
                 </a:solidFill>
                 <a:latin typeface="Montserrat"/>
               </a:rPr>
-              <a:t>Automated comms with live tracking</a:t>
-            </a:r>
-          </a:p>
-        </p:txBody>
-      </p:sp>
-      <p:sp>
-        <p:nvSpPr>
-          <p:cNvPr id="46" name="TextBox 45"/>
-          <p:cNvSpPr txBox="1"/>
-          <p:nvPr/>
-        </p:nvSpPr>
-        <p:spPr>
-          <a:xfrm>
-            <a:off x="4754880" y="7287768"/>
-            <a:ext cx="274320" cy="365760"/>
+              <a:t>AI-powered insights &amp; query support</a:t>
+            </a:r>
+          </a:p>
+        </p:txBody>
+      </p:sp>
+      <p:sp>
+        <p:nvSpPr>
+          <p:cNvPr id="48" name="TextBox 47"/>
+          <p:cNvSpPr txBox="1"/>
+          <p:nvPr/>
+        </p:nvSpPr>
+        <p:spPr>
+          <a:xfrm>
+            <a:off x="4626864" y="8595360"/>
+            <a:ext cx="310896" cy="365760"/>
           </a:xfrm>
           <a:prstGeom prst="rect">
             <a:avLst/>
@@ -6155,7 +6253,7 @@
               </a:spcAft>
             </a:pPr>
             <a:r>
-              <a:rPr sz="1200" b="0" i="0">
+              <a:rPr sz="1400" b="0" i="0">
                 <a:solidFill>
                   <a:srgbClr val="7C3AED"/>
                 </a:solidFill>
@@ -6168,14 +6266,14 @@
       </p:sp>
       <p:sp>
         <p:nvSpPr>
-          <p:cNvPr id="47" name="TextBox 46"/>
-          <p:cNvSpPr txBox="1"/>
-          <p:nvPr/>
-        </p:nvSpPr>
-        <p:spPr>
-          <a:xfrm>
-            <a:off x="5093208" y="7269480"/>
-            <a:ext cx="3026664" cy="502920"/>
+          <p:cNvPr id="49" name="TextBox 48"/>
+          <p:cNvSpPr txBox="1"/>
+          <p:nvPr/>
+        </p:nvSpPr>
+        <p:spPr>
+          <a:xfrm>
+            <a:off x="5010912" y="8577072"/>
+            <a:ext cx="2688336" cy="548640"/>
           </a:xfrm>
           <a:prstGeom prst="rect">
             <a:avLst/>
@@ -6200,97 +6298,7 @@
               </a:spcAft>
             </a:pPr>
             <a:r>
-              <a:rPr sz="1250" b="0" i="0">
-                <a:solidFill>
-                  <a:srgbClr val="1B1F26"/>
-                </a:solidFill>
-                <a:latin typeface="Montserrat"/>
-              </a:rPr>
-              <a:t>AI-powered insights &amp; query support</a:t>
-            </a:r>
-          </a:p>
-        </p:txBody>
-      </p:sp>
-      <p:sp>
-        <p:nvSpPr>
-          <p:cNvPr id="48" name="TextBox 47"/>
-          <p:cNvSpPr txBox="1"/>
-          <p:nvPr/>
-        </p:nvSpPr>
-        <p:spPr>
-          <a:xfrm>
-            <a:off x="4754880" y="8001000"/>
-            <a:ext cx="274320" cy="365760"/>
-          </a:xfrm>
-          <a:prstGeom prst="rect">
-            <a:avLst/>
-          </a:prstGeom>
-          <a:noFill/>
-        </p:spPr>
-        <p:txBody>
-          <a:bodyPr wrap="square" lIns="0" rIns="0" tIns="0" bIns="0" anchor="t">
-            <a:noAutofit/>
-          </a:bodyPr>
-          <a:lstStyle/>
-          <a:p>
-            <a:pPr algn="l">
-              <a:lnSpc>
-                <a:spcPct val="100000"/>
-              </a:lnSpc>
-              <a:spcBef>
-                <a:spcPts val="0"/>
-              </a:spcBef>
-              <a:spcAft>
-                <a:spcPts val="0"/>
-              </a:spcAft>
-            </a:pPr>
-            <a:r>
-              <a:rPr sz="1200" b="0" i="0">
-                <a:solidFill>
-                  <a:srgbClr val="7C3AED"/>
-                </a:solidFill>
-                <a:latin typeface="Montserrat"/>
-              </a:rPr>
-              <a:t>✓</a:t>
-            </a:r>
-          </a:p>
-        </p:txBody>
-      </p:sp>
-      <p:sp>
-        <p:nvSpPr>
-          <p:cNvPr id="49" name="TextBox 48"/>
-          <p:cNvSpPr txBox="1"/>
-          <p:nvPr/>
-        </p:nvSpPr>
-        <p:spPr>
-          <a:xfrm>
-            <a:off x="5093208" y="7982712"/>
-            <a:ext cx="3026664" cy="502920"/>
-          </a:xfrm>
-          <a:prstGeom prst="rect">
-            <a:avLst/>
-          </a:prstGeom>
-          <a:noFill/>
-        </p:spPr>
-        <p:txBody>
-          <a:bodyPr wrap="square" lIns="0" rIns="0" tIns="0" bIns="0" anchor="t">
-            <a:noAutofit/>
-          </a:bodyPr>
-          <a:lstStyle/>
-          <a:p>
-            <a:pPr algn="l">
-              <a:lnSpc>
-                <a:spcPct val="105000"/>
-              </a:lnSpc>
-              <a:spcBef>
-                <a:spcPts val="0"/>
-              </a:spcBef>
-              <a:spcAft>
-                <a:spcPts val="0"/>
-              </a:spcAft>
-            </a:pPr>
-            <a:r>
-              <a:rPr sz="1250" b="0" i="0">
+              <a:rPr sz="1500" b="0" i="0">
                 <a:solidFill>
                   <a:srgbClr val="1B1F26"/>
                 </a:solidFill>
@@ -6309,17 +6317,25 @@
         </p:nvSpPr>
         <p:spPr>
           <a:xfrm>
-            <a:off x="8595360" y="3200400"/>
-            <a:ext cx="3566160" cy="6309360"/>
+            <a:off x="8183879" y="3246120"/>
+            <a:ext cx="3429000" cy="6355080"/>
           </a:xfrm>
           <a:prstGeom prst="roundRect">
             <a:avLst>
-              <a:gd name="adj" fmla="val 2564"/>
+              <a:gd name="adj" fmla="val 3200"/>
             </a:avLst>
           </a:prstGeom>
-          <a:solidFill>
-            <a:srgbClr val="161A2E"/>
-          </a:solidFill>
+          <a:gradFill rotWithShape="1">
+            <a:gsLst>
+              <a:gs pos="0">
+                <a:srgbClr val="0F766E"/>
+              </a:gs>
+              <a:gs pos="100000">
+                <a:srgbClr val="13B5A6"/>
+              </a:gs>
+            </a:gsLst>
+            <a:lin scaled="0" ang="18600000"/>
+          </a:gradFill>
           <a:ln>
             <a:noFill/>
           </a:ln>
@@ -6355,8 +6371,8 @@
         </p:nvSpPr>
         <p:spPr>
           <a:xfrm>
-            <a:off x="8869680" y="3493008"/>
-            <a:ext cx="3017520" cy="274320"/>
+            <a:off x="8476488" y="3575303"/>
+            <a:ext cx="2843784" cy="274320"/>
           </a:xfrm>
           <a:prstGeom prst="rect">
             <a:avLst/>
@@ -6381,7 +6397,7 @@
               </a:spcAft>
             </a:pPr>
             <a:r>
-              <a:rPr sz="1200" b="1" i="0" spc="200">
+              <a:rPr sz="1300" b="1" i="0" spc="200">
                 <a:solidFill>
                   <a:srgbClr val="FFFFFF"/>
                 </a:solidFill>
@@ -6400,15 +6416,15 @@
         </p:nvCxnSpPr>
         <p:spPr>
           <a:xfrm>
-            <a:off x="8869680" y="3913632"/>
-            <a:ext cx="3017520" cy="0"/>
+            <a:off x="8476488" y="4032504"/>
+            <a:ext cx="2843784" cy="0"/>
           </a:xfrm>
           <a:prstGeom prst="bentConnector3">
             <a:avLst/>
           </a:prstGeom>
           <a:ln w="9525">
             <a:solidFill>
-              <a:srgbClr val="3A3F57"/>
+              <a:srgbClr val="3FBFB0"/>
             </a:solidFill>
           </a:ln>
           <a:effectLst/>
@@ -6436,8 +6452,8 @@
         </p:nvSpPr>
         <p:spPr>
           <a:xfrm>
-            <a:off x="8869680" y="4270248"/>
-            <a:ext cx="3017520" cy="777240"/>
+            <a:off x="8476488" y="4325112"/>
+            <a:ext cx="2843784" cy="777240"/>
           </a:xfrm>
           <a:prstGeom prst="rect">
             <a:avLst/>
@@ -6462,7 +6478,7 @@
               </a:spcAft>
             </a:pPr>
             <a:r>
-              <a:rPr sz="4000" b="0" i="0">
+              <a:rPr sz="4600" b="0" i="0">
                 <a:solidFill>
                   <a:srgbClr val="FFFFFF"/>
                 </a:solidFill>
@@ -6481,8 +6497,8 @@
         </p:nvSpPr>
         <p:spPr>
           <a:xfrm>
-            <a:off x="8869680" y="5029200"/>
-            <a:ext cx="3017520" cy="914400"/>
+            <a:off x="8476488" y="5148072"/>
+            <a:ext cx="2843784" cy="914400"/>
           </a:xfrm>
           <a:prstGeom prst="rect">
             <a:avLst/>
@@ -6497,23 +6513,23 @@
           <a:p>
             <a:pPr algn="l">
               <a:lnSpc>
-                <a:spcPct val="118000"/>
-              </a:lnSpc>
-              <a:spcBef>
-                <a:spcPts val="0"/>
-              </a:spcBef>
-              <a:spcAft>
-                <a:spcPts val="0"/>
-              </a:spcAft>
-            </a:pPr>
-            <a:r>
-              <a:rPr sz="1150" b="0" i="0">
-                <a:solidFill>
-                  <a:srgbClr val="E0CFFA"/>
+                <a:spcPct val="122000"/>
+              </a:lnSpc>
+              <a:spcBef>
+                <a:spcPts val="0"/>
+              </a:spcBef>
+              <a:spcAft>
+                <a:spcPts val="0"/>
+              </a:spcAft>
+            </a:pPr>
+            <a:r>
+              <a:rPr sz="1300" b="0" i="0">
+                <a:solidFill>
+                  <a:srgbClr val="CCFBF1"/>
                 </a:solidFill>
                 <a:latin typeface="Montserrat"/>
               </a:rPr>
-              <a:t>Savings on a $54M spend across 37 sourcing projects — average yield 10%</a:t>
+              <a:t>Savings on a $54M spend across 37 sourcing projects — 10% average yield</a:t>
             </a:r>
           </a:p>
         </p:txBody>
@@ -6526,15 +6542,15 @@
         </p:nvCxnSpPr>
         <p:spPr>
           <a:xfrm>
-            <a:off x="8869680" y="5827776"/>
-            <a:ext cx="3017520" cy="0"/>
+            <a:off x="8476488" y="5949696"/>
+            <a:ext cx="2843784" cy="0"/>
           </a:xfrm>
           <a:prstGeom prst="bentConnector3">
             <a:avLst/>
           </a:prstGeom>
           <a:ln w="6350">
             <a:solidFill>
-              <a:srgbClr val="3A3F57"/>
+              <a:srgbClr val="3FBFB0"/>
             </a:solidFill>
           </a:ln>
           <a:effectLst/>
@@ -6562,8 +6578,8 @@
         </p:nvSpPr>
         <p:spPr>
           <a:xfrm>
-            <a:off x="8869680" y="5992368"/>
-            <a:ext cx="3017520" cy="777240"/>
+            <a:off x="8476488" y="6077712"/>
+            <a:ext cx="2843784" cy="777240"/>
           </a:xfrm>
           <a:prstGeom prst="rect">
             <a:avLst/>
@@ -6588,7 +6604,7 @@
               </a:spcAft>
             </a:pPr>
             <a:r>
-              <a:rPr sz="4000" b="0" i="0">
+              <a:rPr sz="4600" b="0" i="0">
                 <a:solidFill>
                   <a:srgbClr val="FFFFFF"/>
                 </a:solidFill>
@@ -6607,8 +6623,8 @@
         </p:nvSpPr>
         <p:spPr>
           <a:xfrm>
-            <a:off x="8869680" y="6751320"/>
-            <a:ext cx="3017520" cy="914400"/>
+            <a:off x="8476488" y="6900672"/>
+            <a:ext cx="2843784" cy="914400"/>
           </a:xfrm>
           <a:prstGeom prst="rect">
             <a:avLst/>
@@ -6623,19 +6639,19 @@
           <a:p>
             <a:pPr algn="l">
               <a:lnSpc>
-                <a:spcPct val="118000"/>
-              </a:lnSpc>
-              <a:spcBef>
-                <a:spcPts val="0"/>
-              </a:spcBef>
-              <a:spcAft>
-                <a:spcPts val="0"/>
-              </a:spcAft>
-            </a:pPr>
-            <a:r>
-              <a:rPr sz="1150" b="0" i="0">
-                <a:solidFill>
-                  <a:srgbClr val="E0CFFA"/>
+                <a:spcPct val="122000"/>
+              </a:lnSpc>
+              <a:spcBef>
+                <a:spcPts val="0"/>
+              </a:spcBef>
+              <a:spcAft>
+                <a:spcPts val="0"/>
+              </a:spcAft>
+            </a:pPr>
+            <a:r>
+              <a:rPr sz="1300" b="0" i="0">
+                <a:solidFill>
+                  <a:srgbClr val="CCFBF1"/>
                 </a:solidFill>
                 <a:latin typeface="Montserrat"/>
               </a:rPr>
@@ -6652,15 +6668,15 @@
         </p:nvCxnSpPr>
         <p:spPr>
           <a:xfrm>
-            <a:off x="8869680" y="7549895"/>
-            <a:ext cx="3017520" cy="0"/>
+            <a:off x="8476488" y="7702296"/>
+            <a:ext cx="2843784" cy="0"/>
           </a:xfrm>
           <a:prstGeom prst="bentConnector3">
             <a:avLst/>
           </a:prstGeom>
           <a:ln w="6350">
             <a:solidFill>
-              <a:srgbClr val="3A3F57"/>
+              <a:srgbClr val="3FBFB0"/>
             </a:solidFill>
           </a:ln>
           <a:effectLst/>
@@ -6688,8 +6704,8 @@
         </p:nvSpPr>
         <p:spPr>
           <a:xfrm>
-            <a:off x="8869680" y="7714487"/>
-            <a:ext cx="3017520" cy="777240"/>
+            <a:off x="8476488" y="7830311"/>
+            <a:ext cx="2843784" cy="777240"/>
           </a:xfrm>
           <a:prstGeom prst="rect">
             <a:avLst/>
@@ -6714,7 +6730,7 @@
               </a:spcAft>
             </a:pPr>
             <a:r>
-              <a:rPr sz="4000" b="0" i="0">
+              <a:rPr sz="4600" b="0" i="0">
                 <a:solidFill>
                   <a:srgbClr val="FFFFFF"/>
                 </a:solidFill>
@@ -6733,8 +6749,8 @@
         </p:nvSpPr>
         <p:spPr>
           <a:xfrm>
-            <a:off x="8869680" y="8473440"/>
-            <a:ext cx="3017520" cy="914400"/>
+            <a:off x="8476488" y="8653272"/>
+            <a:ext cx="2843784" cy="914400"/>
           </a:xfrm>
           <a:prstGeom prst="rect">
             <a:avLst/>
@@ -6749,19 +6765,19 @@
           <a:p>
             <a:pPr algn="l">
               <a:lnSpc>
-                <a:spcPct val="118000"/>
-              </a:lnSpc>
-              <a:spcBef>
-                <a:spcPts val="0"/>
-              </a:spcBef>
-              <a:spcAft>
-                <a:spcPts val="0"/>
-              </a:spcAft>
-            </a:pPr>
-            <a:r>
-              <a:rPr sz="1150" b="0" i="0">
-                <a:solidFill>
-                  <a:srgbClr val="E0CFFA"/>
+                <a:spcPct val="122000"/>
+              </a:lnSpc>
+              <a:spcBef>
+                <a:spcPts val="0"/>
+              </a:spcBef>
+              <a:spcAft>
+                <a:spcPts val="0"/>
+              </a:spcAft>
+            </a:pPr>
+            <a:r>
+              <a:rPr sz="1300" b="0" i="0">
+                <a:solidFill>
+                  <a:srgbClr val="CCFBF1"/>
                 </a:solidFill>
                 <a:latin typeface="Montserrat"/>
               </a:rPr>
@@ -6778,17 +6794,25 @@
         </p:nvSpPr>
         <p:spPr>
           <a:xfrm>
-            <a:off x="12435840" y="3200400"/>
-            <a:ext cx="5093208" cy="6309360"/>
+            <a:off x="11841480" y="3246120"/>
+            <a:ext cx="5687568" cy="6355080"/>
           </a:xfrm>
           <a:prstGeom prst="roundRect">
             <a:avLst>
-              <a:gd name="adj" fmla="val 1795"/>
+              <a:gd name="adj" fmla="val 1929"/>
             </a:avLst>
           </a:prstGeom>
-          <a:solidFill>
-            <a:srgbClr val="7C3AED"/>
-          </a:solidFill>
+          <a:gradFill rotWithShape="1">
+            <a:gsLst>
+              <a:gs pos="0">
+                <a:srgbClr val="6D28D9"/>
+              </a:gs>
+              <a:gs pos="100000">
+                <a:srgbClr val="9333EA"/>
+              </a:gs>
+            </a:gsLst>
+            <a:lin scaled="0" ang="18600000"/>
+          </a:gradFill>
           <a:ln>
             <a:noFill/>
           </a:ln>
@@ -6824,8 +6848,8 @@
         </p:nvSpPr>
         <p:spPr>
           <a:xfrm>
-            <a:off x="12755880" y="3493008"/>
-            <a:ext cx="4453128" cy="274320"/>
+            <a:off x="12207240" y="3575303"/>
+            <a:ext cx="4956048" cy="274320"/>
           </a:xfrm>
           <a:prstGeom prst="rect">
             <a:avLst/>
@@ -6850,7 +6874,7 @@
               </a:spcAft>
             </a:pPr>
             <a:r>
-              <a:rPr sz="1200" b="1" i="0" spc="200">
+              <a:rPr sz="1300" b="1" i="0" spc="200">
                 <a:solidFill>
                   <a:srgbClr val="FFFFFF"/>
                 </a:solidFill>
@@ -6869,15 +6893,15 @@
         </p:nvCxnSpPr>
         <p:spPr>
           <a:xfrm>
-            <a:off x="12755880" y="3913632"/>
-            <a:ext cx="4453128" cy="0"/>
+            <a:off x="12207240" y="4032504"/>
+            <a:ext cx="4956048" cy="0"/>
           </a:xfrm>
           <a:prstGeom prst="bentConnector3">
             <a:avLst/>
           </a:prstGeom>
           <a:ln w="9525">
             <a:solidFill>
-              <a:srgbClr val="C4A8F7"/>
+              <a:srgbClr val="B98DF0"/>
             </a:solidFill>
           </a:ln>
           <a:effectLst/>
@@ -6905,16 +6929,16 @@
         </p:nvSpPr>
         <p:spPr>
           <a:xfrm>
-            <a:off x="12755880" y="4206240"/>
-            <a:ext cx="2103120" cy="640080"/>
-          </a:xfrm>
-          <a:prstGeom prst="rect">
-            <a:avLst/>
-          </a:prstGeom>
-          <a:noFill/>
-        </p:spPr>
-        <p:txBody>
-          <a:bodyPr wrap="square" lIns="0" rIns="0" tIns="0" bIns="0" anchor="ctr">
+            <a:off x="12207240" y="4297679"/>
+            <a:ext cx="2340864" cy="777240"/>
+          </a:xfrm>
+          <a:prstGeom prst="rect">
+            <a:avLst/>
+          </a:prstGeom>
+          <a:noFill/>
+        </p:spPr>
+        <p:txBody>
+          <a:bodyPr wrap="square" lIns="0" rIns="0" tIns="0" bIns="0" anchor="t">
             <a:noAutofit/>
           </a:bodyPr>
           <a:lstStyle/>
@@ -6931,7 +6955,7 @@
               </a:spcAft>
             </a:pPr>
             <a:r>
-              <a:rPr sz="3400" b="0" i="0">
+              <a:rPr sz="4600" b="0" i="0">
                 <a:solidFill>
                   <a:srgbClr val="FFFFFF"/>
                 </a:solidFill>
@@ -6950,16 +6974,16 @@
         </p:nvSpPr>
         <p:spPr>
           <a:xfrm>
-            <a:off x="14950440" y="4142232"/>
-            <a:ext cx="2258568" cy="384048"/>
-          </a:xfrm>
-          <a:prstGeom prst="rect">
-            <a:avLst/>
-          </a:prstGeom>
-          <a:noFill/>
-        </p:spPr>
-        <p:txBody>
-          <a:bodyPr wrap="square" lIns="0" rIns="0" tIns="0" bIns="0" anchor="b">
+            <a:off x="12207240" y="5138927"/>
+            <a:ext cx="2340864" cy="365760"/>
+          </a:xfrm>
+          <a:prstGeom prst="rect">
+            <a:avLst/>
+          </a:prstGeom>
+          <a:noFill/>
+        </p:spPr>
+        <p:txBody>
+          <a:bodyPr wrap="square" lIns="0" rIns="0" tIns="0" bIns="0" anchor="t">
             <a:noAutofit/>
           </a:bodyPr>
           <a:lstStyle/>
@@ -6976,11 +7000,11 @@
               </a:spcAft>
             </a:pPr>
             <a:r>
-              <a:rPr sz="1350" b="0" i="0">
+              <a:rPr sz="1550" b="0" i="0">
                 <a:solidFill>
                   <a:srgbClr val="FFFFFF"/>
                 </a:solidFill>
-                <a:latin typeface="Montserrat Medium"/>
+                <a:latin typeface="Montserrat SemiBold"/>
               </a:rPr>
               <a:t>Return on investment</a:t>
             </a:r>
@@ -6995,8 +7019,8 @@
         </p:nvSpPr>
         <p:spPr>
           <a:xfrm>
-            <a:off x="14950440" y="4544568"/>
-            <a:ext cx="2258568" cy="365760"/>
+            <a:off x="12207240" y="5504688"/>
+            <a:ext cx="2340864" cy="548640"/>
           </a:xfrm>
           <a:prstGeom prst="rect">
             <a:avLst/>
@@ -7011,23 +7035,23 @@
           <a:p>
             <a:pPr algn="l">
               <a:lnSpc>
-                <a:spcPct val="105000"/>
-              </a:lnSpc>
-              <a:spcBef>
-                <a:spcPts val="0"/>
-              </a:spcBef>
-              <a:spcAft>
-                <a:spcPts val="0"/>
-              </a:spcAft>
-            </a:pPr>
-            <a:r>
-              <a:rPr sz="1050" b="0" i="0">
-                <a:solidFill>
-                  <a:srgbClr val="E0CFFA"/>
+                <a:spcPct val="112000"/>
+              </a:lnSpc>
+              <a:spcBef>
+                <a:spcPts val="0"/>
+              </a:spcBef>
+              <a:spcAft>
+                <a:spcPts val="0"/>
+              </a:spcAft>
+            </a:pPr>
+            <a:r>
+              <a:rPr sz="1150" b="0" i="0">
+                <a:solidFill>
+                  <a:srgbClr val="ECE3FF"/>
                 </a:solidFill>
                 <a:latin typeface="Montserrat"/>
               </a:rPr>
-              <a:t>On $15.5M committed savings in 2026</a:t>
+              <a:t>On $15.5M committed savings, 2026</a:t>
             </a:r>
           </a:p>
         </p:txBody>
@@ -7040,15 +7064,15 @@
         </p:nvCxnSpPr>
         <p:spPr>
           <a:xfrm>
-            <a:off x="12755880" y="5378958"/>
-            <a:ext cx="4453128" cy="0"/>
+            <a:off x="12207240" y="6739127"/>
+            <a:ext cx="2340864" cy="0"/>
           </a:xfrm>
           <a:prstGeom prst="bentConnector3">
             <a:avLst/>
           </a:prstGeom>
           <a:ln w="6350">
             <a:solidFill>
-              <a:srgbClr val="C4A8F7"/>
+              <a:srgbClr val="B98DF0"/>
             </a:solidFill>
           </a:ln>
           <a:effectLst/>
@@ -7076,16 +7100,16 @@
         </p:nvSpPr>
         <p:spPr>
           <a:xfrm>
-            <a:off x="12755880" y="5497830"/>
-            <a:ext cx="2103120" cy="640080"/>
-          </a:xfrm>
-          <a:prstGeom prst="rect">
-            <a:avLst/>
-          </a:prstGeom>
-          <a:noFill/>
-        </p:spPr>
-        <p:txBody>
-          <a:bodyPr wrap="square" lIns="0" rIns="0" tIns="0" bIns="0" anchor="ctr">
+            <a:off x="14822424" y="4297679"/>
+            <a:ext cx="2340864" cy="777240"/>
+          </a:xfrm>
+          <a:prstGeom prst="rect">
+            <a:avLst/>
+          </a:prstGeom>
+          <a:noFill/>
+        </p:spPr>
+        <p:txBody>
+          <a:bodyPr wrap="square" lIns="0" rIns="0" tIns="0" bIns="0" anchor="t">
             <a:noAutofit/>
           </a:bodyPr>
           <a:lstStyle/>
@@ -7102,7 +7126,7 @@
               </a:spcAft>
             </a:pPr>
             <a:r>
-              <a:rPr sz="3400" b="0" i="0">
+              <a:rPr sz="4600" b="0" i="0">
                 <a:solidFill>
                   <a:srgbClr val="FFFFFF"/>
                 </a:solidFill>
@@ -7121,16 +7145,16 @@
         </p:nvSpPr>
         <p:spPr>
           <a:xfrm>
-            <a:off x="14950440" y="5433822"/>
-            <a:ext cx="2258568" cy="384048"/>
-          </a:xfrm>
-          <a:prstGeom prst="rect">
-            <a:avLst/>
-          </a:prstGeom>
-          <a:noFill/>
-        </p:spPr>
-        <p:txBody>
-          <a:bodyPr wrap="square" lIns="0" rIns="0" tIns="0" bIns="0" anchor="b">
+            <a:off x="14822424" y="5138927"/>
+            <a:ext cx="2340864" cy="365760"/>
+          </a:xfrm>
+          <a:prstGeom prst="rect">
+            <a:avLst/>
+          </a:prstGeom>
+          <a:noFill/>
+        </p:spPr>
+        <p:txBody>
+          <a:bodyPr wrap="square" lIns="0" rIns="0" tIns="0" bIns="0" anchor="t">
             <a:noAutofit/>
           </a:bodyPr>
           <a:lstStyle/>
@@ -7147,13 +7171,13 @@
               </a:spcAft>
             </a:pPr>
             <a:r>
-              <a:rPr sz="1350" b="0" i="0">
+              <a:rPr sz="1550" b="0" i="0">
                 <a:solidFill>
                   <a:srgbClr val="FFFFFF"/>
                 </a:solidFill>
-                <a:latin typeface="Montserrat Medium"/>
-              </a:rPr>
-              <a:t>Annual cost of the platform</a:t>
+                <a:latin typeface="Montserrat SemiBold"/>
+              </a:rPr>
+              <a:t>Annual platform cost</a:t>
             </a:r>
           </a:p>
         </p:txBody>
@@ -7166,8 +7190,8 @@
         </p:nvSpPr>
         <p:spPr>
           <a:xfrm>
-            <a:off x="14950440" y="5836158"/>
-            <a:ext cx="2258568" cy="365760"/>
+            <a:off x="14822424" y="5504688"/>
+            <a:ext cx="2340864" cy="548640"/>
           </a:xfrm>
           <a:prstGeom prst="rect">
             <a:avLst/>
@@ -7182,19 +7206,19 @@
           <a:p>
             <a:pPr algn="l">
               <a:lnSpc>
-                <a:spcPct val="105000"/>
-              </a:lnSpc>
-              <a:spcBef>
-                <a:spcPts val="0"/>
-              </a:spcBef>
-              <a:spcAft>
-                <a:spcPts val="0"/>
-              </a:spcAft>
-            </a:pPr>
-            <a:r>
-              <a:rPr sz="1050" b="0" i="0">
-                <a:solidFill>
-                  <a:srgbClr val="E0CFFA"/>
+                <a:spcPct val="112000"/>
+              </a:lnSpc>
+              <a:spcBef>
+                <a:spcPts val="0"/>
+              </a:spcBef>
+              <a:spcAft>
+                <a:spcPts val="0"/>
+              </a:spcAft>
+            </a:pPr>
+            <a:r>
+              <a:rPr sz="1150" b="0" i="0">
+                <a:solidFill>
+                  <a:srgbClr val="ECE3FF"/>
                 </a:solidFill>
                 <a:latin typeface="Montserrat"/>
               </a:rPr>
@@ -7211,15 +7235,15 @@
         </p:nvCxnSpPr>
         <p:spPr>
           <a:xfrm>
-            <a:off x="12755880" y="6670548"/>
-            <a:ext cx="4453128" cy="0"/>
+            <a:off x="14822424" y="6739127"/>
+            <a:ext cx="2340864" cy="0"/>
           </a:xfrm>
           <a:prstGeom prst="bentConnector3">
             <a:avLst/>
           </a:prstGeom>
           <a:ln w="6350">
             <a:solidFill>
-              <a:srgbClr val="C4A8F7"/>
+              <a:srgbClr val="B98DF0"/>
             </a:solidFill>
           </a:ln>
           <a:effectLst/>
@@ -7247,16 +7271,16 @@
         </p:nvSpPr>
         <p:spPr>
           <a:xfrm>
-            <a:off x="12755880" y="6789420"/>
-            <a:ext cx="2103120" cy="640080"/>
-          </a:xfrm>
-          <a:prstGeom prst="rect">
-            <a:avLst/>
-          </a:prstGeom>
-          <a:noFill/>
-        </p:spPr>
-        <p:txBody>
-          <a:bodyPr wrap="square" lIns="0" rIns="0" tIns="0" bIns="0" anchor="ctr">
+            <a:off x="12207240" y="6903719"/>
+            <a:ext cx="2340864" cy="777240"/>
+          </a:xfrm>
+          <a:prstGeom prst="rect">
+            <a:avLst/>
+          </a:prstGeom>
+          <a:noFill/>
+        </p:spPr>
+        <p:txBody>
+          <a:bodyPr wrap="square" lIns="0" rIns="0" tIns="0" bIns="0" anchor="t">
             <a:noAutofit/>
           </a:bodyPr>
           <a:lstStyle/>
@@ -7273,7 +7297,7 @@
               </a:spcAft>
             </a:pPr>
             <a:r>
-              <a:rPr sz="3400" b="0" i="0">
+              <a:rPr sz="4600" b="0" i="0">
                 <a:solidFill>
                   <a:srgbClr val="FFFFFF"/>
                 </a:solidFill>
@@ -7292,16 +7316,16 @@
         </p:nvSpPr>
         <p:spPr>
           <a:xfrm>
-            <a:off x="14950440" y="6725412"/>
-            <a:ext cx="2258568" cy="384048"/>
-          </a:xfrm>
-          <a:prstGeom prst="rect">
-            <a:avLst/>
-          </a:prstGeom>
-          <a:noFill/>
-        </p:spPr>
-        <p:txBody>
-          <a:bodyPr wrap="square" lIns="0" rIns="0" tIns="0" bIns="0" anchor="b">
+            <a:off x="12207240" y="7744967"/>
+            <a:ext cx="2340864" cy="365760"/>
+          </a:xfrm>
+          <a:prstGeom prst="rect">
+            <a:avLst/>
+          </a:prstGeom>
+          <a:noFill/>
+        </p:spPr>
+        <p:txBody>
+          <a:bodyPr wrap="square" lIns="0" rIns="0" tIns="0" bIns="0" anchor="t">
             <a:noAutofit/>
           </a:bodyPr>
           <a:lstStyle/>
@@ -7318,27 +7342,117 @@
               </a:spcAft>
             </a:pPr>
             <a:r>
-              <a:rPr sz="1350" b="0" i="0">
+              <a:rPr sz="1550" b="0" i="0">
                 <a:solidFill>
                   <a:srgbClr val="FFFFFF"/>
                 </a:solidFill>
+                <a:latin typeface="Montserrat SemiBold"/>
+              </a:rPr>
+              <a:t>Hard savings in 2025</a:t>
+            </a:r>
+          </a:p>
+        </p:txBody>
+      </p:sp>
+      <p:sp>
+        <p:nvSpPr>
+          <p:cNvPr id="74" name="TextBox 73"/>
+          <p:cNvSpPr txBox="1"/>
+          <p:nvPr/>
+        </p:nvSpPr>
+        <p:spPr>
+          <a:xfrm>
+            <a:off x="12207240" y="8110727"/>
+            <a:ext cx="2340864" cy="548640"/>
+          </a:xfrm>
+          <a:prstGeom prst="rect">
+            <a:avLst/>
+          </a:prstGeom>
+          <a:noFill/>
+        </p:spPr>
+        <p:txBody>
+          <a:bodyPr wrap="square" lIns="0" rIns="0" tIns="0" bIns="0" anchor="t">
+            <a:noAutofit/>
+          </a:bodyPr>
+          <a:lstStyle/>
+          <a:p>
+            <a:pPr algn="l">
+              <a:lnSpc>
+                <a:spcPct val="112000"/>
+              </a:lnSpc>
+              <a:spcBef>
+                <a:spcPts val="0"/>
+              </a:spcBef>
+              <a:spcAft>
+                <a:spcPts val="0"/>
+              </a:spcAft>
+            </a:pPr>
+            <a:r>
+              <a:rPr sz="1150" b="0" i="0">
+                <a:solidFill>
+                  <a:srgbClr val="ECE3FF"/>
+                </a:solidFill>
+                <a:latin typeface="Montserrat"/>
+              </a:rPr>
+              <a:t>Delivered, banked, audited</a:t>
+            </a:r>
+          </a:p>
+        </p:txBody>
+      </p:sp>
+      <p:sp>
+        <p:nvSpPr>
+          <p:cNvPr id="75" name="TextBox 74"/>
+          <p:cNvSpPr txBox="1"/>
+          <p:nvPr/>
+        </p:nvSpPr>
+        <p:spPr>
+          <a:xfrm>
+            <a:off x="14822424" y="6903719"/>
+            <a:ext cx="2340864" cy="777240"/>
+          </a:xfrm>
+          <a:prstGeom prst="rect">
+            <a:avLst/>
+          </a:prstGeom>
+          <a:noFill/>
+        </p:spPr>
+        <p:txBody>
+          <a:bodyPr wrap="square" lIns="0" rIns="0" tIns="0" bIns="0" anchor="t">
+            <a:noAutofit/>
+          </a:bodyPr>
+          <a:lstStyle/>
+          <a:p>
+            <a:pPr algn="l">
+              <a:lnSpc>
+                <a:spcPct val="100000"/>
+              </a:lnSpc>
+              <a:spcBef>
+                <a:spcPts val="0"/>
+              </a:spcBef>
+              <a:spcAft>
+                <a:spcPts val="0"/>
+              </a:spcAft>
+            </a:pPr>
+            <a:r>
+              <a:rPr sz="4600" b="0" i="0">
+                <a:solidFill>
+                  <a:srgbClr val="FFFFFF"/>
+                </a:solidFill>
                 <a:latin typeface="Montserrat Medium"/>
               </a:rPr>
-              <a:t>Hard savings in 2025</a:t>
-            </a:r>
-          </a:p>
-        </p:txBody>
-      </p:sp>
-      <p:sp>
-        <p:nvSpPr>
-          <p:cNvPr id="74" name="TextBox 73"/>
-          <p:cNvSpPr txBox="1"/>
-          <p:nvPr/>
-        </p:nvSpPr>
-        <p:spPr>
-          <a:xfrm>
-            <a:off x="14950440" y="7127748"/>
-            <a:ext cx="2258568" cy="365760"/>
+              <a:t>~3%</a:t>
+            </a:r>
+          </a:p>
+        </p:txBody>
+      </p:sp>
+      <p:sp>
+        <p:nvSpPr>
+          <p:cNvPr id="76" name="TextBox 75"/>
+          <p:cNvSpPr txBox="1"/>
+          <p:nvPr/>
+        </p:nvSpPr>
+        <p:spPr>
+          <a:xfrm>
+            <a:off x="14822424" y="7744967"/>
+            <a:ext cx="2340864" cy="365760"/>
           </a:xfrm>
           <a:prstGeom prst="rect">
             <a:avLst/>
@@ -7353,201 +7467,75 @@
           <a:p>
             <a:pPr algn="l">
               <a:lnSpc>
-                <a:spcPct val="105000"/>
-              </a:lnSpc>
-              <a:spcBef>
-                <a:spcPts val="0"/>
-              </a:spcBef>
-              <a:spcAft>
-                <a:spcPts val="0"/>
-              </a:spcAft>
-            </a:pPr>
-            <a:r>
-              <a:rPr sz="1050" b="0" i="0">
-                <a:solidFill>
-                  <a:srgbClr val="E0CFFA"/>
+                <a:spcPct val="100000"/>
+              </a:lnSpc>
+              <a:spcBef>
+                <a:spcPts val="0"/>
+              </a:spcBef>
+              <a:spcAft>
+                <a:spcPts val="0"/>
+              </a:spcAft>
+            </a:pPr>
+            <a:r>
+              <a:rPr sz="1550" b="0" i="0">
+                <a:solidFill>
+                  <a:srgbClr val="FFFFFF"/>
+                </a:solidFill>
+                <a:latin typeface="Montserrat SemiBold"/>
+              </a:rPr>
+              <a:t>FTE efficiency gain</a:t>
+            </a:r>
+          </a:p>
+        </p:txBody>
+      </p:sp>
+      <p:sp>
+        <p:nvSpPr>
+          <p:cNvPr id="77" name="TextBox 76"/>
+          <p:cNvSpPr txBox="1"/>
+          <p:nvPr/>
+        </p:nvSpPr>
+        <p:spPr>
+          <a:xfrm>
+            <a:off x="14822424" y="8110727"/>
+            <a:ext cx="2340864" cy="548640"/>
+          </a:xfrm>
+          <a:prstGeom prst="rect">
+            <a:avLst/>
+          </a:prstGeom>
+          <a:noFill/>
+        </p:spPr>
+        <p:txBody>
+          <a:bodyPr wrap="square" lIns="0" rIns="0" tIns="0" bIns="0" anchor="t">
+            <a:noAutofit/>
+          </a:bodyPr>
+          <a:lstStyle/>
+          <a:p>
+            <a:pPr algn="l">
+              <a:lnSpc>
+                <a:spcPct val="112000"/>
+              </a:lnSpc>
+              <a:spcBef>
+                <a:spcPts val="0"/>
+              </a:spcBef>
+              <a:spcAft>
+                <a:spcPts val="0"/>
+              </a:spcAft>
+            </a:pPr>
+            <a:r>
+              <a:rPr sz="1150" b="0" i="0">
+                <a:solidFill>
+                  <a:srgbClr val="ECE3FF"/>
                 </a:solidFill>
                 <a:latin typeface="Montserrat"/>
               </a:rPr>
-              <a:t>Delivered, banked, audited</a:t>
-            </a:r>
-          </a:p>
-        </p:txBody>
-      </p:sp>
-      <p:cxnSp>
-        <p:nvCxnSpPr>
-          <p:cNvPr id="75" name="Connector 74"/>
-          <p:cNvCxnSpPr/>
-          <p:nvPr/>
-        </p:nvCxnSpPr>
-        <p:spPr>
-          <a:xfrm>
-            <a:off x="12755880" y="7962138"/>
-            <a:ext cx="4453128" cy="0"/>
-          </a:xfrm>
-          <a:prstGeom prst="bentConnector3">
-            <a:avLst/>
-          </a:prstGeom>
-          <a:ln w="6350">
-            <a:solidFill>
-              <a:srgbClr val="C4A8F7"/>
-            </a:solidFill>
-          </a:ln>
-          <a:effectLst/>
-        </p:spPr>
-        <p:style>
-          <a:lnRef idx="2">
-            <a:schemeClr val="accent1"/>
-          </a:lnRef>
-          <a:fillRef idx="0">
-            <a:schemeClr val="accent1"/>
-          </a:fillRef>
-          <a:effectRef idx="1">
-            <a:schemeClr val="accent1"/>
-          </a:effectRef>
-          <a:fontRef idx="minor">
-            <a:schemeClr val="tx1"/>
-          </a:fontRef>
-        </p:style>
-      </p:cxnSp>
-      <p:sp>
-        <p:nvSpPr>
-          <p:cNvPr id="76" name="TextBox 75"/>
-          <p:cNvSpPr txBox="1"/>
-          <p:nvPr/>
-        </p:nvSpPr>
-        <p:spPr>
-          <a:xfrm>
-            <a:off x="12755880" y="8081010"/>
-            <a:ext cx="2103120" cy="640080"/>
-          </a:xfrm>
-          <a:prstGeom prst="rect">
-            <a:avLst/>
-          </a:prstGeom>
-          <a:noFill/>
-        </p:spPr>
-        <p:txBody>
-          <a:bodyPr wrap="square" lIns="0" rIns="0" tIns="0" bIns="0" anchor="ctr">
-            <a:noAutofit/>
-          </a:bodyPr>
-          <a:lstStyle/>
-          <a:p>
-            <a:pPr algn="l">
-              <a:lnSpc>
-                <a:spcPct val="100000"/>
-              </a:lnSpc>
-              <a:spcBef>
-                <a:spcPts val="0"/>
-              </a:spcBef>
-              <a:spcAft>
-                <a:spcPts val="0"/>
-              </a:spcAft>
-            </a:pPr>
-            <a:r>
-              <a:rPr sz="3400" b="0" i="0">
-                <a:solidFill>
-                  <a:srgbClr val="FFFFFF"/>
-                </a:solidFill>
-                <a:latin typeface="Montserrat Medium"/>
-              </a:rPr>
-              <a:t>~3%</a:t>
-            </a:r>
-          </a:p>
-        </p:txBody>
-      </p:sp>
-      <p:sp>
-        <p:nvSpPr>
-          <p:cNvPr id="77" name="TextBox 76"/>
-          <p:cNvSpPr txBox="1"/>
-          <p:nvPr/>
-        </p:nvSpPr>
-        <p:spPr>
-          <a:xfrm>
-            <a:off x="14950440" y="8017002"/>
-            <a:ext cx="2258568" cy="384048"/>
-          </a:xfrm>
-          <a:prstGeom prst="rect">
-            <a:avLst/>
-          </a:prstGeom>
-          <a:noFill/>
-        </p:spPr>
-        <p:txBody>
-          <a:bodyPr wrap="square" lIns="0" rIns="0" tIns="0" bIns="0" anchor="b">
-            <a:noAutofit/>
-          </a:bodyPr>
-          <a:lstStyle/>
-          <a:p>
-            <a:pPr algn="l">
-              <a:lnSpc>
-                <a:spcPct val="100000"/>
-              </a:lnSpc>
-              <a:spcBef>
-                <a:spcPts val="0"/>
-              </a:spcBef>
-              <a:spcAft>
-                <a:spcPts val="0"/>
-              </a:spcAft>
-            </a:pPr>
-            <a:r>
-              <a:rPr sz="1350" b="0" i="0">
-                <a:solidFill>
-                  <a:srgbClr val="FFFFFF"/>
-                </a:solidFill>
-                <a:latin typeface="Montserrat Medium"/>
-              </a:rPr>
-              <a:t>FTE efficiency gain, year on year</a:t>
-            </a:r>
-          </a:p>
-        </p:txBody>
-      </p:sp>
-      <p:sp>
-        <p:nvSpPr>
-          <p:cNvPr id="78" name="TextBox 77"/>
-          <p:cNvSpPr txBox="1"/>
-          <p:nvPr/>
-        </p:nvSpPr>
-        <p:spPr>
-          <a:xfrm>
-            <a:off x="14950440" y="8419338"/>
-            <a:ext cx="2258568" cy="365760"/>
-          </a:xfrm>
-          <a:prstGeom prst="rect">
-            <a:avLst/>
-          </a:prstGeom>
-          <a:noFill/>
-        </p:spPr>
-        <p:txBody>
-          <a:bodyPr wrap="square" lIns="0" rIns="0" tIns="0" bIns="0" anchor="t">
-            <a:noAutofit/>
-          </a:bodyPr>
-          <a:lstStyle/>
-          <a:p>
-            <a:pPr algn="l">
-              <a:lnSpc>
-                <a:spcPct val="105000"/>
-              </a:lnSpc>
-              <a:spcBef>
-                <a:spcPts val="0"/>
-              </a:spcBef>
-              <a:spcAft>
-                <a:spcPts val="0"/>
-              </a:spcAft>
-            </a:pPr>
-            <a:r>
-              <a:rPr sz="1050" b="0" i="0">
-                <a:solidFill>
-                  <a:srgbClr val="E0CFFA"/>
-                </a:solidFill>
-                <a:latin typeface="Montserrat"/>
-              </a:rPr>
-              <a:t>Plus improved negotiation efficiency</a:t>
-            </a:r>
-          </a:p>
-        </p:txBody>
-      </p:sp>
-      <p:sp>
-        <p:nvSpPr>
-          <p:cNvPr id="79" name="Rectangle 78"/>
+              <a:t>Year on year, plus negotiation uplift</a:t>
+            </a:r>
+          </a:p>
+        </p:txBody>
+      </p:sp>
+      <p:sp>
+        <p:nvSpPr>
+          <p:cNvPr id="78" name="Rectangle 77"/>
           <p:cNvSpPr/>
           <p:nvPr/>
         </p:nvSpPr>
@@ -7591,7 +7579,7 @@
       </p:sp>
       <p:cxnSp>
         <p:nvCxnSpPr>
-          <p:cNvPr id="80" name="Connector 79"/>
+          <p:cNvPr id="79" name="Connector 78"/>
           <p:cNvCxnSpPr/>
           <p:nvPr/>
         </p:nvCxnSpPr>
@@ -7627,7 +7615,7 @@
       </p:cxnSp>
       <p:sp>
         <p:nvSpPr>
-          <p:cNvPr id="81" name="TextBox 80"/>
+          <p:cNvPr id="80" name="TextBox 79"/>
           <p:cNvSpPr txBox="1"/>
           <p:nvPr/>
         </p:nvSpPr>
@@ -7659,7 +7647,7 @@
               </a:spcAft>
             </a:pPr>
             <a:r>
-              <a:rPr sz="800" b="1" i="0" spc="80">
+              <a:rPr sz="900" b="1" i="0" spc="80">
                 <a:solidFill>
                   <a:srgbClr val="6A707B"/>
                 </a:solidFill>
@@ -7672,7 +7660,7 @@
       </p:sp>
       <p:sp>
         <p:nvSpPr>
-          <p:cNvPr id="82" name="TextBox 81"/>
+          <p:cNvPr id="81" name="TextBox 80"/>
           <p:cNvSpPr txBox="1"/>
           <p:nvPr/>
         </p:nvSpPr>
@@ -7704,7 +7692,7 @@
               </a:spcAft>
             </a:pPr>
             <a:r>
-              <a:rPr sz="800" b="1" i="0" spc="80">
+              <a:rPr sz="900" b="1" i="0" spc="80">
                 <a:solidFill>
                   <a:srgbClr val="6A707B"/>
                 </a:solidFill>
@@ -7786,7 +7774,7 @@
         <p:spPr>
           <a:xfrm>
             <a:off x="0" y="0"/>
-            <a:ext cx="18288000" cy="914400"/>
+            <a:ext cx="18288000" cy="960120"/>
           </a:xfrm>
           <a:prstGeom prst="rect">
             <a:avLst/>
@@ -7829,7 +7817,7 @@
         </p:nvCxnSpPr>
         <p:spPr>
           <a:xfrm>
-            <a:off x="0" y="914400"/>
+            <a:off x="0" y="960120"/>
             <a:ext cx="18288000" cy="0"/>
           </a:xfrm>
           <a:prstGeom prst="bentConnector3">
@@ -7873,7 +7861,7 @@
         </p:blipFill>
         <p:spPr>
           <a:xfrm>
-            <a:off x="758952" y="274320"/>
+            <a:off x="758952" y="292608"/>
             <a:ext cx="2542032" cy="365760"/>
           </a:xfrm>
           <a:prstGeom prst="rect">
@@ -7890,7 +7878,7 @@
         <p:spPr>
           <a:xfrm>
             <a:off x="3456432" y="0"/>
-            <a:ext cx="457200" cy="914400"/>
+            <a:ext cx="457200" cy="960120"/>
           </a:xfrm>
           <a:prstGeom prst="rect">
             <a:avLst/>
@@ -7942,8 +7930,8 @@
         </p:blipFill>
         <p:spPr>
           <a:xfrm>
-            <a:off x="3977639" y="320040"/>
-            <a:ext cx="960120" cy="283464"/>
+            <a:off x="3977639" y="338328"/>
+            <a:ext cx="749808" cy="292608"/>
           </a:xfrm>
           <a:prstGeom prst="rect">
             <a:avLst/>
@@ -7958,8 +7946,8 @@
         </p:nvCxnSpPr>
         <p:spPr>
           <a:xfrm>
-            <a:off x="5321808" y="320040"/>
-            <a:ext cx="0" cy="274319"/>
+            <a:off x="5074920" y="338328"/>
+            <a:ext cx="0" cy="283464"/>
           </a:xfrm>
           <a:prstGeom prst="bentConnector3">
             <a:avLst/>
@@ -7994,8 +7982,8 @@
         </p:nvSpPr>
         <p:spPr>
           <a:xfrm>
-            <a:off x="5513832" y="0"/>
-            <a:ext cx="8229600" cy="914400"/>
+            <a:off x="5285232" y="0"/>
+            <a:ext cx="8686800" cy="960120"/>
           </a:xfrm>
           <a:prstGeom prst="rect">
             <a:avLst/>
@@ -8020,7 +8008,7 @@
               </a:spcAft>
             </a:pPr>
             <a:r>
-              <a:rPr sz="1100" b="1" i="0" spc="120">
+              <a:rPr sz="1200" b="1" i="0" spc="120">
                 <a:solidFill>
                   <a:srgbClr val="6A707B"/>
                 </a:solidFill>
@@ -8039,8 +8027,8 @@
         </p:nvSpPr>
         <p:spPr>
           <a:xfrm>
-            <a:off x="15087600" y="0"/>
-            <a:ext cx="1554480" cy="914400"/>
+            <a:off x="14996159" y="0"/>
+            <a:ext cx="1645920" cy="960120"/>
           </a:xfrm>
           <a:prstGeom prst="rect">
             <a:avLst/>
@@ -8065,7 +8053,7 @@
               </a:spcAft>
             </a:pPr>
             <a:r>
-              <a:rPr sz="1200" b="1" i="0">
+              <a:rPr sz="1300" b="1" i="0">
                 <a:solidFill>
                   <a:srgbClr val="1B1F26"/>
                 </a:solidFill>
@@ -8074,7 +8062,7 @@
               <a:t>03</a:t>
             </a:r>
             <a:r>
-              <a:rPr sz="1200" b="1" i="0">
+              <a:rPr sz="1300" b="1" i="0">
                 <a:solidFill>
                   <a:srgbClr val="6A707B"/>
                 </a:solidFill>
@@ -8101,8 +8089,8 @@
         </p:blipFill>
         <p:spPr>
           <a:xfrm>
-            <a:off x="16962120" y="246888"/>
-            <a:ext cx="411480" cy="457200"/>
+            <a:off x="16916400" y="256032"/>
+            <a:ext cx="457200" cy="475488"/>
           </a:xfrm>
           <a:prstGeom prst="rect">
             <a:avLst/>
@@ -8117,8 +8105,8 @@
         </p:nvSpPr>
         <p:spPr>
           <a:xfrm>
-            <a:off x="758952" y="1179576"/>
-            <a:ext cx="402336" cy="402336"/>
+            <a:off x="758952" y="1216152"/>
+            <a:ext cx="420624" cy="420624"/>
           </a:xfrm>
           <a:prstGeom prst="rect">
             <a:avLst/>
@@ -8161,8 +8149,8 @@
         </p:nvSpPr>
         <p:spPr>
           <a:xfrm>
-            <a:off x="758952" y="1179576"/>
-            <a:ext cx="402336" cy="402336"/>
+            <a:off x="758952" y="1216152"/>
+            <a:ext cx="420624" cy="420624"/>
           </a:xfrm>
           <a:prstGeom prst="rect">
             <a:avLst/>
@@ -8187,7 +8175,7 @@
               </a:spcAft>
             </a:pPr>
             <a:r>
-              <a:rPr sz="1200" b="1" i="0">
+              <a:rPr sz="1300" b="1" i="0">
                 <a:solidFill>
                   <a:srgbClr val="FFFFFF"/>
                 </a:solidFill>
@@ -8206,8 +8194,8 @@
         </p:nvSpPr>
         <p:spPr>
           <a:xfrm>
-            <a:off x="1325880" y="1179576"/>
-            <a:ext cx="10972800" cy="402336"/>
+            <a:off x="1353312" y="1216152"/>
+            <a:ext cx="10972800" cy="420624"/>
           </a:xfrm>
           <a:prstGeom prst="rect">
             <a:avLst/>
@@ -8232,7 +8220,7 @@
               </a:spcAft>
             </a:pPr>
             <a:r>
-              <a:rPr sz="1100" b="1" i="0" spc="120">
+              <a:rPr sz="1200" b="1" i="0" spc="120">
                 <a:solidFill>
                   <a:srgbClr val="7C3AED"/>
                 </a:solidFill>
@@ -8251,8 +8239,8 @@
         </p:nvSpPr>
         <p:spPr>
           <a:xfrm>
-            <a:off x="758952" y="1627632"/>
-            <a:ext cx="16770096" cy="640080"/>
+            <a:off x="758952" y="1719072"/>
+            <a:ext cx="16770096" cy="658368"/>
           </a:xfrm>
           <a:prstGeom prst="rect">
             <a:avLst/>
@@ -8277,7 +8265,7 @@
               </a:spcAft>
             </a:pPr>
             <a:r>
-              <a:rPr sz="3600" b="0" i="0">
+              <a:rPr sz="4000" b="0" i="0">
                 <a:solidFill>
                   <a:srgbClr val="1B1F26"/>
                 </a:solidFill>
@@ -8286,7 +8274,7 @@
               <a:t>Five </a:t>
             </a:r>
             <a:r>
-              <a:rPr sz="3600" b="0" i="0">
+              <a:rPr sz="4000" b="0" i="0">
                 <a:solidFill>
                   <a:srgbClr val="7C3AED"/>
                 </a:solidFill>
@@ -8295,7 +8283,7 @@
               <a:t>Aerchain agents</a:t>
             </a:r>
             <a:r>
-              <a:rPr sz="3600" b="0" i="0">
+              <a:rPr sz="4000" b="0" i="0">
                 <a:solidFill>
                   <a:srgbClr val="1B1F26"/>
                 </a:solidFill>
@@ -8314,8 +8302,8 @@
         </p:nvSpPr>
         <p:spPr>
           <a:xfrm>
-            <a:off x="758952" y="2286000"/>
-            <a:ext cx="16093440" cy="548640"/>
+            <a:off x="758952" y="2450592"/>
+            <a:ext cx="16093440" cy="502920"/>
           </a:xfrm>
           <a:prstGeom prst="rect">
             <a:avLst/>
@@ -8340,13 +8328,13 @@
               </a:spcAft>
             </a:pPr>
             <a:r>
-              <a:rPr sz="1300" b="0" i="0">
+              <a:rPr sz="1500" b="0" i="0">
                 <a:solidFill>
                   <a:srgbClr val="484E59"/>
                 </a:solidFill>
                 <a:latin typeface="Montserrat"/>
               </a:rPr>
-              <a:t>Each agent runs autonomously inside its station of the procure-to-pay flow, with human-in-the-loop guardrails configurable per category — all live in production.</a:t>
+              <a:t>Each agent runs autonomously inside its station of the procure-to-pay flow, with human-in-the-loop guardrails per category — all live in production.</a:t>
             </a:r>
           </a:p>
         </p:txBody>
@@ -8359,7 +8347,7 @@
         </p:nvCxnSpPr>
         <p:spPr>
           <a:xfrm>
-            <a:off x="758952" y="2944368"/>
+            <a:off x="758952" y="3054096"/>
             <a:ext cx="16770096" cy="0"/>
           </a:xfrm>
           <a:prstGeom prst="bentConnector3">
@@ -8395,12 +8383,12 @@
         </p:nvSpPr>
         <p:spPr>
           <a:xfrm>
-            <a:off x="758952" y="3200400"/>
-            <a:ext cx="3154680" cy="5623560"/>
+            <a:off x="758952" y="3246120"/>
+            <a:ext cx="3154680" cy="5806440"/>
           </a:xfrm>
           <a:prstGeom prst="roundRect">
             <a:avLst>
-              <a:gd name="adj" fmla="val 2318"/>
+              <a:gd name="adj" fmla="val 2898"/>
             </a:avLst>
           </a:prstGeom>
           <a:solidFill>
@@ -8443,8 +8431,8 @@
         </p:nvSpPr>
         <p:spPr>
           <a:xfrm>
-            <a:off x="758952" y="3200400"/>
-            <a:ext cx="3154680" cy="54864"/>
+            <a:off x="758952" y="3246120"/>
+            <a:ext cx="3154680" cy="64008"/>
           </a:xfrm>
           <a:prstGeom prst="rect">
             <a:avLst/>
@@ -8481,14 +8469,129 @@
       </p:sp>
       <p:sp>
         <p:nvSpPr>
-          <p:cNvPr id="20" name="TextBox 19"/>
-          <p:cNvSpPr txBox="1"/>
-          <p:nvPr/>
-        </p:nvSpPr>
-        <p:spPr>
-          <a:xfrm>
-            <a:off x="960120" y="3456432"/>
-            <a:ext cx="2752344" cy="182880"/>
+          <p:cNvPr id="20" name="Rounded Rectangle 19"/>
+          <p:cNvSpPr/>
+          <p:nvPr/>
+        </p:nvSpPr>
+        <p:spPr>
+          <a:xfrm>
+            <a:off x="978407" y="3538727"/>
+            <a:ext cx="603504" cy="603504"/>
+          </a:xfrm>
+          <a:prstGeom prst="roundRect">
+            <a:avLst>
+              <a:gd name="adj" fmla="val 18181"/>
+            </a:avLst>
+          </a:prstGeom>
+          <a:solidFill>
+            <a:srgbClr val="ECE3FF"/>
+          </a:solidFill>
+          <a:ln>
+            <a:noFill/>
+          </a:ln>
+          <a:effectLst/>
+        </p:spPr>
+        <p:style>
+          <a:lnRef idx="1">
+            <a:schemeClr val="accent1"/>
+          </a:lnRef>
+          <a:fillRef idx="3">
+            <a:schemeClr val="accent1"/>
+          </a:fillRef>
+          <a:effectRef idx="2">
+            <a:schemeClr val="accent1"/>
+          </a:effectRef>
+          <a:fontRef idx="minor">
+            <a:schemeClr val="lt1"/>
+          </a:fontRef>
+        </p:style>
+        <p:txBody>
+          <a:bodyPr rtlCol="0" anchor="ctr"/>
+          <a:lstStyle/>
+          <a:p>
+            <a:pPr algn="ctr"/>
+          </a:p>
+        </p:txBody>
+      </p:sp>
+      <p:pic>
+        <p:nvPicPr>
+          <p:cNvPr id="21" name="Picture 20" descr="icon_intake_purple.png"/>
+          <p:cNvPicPr>
+            <a:picLocks noChangeAspect="1"/>
+          </p:cNvPicPr>
+          <p:nvPr/>
+        </p:nvPicPr>
+        <p:blipFill>
+          <a:blip r:embed="rId5"/>
+          <a:stretch>
+            <a:fillRect/>
+          </a:stretch>
+        </p:blipFill>
+        <p:spPr>
+          <a:xfrm>
+            <a:off x="1097280" y="3657600"/>
+            <a:ext cx="365760" cy="365760"/>
+          </a:xfrm>
+          <a:prstGeom prst="rect">
+            <a:avLst/>
+          </a:prstGeom>
+        </p:spPr>
+      </p:pic>
+      <p:sp>
+        <p:nvSpPr>
+          <p:cNvPr id="22" name="TextBox 21"/>
+          <p:cNvSpPr txBox="1"/>
+          <p:nvPr/>
+        </p:nvSpPr>
+        <p:spPr>
+          <a:xfrm>
+            <a:off x="1691640" y="3557015"/>
+            <a:ext cx="2020824" cy="566928"/>
+          </a:xfrm>
+          <a:prstGeom prst="rect">
+            <a:avLst/>
+          </a:prstGeom>
+          <a:noFill/>
+        </p:spPr>
+        <p:txBody>
+          <a:bodyPr wrap="square" lIns="0" rIns="0" tIns="0" bIns="0" anchor="ctr">
+            <a:noAutofit/>
+          </a:bodyPr>
+          <a:lstStyle/>
+          <a:p>
+            <a:pPr algn="l">
+              <a:lnSpc>
+                <a:spcPct val="100000"/>
+              </a:lnSpc>
+              <a:spcBef>
+                <a:spcPts val="0"/>
+              </a:spcBef>
+              <a:spcAft>
+                <a:spcPts val="0"/>
+              </a:spcAft>
+            </a:pPr>
+            <a:r>
+              <a:rPr sz="1100" b="1" i="0" spc="100">
+                <a:solidFill>
+                  <a:srgbClr val="7C3AED"/>
+                </a:solidFill>
+                <a:latin typeface="Consolas"/>
+              </a:rPr>
+              <a:t>AGENT 01</a:t>
+            </a:r>
+          </a:p>
+        </p:txBody>
+      </p:sp>
+      <p:sp>
+        <p:nvSpPr>
+          <p:cNvPr id="23" name="TextBox 22"/>
+          <p:cNvSpPr txBox="1"/>
+          <p:nvPr/>
+        </p:nvSpPr>
+        <p:spPr>
+          <a:xfrm>
+            <a:off x="978407" y="4297679"/>
+            <a:ext cx="2715768" cy="457200"/>
           </a:xfrm>
           <a:prstGeom prst="rect">
             <a:avLst/>
@@ -8513,27 +8616,27 @@
               </a:spcAft>
             </a:pPr>
             <a:r>
-              <a:rPr sz="1000" b="1" i="0" spc="100">
-                <a:solidFill>
-                  <a:srgbClr val="7C3AED"/>
-                </a:solidFill>
-                <a:latin typeface="Consolas"/>
-              </a:rPr>
-              <a:t>AGENT 01</a:t>
-            </a:r>
-          </a:p>
-        </p:txBody>
-      </p:sp>
-      <p:sp>
-        <p:nvSpPr>
-          <p:cNvPr id="21" name="TextBox 20"/>
-          <p:cNvSpPr txBox="1"/>
-          <p:nvPr/>
-        </p:nvSpPr>
-        <p:spPr>
-          <a:xfrm>
-            <a:off x="960120" y="3675887"/>
-            <a:ext cx="2752344" cy="411480"/>
+              <a:rPr sz="2000" b="0" i="0">
+                <a:solidFill>
+                  <a:srgbClr val="1B1F26"/>
+                </a:solidFill>
+                <a:latin typeface="Montserrat Medium"/>
+              </a:rPr>
+              <a:t>Intake Agent</a:t>
+            </a:r>
+          </a:p>
+        </p:txBody>
+      </p:sp>
+      <p:sp>
+        <p:nvSpPr>
+          <p:cNvPr id="24" name="TextBox 23"/>
+          <p:cNvSpPr txBox="1"/>
+          <p:nvPr/>
+        </p:nvSpPr>
+        <p:spPr>
+          <a:xfrm>
+            <a:off x="978407" y="4818888"/>
+            <a:ext cx="2715768" cy="1097280"/>
           </a:xfrm>
           <a:prstGeom prst="rect">
             <a:avLst/>
@@ -8548,82 +8651,37 @@
           <a:p>
             <a:pPr algn="l">
               <a:lnSpc>
-                <a:spcPct val="100000"/>
-              </a:lnSpc>
-              <a:spcBef>
-                <a:spcPts val="0"/>
-              </a:spcBef>
-              <a:spcAft>
-                <a:spcPts val="0"/>
-              </a:spcAft>
-            </a:pPr>
-            <a:r>
-              <a:rPr sz="1700" b="0" i="0">
-                <a:solidFill>
-                  <a:srgbClr val="1B1F26"/>
-                </a:solidFill>
-                <a:latin typeface="Montserrat Medium"/>
-              </a:rPr>
-              <a:t>Intake Agent</a:t>
-            </a:r>
-          </a:p>
-        </p:txBody>
-      </p:sp>
-      <p:sp>
-        <p:nvSpPr>
-          <p:cNvPr id="22" name="TextBox 21"/>
-          <p:cNvSpPr txBox="1"/>
-          <p:nvPr/>
-        </p:nvSpPr>
-        <p:spPr>
-          <a:xfrm>
-            <a:off x="960120" y="4160520"/>
-            <a:ext cx="2752344" cy="1051560"/>
-          </a:xfrm>
-          <a:prstGeom prst="rect">
-            <a:avLst/>
-          </a:prstGeom>
-          <a:noFill/>
-        </p:spPr>
-        <p:txBody>
-          <a:bodyPr wrap="square" lIns="0" rIns="0" tIns="0" bIns="0" anchor="t">
-            <a:noAutofit/>
-          </a:bodyPr>
-          <a:lstStyle/>
-          <a:p>
-            <a:pPr algn="l">
-              <a:lnSpc>
-                <a:spcPct val="118000"/>
-              </a:lnSpc>
-              <a:spcBef>
-                <a:spcPts val="0"/>
-              </a:spcBef>
-              <a:spcAft>
-                <a:spcPts val="0"/>
-              </a:spcAft>
-            </a:pPr>
-            <a:r>
-              <a:rPr sz="1100" b="0" i="0">
+                <a:spcPct val="120000"/>
+              </a:lnSpc>
+              <a:spcBef>
+                <a:spcPts val="0"/>
+              </a:spcBef>
+              <a:spcAft>
+                <a:spcPts val="0"/>
+              </a:spcAft>
+            </a:pPr>
+            <a:r>
+              <a:rPr sz="1300" b="0" i="0">
                 <a:solidFill>
                   <a:srgbClr val="6A707B"/>
                 </a:solidFill>
                 <a:latin typeface="Montserrat"/>
               </a:rPr>
-              <a:t>Auto-ingests requests, cleans maverick descriptions, classifies &amp; enriches.</a:t>
+              <a:t>Auto-ingests requests, cleans maverick descriptions, classifies &amp; enriches spend.</a:t>
             </a:r>
           </a:p>
         </p:txBody>
       </p:sp>
       <p:cxnSp>
         <p:nvCxnSpPr>
-          <p:cNvPr id="23" name="Connector 22"/>
+          <p:cNvPr id="25" name="Connector 24"/>
           <p:cNvCxnSpPr/>
           <p:nvPr/>
         </p:nvCxnSpPr>
         <p:spPr>
           <a:xfrm>
-            <a:off x="960120" y="5349240"/>
-            <a:ext cx="2752344" cy="0"/>
+            <a:off x="978407" y="6035040"/>
+            <a:ext cx="2715769" cy="0"/>
           </a:xfrm>
           <a:prstGeom prst="bentConnector3">
             <a:avLst/>
@@ -8652,14 +8710,14 @@
       </p:cxnSp>
       <p:sp>
         <p:nvSpPr>
-          <p:cNvPr id="24" name="TextBox 23"/>
-          <p:cNvSpPr txBox="1"/>
-          <p:nvPr/>
-        </p:nvSpPr>
-        <p:spPr>
-          <a:xfrm>
-            <a:off x="960120" y="5486400"/>
-            <a:ext cx="2752344" cy="164592"/>
+          <p:cNvPr id="26" name="TextBox 25"/>
+          <p:cNvSpPr txBox="1"/>
+          <p:nvPr/>
+        </p:nvSpPr>
+        <p:spPr>
+          <a:xfrm>
+            <a:off x="978407" y="6190488"/>
+            <a:ext cx="2715768" cy="182880"/>
           </a:xfrm>
           <a:prstGeom prst="rect">
             <a:avLst/>
@@ -8684,7 +8742,7 @@
               </a:spcAft>
             </a:pPr>
             <a:r>
-              <a:rPr sz="900" b="1" i="0" spc="60">
+              <a:rPr sz="950" b="1" i="0" spc="60">
                 <a:solidFill>
                   <a:srgbClr val="6A707B"/>
                 </a:solidFill>
@@ -8697,14 +8755,14 @@
       </p:sp>
       <p:sp>
         <p:nvSpPr>
-          <p:cNvPr id="25" name="TextBox 24"/>
-          <p:cNvSpPr txBox="1"/>
-          <p:nvPr/>
-        </p:nvSpPr>
-        <p:spPr>
-          <a:xfrm>
-            <a:off x="960120" y="5715000"/>
-            <a:ext cx="2752344" cy="548640"/>
+          <p:cNvPr id="27" name="TextBox 26"/>
+          <p:cNvSpPr txBox="1"/>
+          <p:nvPr/>
+        </p:nvSpPr>
+        <p:spPr>
+          <a:xfrm>
+            <a:off x="978407" y="6446520"/>
+            <a:ext cx="2715768" cy="548640"/>
           </a:xfrm>
           <a:prstGeom prst="rect">
             <a:avLst/>
@@ -8729,7 +8787,7 @@
               </a:spcAft>
             </a:pPr>
             <a:r>
-              <a:rPr sz="1300" b="0" i="0">
+              <a:rPr sz="1500" b="0" i="0">
                 <a:solidFill>
                   <a:srgbClr val="7C3AED"/>
                 </a:solidFill>
@@ -8742,14 +8800,14 @@
       </p:sp>
       <p:sp>
         <p:nvSpPr>
-          <p:cNvPr id="26" name="TextBox 25"/>
-          <p:cNvSpPr txBox="1"/>
-          <p:nvPr/>
-        </p:nvSpPr>
-        <p:spPr>
-          <a:xfrm>
-            <a:off x="960120" y="6355080"/>
-            <a:ext cx="2752344" cy="1737360"/>
+          <p:cNvPr id="28" name="TextBox 27"/>
+          <p:cNvSpPr txBox="1"/>
+          <p:nvPr/>
+        </p:nvSpPr>
+        <p:spPr>
+          <a:xfrm>
+            <a:off x="978407" y="7104888"/>
+            <a:ext cx="2715768" cy="1371600"/>
           </a:xfrm>
           <a:prstGeom prst="rect">
             <a:avLst/>
@@ -8774,31 +8832,31 @@
               </a:spcAft>
             </a:pPr>
             <a:r>
-              <a:rPr sz="1050" b="0" i="0">
+              <a:rPr sz="1200" b="0" i="0">
                 <a:solidFill>
                   <a:srgbClr val="484E59"/>
                 </a:solidFill>
                 <a:latin typeface="Montserrat"/>
               </a:rPr>
-              <a:t>5 parallel sub-agents auto-tag GL, cost centre and taxonomy, and generate clarifying questions before the cycle starts.</a:t>
-            </a:r>
-          </a:p>
-        </p:txBody>
-      </p:sp>
-      <p:sp>
-        <p:nvSpPr>
-          <p:cNvPr id="27" name="Rounded Rectangle 26"/>
+              <a:t>Parallel sub-agents auto-tag GL, cost centre and taxonomy, and raise clarifying questions before the cycle starts.</a:t>
+            </a:r>
+          </a:p>
+        </p:txBody>
+      </p:sp>
+      <p:sp>
+        <p:nvSpPr>
+          <p:cNvPr id="29" name="Rounded Rectangle 28"/>
           <p:cNvSpPr/>
           <p:nvPr/>
         </p:nvSpPr>
         <p:spPr>
           <a:xfrm>
-            <a:off x="960120" y="8183879"/>
-            <a:ext cx="2752344" cy="292608"/>
+            <a:off x="978407" y="8531352"/>
+            <a:ext cx="2715768" cy="329184"/>
           </a:xfrm>
           <a:prstGeom prst="roundRect">
             <a:avLst>
-              <a:gd name="adj" fmla="val 12500"/>
+              <a:gd name="adj" fmla="val 13888"/>
             </a:avLst>
           </a:prstGeom>
           <a:solidFill>
@@ -8835,14 +8893,14 @@
       </p:sp>
       <p:sp>
         <p:nvSpPr>
-          <p:cNvPr id="28" name="TextBox 27"/>
-          <p:cNvSpPr txBox="1"/>
-          <p:nvPr/>
-        </p:nvSpPr>
-        <p:spPr>
-          <a:xfrm>
-            <a:off x="960120" y="8183879"/>
-            <a:ext cx="2752344" cy="292608"/>
+          <p:cNvPr id="30" name="TextBox 29"/>
+          <p:cNvSpPr txBox="1"/>
+          <p:nvPr/>
+        </p:nvSpPr>
+        <p:spPr>
+          <a:xfrm>
+            <a:off x="978407" y="8531352"/>
+            <a:ext cx="2715768" cy="329184"/>
           </a:xfrm>
           <a:prstGeom prst="rect">
             <a:avLst/>
@@ -8867,7 +8925,7 @@
               </a:spcAft>
             </a:pPr>
             <a:r>
-              <a:rPr sz="950" b="1" i="0" spc="80">
+              <a:rPr sz="1100" b="1" i="0" spc="80">
                 <a:solidFill>
                   <a:srgbClr val="146B3F"/>
                 </a:solidFill>
@@ -8880,18 +8938,18 @@
       </p:sp>
       <p:sp>
         <p:nvSpPr>
-          <p:cNvPr id="29" name="Rounded Rectangle 28"/>
+          <p:cNvPr id="31" name="Rounded Rectangle 30"/>
           <p:cNvSpPr/>
           <p:nvPr/>
         </p:nvSpPr>
         <p:spPr>
           <a:xfrm>
-            <a:off x="4069080" y="3200400"/>
-            <a:ext cx="3154680" cy="5623560"/>
+            <a:off x="4069080" y="3246120"/>
+            <a:ext cx="3154680" cy="5806440"/>
           </a:xfrm>
           <a:prstGeom prst="roundRect">
             <a:avLst>
-              <a:gd name="adj" fmla="val 2318"/>
+              <a:gd name="adj" fmla="val 2898"/>
             </a:avLst>
           </a:prstGeom>
           <a:solidFill>
@@ -8928,14 +8986,14 @@
       </p:sp>
       <p:sp>
         <p:nvSpPr>
-          <p:cNvPr id="30" name="Rectangle 29"/>
+          <p:cNvPr id="32" name="Rectangle 31"/>
           <p:cNvSpPr/>
           <p:nvPr/>
         </p:nvSpPr>
         <p:spPr>
           <a:xfrm>
-            <a:off x="4069080" y="3200400"/>
-            <a:ext cx="3154680" cy="54864"/>
+            <a:off x="4069080" y="3246120"/>
+            <a:ext cx="3154680" cy="64008"/>
           </a:xfrm>
           <a:prstGeom prst="rect">
             <a:avLst/>
@@ -8972,14 +9030,129 @@
       </p:sp>
       <p:sp>
         <p:nvSpPr>
-          <p:cNvPr id="31" name="TextBox 30"/>
-          <p:cNvSpPr txBox="1"/>
-          <p:nvPr/>
-        </p:nvSpPr>
-        <p:spPr>
-          <a:xfrm>
-            <a:off x="4270248" y="3456432"/>
-            <a:ext cx="2752344" cy="182880"/>
+          <p:cNvPr id="33" name="Rounded Rectangle 32"/>
+          <p:cNvSpPr/>
+          <p:nvPr/>
+        </p:nvSpPr>
+        <p:spPr>
+          <a:xfrm>
+            <a:off x="4288536" y="3538727"/>
+            <a:ext cx="603504" cy="603504"/>
+          </a:xfrm>
+          <a:prstGeom prst="roundRect">
+            <a:avLst>
+              <a:gd name="adj" fmla="val 18181"/>
+            </a:avLst>
+          </a:prstGeom>
+          <a:solidFill>
+            <a:srgbClr val="ECE3FF"/>
+          </a:solidFill>
+          <a:ln>
+            <a:noFill/>
+          </a:ln>
+          <a:effectLst/>
+        </p:spPr>
+        <p:style>
+          <a:lnRef idx="1">
+            <a:schemeClr val="accent1"/>
+          </a:lnRef>
+          <a:fillRef idx="3">
+            <a:schemeClr val="accent1"/>
+          </a:fillRef>
+          <a:effectRef idx="2">
+            <a:schemeClr val="accent1"/>
+          </a:effectRef>
+          <a:fontRef idx="minor">
+            <a:schemeClr val="lt1"/>
+          </a:fontRef>
+        </p:style>
+        <p:txBody>
+          <a:bodyPr rtlCol="0" anchor="ctr"/>
+          <a:lstStyle/>
+          <a:p>
+            <a:pPr algn="ctr"/>
+          </a:p>
+        </p:txBody>
+      </p:sp>
+      <p:pic>
+        <p:nvPicPr>
+          <p:cNvPr id="34" name="Picture 33" descr="icon_sourcing_purple.png"/>
+          <p:cNvPicPr>
+            <a:picLocks noChangeAspect="1"/>
+          </p:cNvPicPr>
+          <p:nvPr/>
+        </p:nvPicPr>
+        <p:blipFill>
+          <a:blip r:embed="rId6"/>
+          <a:stretch>
+            <a:fillRect/>
+          </a:stretch>
+        </p:blipFill>
+        <p:spPr>
+          <a:xfrm>
+            <a:off x="4407408" y="3657600"/>
+            <a:ext cx="365760" cy="365760"/>
+          </a:xfrm>
+          <a:prstGeom prst="rect">
+            <a:avLst/>
+          </a:prstGeom>
+        </p:spPr>
+      </p:pic>
+      <p:sp>
+        <p:nvSpPr>
+          <p:cNvPr id="35" name="TextBox 34"/>
+          <p:cNvSpPr txBox="1"/>
+          <p:nvPr/>
+        </p:nvSpPr>
+        <p:spPr>
+          <a:xfrm>
+            <a:off x="5001768" y="3557015"/>
+            <a:ext cx="2020824" cy="566928"/>
+          </a:xfrm>
+          <a:prstGeom prst="rect">
+            <a:avLst/>
+          </a:prstGeom>
+          <a:noFill/>
+        </p:spPr>
+        <p:txBody>
+          <a:bodyPr wrap="square" lIns="0" rIns="0" tIns="0" bIns="0" anchor="ctr">
+            <a:noAutofit/>
+          </a:bodyPr>
+          <a:lstStyle/>
+          <a:p>
+            <a:pPr algn="l">
+              <a:lnSpc>
+                <a:spcPct val="100000"/>
+              </a:lnSpc>
+              <a:spcBef>
+                <a:spcPts val="0"/>
+              </a:spcBef>
+              <a:spcAft>
+                <a:spcPts val="0"/>
+              </a:spcAft>
+            </a:pPr>
+            <a:r>
+              <a:rPr sz="1100" b="1" i="0" spc="100">
+                <a:solidFill>
+                  <a:srgbClr val="7C3AED"/>
+                </a:solidFill>
+                <a:latin typeface="Consolas"/>
+              </a:rPr>
+              <a:t>AGENT 02</a:t>
+            </a:r>
+          </a:p>
+        </p:txBody>
+      </p:sp>
+      <p:sp>
+        <p:nvSpPr>
+          <p:cNvPr id="36" name="TextBox 35"/>
+          <p:cNvSpPr txBox="1"/>
+          <p:nvPr/>
+        </p:nvSpPr>
+        <p:spPr>
+          <a:xfrm>
+            <a:off x="4288536" y="4297679"/>
+            <a:ext cx="2715768" cy="457200"/>
           </a:xfrm>
           <a:prstGeom prst="rect">
             <a:avLst/>
@@ -9004,27 +9177,27 @@
               </a:spcAft>
             </a:pPr>
             <a:r>
-              <a:rPr sz="1000" b="1" i="0" spc="100">
-                <a:solidFill>
-                  <a:srgbClr val="7C3AED"/>
-                </a:solidFill>
-                <a:latin typeface="Consolas"/>
-              </a:rPr>
-              <a:t>AGENT 02</a:t>
-            </a:r>
-          </a:p>
-        </p:txBody>
-      </p:sp>
-      <p:sp>
-        <p:nvSpPr>
-          <p:cNvPr id="32" name="TextBox 31"/>
-          <p:cNvSpPr txBox="1"/>
-          <p:nvPr/>
-        </p:nvSpPr>
-        <p:spPr>
-          <a:xfrm>
-            <a:off x="4270248" y="3675887"/>
-            <a:ext cx="2752344" cy="411480"/>
+              <a:rPr sz="2000" b="0" i="0">
+                <a:solidFill>
+                  <a:srgbClr val="1B1F26"/>
+                </a:solidFill>
+                <a:latin typeface="Montserrat Medium"/>
+              </a:rPr>
+              <a:t>Sourcing Agent</a:t>
+            </a:r>
+          </a:p>
+        </p:txBody>
+      </p:sp>
+      <p:sp>
+        <p:nvSpPr>
+          <p:cNvPr id="37" name="TextBox 36"/>
+          <p:cNvSpPr txBox="1"/>
+          <p:nvPr/>
+        </p:nvSpPr>
+        <p:spPr>
+          <a:xfrm>
+            <a:off x="4288536" y="4818888"/>
+            <a:ext cx="2715768" cy="1097280"/>
           </a:xfrm>
           <a:prstGeom prst="rect">
             <a:avLst/>
@@ -9039,62 +9212,17 @@
           <a:p>
             <a:pPr algn="l">
               <a:lnSpc>
-                <a:spcPct val="100000"/>
-              </a:lnSpc>
-              <a:spcBef>
-                <a:spcPts val="0"/>
-              </a:spcBef>
-              <a:spcAft>
-                <a:spcPts val="0"/>
-              </a:spcAft>
-            </a:pPr>
-            <a:r>
-              <a:rPr sz="1700" b="0" i="0">
-                <a:solidFill>
-                  <a:srgbClr val="1B1F26"/>
-                </a:solidFill>
-                <a:latin typeface="Montserrat Medium"/>
-              </a:rPr>
-              <a:t>Sourcing Agent</a:t>
-            </a:r>
-          </a:p>
-        </p:txBody>
-      </p:sp>
-      <p:sp>
-        <p:nvSpPr>
-          <p:cNvPr id="33" name="TextBox 32"/>
-          <p:cNvSpPr txBox="1"/>
-          <p:nvPr/>
-        </p:nvSpPr>
-        <p:spPr>
-          <a:xfrm>
-            <a:off x="4270248" y="4160520"/>
-            <a:ext cx="2752344" cy="1051560"/>
-          </a:xfrm>
-          <a:prstGeom prst="rect">
-            <a:avLst/>
-          </a:prstGeom>
-          <a:noFill/>
-        </p:spPr>
-        <p:txBody>
-          <a:bodyPr wrap="square" lIns="0" rIns="0" tIns="0" bIns="0" anchor="t">
-            <a:noAutofit/>
-          </a:bodyPr>
-          <a:lstStyle/>
-          <a:p>
-            <a:pPr algn="l">
-              <a:lnSpc>
-                <a:spcPct val="118000"/>
-              </a:lnSpc>
-              <a:spcBef>
-                <a:spcPts val="0"/>
-              </a:spcBef>
-              <a:spcAft>
-                <a:spcPts val="0"/>
-              </a:spcAft>
-            </a:pPr>
-            <a:r>
-              <a:rPr sz="1100" b="0" i="0">
+                <a:spcPct val="120000"/>
+              </a:lnSpc>
+              <a:spcBef>
+                <a:spcPts val="0"/>
+              </a:spcBef>
+              <a:spcAft>
+                <a:spcPts val="0"/>
+              </a:spcAft>
+            </a:pPr>
+            <a:r>
+              <a:rPr sz="1300" b="0" i="0">
                 <a:solidFill>
                   <a:srgbClr val="6A707B"/>
                 </a:solidFill>
@@ -9107,14 +9235,14 @@
       </p:sp>
       <p:cxnSp>
         <p:nvCxnSpPr>
-          <p:cNvPr id="34" name="Connector 33"/>
+          <p:cNvPr id="38" name="Connector 37"/>
           <p:cNvCxnSpPr/>
           <p:nvPr/>
         </p:nvCxnSpPr>
         <p:spPr>
           <a:xfrm>
-            <a:off x="4270248" y="5349240"/>
-            <a:ext cx="2752344" cy="0"/>
+            <a:off x="4288536" y="6035040"/>
+            <a:ext cx="2715768" cy="0"/>
           </a:xfrm>
           <a:prstGeom prst="bentConnector3">
             <a:avLst/>
@@ -9143,14 +9271,14 @@
       </p:cxnSp>
       <p:sp>
         <p:nvSpPr>
-          <p:cNvPr id="35" name="TextBox 34"/>
-          <p:cNvSpPr txBox="1"/>
-          <p:nvPr/>
-        </p:nvSpPr>
-        <p:spPr>
-          <a:xfrm>
-            <a:off x="4270248" y="5486400"/>
-            <a:ext cx="2752344" cy="164592"/>
+          <p:cNvPr id="39" name="TextBox 38"/>
+          <p:cNvSpPr txBox="1"/>
+          <p:nvPr/>
+        </p:nvSpPr>
+        <p:spPr>
+          <a:xfrm>
+            <a:off x="4288536" y="6190488"/>
+            <a:ext cx="2715768" cy="182880"/>
           </a:xfrm>
           <a:prstGeom prst="rect">
             <a:avLst/>
@@ -9175,7 +9303,7 @@
               </a:spcAft>
             </a:pPr>
             <a:r>
-              <a:rPr sz="900" b="1" i="0" spc="60">
+              <a:rPr sz="950" b="1" i="0" spc="60">
                 <a:solidFill>
                   <a:srgbClr val="6A707B"/>
                 </a:solidFill>
@@ -9188,14 +9316,14 @@
       </p:sp>
       <p:sp>
         <p:nvSpPr>
-          <p:cNvPr id="36" name="TextBox 35"/>
-          <p:cNvSpPr txBox="1"/>
-          <p:nvPr/>
-        </p:nvSpPr>
-        <p:spPr>
-          <a:xfrm>
-            <a:off x="4270248" y="5715000"/>
-            <a:ext cx="2752344" cy="548640"/>
+          <p:cNvPr id="40" name="TextBox 39"/>
+          <p:cNvSpPr txBox="1"/>
+          <p:nvPr/>
+        </p:nvSpPr>
+        <p:spPr>
+          <a:xfrm>
+            <a:off x="4288536" y="6446520"/>
+            <a:ext cx="2715768" cy="548640"/>
           </a:xfrm>
           <a:prstGeom prst="rect">
             <a:avLst/>
@@ -9220,7 +9348,7 @@
               </a:spcAft>
             </a:pPr>
             <a:r>
-              <a:rPr sz="1300" b="0" i="0">
+              <a:rPr sz="1500" b="0" i="0">
                 <a:solidFill>
                   <a:srgbClr val="7C3AED"/>
                 </a:solidFill>
@@ -9233,14 +9361,14 @@
       </p:sp>
       <p:sp>
         <p:nvSpPr>
-          <p:cNvPr id="37" name="TextBox 36"/>
-          <p:cNvSpPr txBox="1"/>
-          <p:nvPr/>
-        </p:nvSpPr>
-        <p:spPr>
-          <a:xfrm>
-            <a:off x="4270248" y="6355080"/>
-            <a:ext cx="2752344" cy="1737360"/>
+          <p:cNvPr id="41" name="TextBox 40"/>
+          <p:cNvSpPr txBox="1"/>
+          <p:nvPr/>
+        </p:nvSpPr>
+        <p:spPr>
+          <a:xfrm>
+            <a:off x="4288536" y="7104888"/>
+            <a:ext cx="2715768" cy="1371600"/>
           </a:xfrm>
           <a:prstGeom prst="rect">
             <a:avLst/>
@@ -9265,7 +9393,7 @@
               </a:spcAft>
             </a:pPr>
             <a:r>
-              <a:rPr sz="1050" b="0" i="0">
+              <a:rPr sz="1200" b="0" i="0">
                 <a:solidFill>
                   <a:srgbClr val="484E59"/>
                 </a:solidFill>
@@ -9278,18 +9406,18 @@
       </p:sp>
       <p:sp>
         <p:nvSpPr>
-          <p:cNvPr id="38" name="Rounded Rectangle 37"/>
+          <p:cNvPr id="42" name="Rounded Rectangle 41"/>
           <p:cNvSpPr/>
           <p:nvPr/>
         </p:nvSpPr>
         <p:spPr>
           <a:xfrm>
-            <a:off x="4270248" y="8183879"/>
-            <a:ext cx="2752344" cy="292608"/>
+            <a:off x="4288536" y="8531352"/>
+            <a:ext cx="2715768" cy="329184"/>
           </a:xfrm>
           <a:prstGeom prst="roundRect">
             <a:avLst>
-              <a:gd name="adj" fmla="val 12500"/>
+              <a:gd name="adj" fmla="val 13888"/>
             </a:avLst>
           </a:prstGeom>
           <a:solidFill>
@@ -9326,14 +9454,14 @@
       </p:sp>
       <p:sp>
         <p:nvSpPr>
-          <p:cNvPr id="39" name="TextBox 38"/>
-          <p:cNvSpPr txBox="1"/>
-          <p:nvPr/>
-        </p:nvSpPr>
-        <p:spPr>
-          <a:xfrm>
-            <a:off x="4270248" y="8183879"/>
-            <a:ext cx="2752344" cy="292608"/>
+          <p:cNvPr id="43" name="TextBox 42"/>
+          <p:cNvSpPr txBox="1"/>
+          <p:nvPr/>
+        </p:nvSpPr>
+        <p:spPr>
+          <a:xfrm>
+            <a:off x="4288536" y="8531352"/>
+            <a:ext cx="2715768" cy="329184"/>
           </a:xfrm>
           <a:prstGeom prst="rect">
             <a:avLst/>
@@ -9358,7 +9486,7 @@
               </a:spcAft>
             </a:pPr>
             <a:r>
-              <a:rPr sz="950" b="1" i="0" spc="80">
+              <a:rPr sz="1100" b="1" i="0" spc="80">
                 <a:solidFill>
                   <a:srgbClr val="146B3F"/>
                 </a:solidFill>
@@ -9371,18 +9499,18 @@
       </p:sp>
       <p:sp>
         <p:nvSpPr>
-          <p:cNvPr id="40" name="Rounded Rectangle 39"/>
+          <p:cNvPr id="44" name="Rounded Rectangle 43"/>
           <p:cNvSpPr/>
           <p:nvPr/>
         </p:nvSpPr>
         <p:spPr>
           <a:xfrm>
-            <a:off x="7379208" y="3200400"/>
-            <a:ext cx="3154680" cy="5623560"/>
+            <a:off x="7379208" y="3246120"/>
+            <a:ext cx="3154680" cy="5806440"/>
           </a:xfrm>
           <a:prstGeom prst="roundRect">
             <a:avLst>
-              <a:gd name="adj" fmla="val 2318"/>
+              <a:gd name="adj" fmla="val 2898"/>
             </a:avLst>
           </a:prstGeom>
           <a:solidFill>
@@ -9419,14 +9547,14 @@
       </p:sp>
       <p:sp>
         <p:nvSpPr>
-          <p:cNvPr id="41" name="Rectangle 40"/>
+          <p:cNvPr id="45" name="Rectangle 44"/>
           <p:cNvSpPr/>
           <p:nvPr/>
         </p:nvSpPr>
         <p:spPr>
           <a:xfrm>
-            <a:off x="7379208" y="3200400"/>
-            <a:ext cx="3154680" cy="54864"/>
+            <a:off x="7379208" y="3246120"/>
+            <a:ext cx="3154680" cy="64008"/>
           </a:xfrm>
           <a:prstGeom prst="rect">
             <a:avLst/>
@@ -9463,14 +9591,129 @@
       </p:sp>
       <p:sp>
         <p:nvSpPr>
-          <p:cNvPr id="42" name="TextBox 41"/>
-          <p:cNvSpPr txBox="1"/>
-          <p:nvPr/>
-        </p:nvSpPr>
-        <p:spPr>
-          <a:xfrm>
-            <a:off x="7580376" y="3456432"/>
-            <a:ext cx="2752344" cy="182880"/>
+          <p:cNvPr id="46" name="Rounded Rectangle 45"/>
+          <p:cNvSpPr/>
+          <p:nvPr/>
+        </p:nvSpPr>
+        <p:spPr>
+          <a:xfrm>
+            <a:off x="7598664" y="3538727"/>
+            <a:ext cx="603504" cy="603504"/>
+          </a:xfrm>
+          <a:prstGeom prst="roundRect">
+            <a:avLst>
+              <a:gd name="adj" fmla="val 18181"/>
+            </a:avLst>
+          </a:prstGeom>
+          <a:solidFill>
+            <a:srgbClr val="ECE3FF"/>
+          </a:solidFill>
+          <a:ln>
+            <a:noFill/>
+          </a:ln>
+          <a:effectLst/>
+        </p:spPr>
+        <p:style>
+          <a:lnRef idx="1">
+            <a:schemeClr val="accent1"/>
+          </a:lnRef>
+          <a:fillRef idx="3">
+            <a:schemeClr val="accent1"/>
+          </a:fillRef>
+          <a:effectRef idx="2">
+            <a:schemeClr val="accent1"/>
+          </a:effectRef>
+          <a:fontRef idx="minor">
+            <a:schemeClr val="lt1"/>
+          </a:fontRef>
+        </p:style>
+        <p:txBody>
+          <a:bodyPr rtlCol="0" anchor="ctr"/>
+          <a:lstStyle/>
+          <a:p>
+            <a:pPr algn="ctr"/>
+          </a:p>
+        </p:txBody>
+      </p:sp>
+      <p:pic>
+        <p:nvPicPr>
+          <p:cNvPr id="47" name="Picture 46" descr="icon_negotiation_purple.png"/>
+          <p:cNvPicPr>
+            <a:picLocks noChangeAspect="1"/>
+          </p:cNvPicPr>
+          <p:nvPr/>
+        </p:nvPicPr>
+        <p:blipFill>
+          <a:blip r:embed="rId7"/>
+          <a:stretch>
+            <a:fillRect/>
+          </a:stretch>
+        </p:blipFill>
+        <p:spPr>
+          <a:xfrm>
+            <a:off x="7717536" y="3657600"/>
+            <a:ext cx="365760" cy="365760"/>
+          </a:xfrm>
+          <a:prstGeom prst="rect">
+            <a:avLst/>
+          </a:prstGeom>
+        </p:spPr>
+      </p:pic>
+      <p:sp>
+        <p:nvSpPr>
+          <p:cNvPr id="48" name="TextBox 47"/>
+          <p:cNvSpPr txBox="1"/>
+          <p:nvPr/>
+        </p:nvSpPr>
+        <p:spPr>
+          <a:xfrm>
+            <a:off x="8311896" y="3557015"/>
+            <a:ext cx="2020824" cy="566928"/>
+          </a:xfrm>
+          <a:prstGeom prst="rect">
+            <a:avLst/>
+          </a:prstGeom>
+          <a:noFill/>
+        </p:spPr>
+        <p:txBody>
+          <a:bodyPr wrap="square" lIns="0" rIns="0" tIns="0" bIns="0" anchor="ctr">
+            <a:noAutofit/>
+          </a:bodyPr>
+          <a:lstStyle/>
+          <a:p>
+            <a:pPr algn="l">
+              <a:lnSpc>
+                <a:spcPct val="100000"/>
+              </a:lnSpc>
+              <a:spcBef>
+                <a:spcPts val="0"/>
+              </a:spcBef>
+              <a:spcAft>
+                <a:spcPts val="0"/>
+              </a:spcAft>
+            </a:pPr>
+            <a:r>
+              <a:rPr sz="1100" b="1" i="0" spc="100">
+                <a:solidFill>
+                  <a:srgbClr val="7C3AED"/>
+                </a:solidFill>
+                <a:latin typeface="Consolas"/>
+              </a:rPr>
+              <a:t>AGENT 03</a:t>
+            </a:r>
+          </a:p>
+        </p:txBody>
+      </p:sp>
+      <p:sp>
+        <p:nvSpPr>
+          <p:cNvPr id="49" name="TextBox 48"/>
+          <p:cNvSpPr txBox="1"/>
+          <p:nvPr/>
+        </p:nvSpPr>
+        <p:spPr>
+          <a:xfrm>
+            <a:off x="7598664" y="4297679"/>
+            <a:ext cx="2715768" cy="457200"/>
           </a:xfrm>
           <a:prstGeom prst="rect">
             <a:avLst/>
@@ -9495,27 +9738,27 @@
               </a:spcAft>
             </a:pPr>
             <a:r>
-              <a:rPr sz="1000" b="1" i="0" spc="100">
-                <a:solidFill>
-                  <a:srgbClr val="7C3AED"/>
-                </a:solidFill>
-                <a:latin typeface="Consolas"/>
-              </a:rPr>
-              <a:t>AGENT 03</a:t>
-            </a:r>
-          </a:p>
-        </p:txBody>
-      </p:sp>
-      <p:sp>
-        <p:nvSpPr>
-          <p:cNvPr id="43" name="TextBox 42"/>
-          <p:cNvSpPr txBox="1"/>
-          <p:nvPr/>
-        </p:nvSpPr>
-        <p:spPr>
-          <a:xfrm>
-            <a:off x="7580376" y="3675887"/>
-            <a:ext cx="2752344" cy="411480"/>
+              <a:rPr sz="2000" b="0" i="0">
+                <a:solidFill>
+                  <a:srgbClr val="1B1F26"/>
+                </a:solidFill>
+                <a:latin typeface="Montserrat Medium"/>
+              </a:rPr>
+              <a:t>Negotiation Agent</a:t>
+            </a:r>
+          </a:p>
+        </p:txBody>
+      </p:sp>
+      <p:sp>
+        <p:nvSpPr>
+          <p:cNvPr id="50" name="TextBox 49"/>
+          <p:cNvSpPr txBox="1"/>
+          <p:nvPr/>
+        </p:nvSpPr>
+        <p:spPr>
+          <a:xfrm>
+            <a:off x="7598664" y="4818888"/>
+            <a:ext cx="2715768" cy="1097280"/>
           </a:xfrm>
           <a:prstGeom prst="rect">
             <a:avLst/>
@@ -9530,82 +9773,37 @@
           <a:p>
             <a:pPr algn="l">
               <a:lnSpc>
-                <a:spcPct val="100000"/>
-              </a:lnSpc>
-              <a:spcBef>
-                <a:spcPts val="0"/>
-              </a:spcBef>
-              <a:spcAft>
-                <a:spcPts val="0"/>
-              </a:spcAft>
-            </a:pPr>
-            <a:r>
-              <a:rPr sz="1700" b="0" i="0">
-                <a:solidFill>
-                  <a:srgbClr val="1B1F26"/>
-                </a:solidFill>
-                <a:latin typeface="Montserrat Medium"/>
-              </a:rPr>
-              <a:t>Negotiation Agent</a:t>
-            </a:r>
-          </a:p>
-        </p:txBody>
-      </p:sp>
-      <p:sp>
-        <p:nvSpPr>
-          <p:cNvPr id="44" name="TextBox 43"/>
-          <p:cNvSpPr txBox="1"/>
-          <p:nvPr/>
-        </p:nvSpPr>
-        <p:spPr>
-          <a:xfrm>
-            <a:off x="7580376" y="4160520"/>
-            <a:ext cx="2752344" cy="1051560"/>
-          </a:xfrm>
-          <a:prstGeom prst="rect">
-            <a:avLst/>
-          </a:prstGeom>
-          <a:noFill/>
-        </p:spPr>
-        <p:txBody>
-          <a:bodyPr wrap="square" lIns="0" rIns="0" tIns="0" bIns="0" anchor="t">
-            <a:noAutofit/>
-          </a:bodyPr>
-          <a:lstStyle/>
-          <a:p>
-            <a:pPr algn="l">
-              <a:lnSpc>
-                <a:spcPct val="118000"/>
-              </a:lnSpc>
-              <a:spcBef>
-                <a:spcPts val="0"/>
-              </a:spcBef>
-              <a:spcAft>
-                <a:spcPts val="0"/>
-              </a:spcAft>
-            </a:pPr>
-            <a:r>
-              <a:rPr sz="1100" b="0" i="0">
+                <a:spcPct val="120000"/>
+              </a:lnSpc>
+              <a:spcBef>
+                <a:spcPts val="0"/>
+              </a:spcBef>
+              <a:spcAft>
+                <a:spcPts val="0"/>
+              </a:spcAft>
+            </a:pPr>
+            <a:r>
+              <a:rPr sz="1300" b="0" i="0">
                 <a:solidFill>
                   <a:srgbClr val="6A707B"/>
                 </a:solidFill>
                 <a:latin typeface="Montserrat"/>
               </a:rPr>
-              <a:t>Multi-parameter, asynchronous negotiations across price, terms &amp; lead time.</a:t>
+              <a:t>Multi-parameter, asynchronous negotiation across price, terms &amp; lead time.</a:t>
             </a:r>
           </a:p>
         </p:txBody>
       </p:sp>
       <p:cxnSp>
         <p:nvCxnSpPr>
-          <p:cNvPr id="45" name="Connector 44"/>
+          <p:cNvPr id="51" name="Connector 50"/>
           <p:cNvCxnSpPr/>
           <p:nvPr/>
         </p:nvCxnSpPr>
         <p:spPr>
           <a:xfrm>
-            <a:off x="7580376" y="5349240"/>
-            <a:ext cx="2752344" cy="0"/>
+            <a:off x="7598664" y="6035040"/>
+            <a:ext cx="2715768" cy="0"/>
           </a:xfrm>
           <a:prstGeom prst="bentConnector3">
             <a:avLst/>
@@ -9634,14 +9832,14 @@
       </p:cxnSp>
       <p:sp>
         <p:nvSpPr>
-          <p:cNvPr id="46" name="TextBox 45"/>
-          <p:cNvSpPr txBox="1"/>
-          <p:nvPr/>
-        </p:nvSpPr>
-        <p:spPr>
-          <a:xfrm>
-            <a:off x="7580376" y="5486400"/>
-            <a:ext cx="2752344" cy="164592"/>
+          <p:cNvPr id="52" name="TextBox 51"/>
+          <p:cNvSpPr txBox="1"/>
+          <p:nvPr/>
+        </p:nvSpPr>
+        <p:spPr>
+          <a:xfrm>
+            <a:off x="7598664" y="6190488"/>
+            <a:ext cx="2715768" cy="182880"/>
           </a:xfrm>
           <a:prstGeom prst="rect">
             <a:avLst/>
@@ -9666,7 +9864,7 @@
               </a:spcAft>
             </a:pPr>
             <a:r>
-              <a:rPr sz="900" b="1" i="0" spc="60">
+              <a:rPr sz="950" b="1" i="0" spc="60">
                 <a:solidFill>
                   <a:srgbClr val="6A707B"/>
                 </a:solidFill>
@@ -9679,14 +9877,14 @@
       </p:sp>
       <p:sp>
         <p:nvSpPr>
-          <p:cNvPr id="47" name="TextBox 46"/>
-          <p:cNvSpPr txBox="1"/>
-          <p:nvPr/>
-        </p:nvSpPr>
-        <p:spPr>
-          <a:xfrm>
-            <a:off x="7580376" y="5715000"/>
-            <a:ext cx="2752344" cy="548640"/>
+          <p:cNvPr id="53" name="TextBox 52"/>
+          <p:cNvSpPr txBox="1"/>
+          <p:nvPr/>
+        </p:nvSpPr>
+        <p:spPr>
+          <a:xfrm>
+            <a:off x="7598664" y="6446520"/>
+            <a:ext cx="2715768" cy="548640"/>
           </a:xfrm>
           <a:prstGeom prst="rect">
             <a:avLst/>
@@ -9711,7 +9909,7 @@
               </a:spcAft>
             </a:pPr>
             <a:r>
-              <a:rPr sz="1300" b="0" i="0">
+              <a:rPr sz="1500" b="0" i="0">
                 <a:solidFill>
                   <a:srgbClr val="7C3AED"/>
                 </a:solidFill>
@@ -9724,14 +9922,14 @@
       </p:sp>
       <p:sp>
         <p:nvSpPr>
-          <p:cNvPr id="48" name="TextBox 47"/>
-          <p:cNvSpPr txBox="1"/>
-          <p:nvPr/>
-        </p:nvSpPr>
-        <p:spPr>
-          <a:xfrm>
-            <a:off x="7580376" y="6355080"/>
-            <a:ext cx="2752344" cy="1737360"/>
+          <p:cNvPr id="54" name="TextBox 53"/>
+          <p:cNvSpPr txBox="1"/>
+          <p:nvPr/>
+        </p:nvSpPr>
+        <p:spPr>
+          <a:xfrm>
+            <a:off x="7598664" y="7104888"/>
+            <a:ext cx="2715768" cy="1371600"/>
           </a:xfrm>
           <a:prstGeom prst="rect">
             <a:avLst/>
@@ -9756,7 +9954,7 @@
               </a:spcAft>
             </a:pPr>
             <a:r>
-              <a:rPr sz="1050" b="0" i="0">
+              <a:rPr sz="1200" b="0" i="0">
                 <a:solidFill>
                   <a:srgbClr val="484E59"/>
                 </a:solidFill>
@@ -9769,18 +9967,18 @@
       </p:sp>
       <p:sp>
         <p:nvSpPr>
-          <p:cNvPr id="49" name="Rounded Rectangle 48"/>
+          <p:cNvPr id="55" name="Rounded Rectangle 54"/>
           <p:cNvSpPr/>
           <p:nvPr/>
         </p:nvSpPr>
         <p:spPr>
           <a:xfrm>
-            <a:off x="7580376" y="8183879"/>
-            <a:ext cx="2752344" cy="292608"/>
+            <a:off x="7598664" y="8531352"/>
+            <a:ext cx="2715768" cy="329184"/>
           </a:xfrm>
           <a:prstGeom prst="roundRect">
             <a:avLst>
-              <a:gd name="adj" fmla="val 12500"/>
+              <a:gd name="adj" fmla="val 13888"/>
             </a:avLst>
           </a:prstGeom>
           <a:solidFill>
@@ -9817,14 +10015,14 @@
       </p:sp>
       <p:sp>
         <p:nvSpPr>
-          <p:cNvPr id="50" name="TextBox 49"/>
-          <p:cNvSpPr txBox="1"/>
-          <p:nvPr/>
-        </p:nvSpPr>
-        <p:spPr>
-          <a:xfrm>
-            <a:off x="7580376" y="8183879"/>
-            <a:ext cx="2752344" cy="292608"/>
+          <p:cNvPr id="56" name="TextBox 55"/>
+          <p:cNvSpPr txBox="1"/>
+          <p:nvPr/>
+        </p:nvSpPr>
+        <p:spPr>
+          <a:xfrm>
+            <a:off x="7598664" y="8531352"/>
+            <a:ext cx="2715768" cy="329184"/>
           </a:xfrm>
           <a:prstGeom prst="rect">
             <a:avLst/>
@@ -9849,7 +10047,7 @@
               </a:spcAft>
             </a:pPr>
             <a:r>
-              <a:rPr sz="950" b="1" i="0" spc="80">
+              <a:rPr sz="1100" b="1" i="0" spc="80">
                 <a:solidFill>
                   <a:srgbClr val="146B3F"/>
                 </a:solidFill>
@@ -9862,18 +10060,18 @@
       </p:sp>
       <p:sp>
         <p:nvSpPr>
-          <p:cNvPr id="51" name="Rounded Rectangle 50"/>
+          <p:cNvPr id="57" name="Rounded Rectangle 56"/>
           <p:cNvSpPr/>
           <p:nvPr/>
         </p:nvSpPr>
         <p:spPr>
           <a:xfrm>
-            <a:off x="10689336" y="3200400"/>
-            <a:ext cx="3154680" cy="5623560"/>
+            <a:off x="10689336" y="3246120"/>
+            <a:ext cx="3154680" cy="5806440"/>
           </a:xfrm>
           <a:prstGeom prst="roundRect">
             <a:avLst>
-              <a:gd name="adj" fmla="val 2318"/>
+              <a:gd name="adj" fmla="val 2898"/>
             </a:avLst>
           </a:prstGeom>
           <a:solidFill>
@@ -9910,14 +10108,14 @@
       </p:sp>
       <p:sp>
         <p:nvSpPr>
-          <p:cNvPr id="52" name="Rectangle 51"/>
+          <p:cNvPr id="58" name="Rectangle 57"/>
           <p:cNvSpPr/>
           <p:nvPr/>
         </p:nvSpPr>
         <p:spPr>
           <a:xfrm>
-            <a:off x="10689336" y="3200400"/>
-            <a:ext cx="3154680" cy="54864"/>
+            <a:off x="10689336" y="3246120"/>
+            <a:ext cx="3154680" cy="64008"/>
           </a:xfrm>
           <a:prstGeom prst="rect">
             <a:avLst/>
@@ -9954,14 +10152,129 @@
       </p:sp>
       <p:sp>
         <p:nvSpPr>
-          <p:cNvPr id="53" name="TextBox 52"/>
-          <p:cNvSpPr txBox="1"/>
-          <p:nvPr/>
-        </p:nvSpPr>
-        <p:spPr>
-          <a:xfrm>
-            <a:off x="10890504" y="3456432"/>
-            <a:ext cx="2752344" cy="182880"/>
+          <p:cNvPr id="59" name="Rounded Rectangle 58"/>
+          <p:cNvSpPr/>
+          <p:nvPr/>
+        </p:nvSpPr>
+        <p:spPr>
+          <a:xfrm>
+            <a:off x="10908792" y="3538727"/>
+            <a:ext cx="603504" cy="603504"/>
+          </a:xfrm>
+          <a:prstGeom prst="roundRect">
+            <a:avLst>
+              <a:gd name="adj" fmla="val 18181"/>
+            </a:avLst>
+          </a:prstGeom>
+          <a:solidFill>
+            <a:srgbClr val="ECE3FF"/>
+          </a:solidFill>
+          <a:ln>
+            <a:noFill/>
+          </a:ln>
+          <a:effectLst/>
+        </p:spPr>
+        <p:style>
+          <a:lnRef idx="1">
+            <a:schemeClr val="accent1"/>
+          </a:lnRef>
+          <a:fillRef idx="3">
+            <a:schemeClr val="accent1"/>
+          </a:fillRef>
+          <a:effectRef idx="2">
+            <a:schemeClr val="accent1"/>
+          </a:effectRef>
+          <a:fontRef idx="minor">
+            <a:schemeClr val="lt1"/>
+          </a:fontRef>
+        </p:style>
+        <p:txBody>
+          <a:bodyPr rtlCol="0" anchor="ctr"/>
+          <a:lstStyle/>
+          <a:p>
+            <a:pPr algn="ctr"/>
+          </a:p>
+        </p:txBody>
+      </p:sp>
+      <p:pic>
+        <p:nvPicPr>
+          <p:cNvPr id="60" name="Picture 59" descr="icon_evaluation_purple.png"/>
+          <p:cNvPicPr>
+            <a:picLocks noChangeAspect="1"/>
+          </p:cNvPicPr>
+          <p:nvPr/>
+        </p:nvPicPr>
+        <p:blipFill>
+          <a:blip r:embed="rId8"/>
+          <a:stretch>
+            <a:fillRect/>
+          </a:stretch>
+        </p:blipFill>
+        <p:spPr>
+          <a:xfrm>
+            <a:off x="11027663" y="3657600"/>
+            <a:ext cx="365760" cy="365760"/>
+          </a:xfrm>
+          <a:prstGeom prst="rect">
+            <a:avLst/>
+          </a:prstGeom>
+        </p:spPr>
+      </p:pic>
+      <p:sp>
+        <p:nvSpPr>
+          <p:cNvPr id="61" name="TextBox 60"/>
+          <p:cNvSpPr txBox="1"/>
+          <p:nvPr/>
+        </p:nvSpPr>
+        <p:spPr>
+          <a:xfrm>
+            <a:off x="11622024" y="3557015"/>
+            <a:ext cx="2020824" cy="566928"/>
+          </a:xfrm>
+          <a:prstGeom prst="rect">
+            <a:avLst/>
+          </a:prstGeom>
+          <a:noFill/>
+        </p:spPr>
+        <p:txBody>
+          <a:bodyPr wrap="square" lIns="0" rIns="0" tIns="0" bIns="0" anchor="ctr">
+            <a:noAutofit/>
+          </a:bodyPr>
+          <a:lstStyle/>
+          <a:p>
+            <a:pPr algn="l">
+              <a:lnSpc>
+                <a:spcPct val="100000"/>
+              </a:lnSpc>
+              <a:spcBef>
+                <a:spcPts val="0"/>
+              </a:spcBef>
+              <a:spcAft>
+                <a:spcPts val="0"/>
+              </a:spcAft>
+            </a:pPr>
+            <a:r>
+              <a:rPr sz="1100" b="1" i="0" spc="100">
+                <a:solidFill>
+                  <a:srgbClr val="7C3AED"/>
+                </a:solidFill>
+                <a:latin typeface="Consolas"/>
+              </a:rPr>
+              <a:t>AGENT 04</a:t>
+            </a:r>
+          </a:p>
+        </p:txBody>
+      </p:sp>
+      <p:sp>
+        <p:nvSpPr>
+          <p:cNvPr id="62" name="TextBox 61"/>
+          <p:cNvSpPr txBox="1"/>
+          <p:nvPr/>
+        </p:nvSpPr>
+        <p:spPr>
+          <a:xfrm>
+            <a:off x="10908792" y="4297679"/>
+            <a:ext cx="2715768" cy="457200"/>
           </a:xfrm>
           <a:prstGeom prst="rect">
             <a:avLst/>
@@ -9986,27 +10299,27 @@
               </a:spcAft>
             </a:pPr>
             <a:r>
-              <a:rPr sz="1000" b="1" i="0" spc="100">
-                <a:solidFill>
-                  <a:srgbClr val="7C3AED"/>
-                </a:solidFill>
-                <a:latin typeface="Consolas"/>
-              </a:rPr>
-              <a:t>AGENT 04</a:t>
-            </a:r>
-          </a:p>
-        </p:txBody>
-      </p:sp>
-      <p:sp>
-        <p:nvSpPr>
-          <p:cNvPr id="54" name="TextBox 53"/>
-          <p:cNvSpPr txBox="1"/>
-          <p:nvPr/>
-        </p:nvSpPr>
-        <p:spPr>
-          <a:xfrm>
-            <a:off x="10890504" y="3675887"/>
-            <a:ext cx="2752344" cy="411480"/>
+              <a:rPr sz="2000" b="0" i="0">
+                <a:solidFill>
+                  <a:srgbClr val="1B1F26"/>
+                </a:solidFill>
+                <a:latin typeface="Montserrat Medium"/>
+              </a:rPr>
+              <a:t>Evaluation Agent</a:t>
+            </a:r>
+          </a:p>
+        </p:txBody>
+      </p:sp>
+      <p:sp>
+        <p:nvSpPr>
+          <p:cNvPr id="63" name="TextBox 62"/>
+          <p:cNvSpPr txBox="1"/>
+          <p:nvPr/>
+        </p:nvSpPr>
+        <p:spPr>
+          <a:xfrm>
+            <a:off x="10908792" y="4818888"/>
+            <a:ext cx="2715768" cy="1097280"/>
           </a:xfrm>
           <a:prstGeom prst="rect">
             <a:avLst/>
@@ -10021,62 +10334,17 @@
           <a:p>
             <a:pPr algn="l">
               <a:lnSpc>
-                <a:spcPct val="100000"/>
-              </a:lnSpc>
-              <a:spcBef>
-                <a:spcPts val="0"/>
-              </a:spcBef>
-              <a:spcAft>
-                <a:spcPts val="0"/>
-              </a:spcAft>
-            </a:pPr>
-            <a:r>
-              <a:rPr sz="1700" b="0" i="0">
-                <a:solidFill>
-                  <a:srgbClr val="1B1F26"/>
-                </a:solidFill>
-                <a:latin typeface="Montserrat Medium"/>
-              </a:rPr>
-              <a:t>Evaluation Agent</a:t>
-            </a:r>
-          </a:p>
-        </p:txBody>
-      </p:sp>
-      <p:sp>
-        <p:nvSpPr>
-          <p:cNvPr id="55" name="TextBox 54"/>
-          <p:cNvSpPr txBox="1"/>
-          <p:nvPr/>
-        </p:nvSpPr>
-        <p:spPr>
-          <a:xfrm>
-            <a:off x="10890504" y="4160520"/>
-            <a:ext cx="2752344" cy="1051560"/>
-          </a:xfrm>
-          <a:prstGeom prst="rect">
-            <a:avLst/>
-          </a:prstGeom>
-          <a:noFill/>
-        </p:spPr>
-        <p:txBody>
-          <a:bodyPr wrap="square" lIns="0" rIns="0" tIns="0" bIns="0" anchor="t">
-            <a:noAutofit/>
-          </a:bodyPr>
-          <a:lstStyle/>
-          <a:p>
-            <a:pPr algn="l">
-              <a:lnSpc>
-                <a:spcPct val="118000"/>
-              </a:lnSpc>
-              <a:spcBef>
-                <a:spcPts val="0"/>
-              </a:spcBef>
-              <a:spcAft>
-                <a:spcPts val="0"/>
-              </a:spcAft>
-            </a:pPr>
-            <a:r>
-              <a:rPr sz="1100" b="0" i="0">
+                <a:spcPct val="120000"/>
+              </a:lnSpc>
+              <a:spcBef>
+                <a:spcPts val="0"/>
+              </a:spcBef>
+              <a:spcAft>
+                <a:spcPts val="0"/>
+              </a:spcAft>
+            </a:pPr>
+            <a:r>
+              <a:rPr sz="1300" b="0" i="0">
                 <a:solidFill>
                   <a:srgbClr val="6A707B"/>
                 </a:solidFill>
@@ -10089,14 +10357,14 @@
       </p:sp>
       <p:cxnSp>
         <p:nvCxnSpPr>
-          <p:cNvPr id="56" name="Connector 55"/>
+          <p:cNvPr id="64" name="Connector 63"/>
           <p:cNvCxnSpPr/>
           <p:nvPr/>
         </p:nvCxnSpPr>
         <p:spPr>
           <a:xfrm>
-            <a:off x="10890504" y="5349240"/>
-            <a:ext cx="2752344" cy="0"/>
+            <a:off x="10908792" y="6035040"/>
+            <a:ext cx="2715768" cy="0"/>
           </a:xfrm>
           <a:prstGeom prst="bentConnector3">
             <a:avLst/>
@@ -10125,14 +10393,14 @@
       </p:cxnSp>
       <p:sp>
         <p:nvSpPr>
-          <p:cNvPr id="57" name="TextBox 56"/>
-          <p:cNvSpPr txBox="1"/>
-          <p:nvPr/>
-        </p:nvSpPr>
-        <p:spPr>
-          <a:xfrm>
-            <a:off x="10890504" y="5486400"/>
-            <a:ext cx="2752344" cy="164592"/>
+          <p:cNvPr id="65" name="TextBox 64"/>
+          <p:cNvSpPr txBox="1"/>
+          <p:nvPr/>
+        </p:nvSpPr>
+        <p:spPr>
+          <a:xfrm>
+            <a:off x="10908792" y="6190488"/>
+            <a:ext cx="2715768" cy="182880"/>
           </a:xfrm>
           <a:prstGeom prst="rect">
             <a:avLst/>
@@ -10157,7 +10425,7 @@
               </a:spcAft>
             </a:pPr>
             <a:r>
-              <a:rPr sz="900" b="1" i="0" spc="60">
+              <a:rPr sz="950" b="1" i="0" spc="60">
                 <a:solidFill>
                   <a:srgbClr val="6A707B"/>
                 </a:solidFill>
@@ -10170,14 +10438,14 @@
       </p:sp>
       <p:sp>
         <p:nvSpPr>
-          <p:cNvPr id="58" name="TextBox 57"/>
-          <p:cNvSpPr txBox="1"/>
-          <p:nvPr/>
-        </p:nvSpPr>
-        <p:spPr>
-          <a:xfrm>
-            <a:off x="10890504" y="5715000"/>
-            <a:ext cx="2752344" cy="548640"/>
+          <p:cNvPr id="66" name="TextBox 65"/>
+          <p:cNvSpPr txBox="1"/>
+          <p:nvPr/>
+        </p:nvSpPr>
+        <p:spPr>
+          <a:xfrm>
+            <a:off x="10908792" y="6446520"/>
+            <a:ext cx="2715768" cy="548640"/>
           </a:xfrm>
           <a:prstGeom prst="rect">
             <a:avLst/>
@@ -10202,7 +10470,7 @@
               </a:spcAft>
             </a:pPr>
             <a:r>
-              <a:rPr sz="1300" b="0" i="0">
+              <a:rPr sz="1500" b="0" i="0">
                 <a:solidFill>
                   <a:srgbClr val="7C3AED"/>
                 </a:solidFill>
@@ -10215,14 +10483,14 @@
       </p:sp>
       <p:sp>
         <p:nvSpPr>
-          <p:cNvPr id="59" name="TextBox 58"/>
-          <p:cNvSpPr txBox="1"/>
-          <p:nvPr/>
-        </p:nvSpPr>
-        <p:spPr>
-          <a:xfrm>
-            <a:off x="10890504" y="6355080"/>
-            <a:ext cx="2752344" cy="1737360"/>
+          <p:cNvPr id="67" name="TextBox 66"/>
+          <p:cNvSpPr txBox="1"/>
+          <p:nvPr/>
+        </p:nvSpPr>
+        <p:spPr>
+          <a:xfrm>
+            <a:off x="10908792" y="7104888"/>
+            <a:ext cx="2715768" cy="1371600"/>
           </a:xfrm>
           <a:prstGeom prst="rect">
             <a:avLst/>
@@ -10247,31 +10515,31 @@
               </a:spcAft>
             </a:pPr>
             <a:r>
-              <a:rPr sz="1050" b="0" i="0">
+              <a:rPr sz="1200" b="0" i="0">
                 <a:solidFill>
                   <a:srgbClr val="484E59"/>
                 </a:solidFill>
                 <a:latin typeface="Montserrat"/>
               </a:rPr>
-              <a:t>Configurable scoring matrix per category. Compliance runs as a subroutine — single decision surface, single audit entry.</a:t>
-            </a:r>
-          </a:p>
-        </p:txBody>
-      </p:sp>
-      <p:sp>
-        <p:nvSpPr>
-          <p:cNvPr id="60" name="Rounded Rectangle 59"/>
+              <a:t>Configurable scoring per category. Compliance runs as a subroutine — single decision surface, single audit entry.</a:t>
+            </a:r>
+          </a:p>
+        </p:txBody>
+      </p:sp>
+      <p:sp>
+        <p:nvSpPr>
+          <p:cNvPr id="68" name="Rounded Rectangle 67"/>
           <p:cNvSpPr/>
           <p:nvPr/>
         </p:nvSpPr>
         <p:spPr>
           <a:xfrm>
-            <a:off x="10890504" y="8183879"/>
-            <a:ext cx="2752344" cy="292608"/>
+            <a:off x="10908792" y="8531352"/>
+            <a:ext cx="2715768" cy="329184"/>
           </a:xfrm>
           <a:prstGeom prst="roundRect">
             <a:avLst>
-              <a:gd name="adj" fmla="val 12500"/>
+              <a:gd name="adj" fmla="val 13888"/>
             </a:avLst>
           </a:prstGeom>
           <a:solidFill>
@@ -10308,14 +10576,14 @@
       </p:sp>
       <p:sp>
         <p:nvSpPr>
-          <p:cNvPr id="61" name="TextBox 60"/>
-          <p:cNvSpPr txBox="1"/>
-          <p:nvPr/>
-        </p:nvSpPr>
-        <p:spPr>
-          <a:xfrm>
-            <a:off x="10890504" y="8183879"/>
-            <a:ext cx="2752344" cy="292608"/>
+          <p:cNvPr id="69" name="TextBox 68"/>
+          <p:cNvSpPr txBox="1"/>
+          <p:nvPr/>
+        </p:nvSpPr>
+        <p:spPr>
+          <a:xfrm>
+            <a:off x="10908792" y="8531352"/>
+            <a:ext cx="2715768" cy="329184"/>
           </a:xfrm>
           <a:prstGeom prst="rect">
             <a:avLst/>
@@ -10340,7 +10608,7 @@
               </a:spcAft>
             </a:pPr>
             <a:r>
-              <a:rPr sz="950" b="1" i="0" spc="80">
+              <a:rPr sz="1100" b="1" i="0" spc="80">
                 <a:solidFill>
                   <a:srgbClr val="146B3F"/>
                 </a:solidFill>
@@ -10353,18 +10621,18 @@
       </p:sp>
       <p:sp>
         <p:nvSpPr>
-          <p:cNvPr id="62" name="Rounded Rectangle 61"/>
+          <p:cNvPr id="70" name="Rounded Rectangle 69"/>
           <p:cNvSpPr/>
           <p:nvPr/>
         </p:nvSpPr>
         <p:spPr>
           <a:xfrm>
-            <a:off x="13999464" y="3200400"/>
-            <a:ext cx="3154680" cy="5623560"/>
+            <a:off x="13999464" y="3246120"/>
+            <a:ext cx="3154680" cy="5806440"/>
           </a:xfrm>
           <a:prstGeom prst="roundRect">
             <a:avLst>
-              <a:gd name="adj" fmla="val 2318"/>
+              <a:gd name="adj" fmla="val 2898"/>
             </a:avLst>
           </a:prstGeom>
           <a:solidFill>
@@ -10401,14 +10669,14 @@
       </p:sp>
       <p:sp>
         <p:nvSpPr>
-          <p:cNvPr id="63" name="Rectangle 62"/>
+          <p:cNvPr id="71" name="Rectangle 70"/>
           <p:cNvSpPr/>
           <p:nvPr/>
         </p:nvSpPr>
         <p:spPr>
           <a:xfrm>
-            <a:off x="13999464" y="3200400"/>
-            <a:ext cx="3154680" cy="54864"/>
+            <a:off x="13999464" y="3246120"/>
+            <a:ext cx="3154680" cy="64008"/>
           </a:xfrm>
           <a:prstGeom prst="rect">
             <a:avLst/>
@@ -10445,14 +10713,129 @@
       </p:sp>
       <p:sp>
         <p:nvSpPr>
-          <p:cNvPr id="64" name="TextBox 63"/>
-          <p:cNvSpPr txBox="1"/>
-          <p:nvPr/>
-        </p:nvSpPr>
-        <p:spPr>
-          <a:xfrm>
-            <a:off x="14200632" y="3456432"/>
-            <a:ext cx="2752344" cy="182880"/>
+          <p:cNvPr id="72" name="Rounded Rectangle 71"/>
+          <p:cNvSpPr/>
+          <p:nvPr/>
+        </p:nvSpPr>
+        <p:spPr>
+          <a:xfrm>
+            <a:off x="14218920" y="3538727"/>
+            <a:ext cx="603504" cy="603504"/>
+          </a:xfrm>
+          <a:prstGeom prst="roundRect">
+            <a:avLst>
+              <a:gd name="adj" fmla="val 18181"/>
+            </a:avLst>
+          </a:prstGeom>
+          <a:solidFill>
+            <a:srgbClr val="ECE3FF"/>
+          </a:solidFill>
+          <a:ln>
+            <a:noFill/>
+          </a:ln>
+          <a:effectLst/>
+        </p:spPr>
+        <p:style>
+          <a:lnRef idx="1">
+            <a:schemeClr val="accent1"/>
+          </a:lnRef>
+          <a:fillRef idx="3">
+            <a:schemeClr val="accent1"/>
+          </a:fillRef>
+          <a:effectRef idx="2">
+            <a:schemeClr val="accent1"/>
+          </a:effectRef>
+          <a:fontRef idx="minor">
+            <a:schemeClr val="lt1"/>
+          </a:fontRef>
+        </p:style>
+        <p:txBody>
+          <a:bodyPr rtlCol="0" anchor="ctr"/>
+          <a:lstStyle/>
+          <a:p>
+            <a:pPr algn="ctr"/>
+          </a:p>
+        </p:txBody>
+      </p:sp>
+      <p:pic>
+        <p:nvPicPr>
+          <p:cNvPr id="73" name="Picture 72" descr="icon_award_purple.png"/>
+          <p:cNvPicPr>
+            <a:picLocks noChangeAspect="1"/>
+          </p:cNvPicPr>
+          <p:nvPr/>
+        </p:nvPicPr>
+        <p:blipFill>
+          <a:blip r:embed="rId9"/>
+          <a:stretch>
+            <a:fillRect/>
+          </a:stretch>
+        </p:blipFill>
+        <p:spPr>
+          <a:xfrm>
+            <a:off x="14337792" y="3657600"/>
+            <a:ext cx="365760" cy="365760"/>
+          </a:xfrm>
+          <a:prstGeom prst="rect">
+            <a:avLst/>
+          </a:prstGeom>
+        </p:spPr>
+      </p:pic>
+      <p:sp>
+        <p:nvSpPr>
+          <p:cNvPr id="74" name="TextBox 73"/>
+          <p:cNvSpPr txBox="1"/>
+          <p:nvPr/>
+        </p:nvSpPr>
+        <p:spPr>
+          <a:xfrm>
+            <a:off x="14932152" y="3557015"/>
+            <a:ext cx="2020824" cy="566928"/>
+          </a:xfrm>
+          <a:prstGeom prst="rect">
+            <a:avLst/>
+          </a:prstGeom>
+          <a:noFill/>
+        </p:spPr>
+        <p:txBody>
+          <a:bodyPr wrap="square" lIns="0" rIns="0" tIns="0" bIns="0" anchor="ctr">
+            <a:noAutofit/>
+          </a:bodyPr>
+          <a:lstStyle/>
+          <a:p>
+            <a:pPr algn="l">
+              <a:lnSpc>
+                <a:spcPct val="100000"/>
+              </a:lnSpc>
+              <a:spcBef>
+                <a:spcPts val="0"/>
+              </a:spcBef>
+              <a:spcAft>
+                <a:spcPts val="0"/>
+              </a:spcAft>
+            </a:pPr>
+            <a:r>
+              <a:rPr sz="1100" b="1" i="0" spc="100">
+                <a:solidFill>
+                  <a:srgbClr val="7C3AED"/>
+                </a:solidFill>
+                <a:latin typeface="Consolas"/>
+              </a:rPr>
+              <a:t>AGENT 05</a:t>
+            </a:r>
+          </a:p>
+        </p:txBody>
+      </p:sp>
+      <p:sp>
+        <p:nvSpPr>
+          <p:cNvPr id="75" name="TextBox 74"/>
+          <p:cNvSpPr txBox="1"/>
+          <p:nvPr/>
+        </p:nvSpPr>
+        <p:spPr>
+          <a:xfrm>
+            <a:off x="14218920" y="4297679"/>
+            <a:ext cx="2715768" cy="457200"/>
           </a:xfrm>
           <a:prstGeom prst="rect">
             <a:avLst/>
@@ -10477,27 +10860,27 @@
               </a:spcAft>
             </a:pPr>
             <a:r>
-              <a:rPr sz="1000" b="1" i="0" spc="100">
-                <a:solidFill>
-                  <a:srgbClr val="7C3AED"/>
-                </a:solidFill>
-                <a:latin typeface="Consolas"/>
-              </a:rPr>
-              <a:t>AGENT 05</a:t>
-            </a:r>
-          </a:p>
-        </p:txBody>
-      </p:sp>
-      <p:sp>
-        <p:nvSpPr>
-          <p:cNvPr id="65" name="TextBox 64"/>
-          <p:cNvSpPr txBox="1"/>
-          <p:nvPr/>
-        </p:nvSpPr>
-        <p:spPr>
-          <a:xfrm>
-            <a:off x="14200632" y="3675887"/>
-            <a:ext cx="2752344" cy="411480"/>
+              <a:rPr sz="2000" b="0" i="0">
+                <a:solidFill>
+                  <a:srgbClr val="1B1F26"/>
+                </a:solidFill>
+                <a:latin typeface="Montserrat Medium"/>
+              </a:rPr>
+              <a:t>Award Agent</a:t>
+            </a:r>
+          </a:p>
+        </p:txBody>
+      </p:sp>
+      <p:sp>
+        <p:nvSpPr>
+          <p:cNvPr id="76" name="TextBox 75"/>
+          <p:cNvSpPr txBox="1"/>
+          <p:nvPr/>
+        </p:nvSpPr>
+        <p:spPr>
+          <a:xfrm>
+            <a:off x="14218920" y="4818888"/>
+            <a:ext cx="2715768" cy="1097280"/>
           </a:xfrm>
           <a:prstGeom prst="rect">
             <a:avLst/>
@@ -10512,62 +10895,17 @@
           <a:p>
             <a:pPr algn="l">
               <a:lnSpc>
-                <a:spcPct val="100000"/>
-              </a:lnSpc>
-              <a:spcBef>
-                <a:spcPts val="0"/>
-              </a:spcBef>
-              <a:spcAft>
-                <a:spcPts val="0"/>
-              </a:spcAft>
-            </a:pPr>
-            <a:r>
-              <a:rPr sz="1700" b="0" i="0">
-                <a:solidFill>
-                  <a:srgbClr val="1B1F26"/>
-                </a:solidFill>
-                <a:latin typeface="Montserrat Medium"/>
-              </a:rPr>
-              <a:t>Award Agent</a:t>
-            </a:r>
-          </a:p>
-        </p:txBody>
-      </p:sp>
-      <p:sp>
-        <p:nvSpPr>
-          <p:cNvPr id="66" name="TextBox 65"/>
-          <p:cNvSpPr txBox="1"/>
-          <p:nvPr/>
-        </p:nvSpPr>
-        <p:spPr>
-          <a:xfrm>
-            <a:off x="14200632" y="4160520"/>
-            <a:ext cx="2752344" cy="1051560"/>
-          </a:xfrm>
-          <a:prstGeom prst="rect">
-            <a:avLst/>
-          </a:prstGeom>
-          <a:noFill/>
-        </p:spPr>
-        <p:txBody>
-          <a:bodyPr wrap="square" lIns="0" rIns="0" tIns="0" bIns="0" anchor="t">
-            <a:noAutofit/>
-          </a:bodyPr>
-          <a:lstStyle/>
-          <a:p>
-            <a:pPr algn="l">
-              <a:lnSpc>
-                <a:spcPct val="118000"/>
-              </a:lnSpc>
-              <a:spcBef>
-                <a:spcPts val="0"/>
-              </a:spcBef>
-              <a:spcAft>
-                <a:spcPts val="0"/>
-              </a:spcAft>
-            </a:pPr>
-            <a:r>
-              <a:rPr sz="1100" b="0" i="0">
+                <a:spcPct val="120000"/>
+              </a:lnSpc>
+              <a:spcBef>
+                <a:spcPts val="0"/>
+              </a:spcBef>
+              <a:spcAft>
+                <a:spcPts val="0"/>
+              </a:spcAft>
+            </a:pPr>
+            <a:r>
+              <a:rPr sz="1300" b="0" i="0">
                 <a:solidFill>
                   <a:srgbClr val="6A707B"/>
                 </a:solidFill>
@@ -10580,14 +10918,14 @@
       </p:sp>
       <p:cxnSp>
         <p:nvCxnSpPr>
-          <p:cNvPr id="67" name="Connector 66"/>
+          <p:cNvPr id="77" name="Connector 76"/>
           <p:cNvCxnSpPr/>
           <p:nvPr/>
         </p:nvCxnSpPr>
         <p:spPr>
           <a:xfrm>
-            <a:off x="14200632" y="5349240"/>
-            <a:ext cx="2752344" cy="0"/>
+            <a:off x="14218920" y="6035040"/>
+            <a:ext cx="2715768" cy="0"/>
           </a:xfrm>
           <a:prstGeom prst="bentConnector3">
             <a:avLst/>
@@ -10616,14 +10954,14 @@
       </p:cxnSp>
       <p:sp>
         <p:nvSpPr>
-          <p:cNvPr id="68" name="TextBox 67"/>
-          <p:cNvSpPr txBox="1"/>
-          <p:nvPr/>
-        </p:nvSpPr>
-        <p:spPr>
-          <a:xfrm>
-            <a:off x="14200632" y="5486400"/>
-            <a:ext cx="2752344" cy="164592"/>
+          <p:cNvPr id="78" name="TextBox 77"/>
+          <p:cNvSpPr txBox="1"/>
+          <p:nvPr/>
+        </p:nvSpPr>
+        <p:spPr>
+          <a:xfrm>
+            <a:off x="14218920" y="6190488"/>
+            <a:ext cx="2715768" cy="182880"/>
           </a:xfrm>
           <a:prstGeom prst="rect">
             <a:avLst/>
@@ -10648,7 +10986,7 @@
               </a:spcAft>
             </a:pPr>
             <a:r>
-              <a:rPr sz="900" b="1" i="0" spc="60">
+              <a:rPr sz="950" b="1" i="0" spc="60">
                 <a:solidFill>
                   <a:srgbClr val="6A707B"/>
                 </a:solidFill>
@@ -10661,14 +10999,14 @@
       </p:sp>
       <p:sp>
         <p:nvSpPr>
-          <p:cNvPr id="69" name="TextBox 68"/>
-          <p:cNvSpPr txBox="1"/>
-          <p:nvPr/>
-        </p:nvSpPr>
-        <p:spPr>
-          <a:xfrm>
-            <a:off x="14200632" y="5715000"/>
-            <a:ext cx="2752344" cy="548640"/>
+          <p:cNvPr id="79" name="TextBox 78"/>
+          <p:cNvSpPr txBox="1"/>
+          <p:nvPr/>
+        </p:nvSpPr>
+        <p:spPr>
+          <a:xfrm>
+            <a:off x="14218920" y="6446520"/>
+            <a:ext cx="2715768" cy="548640"/>
           </a:xfrm>
           <a:prstGeom prst="rect">
             <a:avLst/>
@@ -10693,7 +11031,7 @@
               </a:spcAft>
             </a:pPr>
             <a:r>
-              <a:rPr sz="1300" b="0" i="0">
+              <a:rPr sz="1500" b="0" i="0">
                 <a:solidFill>
                   <a:srgbClr val="7C3AED"/>
                 </a:solidFill>
@@ -10706,14 +11044,14 @@
       </p:sp>
       <p:sp>
         <p:nvSpPr>
-          <p:cNvPr id="70" name="TextBox 69"/>
-          <p:cNvSpPr txBox="1"/>
-          <p:nvPr/>
-        </p:nvSpPr>
-        <p:spPr>
-          <a:xfrm>
-            <a:off x="14200632" y="6355080"/>
-            <a:ext cx="2752344" cy="1737360"/>
+          <p:cNvPr id="80" name="TextBox 79"/>
+          <p:cNvSpPr txBox="1"/>
+          <p:nvPr/>
+        </p:nvSpPr>
+        <p:spPr>
+          <a:xfrm>
+            <a:off x="14218920" y="7104888"/>
+            <a:ext cx="2715768" cy="1371600"/>
           </a:xfrm>
           <a:prstGeom prst="rect">
             <a:avLst/>
@@ -10738,7 +11076,7 @@
               </a:spcAft>
             </a:pPr>
             <a:r>
-              <a:rPr sz="1050" b="0" i="0">
+              <a:rPr sz="1200" b="0" i="0">
                 <a:solidFill>
                   <a:srgbClr val="484E59"/>
                 </a:solidFill>
@@ -10751,18 +11089,18 @@
       </p:sp>
       <p:sp>
         <p:nvSpPr>
-          <p:cNvPr id="71" name="Rounded Rectangle 70"/>
+          <p:cNvPr id="81" name="Rounded Rectangle 80"/>
           <p:cNvSpPr/>
           <p:nvPr/>
         </p:nvSpPr>
         <p:spPr>
           <a:xfrm>
-            <a:off x="14200632" y="8183879"/>
-            <a:ext cx="2752344" cy="292608"/>
+            <a:off x="14218920" y="8531352"/>
+            <a:ext cx="2715768" cy="329184"/>
           </a:xfrm>
           <a:prstGeom prst="roundRect">
             <a:avLst>
-              <a:gd name="adj" fmla="val 12500"/>
+              <a:gd name="adj" fmla="val 13888"/>
             </a:avLst>
           </a:prstGeom>
           <a:solidFill>
@@ -10799,14 +11137,14 @@
       </p:sp>
       <p:sp>
         <p:nvSpPr>
-          <p:cNvPr id="72" name="TextBox 71"/>
-          <p:cNvSpPr txBox="1"/>
-          <p:nvPr/>
-        </p:nvSpPr>
-        <p:spPr>
-          <a:xfrm>
-            <a:off x="14200632" y="8183879"/>
-            <a:ext cx="2752344" cy="292608"/>
+          <p:cNvPr id="82" name="TextBox 81"/>
+          <p:cNvSpPr txBox="1"/>
+          <p:nvPr/>
+        </p:nvSpPr>
+        <p:spPr>
+          <a:xfrm>
+            <a:off x="14218920" y="8531352"/>
+            <a:ext cx="2715768" cy="329184"/>
           </a:xfrm>
           <a:prstGeom prst="rect">
             <a:avLst/>
@@ -10831,7 +11169,7 @@
               </a:spcAft>
             </a:pPr>
             <a:r>
-              <a:rPr sz="950" b="1" i="0" spc="80">
+              <a:rPr sz="1100" b="1" i="0" spc="80">
                 <a:solidFill>
                   <a:srgbClr val="146B3F"/>
                 </a:solidFill>
@@ -10844,13 +11182,13 @@
       </p:sp>
       <p:sp>
         <p:nvSpPr>
-          <p:cNvPr id="73" name="TextBox 72"/>
-          <p:cNvSpPr txBox="1"/>
-          <p:nvPr/>
-        </p:nvSpPr>
-        <p:spPr>
-          <a:xfrm>
-            <a:off x="758952" y="9098280"/>
+          <p:cNvPr id="83" name="TextBox 82"/>
+          <p:cNvSpPr txBox="1"/>
+          <p:nvPr/>
+        </p:nvSpPr>
+        <p:spPr>
+          <a:xfrm>
+            <a:off x="758952" y="9281160"/>
             <a:ext cx="16770096" cy="457200"/>
           </a:xfrm>
           <a:prstGeom prst="rect">
@@ -10876,7 +11214,7 @@
               </a:spcAft>
             </a:pPr>
             <a:r>
-              <a:rPr sz="1300" b="0" i="0">
+              <a:rPr sz="1450" b="0" i="0">
                 <a:solidFill>
                   <a:srgbClr val="1B1F26"/>
                 </a:solidFill>
@@ -10885,20 +11223,20 @@
               <a:t>Delivery posture.  </a:t>
             </a:r>
             <a:r>
-              <a:rPr sz="1300" b="0" i="0">
+              <a:rPr sz="1450" b="0" i="0">
                 <a:solidFill>
                   <a:srgbClr val="484E59"/>
                 </a:solidFill>
                 <a:latin typeface="Montserrat"/>
               </a:rPr>
-              <a:t>All five agents are in production today across Aerchain customers — Intake, Sourcing, Negotiation, Evaluation and Award — orchestrated end-to-end, with the ERP kept as the system of record.</a:t>
-            </a:r>
-          </a:p>
-        </p:txBody>
-      </p:sp>
-      <p:sp>
-        <p:nvSpPr>
-          <p:cNvPr id="74" name="Rectangle 73"/>
+              <a:t>All five agents are in production today — Intake, Sourcing, Negotiation, Evaluation and Award — orchestrated end-to-end, with the ERP kept as the system of record.</a:t>
+            </a:r>
+          </a:p>
+        </p:txBody>
+      </p:sp>
+      <p:sp>
+        <p:nvSpPr>
+          <p:cNvPr id="84" name="Rectangle 83"/>
           <p:cNvSpPr/>
           <p:nvPr/>
         </p:nvSpPr>
@@ -10942,7 +11280,7 @@
       </p:sp>
       <p:cxnSp>
         <p:nvCxnSpPr>
-          <p:cNvPr id="75" name="Connector 74"/>
+          <p:cNvPr id="85" name="Connector 84"/>
           <p:cNvCxnSpPr/>
           <p:nvPr/>
         </p:nvCxnSpPr>
@@ -10978,7 +11316,7 @@
       </p:cxnSp>
       <p:sp>
         <p:nvSpPr>
-          <p:cNvPr id="76" name="TextBox 75"/>
+          <p:cNvPr id="86" name="TextBox 85"/>
           <p:cNvSpPr txBox="1"/>
           <p:nvPr/>
         </p:nvSpPr>
@@ -11010,7 +11348,7 @@
               </a:spcAft>
             </a:pPr>
             <a:r>
-              <a:rPr sz="800" b="1" i="0" spc="80">
+              <a:rPr sz="900" b="1" i="0" spc="80">
                 <a:solidFill>
                   <a:srgbClr val="6A707B"/>
                 </a:solidFill>
@@ -11023,7 +11361,7 @@
       </p:sp>
       <p:sp>
         <p:nvSpPr>
-          <p:cNvPr id="77" name="TextBox 76"/>
+          <p:cNvPr id="87" name="TextBox 86"/>
           <p:cNvSpPr txBox="1"/>
           <p:nvPr/>
         </p:nvSpPr>
@@ -11055,7 +11393,7 @@
               </a:spcAft>
             </a:pPr>
             <a:r>
-              <a:rPr sz="800" b="1" i="0" spc="80">
+              <a:rPr sz="900" b="1" i="0" spc="80">
                 <a:solidFill>
                   <a:srgbClr val="6A707B"/>
                 </a:solidFill>
@@ -11137,7 +11475,7 @@
         <p:spPr>
           <a:xfrm>
             <a:off x="0" y="0"/>
-            <a:ext cx="18288000" cy="914400"/>
+            <a:ext cx="18288000" cy="960120"/>
           </a:xfrm>
           <a:prstGeom prst="rect">
             <a:avLst/>
@@ -11180,7 +11518,7 @@
         </p:nvCxnSpPr>
         <p:spPr>
           <a:xfrm>
-            <a:off x="0" y="914400"/>
+            <a:off x="0" y="960120"/>
             <a:ext cx="18288000" cy="0"/>
           </a:xfrm>
           <a:prstGeom prst="bentConnector3">
@@ -11224,7 +11562,7 @@
         </p:blipFill>
         <p:spPr>
           <a:xfrm>
-            <a:off x="758952" y="274320"/>
+            <a:off x="758952" y="292608"/>
             <a:ext cx="2542032" cy="365760"/>
           </a:xfrm>
           <a:prstGeom prst="rect">
@@ -11241,7 +11579,7 @@
         <p:spPr>
           <a:xfrm>
             <a:off x="3456432" y="0"/>
-            <a:ext cx="457200" cy="914400"/>
+            <a:ext cx="457200" cy="960120"/>
           </a:xfrm>
           <a:prstGeom prst="rect">
             <a:avLst/>
@@ -11293,8 +11631,8 @@
         </p:blipFill>
         <p:spPr>
           <a:xfrm>
-            <a:off x="3977639" y="320040"/>
-            <a:ext cx="960120" cy="283464"/>
+            <a:off x="3977639" y="338328"/>
+            <a:ext cx="749808" cy="292608"/>
           </a:xfrm>
           <a:prstGeom prst="rect">
             <a:avLst/>
@@ -11309,8 +11647,8 @@
         </p:nvCxnSpPr>
         <p:spPr>
           <a:xfrm>
-            <a:off x="5321808" y="320040"/>
-            <a:ext cx="0" cy="274319"/>
+            <a:off x="5074920" y="338328"/>
+            <a:ext cx="0" cy="283464"/>
           </a:xfrm>
           <a:prstGeom prst="bentConnector3">
             <a:avLst/>
@@ -11345,8 +11683,8 @@
         </p:nvSpPr>
         <p:spPr>
           <a:xfrm>
-            <a:off x="5513832" y="0"/>
-            <a:ext cx="8229600" cy="914400"/>
+            <a:off x="5285232" y="0"/>
+            <a:ext cx="8686800" cy="960120"/>
           </a:xfrm>
           <a:prstGeom prst="rect">
             <a:avLst/>
@@ -11371,7 +11709,7 @@
               </a:spcAft>
             </a:pPr>
             <a:r>
-              <a:rPr sz="1100" b="1" i="0" spc="120">
+              <a:rPr sz="1200" b="1" i="0" spc="120">
                 <a:solidFill>
                   <a:srgbClr val="6A707B"/>
                 </a:solidFill>
@@ -11390,8 +11728,8 @@
         </p:nvSpPr>
         <p:spPr>
           <a:xfrm>
-            <a:off x="15087600" y="0"/>
-            <a:ext cx="1554480" cy="914400"/>
+            <a:off x="14996159" y="0"/>
+            <a:ext cx="1645920" cy="960120"/>
           </a:xfrm>
           <a:prstGeom prst="rect">
             <a:avLst/>
@@ -11416,7 +11754,7 @@
               </a:spcAft>
             </a:pPr>
             <a:r>
-              <a:rPr sz="1200" b="1" i="0">
+              <a:rPr sz="1300" b="1" i="0">
                 <a:solidFill>
                   <a:srgbClr val="1B1F26"/>
                 </a:solidFill>
@@ -11425,7 +11763,7 @@
               <a:t>04</a:t>
             </a:r>
             <a:r>
-              <a:rPr sz="1200" b="1" i="0">
+              <a:rPr sz="1300" b="1" i="0">
                 <a:solidFill>
                   <a:srgbClr val="6A707B"/>
                 </a:solidFill>
@@ -11452,8 +11790,8 @@
         </p:blipFill>
         <p:spPr>
           <a:xfrm>
-            <a:off x="16962120" y="246888"/>
-            <a:ext cx="411480" cy="457200"/>
+            <a:off x="16916400" y="256032"/>
+            <a:ext cx="457200" cy="475488"/>
           </a:xfrm>
           <a:prstGeom prst="rect">
             <a:avLst/>
@@ -11468,8 +11806,8 @@
         </p:nvSpPr>
         <p:spPr>
           <a:xfrm>
-            <a:off x="758952" y="1179576"/>
-            <a:ext cx="402336" cy="402336"/>
+            <a:off x="758952" y="1216152"/>
+            <a:ext cx="420624" cy="420624"/>
           </a:xfrm>
           <a:prstGeom prst="rect">
             <a:avLst/>
@@ -11512,8 +11850,8 @@
         </p:nvSpPr>
         <p:spPr>
           <a:xfrm>
-            <a:off x="758952" y="1179576"/>
-            <a:ext cx="402336" cy="402336"/>
+            <a:off x="758952" y="1216152"/>
+            <a:ext cx="420624" cy="420624"/>
           </a:xfrm>
           <a:prstGeom prst="rect">
             <a:avLst/>
@@ -11538,7 +11876,7 @@
               </a:spcAft>
             </a:pPr>
             <a:r>
-              <a:rPr sz="1200" b="1" i="0">
+              <a:rPr sz="1300" b="1" i="0">
                 <a:solidFill>
                   <a:srgbClr val="FFFFFF"/>
                 </a:solidFill>
@@ -11557,8 +11895,8 @@
         </p:nvSpPr>
         <p:spPr>
           <a:xfrm>
-            <a:off x="1325880" y="1179576"/>
-            <a:ext cx="10972800" cy="402336"/>
+            <a:off x="1353312" y="1216152"/>
+            <a:ext cx="10972800" cy="420624"/>
           </a:xfrm>
           <a:prstGeom prst="rect">
             <a:avLst/>
@@ -11583,7 +11921,7 @@
               </a:spcAft>
             </a:pPr>
             <a:r>
-              <a:rPr sz="1100" b="1" i="0" spc="120">
+              <a:rPr sz="1200" b="1" i="0" spc="120">
                 <a:solidFill>
                   <a:srgbClr val="7C3AED"/>
                 </a:solidFill>
@@ -11602,8 +11940,8 @@
         </p:nvSpPr>
         <p:spPr>
           <a:xfrm>
-            <a:off x="758952" y="1627632"/>
-            <a:ext cx="16770096" cy="640080"/>
+            <a:off x="758952" y="1719072"/>
+            <a:ext cx="16770096" cy="658368"/>
           </a:xfrm>
           <a:prstGeom prst="rect">
             <a:avLst/>
@@ -11628,7 +11966,7 @@
               </a:spcAft>
             </a:pPr>
             <a:r>
-              <a:rPr sz="3600" b="0" i="0">
+              <a:rPr sz="4000" b="0" i="0">
                 <a:solidFill>
                   <a:srgbClr val="1B1F26"/>
                 </a:solidFill>
@@ -11637,7 +11975,7 @@
               <a:t>A </a:t>
             </a:r>
             <a:r>
-              <a:rPr sz="3600" b="0" i="0">
+              <a:rPr sz="4000" b="0" i="0">
                 <a:solidFill>
                   <a:srgbClr val="7C3AED"/>
                 </a:solidFill>
@@ -11646,7 +11984,7 @@
               <a:t>1 : 58 return</a:t>
             </a:r>
             <a:r>
-              <a:rPr sz="3600" b="0" i="0">
+              <a:rPr sz="4000" b="0" i="0">
                 <a:solidFill>
                   <a:srgbClr val="1B1F26"/>
                 </a:solidFill>
@@ -11665,8 +12003,8 @@
         </p:nvSpPr>
         <p:spPr>
           <a:xfrm>
-            <a:off x="758952" y="2286000"/>
-            <a:ext cx="16093440" cy="548640"/>
+            <a:off x="758952" y="2450592"/>
+            <a:ext cx="16093440" cy="502920"/>
           </a:xfrm>
           <a:prstGeom prst="rect">
             <a:avLst/>
@@ -11691,7 +12029,7 @@
               </a:spcAft>
             </a:pPr>
             <a:r>
-              <a:rPr sz="1300" b="0" i="0">
+              <a:rPr sz="1500" b="0" i="0">
                 <a:solidFill>
                   <a:srgbClr val="484E59"/>
                 </a:solidFill>
@@ -11710,7 +12048,7 @@
         </p:nvCxnSpPr>
         <p:spPr>
           <a:xfrm>
-            <a:off x="758952" y="2944368"/>
+            <a:off x="758952" y="3054096"/>
             <a:ext cx="16770096" cy="0"/>
           </a:xfrm>
           <a:prstGeom prst="bentConnector3">
@@ -11746,12 +12084,12 @@
         </p:nvSpPr>
         <p:spPr>
           <a:xfrm>
-            <a:off x="758952" y="3200400"/>
-            <a:ext cx="3931920" cy="1993392"/>
+            <a:off x="758952" y="3291840"/>
+            <a:ext cx="3931920" cy="1975104"/>
           </a:xfrm>
           <a:prstGeom prst="roundRect">
             <a:avLst>
-              <a:gd name="adj" fmla="val 3669"/>
+              <a:gd name="adj" fmla="val 4629"/>
             </a:avLst>
           </a:prstGeom>
           <a:solidFill>
@@ -11794,8 +12132,8 @@
         </p:nvSpPr>
         <p:spPr>
           <a:xfrm>
-            <a:off x="758952" y="3200400"/>
-            <a:ext cx="54864" cy="1993392"/>
+            <a:off x="758952" y="3291840"/>
+            <a:ext cx="64008" cy="1975104"/>
           </a:xfrm>
           <a:prstGeom prst="rect">
             <a:avLst/>
@@ -11838,7 +12176,7 @@
         </p:nvSpPr>
         <p:spPr>
           <a:xfrm>
-            <a:off x="1033271" y="3456432"/>
+            <a:off x="1051560" y="3566160"/>
             <a:ext cx="3474720" cy="777240"/>
           </a:xfrm>
           <a:prstGeom prst="rect">
@@ -11864,27 +12202,72 @@
               </a:spcAft>
             </a:pPr>
             <a:r>
-              <a:rPr sz="4000" b="0" i="0">
+              <a:rPr sz="4200" b="0" i="0">
+                <a:solidFill>
+                  <a:srgbClr val="7C3AED"/>
+                </a:solidFill>
+                <a:latin typeface="Montserrat Medium"/>
+              </a:rPr>
+              <a:t>$54M</a:t>
+            </a:r>
+          </a:p>
+        </p:txBody>
+      </p:sp>
+      <p:sp>
+        <p:nvSpPr>
+          <p:cNvPr id="21" name="TextBox 20"/>
+          <p:cNvSpPr txBox="1"/>
+          <p:nvPr/>
+        </p:nvSpPr>
+        <p:spPr>
+          <a:xfrm>
+            <a:off x="1051560" y="4389120"/>
+            <a:ext cx="3474720" cy="365760"/>
+          </a:xfrm>
+          <a:prstGeom prst="rect">
+            <a:avLst/>
+          </a:prstGeom>
+          <a:noFill/>
+        </p:spPr>
+        <p:txBody>
+          <a:bodyPr wrap="square" lIns="0" rIns="0" tIns="0" bIns="0" anchor="t">
+            <a:noAutofit/>
+          </a:bodyPr>
+          <a:lstStyle/>
+          <a:p>
+            <a:pPr algn="l">
+              <a:lnSpc>
+                <a:spcPct val="100000"/>
+              </a:lnSpc>
+              <a:spcBef>
+                <a:spcPts val="0"/>
+              </a:spcBef>
+              <a:spcAft>
+                <a:spcPts val="0"/>
+              </a:spcAft>
+            </a:pPr>
+            <a:r>
+              <a:rPr sz="1500" b="0" i="0">
                 <a:solidFill>
                   <a:srgbClr val="1B1F26"/>
                 </a:solidFill>
-                <a:latin typeface="Montserrat Medium"/>
-              </a:rPr>
-              <a:t>$54M</a:t>
-            </a:r>
-          </a:p>
-        </p:txBody>
-      </p:sp>
-      <p:sp>
-        <p:nvSpPr>
-          <p:cNvPr id="21" name="TextBox 20"/>
-          <p:cNvSpPr txBox="1"/>
-          <p:nvPr/>
-        </p:nvSpPr>
-        <p:spPr>
-          <a:xfrm>
-            <a:off x="1033271" y="4251960"/>
-            <a:ext cx="3474720" cy="365760"/>
+                <a:latin typeface="Montserrat SemiBold"/>
+              </a:rPr>
+              <a:t>Addressable spend</a:t>
+            </a:r>
+          </a:p>
+        </p:txBody>
+      </p:sp>
+      <p:sp>
+        <p:nvSpPr>
+          <p:cNvPr id="22" name="TextBox 21"/>
+          <p:cNvSpPr txBox="1"/>
+          <p:nvPr/>
+        </p:nvSpPr>
+        <p:spPr>
+          <a:xfrm>
+            <a:off x="1051560" y="4736592"/>
+            <a:ext cx="3474720" cy="457200"/>
           </a:xfrm>
           <a:prstGeom prst="rect">
             <a:avLst/>
@@ -11899,51 +12282,6 @@
           <a:p>
             <a:pPr algn="l">
               <a:lnSpc>
-                <a:spcPct val="100000"/>
-              </a:lnSpc>
-              <a:spcBef>
-                <a:spcPts val="0"/>
-              </a:spcBef>
-              <a:spcAft>
-                <a:spcPts val="0"/>
-              </a:spcAft>
-            </a:pPr>
-            <a:r>
-              <a:rPr sz="1400" b="0" i="0">
-                <a:solidFill>
-                  <a:srgbClr val="1B1F26"/>
-                </a:solidFill>
-                <a:latin typeface="Montserrat SemiBold"/>
-              </a:rPr>
-              <a:t>Addressable spend</a:t>
-            </a:r>
-          </a:p>
-        </p:txBody>
-      </p:sp>
-      <p:sp>
-        <p:nvSpPr>
-          <p:cNvPr id="22" name="TextBox 21"/>
-          <p:cNvSpPr txBox="1"/>
-          <p:nvPr/>
-        </p:nvSpPr>
-        <p:spPr>
-          <a:xfrm>
-            <a:off x="1033271" y="4617720"/>
-            <a:ext cx="3474720" cy="457200"/>
-          </a:xfrm>
-          <a:prstGeom prst="rect">
-            <a:avLst/>
-          </a:prstGeom>
-          <a:noFill/>
-        </p:spPr>
-        <p:txBody>
-          <a:bodyPr wrap="square" lIns="0" rIns="0" tIns="0" bIns="0" anchor="t">
-            <a:noAutofit/>
-          </a:bodyPr>
-          <a:lstStyle/>
-          <a:p>
-            <a:pPr algn="l">
-              <a:lnSpc>
                 <a:spcPct val="110000"/>
               </a:lnSpc>
               <a:spcBef>
@@ -11954,7 +12292,7 @@
               </a:spcAft>
             </a:pPr>
             <a:r>
-              <a:rPr sz="1100" b="0" i="0">
+              <a:rPr sz="1200" b="0" i="0">
                 <a:solidFill>
                   <a:srgbClr val="6A707B"/>
                 </a:solidFill>
@@ -11973,12 +12311,12 @@
         </p:nvSpPr>
         <p:spPr>
           <a:xfrm>
-            <a:off x="5056632" y="3200400"/>
-            <a:ext cx="3931920" cy="1993392"/>
+            <a:off x="5056632" y="3291840"/>
+            <a:ext cx="3931920" cy="1975104"/>
           </a:xfrm>
           <a:prstGeom prst="roundRect">
             <a:avLst>
-              <a:gd name="adj" fmla="val 3669"/>
+              <a:gd name="adj" fmla="val 4629"/>
             </a:avLst>
           </a:prstGeom>
           <a:solidFill>
@@ -12021,8 +12359,8 @@
         </p:nvSpPr>
         <p:spPr>
           <a:xfrm>
-            <a:off x="5056632" y="3200400"/>
-            <a:ext cx="54864" cy="1993392"/>
+            <a:off x="5056632" y="3291840"/>
+            <a:ext cx="64008" cy="1975104"/>
           </a:xfrm>
           <a:prstGeom prst="rect">
             <a:avLst/>
@@ -12065,7 +12403,7 @@
         </p:nvSpPr>
         <p:spPr>
           <a:xfrm>
-            <a:off x="5330952" y="3456432"/>
+            <a:off x="5349240" y="3566160"/>
             <a:ext cx="3474720" cy="777240"/>
           </a:xfrm>
           <a:prstGeom prst="rect">
@@ -12091,27 +12429,72 @@
               </a:spcAft>
             </a:pPr>
             <a:r>
-              <a:rPr sz="4000" b="0" i="0">
+              <a:rPr sz="4200" b="0" i="0">
+                <a:solidFill>
+                  <a:srgbClr val="7C3AED"/>
+                </a:solidFill>
+                <a:latin typeface="Montserrat Medium"/>
+              </a:rPr>
+              <a:t>10%</a:t>
+            </a:r>
+          </a:p>
+        </p:txBody>
+      </p:sp>
+      <p:sp>
+        <p:nvSpPr>
+          <p:cNvPr id="26" name="TextBox 25"/>
+          <p:cNvSpPr txBox="1"/>
+          <p:nvPr/>
+        </p:nvSpPr>
+        <p:spPr>
+          <a:xfrm>
+            <a:off x="5349240" y="4389120"/>
+            <a:ext cx="3474720" cy="365760"/>
+          </a:xfrm>
+          <a:prstGeom prst="rect">
+            <a:avLst/>
+          </a:prstGeom>
+          <a:noFill/>
+        </p:spPr>
+        <p:txBody>
+          <a:bodyPr wrap="square" lIns="0" rIns="0" tIns="0" bIns="0" anchor="t">
+            <a:noAutofit/>
+          </a:bodyPr>
+          <a:lstStyle/>
+          <a:p>
+            <a:pPr algn="l">
+              <a:lnSpc>
+                <a:spcPct val="100000"/>
+              </a:lnSpc>
+              <a:spcBef>
+                <a:spcPts val="0"/>
+              </a:spcBef>
+              <a:spcAft>
+                <a:spcPts val="0"/>
+              </a:spcAft>
+            </a:pPr>
+            <a:r>
+              <a:rPr sz="1500" b="0" i="0">
                 <a:solidFill>
                   <a:srgbClr val="1B1F26"/>
                 </a:solidFill>
-                <a:latin typeface="Montserrat Medium"/>
-              </a:rPr>
-              <a:t>10%</a:t>
-            </a:r>
-          </a:p>
-        </p:txBody>
-      </p:sp>
-      <p:sp>
-        <p:nvSpPr>
-          <p:cNvPr id="26" name="TextBox 25"/>
-          <p:cNvSpPr txBox="1"/>
-          <p:nvPr/>
-        </p:nvSpPr>
-        <p:spPr>
-          <a:xfrm>
-            <a:off x="5330952" y="4251960"/>
-            <a:ext cx="3474720" cy="365760"/>
+                <a:latin typeface="Montserrat SemiBold"/>
+              </a:rPr>
+              <a:t>Average yield</a:t>
+            </a:r>
+          </a:p>
+        </p:txBody>
+      </p:sp>
+      <p:sp>
+        <p:nvSpPr>
+          <p:cNvPr id="27" name="TextBox 26"/>
+          <p:cNvSpPr txBox="1"/>
+          <p:nvPr/>
+        </p:nvSpPr>
+        <p:spPr>
+          <a:xfrm>
+            <a:off x="5349240" y="4736592"/>
+            <a:ext cx="3474720" cy="457200"/>
           </a:xfrm>
           <a:prstGeom prst="rect">
             <a:avLst/>
@@ -12126,51 +12509,6 @@
           <a:p>
             <a:pPr algn="l">
               <a:lnSpc>
-                <a:spcPct val="100000"/>
-              </a:lnSpc>
-              <a:spcBef>
-                <a:spcPts val="0"/>
-              </a:spcBef>
-              <a:spcAft>
-                <a:spcPts val="0"/>
-              </a:spcAft>
-            </a:pPr>
-            <a:r>
-              <a:rPr sz="1400" b="0" i="0">
-                <a:solidFill>
-                  <a:srgbClr val="1B1F26"/>
-                </a:solidFill>
-                <a:latin typeface="Montserrat SemiBold"/>
-              </a:rPr>
-              <a:t>Average yield</a:t>
-            </a:r>
-          </a:p>
-        </p:txBody>
-      </p:sp>
-      <p:sp>
-        <p:nvSpPr>
-          <p:cNvPr id="27" name="TextBox 26"/>
-          <p:cNvSpPr txBox="1"/>
-          <p:nvPr/>
-        </p:nvSpPr>
-        <p:spPr>
-          <a:xfrm>
-            <a:off x="5330952" y="4617720"/>
-            <a:ext cx="3474720" cy="457200"/>
-          </a:xfrm>
-          <a:prstGeom prst="rect">
-            <a:avLst/>
-          </a:prstGeom>
-          <a:noFill/>
-        </p:spPr>
-        <p:txBody>
-          <a:bodyPr wrap="square" lIns="0" rIns="0" tIns="0" bIns="0" anchor="t">
-            <a:noAutofit/>
-          </a:bodyPr>
-          <a:lstStyle/>
-          <a:p>
-            <a:pPr algn="l">
-              <a:lnSpc>
                 <a:spcPct val="110000"/>
               </a:lnSpc>
               <a:spcBef>
@@ -12181,7 +12519,7 @@
               </a:spcAft>
             </a:pPr>
             <a:r>
-              <a:rPr sz="1100" b="0" i="0">
+              <a:rPr sz="1200" b="0" i="0">
                 <a:solidFill>
                   <a:srgbClr val="6A707B"/>
                 </a:solidFill>
@@ -12200,12 +12538,12 @@
         </p:nvSpPr>
         <p:spPr>
           <a:xfrm>
-            <a:off x="758952" y="5303520"/>
-            <a:ext cx="3931920" cy="1993392"/>
+            <a:off x="758952" y="5394960"/>
+            <a:ext cx="3931920" cy="1975104"/>
           </a:xfrm>
           <a:prstGeom prst="roundRect">
             <a:avLst>
-              <a:gd name="adj" fmla="val 3669"/>
+              <a:gd name="adj" fmla="val 4629"/>
             </a:avLst>
           </a:prstGeom>
           <a:solidFill>
@@ -12248,8 +12586,8 @@
         </p:nvSpPr>
         <p:spPr>
           <a:xfrm>
-            <a:off x="758952" y="5303520"/>
-            <a:ext cx="54864" cy="1993392"/>
+            <a:off x="758952" y="5394960"/>
+            <a:ext cx="64008" cy="1975104"/>
           </a:xfrm>
           <a:prstGeom prst="rect">
             <a:avLst/>
@@ -12292,7 +12630,7 @@
         </p:nvSpPr>
         <p:spPr>
           <a:xfrm>
-            <a:off x="1033271" y="5559552"/>
+            <a:off x="1051560" y="5669280"/>
             <a:ext cx="3474720" cy="777240"/>
           </a:xfrm>
           <a:prstGeom prst="rect">
@@ -12318,27 +12656,72 @@
               </a:spcAft>
             </a:pPr>
             <a:r>
-              <a:rPr sz="4000" b="0" i="0">
+              <a:rPr sz="4200" b="0" i="0">
+                <a:solidFill>
+                  <a:srgbClr val="7C3AED"/>
+                </a:solidFill>
+                <a:latin typeface="Montserrat Medium"/>
+              </a:rPr>
+              <a:t>$5M</a:t>
+            </a:r>
+          </a:p>
+        </p:txBody>
+      </p:sp>
+      <p:sp>
+        <p:nvSpPr>
+          <p:cNvPr id="31" name="TextBox 30"/>
+          <p:cNvSpPr txBox="1"/>
+          <p:nvPr/>
+        </p:nvSpPr>
+        <p:spPr>
+          <a:xfrm>
+            <a:off x="1051560" y="6492240"/>
+            <a:ext cx="3474720" cy="365760"/>
+          </a:xfrm>
+          <a:prstGeom prst="rect">
+            <a:avLst/>
+          </a:prstGeom>
+          <a:noFill/>
+        </p:spPr>
+        <p:txBody>
+          <a:bodyPr wrap="square" lIns="0" rIns="0" tIns="0" bIns="0" anchor="t">
+            <a:noAutofit/>
+          </a:bodyPr>
+          <a:lstStyle/>
+          <a:p>
+            <a:pPr algn="l">
+              <a:lnSpc>
+                <a:spcPct val="100000"/>
+              </a:lnSpc>
+              <a:spcBef>
+                <a:spcPts val="0"/>
+              </a:spcBef>
+              <a:spcAft>
+                <a:spcPts val="0"/>
+              </a:spcAft>
+            </a:pPr>
+            <a:r>
+              <a:rPr sz="1500" b="0" i="0">
                 <a:solidFill>
                   <a:srgbClr val="1B1F26"/>
                 </a:solidFill>
-                <a:latin typeface="Montserrat Medium"/>
-              </a:rPr>
-              <a:t>$5M</a:t>
-            </a:r>
-          </a:p>
-        </p:txBody>
-      </p:sp>
-      <p:sp>
-        <p:nvSpPr>
-          <p:cNvPr id="31" name="TextBox 30"/>
-          <p:cNvSpPr txBox="1"/>
-          <p:nvPr/>
-        </p:nvSpPr>
-        <p:spPr>
-          <a:xfrm>
-            <a:off x="1033271" y="6355080"/>
-            <a:ext cx="3474720" cy="365760"/>
+                <a:latin typeface="Montserrat SemiBold"/>
+              </a:rPr>
+              <a:t>Savings unlocked</a:t>
+            </a:r>
+          </a:p>
+        </p:txBody>
+      </p:sp>
+      <p:sp>
+        <p:nvSpPr>
+          <p:cNvPr id="32" name="TextBox 31"/>
+          <p:cNvSpPr txBox="1"/>
+          <p:nvPr/>
+        </p:nvSpPr>
+        <p:spPr>
+          <a:xfrm>
+            <a:off x="1051560" y="6839712"/>
+            <a:ext cx="3474720" cy="457200"/>
           </a:xfrm>
           <a:prstGeom prst="rect">
             <a:avLst/>
@@ -12353,51 +12736,6 @@
           <a:p>
             <a:pPr algn="l">
               <a:lnSpc>
-                <a:spcPct val="100000"/>
-              </a:lnSpc>
-              <a:spcBef>
-                <a:spcPts val="0"/>
-              </a:spcBef>
-              <a:spcAft>
-                <a:spcPts val="0"/>
-              </a:spcAft>
-            </a:pPr>
-            <a:r>
-              <a:rPr sz="1400" b="0" i="0">
-                <a:solidFill>
-                  <a:srgbClr val="1B1F26"/>
-                </a:solidFill>
-                <a:latin typeface="Montserrat SemiBold"/>
-              </a:rPr>
-              <a:t>Savings unlocked</a:t>
-            </a:r>
-          </a:p>
-        </p:txBody>
-      </p:sp>
-      <p:sp>
-        <p:nvSpPr>
-          <p:cNvPr id="32" name="TextBox 31"/>
-          <p:cNvSpPr txBox="1"/>
-          <p:nvPr/>
-        </p:nvSpPr>
-        <p:spPr>
-          <a:xfrm>
-            <a:off x="1033271" y="6720840"/>
-            <a:ext cx="3474720" cy="457200"/>
-          </a:xfrm>
-          <a:prstGeom prst="rect">
-            <a:avLst/>
-          </a:prstGeom>
-          <a:noFill/>
-        </p:spPr>
-        <p:txBody>
-          <a:bodyPr wrap="square" lIns="0" rIns="0" tIns="0" bIns="0" anchor="t">
-            <a:noAutofit/>
-          </a:bodyPr>
-          <a:lstStyle/>
-          <a:p>
-            <a:pPr algn="l">
-              <a:lnSpc>
                 <a:spcPct val="110000"/>
               </a:lnSpc>
               <a:spcBef>
@@ -12408,7 +12746,7 @@
               </a:spcAft>
             </a:pPr>
             <a:r>
-              <a:rPr sz="1100" b="0" i="0">
+              <a:rPr sz="1200" b="0" i="0">
                 <a:solidFill>
                   <a:srgbClr val="6A707B"/>
                 </a:solidFill>
@@ -12427,12 +12765,12 @@
         </p:nvSpPr>
         <p:spPr>
           <a:xfrm>
-            <a:off x="5056632" y="5303520"/>
-            <a:ext cx="3931920" cy="1993392"/>
+            <a:off x="5056632" y="5394960"/>
+            <a:ext cx="3931920" cy="1975104"/>
           </a:xfrm>
           <a:prstGeom prst="roundRect">
             <a:avLst>
-              <a:gd name="adj" fmla="val 3669"/>
+              <a:gd name="adj" fmla="val 4629"/>
             </a:avLst>
           </a:prstGeom>
           <a:solidFill>
@@ -12475,8 +12813,8 @@
         </p:nvSpPr>
         <p:spPr>
           <a:xfrm>
-            <a:off x="5056632" y="5303520"/>
-            <a:ext cx="54864" cy="1993392"/>
+            <a:off x="5056632" y="5394960"/>
+            <a:ext cx="64008" cy="1975104"/>
           </a:xfrm>
           <a:prstGeom prst="rect">
             <a:avLst/>
@@ -12519,7 +12857,7 @@
         </p:nvSpPr>
         <p:spPr>
           <a:xfrm>
-            <a:off x="5330952" y="5559552"/>
+            <a:off x="5349240" y="5669280"/>
             <a:ext cx="3474720" cy="777240"/>
           </a:xfrm>
           <a:prstGeom prst="rect">
@@ -12545,27 +12883,72 @@
               </a:spcAft>
             </a:pPr>
             <a:r>
-              <a:rPr sz="4000" b="0" i="0">
+              <a:rPr sz="4200" b="0" i="0">
+                <a:solidFill>
+                  <a:srgbClr val="7C3AED"/>
+                </a:solidFill>
+                <a:latin typeface="Montserrat Medium"/>
+              </a:rPr>
+              <a:t>$15.5M</a:t>
+            </a:r>
+          </a:p>
+        </p:txBody>
+      </p:sp>
+      <p:sp>
+        <p:nvSpPr>
+          <p:cNvPr id="36" name="TextBox 35"/>
+          <p:cNvSpPr txBox="1"/>
+          <p:nvPr/>
+        </p:nvSpPr>
+        <p:spPr>
+          <a:xfrm>
+            <a:off x="5349240" y="6492240"/>
+            <a:ext cx="3474720" cy="365760"/>
+          </a:xfrm>
+          <a:prstGeom prst="rect">
+            <a:avLst/>
+          </a:prstGeom>
+          <a:noFill/>
+        </p:spPr>
+        <p:txBody>
+          <a:bodyPr wrap="square" lIns="0" rIns="0" tIns="0" bIns="0" anchor="t">
+            <a:noAutofit/>
+          </a:bodyPr>
+          <a:lstStyle/>
+          <a:p>
+            <a:pPr algn="l">
+              <a:lnSpc>
+                <a:spcPct val="100000"/>
+              </a:lnSpc>
+              <a:spcBef>
+                <a:spcPts val="0"/>
+              </a:spcBef>
+              <a:spcAft>
+                <a:spcPts val="0"/>
+              </a:spcAft>
+            </a:pPr>
+            <a:r>
+              <a:rPr sz="1500" b="0" i="0">
                 <a:solidFill>
                   <a:srgbClr val="1B1F26"/>
                 </a:solidFill>
-                <a:latin typeface="Montserrat Medium"/>
-              </a:rPr>
-              <a:t>$15.5M</a:t>
-            </a:r>
-          </a:p>
-        </p:txBody>
-      </p:sp>
-      <p:sp>
-        <p:nvSpPr>
-          <p:cNvPr id="36" name="TextBox 35"/>
-          <p:cNvSpPr txBox="1"/>
-          <p:nvPr/>
-        </p:nvSpPr>
-        <p:spPr>
-          <a:xfrm>
-            <a:off x="5330952" y="6355080"/>
-            <a:ext cx="3474720" cy="365760"/>
+                <a:latin typeface="Montserrat SemiBold"/>
+              </a:rPr>
+              <a:t>Committed savings · 2026</a:t>
+            </a:r>
+          </a:p>
+        </p:txBody>
+      </p:sp>
+      <p:sp>
+        <p:nvSpPr>
+          <p:cNvPr id="37" name="TextBox 36"/>
+          <p:cNvSpPr txBox="1"/>
+          <p:nvPr/>
+        </p:nvSpPr>
+        <p:spPr>
+          <a:xfrm>
+            <a:off x="5349240" y="6839712"/>
+            <a:ext cx="3474720" cy="457200"/>
           </a:xfrm>
           <a:prstGeom prst="rect">
             <a:avLst/>
@@ -12580,51 +12963,6 @@
           <a:p>
             <a:pPr algn="l">
               <a:lnSpc>
-                <a:spcPct val="100000"/>
-              </a:lnSpc>
-              <a:spcBef>
-                <a:spcPts val="0"/>
-              </a:spcBef>
-              <a:spcAft>
-                <a:spcPts val="0"/>
-              </a:spcAft>
-            </a:pPr>
-            <a:r>
-              <a:rPr sz="1400" b="0" i="0">
-                <a:solidFill>
-                  <a:srgbClr val="1B1F26"/>
-                </a:solidFill>
-                <a:latin typeface="Montserrat SemiBold"/>
-              </a:rPr>
-              <a:t>Committed savings · 2026</a:t>
-            </a:r>
-          </a:p>
-        </p:txBody>
-      </p:sp>
-      <p:sp>
-        <p:nvSpPr>
-          <p:cNvPr id="37" name="TextBox 36"/>
-          <p:cNvSpPr txBox="1"/>
-          <p:nvPr/>
-        </p:nvSpPr>
-        <p:spPr>
-          <a:xfrm>
-            <a:off x="5330952" y="6720840"/>
-            <a:ext cx="3474720" cy="457200"/>
-          </a:xfrm>
-          <a:prstGeom prst="rect">
-            <a:avLst/>
-          </a:prstGeom>
-          <a:noFill/>
-        </p:spPr>
-        <p:txBody>
-          <a:bodyPr wrap="square" lIns="0" rIns="0" tIns="0" bIns="0" anchor="t">
-            <a:noAutofit/>
-          </a:bodyPr>
-          <a:lstStyle/>
-          <a:p>
-            <a:pPr algn="l">
-              <a:lnSpc>
                 <a:spcPct val="110000"/>
               </a:lnSpc>
               <a:spcBef>
@@ -12635,7 +12973,7 @@
               </a:spcAft>
             </a:pPr>
             <a:r>
-              <a:rPr sz="1100" b="0" i="0">
+              <a:rPr sz="1200" b="0" i="0">
                 <a:solidFill>
                   <a:srgbClr val="6A707B"/>
                 </a:solidFill>
@@ -12654,12 +12992,12 @@
         </p:nvSpPr>
         <p:spPr>
           <a:xfrm>
-            <a:off x="758952" y="7406640"/>
-            <a:ext cx="3931920" cy="1993392"/>
+            <a:off x="758952" y="7498080"/>
+            <a:ext cx="3931920" cy="1975104"/>
           </a:xfrm>
           <a:prstGeom prst="roundRect">
             <a:avLst>
-              <a:gd name="adj" fmla="val 3669"/>
+              <a:gd name="adj" fmla="val 4629"/>
             </a:avLst>
           </a:prstGeom>
           <a:solidFill>
@@ -12702,8 +13040,8 @@
         </p:nvSpPr>
         <p:spPr>
           <a:xfrm>
-            <a:off x="758952" y="7406640"/>
-            <a:ext cx="54864" cy="1993392"/>
+            <a:off x="758952" y="7498080"/>
+            <a:ext cx="64008" cy="1975104"/>
           </a:xfrm>
           <a:prstGeom prst="rect">
             <a:avLst/>
@@ -12746,7 +13084,7 @@
         </p:nvSpPr>
         <p:spPr>
           <a:xfrm>
-            <a:off x="1033271" y="7662672"/>
+            <a:off x="1051560" y="7772400"/>
             <a:ext cx="3474720" cy="777240"/>
           </a:xfrm>
           <a:prstGeom prst="rect">
@@ -12772,27 +13110,72 @@
               </a:spcAft>
             </a:pPr>
             <a:r>
-              <a:rPr sz="4000" b="0" i="0">
+              <a:rPr sz="4200" b="0" i="0">
+                <a:solidFill>
+                  <a:srgbClr val="7C3AED"/>
+                </a:solidFill>
+                <a:latin typeface="Montserrat Medium"/>
+              </a:rPr>
+              <a:t>$265K</a:t>
+            </a:r>
+          </a:p>
+        </p:txBody>
+      </p:sp>
+      <p:sp>
+        <p:nvSpPr>
+          <p:cNvPr id="41" name="TextBox 40"/>
+          <p:cNvSpPr txBox="1"/>
+          <p:nvPr/>
+        </p:nvSpPr>
+        <p:spPr>
+          <a:xfrm>
+            <a:off x="1051560" y="8595360"/>
+            <a:ext cx="3474720" cy="365760"/>
+          </a:xfrm>
+          <a:prstGeom prst="rect">
+            <a:avLst/>
+          </a:prstGeom>
+          <a:noFill/>
+        </p:spPr>
+        <p:txBody>
+          <a:bodyPr wrap="square" lIns="0" rIns="0" tIns="0" bIns="0" anchor="t">
+            <a:noAutofit/>
+          </a:bodyPr>
+          <a:lstStyle/>
+          <a:p>
+            <a:pPr algn="l">
+              <a:lnSpc>
+                <a:spcPct val="100000"/>
+              </a:lnSpc>
+              <a:spcBef>
+                <a:spcPts val="0"/>
+              </a:spcBef>
+              <a:spcAft>
+                <a:spcPts val="0"/>
+              </a:spcAft>
+            </a:pPr>
+            <a:r>
+              <a:rPr sz="1500" b="0" i="0">
                 <a:solidFill>
                   <a:srgbClr val="1B1F26"/>
                 </a:solidFill>
-                <a:latin typeface="Montserrat Medium"/>
-              </a:rPr>
-              <a:t>$265K</a:t>
-            </a:r>
-          </a:p>
-        </p:txBody>
-      </p:sp>
-      <p:sp>
-        <p:nvSpPr>
-          <p:cNvPr id="41" name="TextBox 40"/>
-          <p:cNvSpPr txBox="1"/>
-          <p:nvPr/>
-        </p:nvSpPr>
-        <p:spPr>
-          <a:xfrm>
-            <a:off x="1033271" y="8458200"/>
-            <a:ext cx="3474720" cy="365760"/>
+                <a:latin typeface="Montserrat SemiBold"/>
+              </a:rPr>
+              <a:t>Annual platform cost</a:t>
+            </a:r>
+          </a:p>
+        </p:txBody>
+      </p:sp>
+      <p:sp>
+        <p:nvSpPr>
+          <p:cNvPr id="42" name="TextBox 41"/>
+          <p:cNvSpPr txBox="1"/>
+          <p:nvPr/>
+        </p:nvSpPr>
+        <p:spPr>
+          <a:xfrm>
+            <a:off x="1051560" y="8942832"/>
+            <a:ext cx="3474720" cy="457200"/>
           </a:xfrm>
           <a:prstGeom prst="rect">
             <a:avLst/>
@@ -12807,51 +13190,6 @@
           <a:p>
             <a:pPr algn="l">
               <a:lnSpc>
-                <a:spcPct val="100000"/>
-              </a:lnSpc>
-              <a:spcBef>
-                <a:spcPts val="0"/>
-              </a:spcBef>
-              <a:spcAft>
-                <a:spcPts val="0"/>
-              </a:spcAft>
-            </a:pPr>
-            <a:r>
-              <a:rPr sz="1400" b="0" i="0">
-                <a:solidFill>
-                  <a:srgbClr val="1B1F26"/>
-                </a:solidFill>
-                <a:latin typeface="Montserrat SemiBold"/>
-              </a:rPr>
-              <a:t>Annual platform cost</a:t>
-            </a:r>
-          </a:p>
-        </p:txBody>
-      </p:sp>
-      <p:sp>
-        <p:nvSpPr>
-          <p:cNvPr id="42" name="TextBox 41"/>
-          <p:cNvSpPr txBox="1"/>
-          <p:nvPr/>
-        </p:nvSpPr>
-        <p:spPr>
-          <a:xfrm>
-            <a:off x="1033271" y="8823960"/>
-            <a:ext cx="3474720" cy="457200"/>
-          </a:xfrm>
-          <a:prstGeom prst="rect">
-            <a:avLst/>
-          </a:prstGeom>
-          <a:noFill/>
-        </p:spPr>
-        <p:txBody>
-          <a:bodyPr wrap="square" lIns="0" rIns="0" tIns="0" bIns="0" anchor="t">
-            <a:noAutofit/>
-          </a:bodyPr>
-          <a:lstStyle/>
-          <a:p>
-            <a:pPr algn="l">
-              <a:lnSpc>
                 <a:spcPct val="110000"/>
               </a:lnSpc>
               <a:spcBef>
@@ -12862,7 +13200,7 @@
               </a:spcAft>
             </a:pPr>
             <a:r>
-              <a:rPr sz="1100" b="0" i="0">
+              <a:rPr sz="1200" b="0" i="0">
                 <a:solidFill>
                   <a:srgbClr val="6A707B"/>
                 </a:solidFill>
@@ -12881,12 +13219,12 @@
         </p:nvSpPr>
         <p:spPr>
           <a:xfrm>
-            <a:off x="5056632" y="7406640"/>
-            <a:ext cx="3931920" cy="1993392"/>
+            <a:off x="5056632" y="7498080"/>
+            <a:ext cx="3931920" cy="1975104"/>
           </a:xfrm>
           <a:prstGeom prst="roundRect">
             <a:avLst>
-              <a:gd name="adj" fmla="val 3669"/>
+              <a:gd name="adj" fmla="val 4629"/>
             </a:avLst>
           </a:prstGeom>
           <a:solidFill>
@@ -12929,8 +13267,8 @@
         </p:nvSpPr>
         <p:spPr>
           <a:xfrm>
-            <a:off x="5056632" y="7406640"/>
-            <a:ext cx="54864" cy="1993392"/>
+            <a:off x="5056632" y="7498080"/>
+            <a:ext cx="64008" cy="1975104"/>
           </a:xfrm>
           <a:prstGeom prst="rect">
             <a:avLst/>
@@ -12973,7 +13311,7 @@
         </p:nvSpPr>
         <p:spPr>
           <a:xfrm>
-            <a:off x="5330952" y="7662672"/>
+            <a:off x="5349240" y="7772400"/>
             <a:ext cx="3474720" cy="777240"/>
           </a:xfrm>
           <a:prstGeom prst="rect">
@@ -12999,27 +13337,72 @@
               </a:spcAft>
             </a:pPr>
             <a:r>
-              <a:rPr sz="4000" b="0" i="0">
+              <a:rPr sz="4200" b="0" i="0">
+                <a:solidFill>
+                  <a:srgbClr val="7C3AED"/>
+                </a:solidFill>
+                <a:latin typeface="Montserrat Medium"/>
+              </a:rPr>
+              <a:t>1 : 58</a:t>
+            </a:r>
+          </a:p>
+        </p:txBody>
+      </p:sp>
+      <p:sp>
+        <p:nvSpPr>
+          <p:cNvPr id="46" name="TextBox 45"/>
+          <p:cNvSpPr txBox="1"/>
+          <p:nvPr/>
+        </p:nvSpPr>
+        <p:spPr>
+          <a:xfrm>
+            <a:off x="5349240" y="8595360"/>
+            <a:ext cx="3474720" cy="365760"/>
+          </a:xfrm>
+          <a:prstGeom prst="rect">
+            <a:avLst/>
+          </a:prstGeom>
+          <a:noFill/>
+        </p:spPr>
+        <p:txBody>
+          <a:bodyPr wrap="square" lIns="0" rIns="0" tIns="0" bIns="0" anchor="t">
+            <a:noAutofit/>
+          </a:bodyPr>
+          <a:lstStyle/>
+          <a:p>
+            <a:pPr algn="l">
+              <a:lnSpc>
+                <a:spcPct val="100000"/>
+              </a:lnSpc>
+              <a:spcBef>
+                <a:spcPts val="0"/>
+              </a:spcBef>
+              <a:spcAft>
+                <a:spcPts val="0"/>
+              </a:spcAft>
+            </a:pPr>
+            <a:r>
+              <a:rPr sz="1500" b="0" i="0">
                 <a:solidFill>
                   <a:srgbClr val="1B1F26"/>
                 </a:solidFill>
-                <a:latin typeface="Montserrat Medium"/>
-              </a:rPr>
-              <a:t>1 : 58</a:t>
-            </a:r>
-          </a:p>
-        </p:txBody>
-      </p:sp>
-      <p:sp>
-        <p:nvSpPr>
-          <p:cNvPr id="46" name="TextBox 45"/>
-          <p:cNvSpPr txBox="1"/>
-          <p:nvPr/>
-        </p:nvSpPr>
-        <p:spPr>
-          <a:xfrm>
-            <a:off x="5330952" y="8458200"/>
-            <a:ext cx="3474720" cy="365760"/>
+                <a:latin typeface="Montserrat SemiBold"/>
+              </a:rPr>
+              <a:t>Return on investment</a:t>
+            </a:r>
+          </a:p>
+        </p:txBody>
+      </p:sp>
+      <p:sp>
+        <p:nvSpPr>
+          <p:cNvPr id="47" name="TextBox 46"/>
+          <p:cNvSpPr txBox="1"/>
+          <p:nvPr/>
+        </p:nvSpPr>
+        <p:spPr>
+          <a:xfrm>
+            <a:off x="5349240" y="8942832"/>
+            <a:ext cx="3474720" cy="457200"/>
           </a:xfrm>
           <a:prstGeom prst="rect">
             <a:avLst/>
@@ -13034,51 +13417,6 @@
           <a:p>
             <a:pPr algn="l">
               <a:lnSpc>
-                <a:spcPct val="100000"/>
-              </a:lnSpc>
-              <a:spcBef>
-                <a:spcPts val="0"/>
-              </a:spcBef>
-              <a:spcAft>
-                <a:spcPts val="0"/>
-              </a:spcAft>
-            </a:pPr>
-            <a:r>
-              <a:rPr sz="1400" b="0" i="0">
-                <a:solidFill>
-                  <a:srgbClr val="1B1F26"/>
-                </a:solidFill>
-                <a:latin typeface="Montserrat SemiBold"/>
-              </a:rPr>
-              <a:t>Return on investment</a:t>
-            </a:r>
-          </a:p>
-        </p:txBody>
-      </p:sp>
-      <p:sp>
-        <p:nvSpPr>
-          <p:cNvPr id="47" name="TextBox 46"/>
-          <p:cNvSpPr txBox="1"/>
-          <p:nvPr/>
-        </p:nvSpPr>
-        <p:spPr>
-          <a:xfrm>
-            <a:off x="5330952" y="8823960"/>
-            <a:ext cx="3474720" cy="457200"/>
-          </a:xfrm>
-          <a:prstGeom prst="rect">
-            <a:avLst/>
-          </a:prstGeom>
-          <a:noFill/>
-        </p:spPr>
-        <p:txBody>
-          <a:bodyPr wrap="square" lIns="0" rIns="0" tIns="0" bIns="0" anchor="t">
-            <a:noAutofit/>
-          </a:bodyPr>
-          <a:lstStyle/>
-          <a:p>
-            <a:pPr algn="l">
-              <a:lnSpc>
                 <a:spcPct val="110000"/>
               </a:lnSpc>
               <a:spcBef>
@@ -13089,7 +13427,7 @@
               </a:spcAft>
             </a:pPr>
             <a:r>
-              <a:rPr sz="1100" b="0" i="0">
+              <a:rPr sz="1200" b="0" i="0">
                 <a:solidFill>
                   <a:srgbClr val="6A707B"/>
                 </a:solidFill>
@@ -13108,12 +13446,12 @@
         </p:nvSpPr>
         <p:spPr>
           <a:xfrm>
-            <a:off x="9326880" y="3200400"/>
-            <a:ext cx="8202168" cy="2743200"/>
+            <a:off x="9326880" y="3291840"/>
+            <a:ext cx="8202168" cy="2788920"/>
           </a:xfrm>
           <a:prstGeom prst="roundRect">
             <a:avLst>
-              <a:gd name="adj" fmla="val 3333"/>
+              <a:gd name="adj" fmla="val 3934"/>
             </a:avLst>
           </a:prstGeom>
           <a:solidFill>
@@ -13156,8 +13494,8 @@
         </p:nvSpPr>
         <p:spPr>
           <a:xfrm>
-            <a:off x="9692640" y="3493008"/>
-            <a:ext cx="7470648" cy="274320"/>
+            <a:off x="9738359" y="3602736"/>
+            <a:ext cx="7379208" cy="274320"/>
           </a:xfrm>
           <a:prstGeom prst="rect">
             <a:avLst/>
@@ -13182,7 +13520,7 @@
               </a:spcAft>
             </a:pPr>
             <a:r>
-              <a:rPr sz="1100" b="1" i="0" spc="120">
+              <a:rPr sz="1200" b="1" i="0" spc="120">
                 <a:solidFill>
                   <a:srgbClr val="7C3AED"/>
                 </a:solidFill>
@@ -13201,17 +13539,25 @@
         </p:nvSpPr>
         <p:spPr>
           <a:xfrm>
-            <a:off x="9875519" y="4800600"/>
-            <a:ext cx="1371600" cy="731520"/>
+            <a:off x="10012680" y="4869917"/>
+            <a:ext cx="1417320" cy="707922"/>
           </a:xfrm>
           <a:prstGeom prst="roundRect">
             <a:avLst>
-              <a:gd name="adj" fmla="val 3750"/>
+              <a:gd name="adj" fmla="val 5166"/>
             </a:avLst>
           </a:prstGeom>
-          <a:solidFill>
-            <a:srgbClr val="C4A8F7"/>
-          </a:solidFill>
+          <a:gradFill rotWithShape="1">
+            <a:gsLst>
+              <a:gs pos="0">
+                <a:srgbClr val="C4A8F7"/>
+              </a:gs>
+              <a:gs pos="100000">
+                <a:srgbClr val="A78BFA"/>
+              </a:gs>
+            </a:gsLst>
+            <a:lin scaled="0" ang="16200000"/>
+          </a:gradFill>
           <a:ln>
             <a:noFill/>
           </a:ln>
@@ -13247,8 +13593,8 @@
         </p:nvSpPr>
         <p:spPr>
           <a:xfrm>
-            <a:off x="9601199" y="4416552"/>
-            <a:ext cx="1920240" cy="365760"/>
+            <a:off x="9692640" y="4412717"/>
+            <a:ext cx="2057400" cy="411480"/>
           </a:xfrm>
           <a:prstGeom prst="rect">
             <a:avLst/>
@@ -13273,27 +13619,72 @@
               </a:spcAft>
             </a:pPr>
             <a:r>
-              <a:rPr sz="1800" b="0" i="0">
+              <a:rPr sz="2000" b="0" i="0">
+                <a:solidFill>
+                  <a:srgbClr val="7C3AED"/>
+                </a:solidFill>
+                <a:latin typeface="Montserrat SemiBold"/>
+              </a:rPr>
+              <a:t>$8M</a:t>
+            </a:r>
+          </a:p>
+        </p:txBody>
+      </p:sp>
+      <p:sp>
+        <p:nvSpPr>
+          <p:cNvPr id="52" name="TextBox 51"/>
+          <p:cNvSpPr txBox="1"/>
+          <p:nvPr/>
+        </p:nvSpPr>
+        <p:spPr>
+          <a:xfrm>
+            <a:off x="9692640" y="5632704"/>
+            <a:ext cx="2057400" cy="256032"/>
+          </a:xfrm>
+          <a:prstGeom prst="rect">
+            <a:avLst/>
+          </a:prstGeom>
+          <a:noFill/>
+        </p:spPr>
+        <p:txBody>
+          <a:bodyPr wrap="square" lIns="0" rIns="0" tIns="0" bIns="0" anchor="t">
+            <a:noAutofit/>
+          </a:bodyPr>
+          <a:lstStyle/>
+          <a:p>
+            <a:pPr algn="ctr">
+              <a:lnSpc>
+                <a:spcPct val="100000"/>
+              </a:lnSpc>
+              <a:spcBef>
+                <a:spcPts val="0"/>
+              </a:spcBef>
+              <a:spcAft>
+                <a:spcPts val="0"/>
+              </a:spcAft>
+            </a:pPr>
+            <a:r>
+              <a:rPr sz="1300" b="0" i="0">
                 <a:solidFill>
                   <a:srgbClr val="1B1F26"/>
                 </a:solidFill>
-                <a:latin typeface="Montserrat Medium"/>
-              </a:rPr>
-              <a:t>$8M</a:t>
-            </a:r>
-          </a:p>
-        </p:txBody>
-      </p:sp>
-      <p:sp>
-        <p:nvSpPr>
-          <p:cNvPr id="52" name="TextBox 51"/>
-          <p:cNvSpPr txBox="1"/>
-          <p:nvPr/>
-        </p:nvSpPr>
-        <p:spPr>
-          <a:xfrm>
-            <a:off x="9601199" y="5577840"/>
-            <a:ext cx="1920240" cy="228600"/>
+                <a:latin typeface="Montserrat SemiBold"/>
+              </a:rPr>
+              <a:t>2025</a:t>
+            </a:r>
+          </a:p>
+        </p:txBody>
+      </p:sp>
+      <p:sp>
+        <p:nvSpPr>
+          <p:cNvPr id="53" name="TextBox 52"/>
+          <p:cNvSpPr txBox="1"/>
+          <p:nvPr/>
+        </p:nvSpPr>
+        <p:spPr>
+          <a:xfrm>
+            <a:off x="9692640" y="5888736"/>
+            <a:ext cx="2057400" cy="228600"/>
           </a:xfrm>
           <a:prstGeom prst="rect">
             <a:avLst/>
@@ -13318,58 +13709,13 @@
               </a:spcAft>
             </a:pPr>
             <a:r>
-              <a:rPr sz="1200" b="0" i="0">
-                <a:solidFill>
-                  <a:srgbClr val="1B1F26"/>
-                </a:solidFill>
-                <a:latin typeface="Montserrat SemiBold"/>
-              </a:rPr>
-              <a:t>2025</a:t>
-            </a:r>
-          </a:p>
-        </p:txBody>
-      </p:sp>
-      <p:sp>
-        <p:nvSpPr>
-          <p:cNvPr id="53" name="TextBox 52"/>
-          <p:cNvSpPr txBox="1"/>
-          <p:nvPr/>
-        </p:nvSpPr>
-        <p:spPr>
-          <a:xfrm>
-            <a:off x="9601199" y="5824728"/>
-            <a:ext cx="1920240" cy="228600"/>
-          </a:xfrm>
-          <a:prstGeom prst="rect">
-            <a:avLst/>
-          </a:prstGeom>
-          <a:noFill/>
-        </p:spPr>
-        <p:txBody>
-          <a:bodyPr wrap="square" lIns="0" rIns="0" tIns="0" bIns="0" anchor="t">
-            <a:noAutofit/>
-          </a:bodyPr>
-          <a:lstStyle/>
-          <a:p>
-            <a:pPr algn="ctr">
-              <a:lnSpc>
-                <a:spcPct val="100000"/>
-              </a:lnSpc>
-              <a:spcBef>
-                <a:spcPts val="0"/>
-              </a:spcBef>
-              <a:spcAft>
-                <a:spcPts val="0"/>
-              </a:spcAft>
-            </a:pPr>
-            <a:r>
-              <a:rPr sz="1000" b="0" i="0">
+              <a:rPr sz="1100" b="0" i="0">
                 <a:solidFill>
                   <a:srgbClr val="6A707B"/>
                 </a:solidFill>
                 <a:latin typeface="Montserrat"/>
               </a:rPr>
-              <a:t>$8M delivered</a:t>
+              <a:t>delivered</a:t>
             </a:r>
           </a:p>
         </p:txBody>
@@ -13382,17 +13728,25 @@
         </p:nvSpPr>
         <p:spPr>
           <a:xfrm>
-            <a:off x="12252959" y="4114800"/>
-            <a:ext cx="1371600" cy="1417320"/>
+            <a:off x="12344400" y="4206240"/>
+            <a:ext cx="1417320" cy="1371600"/>
           </a:xfrm>
           <a:prstGeom prst="roundRect">
             <a:avLst>
-              <a:gd name="adj" fmla="val 2000"/>
+              <a:gd name="adj" fmla="val 2666"/>
             </a:avLst>
           </a:prstGeom>
-          <a:solidFill>
-            <a:srgbClr val="7C3AED"/>
-          </a:solidFill>
+          <a:gradFill rotWithShape="1">
+            <a:gsLst>
+              <a:gs pos="0">
+                <a:srgbClr val="8B5CF6"/>
+              </a:gs>
+              <a:gs pos="100000">
+                <a:srgbClr val="6D28D9"/>
+              </a:gs>
+            </a:gsLst>
+            <a:lin scaled="0" ang="16200000"/>
+          </a:gradFill>
           <a:ln>
             <a:noFill/>
           </a:ln>
@@ -13428,8 +13782,8 @@
         </p:nvSpPr>
         <p:spPr>
           <a:xfrm>
-            <a:off x="11978639" y="3730752"/>
-            <a:ext cx="1920240" cy="365760"/>
+            <a:off x="12024360" y="3749040"/>
+            <a:ext cx="2057400" cy="411480"/>
           </a:xfrm>
           <a:prstGeom prst="rect">
             <a:avLst/>
@@ -13454,27 +13808,72 @@
               </a:spcAft>
             </a:pPr>
             <a:r>
-              <a:rPr sz="1800" b="0" i="0">
+              <a:rPr sz="2000" b="0" i="0">
+                <a:solidFill>
+                  <a:srgbClr val="7C3AED"/>
+                </a:solidFill>
+                <a:latin typeface="Montserrat SemiBold"/>
+              </a:rPr>
+              <a:t>$15.5M</a:t>
+            </a:r>
+          </a:p>
+        </p:txBody>
+      </p:sp>
+      <p:sp>
+        <p:nvSpPr>
+          <p:cNvPr id="56" name="TextBox 55"/>
+          <p:cNvSpPr txBox="1"/>
+          <p:nvPr/>
+        </p:nvSpPr>
+        <p:spPr>
+          <a:xfrm>
+            <a:off x="12024360" y="5632704"/>
+            <a:ext cx="2057400" cy="256032"/>
+          </a:xfrm>
+          <a:prstGeom prst="rect">
+            <a:avLst/>
+          </a:prstGeom>
+          <a:noFill/>
+        </p:spPr>
+        <p:txBody>
+          <a:bodyPr wrap="square" lIns="0" rIns="0" tIns="0" bIns="0" anchor="t">
+            <a:noAutofit/>
+          </a:bodyPr>
+          <a:lstStyle/>
+          <a:p>
+            <a:pPr algn="ctr">
+              <a:lnSpc>
+                <a:spcPct val="100000"/>
+              </a:lnSpc>
+              <a:spcBef>
+                <a:spcPts val="0"/>
+              </a:spcBef>
+              <a:spcAft>
+                <a:spcPts val="0"/>
+              </a:spcAft>
+            </a:pPr>
+            <a:r>
+              <a:rPr sz="1300" b="0" i="0">
                 <a:solidFill>
                   <a:srgbClr val="1B1F26"/>
                 </a:solidFill>
-                <a:latin typeface="Montserrat Medium"/>
-              </a:rPr>
-              <a:t>$15.5M</a:t>
-            </a:r>
-          </a:p>
-        </p:txBody>
-      </p:sp>
-      <p:sp>
-        <p:nvSpPr>
-          <p:cNvPr id="56" name="TextBox 55"/>
-          <p:cNvSpPr txBox="1"/>
-          <p:nvPr/>
-        </p:nvSpPr>
-        <p:spPr>
-          <a:xfrm>
-            <a:off x="11978639" y="5577840"/>
-            <a:ext cx="1920240" cy="228600"/>
+                <a:latin typeface="Montserrat SemiBold"/>
+              </a:rPr>
+              <a:t>2026</a:t>
+            </a:r>
+          </a:p>
+        </p:txBody>
+      </p:sp>
+      <p:sp>
+        <p:nvSpPr>
+          <p:cNvPr id="57" name="TextBox 56"/>
+          <p:cNvSpPr txBox="1"/>
+          <p:nvPr/>
+        </p:nvSpPr>
+        <p:spPr>
+          <a:xfrm>
+            <a:off x="12024360" y="5888736"/>
+            <a:ext cx="2057400" cy="228600"/>
           </a:xfrm>
           <a:prstGeom prst="rect">
             <a:avLst/>
@@ -13499,58 +13898,13 @@
               </a:spcAft>
             </a:pPr>
             <a:r>
-              <a:rPr sz="1200" b="0" i="0">
-                <a:solidFill>
-                  <a:srgbClr val="1B1F26"/>
-                </a:solidFill>
-                <a:latin typeface="Montserrat SemiBold"/>
-              </a:rPr>
-              <a:t>2026</a:t>
-            </a:r>
-          </a:p>
-        </p:txBody>
-      </p:sp>
-      <p:sp>
-        <p:nvSpPr>
-          <p:cNvPr id="57" name="TextBox 56"/>
-          <p:cNvSpPr txBox="1"/>
-          <p:nvPr/>
-        </p:nvSpPr>
-        <p:spPr>
-          <a:xfrm>
-            <a:off x="11978639" y="5824728"/>
-            <a:ext cx="1920240" cy="228600"/>
-          </a:xfrm>
-          <a:prstGeom prst="rect">
-            <a:avLst/>
-          </a:prstGeom>
-          <a:noFill/>
-        </p:spPr>
-        <p:txBody>
-          <a:bodyPr wrap="square" lIns="0" rIns="0" tIns="0" bIns="0" anchor="t">
-            <a:noAutofit/>
-          </a:bodyPr>
-          <a:lstStyle/>
-          <a:p>
-            <a:pPr algn="ctr">
-              <a:lnSpc>
-                <a:spcPct val="100000"/>
-              </a:lnSpc>
-              <a:spcBef>
-                <a:spcPts val="0"/>
-              </a:spcBef>
-              <a:spcAft>
-                <a:spcPts val="0"/>
-              </a:spcAft>
-            </a:pPr>
-            <a:r>
-              <a:rPr sz="1000" b="0" i="0">
+              <a:rPr sz="1100" b="0" i="0">
                 <a:solidFill>
                   <a:srgbClr val="6A707B"/>
                 </a:solidFill>
                 <a:latin typeface="Montserrat"/>
               </a:rPr>
-              <a:t>$15.5M committed</a:t>
+              <a:t>committed</a:t>
             </a:r>
           </a:p>
         </p:txBody>
@@ -13563,8 +13917,8 @@
         </p:nvCxnSpPr>
         <p:spPr>
           <a:xfrm>
-            <a:off x="9738359" y="5532120"/>
-            <a:ext cx="4937760" cy="0"/>
+            <a:off x="9829800" y="5577840"/>
+            <a:ext cx="5029200" cy="0"/>
           </a:xfrm>
           <a:prstGeom prst="bentConnector3">
             <a:avLst/>
@@ -13599,8 +13953,8 @@
         </p:nvSpPr>
         <p:spPr>
           <a:xfrm>
-            <a:off x="14721840" y="4114800"/>
-            <a:ext cx="2532888" cy="1645920"/>
+            <a:off x="14584680" y="4160520"/>
+            <a:ext cx="2624328" cy="1737360"/>
           </a:xfrm>
           <a:prstGeom prst="rect">
             <a:avLst/>
@@ -13615,17 +13969,17 @@
           <a:p>
             <a:pPr algn="l">
               <a:lnSpc>
-                <a:spcPct val="115000"/>
-              </a:lnSpc>
-              <a:spcBef>
-                <a:spcPts val="0"/>
-              </a:spcBef>
-              <a:spcAft>
-                <a:spcPts val="0"/>
-              </a:spcAft>
-            </a:pPr>
-            <a:r>
-              <a:rPr sz="3000" b="0" i="0">
+                <a:spcPct val="118000"/>
+              </a:lnSpc>
+              <a:spcBef>
+                <a:spcPts val="0"/>
+              </a:spcBef>
+              <a:spcAft>
+                <a:spcPts val="0"/>
+              </a:spcAft>
+            </a:pPr>
+            <a:r>
+              <a:rPr sz="3600" b="0" i="0">
                 <a:solidFill>
                   <a:srgbClr val="7C3AED"/>
                 </a:solidFill>
@@ -13637,17 +13991,17 @@
           <a:p>
             <a:pPr algn="l">
               <a:lnSpc>
-                <a:spcPct val="115000"/>
-              </a:lnSpc>
-              <a:spcBef>
-                <a:spcPts val="0"/>
-              </a:spcBef>
-              <a:spcAft>
-                <a:spcPts val="0"/>
-              </a:spcAft>
-            </a:pPr>
-            <a:r>
-              <a:rPr sz="1200" b="0" i="0">
+                <a:spcPct val="118000"/>
+              </a:lnSpc>
+              <a:spcBef>
+                <a:spcPts val="0"/>
+              </a:spcBef>
+              <a:spcAft>
+                <a:spcPts val="0"/>
+              </a:spcAft>
+            </a:pPr>
+            <a:r>
+              <a:rPr sz="1300" b="0" i="0">
                 <a:solidFill>
                   <a:srgbClr val="484E59"/>
                 </a:solidFill>
@@ -13666,16 +14020,115 @@
         </p:nvSpPr>
         <p:spPr>
           <a:xfrm>
-            <a:off x="9326880" y="6172200"/>
-            <a:ext cx="8202168" cy="3108960"/>
+            <a:off x="9326880" y="6355080"/>
+            <a:ext cx="8202168" cy="2743200"/>
           </a:xfrm>
           <a:prstGeom prst="roundRect">
             <a:avLst>
-              <a:gd name="adj" fmla="val 2941"/>
+              <a:gd name="adj" fmla="val 4000"/>
             </a:avLst>
           </a:prstGeom>
+          <a:gradFill rotWithShape="1">
+            <a:gsLst>
+              <a:gs pos="0">
+                <a:srgbClr val="0F766E"/>
+              </a:gs>
+              <a:gs pos="100000">
+                <a:srgbClr val="13B5A6"/>
+              </a:gs>
+            </a:gsLst>
+            <a:lin scaled="0" ang="18600000"/>
+          </a:gradFill>
+          <a:ln>
+            <a:noFill/>
+          </a:ln>
+          <a:effectLst/>
+        </p:spPr>
+        <p:style>
+          <a:lnRef idx="1">
+            <a:schemeClr val="accent1"/>
+          </a:lnRef>
+          <a:fillRef idx="3">
+            <a:schemeClr val="accent1"/>
+          </a:fillRef>
+          <a:effectRef idx="2">
+            <a:schemeClr val="accent1"/>
+          </a:effectRef>
+          <a:fontRef idx="minor">
+            <a:schemeClr val="lt1"/>
+          </a:fontRef>
+        </p:style>
+        <p:txBody>
+          <a:bodyPr rtlCol="0" anchor="ctr"/>
+          <a:lstStyle/>
+          <a:p>
+            <a:pPr algn="ctr"/>
+          </a:p>
+        </p:txBody>
+      </p:sp>
+      <p:sp>
+        <p:nvSpPr>
+          <p:cNvPr id="61" name="TextBox 60"/>
+          <p:cNvSpPr txBox="1"/>
+          <p:nvPr/>
+        </p:nvSpPr>
+        <p:spPr>
+          <a:xfrm>
+            <a:off x="9738359" y="6665976"/>
+            <a:ext cx="7379208" cy="274320"/>
+          </a:xfrm>
+          <a:prstGeom prst="rect">
+            <a:avLst/>
+          </a:prstGeom>
+          <a:noFill/>
+        </p:spPr>
+        <p:txBody>
+          <a:bodyPr wrap="square" lIns="0" rIns="0" tIns="0" bIns="0" anchor="t">
+            <a:noAutofit/>
+          </a:bodyPr>
+          <a:lstStyle/>
+          <a:p>
+            <a:pPr algn="l">
+              <a:lnSpc>
+                <a:spcPct val="100000"/>
+              </a:lnSpc>
+              <a:spcBef>
+                <a:spcPts val="0"/>
+              </a:spcBef>
+              <a:spcAft>
+                <a:spcPts val="0"/>
+              </a:spcAft>
+            </a:pPr>
+            <a:r>
+              <a:rPr sz="1200" b="1" i="0" spc="120">
+                <a:solidFill>
+                  <a:srgbClr val="CCFBF1"/>
+                </a:solidFill>
+                <a:latin typeface="Consolas"/>
+              </a:rPr>
+              <a:t>ROLLOUT ROADMAP</a:t>
+            </a:r>
+          </a:p>
+        </p:txBody>
+      </p:sp>
+      <p:sp>
+        <p:nvSpPr>
+          <p:cNvPr id="62" name="Rounded Rectangle 61"/>
+          <p:cNvSpPr/>
+          <p:nvPr/>
+        </p:nvSpPr>
+        <p:spPr>
+          <a:xfrm>
+            <a:off x="9738359" y="7223760"/>
+            <a:ext cx="2276856" cy="1554480"/>
+          </a:xfrm>
+          <a:prstGeom prst="roundRect">
+            <a:avLst>
+              <a:gd name="adj" fmla="val 4705"/>
+            </a:avLst>
+          </a:prstGeom>
           <a:solidFill>
-            <a:srgbClr val="161A2E"/>
+            <a:srgbClr val="0B5B55"/>
           </a:solidFill>
           <a:ln>
             <a:noFill/>
@@ -13706,14 +14159,14 @@
       </p:sp>
       <p:sp>
         <p:nvSpPr>
-          <p:cNvPr id="61" name="TextBox 60"/>
-          <p:cNvSpPr txBox="1"/>
-          <p:nvPr/>
-        </p:nvSpPr>
-        <p:spPr>
-          <a:xfrm>
-            <a:off x="9692640" y="6464808"/>
-            <a:ext cx="7470648" cy="274320"/>
+          <p:cNvPr id="63" name="TextBox 62"/>
+          <p:cNvSpPr txBox="1"/>
+          <p:nvPr/>
+        </p:nvSpPr>
+        <p:spPr>
+          <a:xfrm>
+            <a:off x="9994391" y="7461504"/>
+            <a:ext cx="1764792" cy="228600"/>
           </a:xfrm>
           <a:prstGeom prst="rect">
             <a:avLst/>
@@ -13738,35 +14191,170 @@
               </a:spcAft>
             </a:pPr>
             <a:r>
-              <a:rPr sz="1100" b="1" i="0" spc="120">
-                <a:solidFill>
-                  <a:srgbClr val="E0CFFA"/>
+              <a:rPr sz="1050" b="1" i="0" spc="120">
+                <a:solidFill>
+                  <a:srgbClr val="CCFBF1"/>
                 </a:solidFill>
                 <a:latin typeface="Consolas"/>
               </a:rPr>
-              <a:t>ROLLOUT ROADMAP</a:t>
-            </a:r>
-          </a:p>
-        </p:txBody>
-      </p:sp>
-      <p:sp>
-        <p:nvSpPr>
-          <p:cNvPr id="62" name="Rounded Rectangle 61"/>
+              <a:t>NOW</a:t>
+            </a:r>
+          </a:p>
+        </p:txBody>
+      </p:sp>
+      <p:sp>
+        <p:nvSpPr>
+          <p:cNvPr id="64" name="TextBox 63"/>
+          <p:cNvSpPr txBox="1"/>
+          <p:nvPr/>
+        </p:nvSpPr>
+        <p:spPr>
+          <a:xfrm>
+            <a:off x="9994391" y="7772400"/>
+            <a:ext cx="1764792" cy="502920"/>
+          </a:xfrm>
+          <a:prstGeom prst="rect">
+            <a:avLst/>
+          </a:prstGeom>
+          <a:noFill/>
+        </p:spPr>
+        <p:txBody>
+          <a:bodyPr wrap="square" lIns="0" rIns="0" tIns="0" bIns="0" anchor="t">
+            <a:noAutofit/>
+          </a:bodyPr>
+          <a:lstStyle/>
+          <a:p>
+            <a:pPr algn="l">
+              <a:lnSpc>
+                <a:spcPct val="100000"/>
+              </a:lnSpc>
+              <a:spcBef>
+                <a:spcPts val="0"/>
+              </a:spcBef>
+              <a:spcAft>
+                <a:spcPts val="0"/>
+              </a:spcAft>
+            </a:pPr>
+            <a:r>
+              <a:rPr sz="1700" b="0" i="0">
+                <a:solidFill>
+                  <a:srgbClr val="FFFFFF"/>
+                </a:solidFill>
+                <a:latin typeface="Montserrat Medium"/>
+              </a:rPr>
+              <a:t>Business Services</a:t>
+            </a:r>
+          </a:p>
+        </p:txBody>
+      </p:sp>
+      <p:sp>
+        <p:nvSpPr>
+          <p:cNvPr id="65" name="TextBox 64"/>
+          <p:cNvSpPr txBox="1"/>
+          <p:nvPr/>
+        </p:nvSpPr>
+        <p:spPr>
+          <a:xfrm>
+            <a:off x="9994391" y="8302752"/>
+            <a:ext cx="1764792" cy="365760"/>
+          </a:xfrm>
+          <a:prstGeom prst="rect">
+            <a:avLst/>
+          </a:prstGeom>
+          <a:noFill/>
+        </p:spPr>
+        <p:txBody>
+          <a:bodyPr wrap="square" lIns="0" rIns="0" tIns="0" bIns="0" anchor="t">
+            <a:noAutofit/>
+          </a:bodyPr>
+          <a:lstStyle/>
+          <a:p>
+            <a:pPr algn="l">
+              <a:lnSpc>
+                <a:spcPct val="105000"/>
+              </a:lnSpc>
+              <a:spcBef>
+                <a:spcPts val="0"/>
+              </a:spcBef>
+              <a:spcAft>
+                <a:spcPts val="0"/>
+              </a:spcAft>
+            </a:pPr>
+            <a:r>
+              <a:rPr sz="1200" b="0" i="0">
+                <a:solidFill>
+                  <a:srgbClr val="CCFBF1"/>
+                </a:solidFill>
+                <a:latin typeface="Montserrat"/>
+              </a:rPr>
+              <a:t>Live in production</a:t>
+            </a:r>
+          </a:p>
+        </p:txBody>
+      </p:sp>
+      <p:sp>
+        <p:nvSpPr>
+          <p:cNvPr id="66" name="TextBox 65"/>
+          <p:cNvSpPr txBox="1"/>
+          <p:nvPr/>
+        </p:nvSpPr>
+        <p:spPr>
+          <a:xfrm>
+            <a:off x="11996928" y="7680960"/>
+            <a:ext cx="310896" cy="640080"/>
+          </a:xfrm>
+          <a:prstGeom prst="rect">
+            <a:avLst/>
+          </a:prstGeom>
+          <a:noFill/>
+        </p:spPr>
+        <p:txBody>
+          <a:bodyPr wrap="square" lIns="0" rIns="0" tIns="0" bIns="0" anchor="ctr">
+            <a:noAutofit/>
+          </a:bodyPr>
+          <a:lstStyle/>
+          <a:p>
+            <a:pPr algn="ctr">
+              <a:lnSpc>
+                <a:spcPct val="100000"/>
+              </a:lnSpc>
+              <a:spcBef>
+                <a:spcPts val="0"/>
+              </a:spcBef>
+              <a:spcAft>
+                <a:spcPts val="0"/>
+              </a:spcAft>
+            </a:pPr>
+            <a:r>
+              <a:rPr sz="2000" b="0" i="0">
+                <a:solidFill>
+                  <a:srgbClr val="FFFFFF"/>
+                </a:solidFill>
+                <a:latin typeface="Montserrat"/>
+              </a:rPr>
+              <a:t>→</a:t>
+            </a:r>
+          </a:p>
+        </p:txBody>
+      </p:sp>
+      <p:sp>
+        <p:nvSpPr>
+          <p:cNvPr id="67" name="Rounded Rectangle 66"/>
           <p:cNvSpPr/>
           <p:nvPr/>
         </p:nvSpPr>
         <p:spPr>
           <a:xfrm>
-            <a:off x="9692640" y="7040880"/>
-            <a:ext cx="2307336" cy="1737360"/>
+            <a:off x="12289535" y="7223760"/>
+            <a:ext cx="2276856" cy="1554480"/>
           </a:xfrm>
           <a:prstGeom prst="roundRect">
             <a:avLst>
-              <a:gd name="adj" fmla="val 3157"/>
+              <a:gd name="adj" fmla="val 4705"/>
             </a:avLst>
           </a:prstGeom>
           <a:solidFill>
-            <a:srgbClr val="20243B"/>
+            <a:srgbClr val="0B5B55"/>
           </a:solidFill>
           <a:ln>
             <a:noFill/>
@@ -13797,14 +14385,14 @@
       </p:sp>
       <p:sp>
         <p:nvSpPr>
-          <p:cNvPr id="63" name="TextBox 62"/>
-          <p:cNvSpPr txBox="1"/>
-          <p:nvPr/>
-        </p:nvSpPr>
-        <p:spPr>
-          <a:xfrm>
-            <a:off x="9921240" y="7269480"/>
-            <a:ext cx="1850136" cy="228600"/>
+          <p:cNvPr id="68" name="TextBox 67"/>
+          <p:cNvSpPr txBox="1"/>
+          <p:nvPr/>
+        </p:nvSpPr>
+        <p:spPr>
+          <a:xfrm>
+            <a:off x="12545567" y="7461504"/>
+            <a:ext cx="1764792" cy="228600"/>
           </a:xfrm>
           <a:prstGeom prst="rect">
             <a:avLst/>
@@ -13829,27 +14417,27 @@
               </a:spcAft>
             </a:pPr>
             <a:r>
-              <a:rPr sz="1000" b="1" i="0" spc="120">
-                <a:solidFill>
-                  <a:srgbClr val="C4A8F7"/>
+              <a:rPr sz="1050" b="1" i="0" spc="120">
+                <a:solidFill>
+                  <a:srgbClr val="CCFBF1"/>
                 </a:solidFill>
                 <a:latin typeface="Consolas"/>
               </a:rPr>
-              <a:t>NOW</a:t>
-            </a:r>
-          </a:p>
-        </p:txBody>
-      </p:sp>
-      <p:sp>
-        <p:nvSpPr>
-          <p:cNvPr id="64" name="TextBox 63"/>
-          <p:cNvSpPr txBox="1"/>
-          <p:nvPr/>
-        </p:nvSpPr>
-        <p:spPr>
-          <a:xfrm>
-            <a:off x="9921240" y="7607808"/>
-            <a:ext cx="1850136" cy="502920"/>
+              <a:t>NEXT</a:t>
+            </a:r>
+          </a:p>
+        </p:txBody>
+      </p:sp>
+      <p:sp>
+        <p:nvSpPr>
+          <p:cNvPr id="69" name="TextBox 68"/>
+          <p:cNvSpPr txBox="1"/>
+          <p:nvPr/>
+        </p:nvSpPr>
+        <p:spPr>
+          <a:xfrm>
+            <a:off x="12545567" y="7772400"/>
+            <a:ext cx="1764792" cy="502920"/>
           </a:xfrm>
           <a:prstGeom prst="rect">
             <a:avLst/>
@@ -13874,27 +14462,27 @@
               </a:spcAft>
             </a:pPr>
             <a:r>
-              <a:rPr sz="1600" b="0" i="0">
+              <a:rPr sz="1700" b="0" i="0">
                 <a:solidFill>
                   <a:srgbClr val="FFFFFF"/>
                 </a:solidFill>
                 <a:latin typeface="Montserrat Medium"/>
               </a:rPr>
-              <a:t>Business Services</a:t>
-            </a:r>
-          </a:p>
-        </p:txBody>
-      </p:sp>
-      <p:sp>
-        <p:nvSpPr>
-          <p:cNvPr id="65" name="TextBox 64"/>
-          <p:cNvSpPr txBox="1"/>
-          <p:nvPr/>
-        </p:nvSpPr>
-        <p:spPr>
-          <a:xfrm>
-            <a:off x="9921240" y="8211312"/>
-            <a:ext cx="1850136" cy="457200"/>
+              <a:t>Marketing &amp; IT</a:t>
+            </a:r>
+          </a:p>
+        </p:txBody>
+      </p:sp>
+      <p:sp>
+        <p:nvSpPr>
+          <p:cNvPr id="70" name="TextBox 69"/>
+          <p:cNvSpPr txBox="1"/>
+          <p:nvPr/>
+        </p:nvSpPr>
+        <p:spPr>
+          <a:xfrm>
+            <a:off x="12545567" y="8302752"/>
+            <a:ext cx="1764792" cy="365760"/>
           </a:xfrm>
           <a:prstGeom prst="rect">
             <a:avLst/>
@@ -13909,36 +14497,36 @@
           <a:p>
             <a:pPr algn="l">
               <a:lnSpc>
-                <a:spcPct val="110000"/>
-              </a:lnSpc>
-              <a:spcBef>
-                <a:spcPts val="0"/>
-              </a:spcBef>
-              <a:spcAft>
-                <a:spcPts val="0"/>
-              </a:spcAft>
-            </a:pPr>
-            <a:r>
-              <a:rPr sz="1100" b="0" i="0">
-                <a:solidFill>
-                  <a:srgbClr val="E0CFFA"/>
+                <a:spcPct val="105000"/>
+              </a:lnSpc>
+              <a:spcBef>
+                <a:spcPts val="0"/>
+              </a:spcBef>
+              <a:spcAft>
+                <a:spcPts val="0"/>
+              </a:spcAft>
+            </a:pPr>
+            <a:r>
+              <a:rPr sz="1200" b="0" i="0">
+                <a:solidFill>
+                  <a:srgbClr val="CCFBF1"/>
                 </a:solidFill>
                 <a:latin typeface="Montserrat"/>
               </a:rPr>
-              <a:t>Live in production</a:t>
-            </a:r>
-          </a:p>
-        </p:txBody>
-      </p:sp>
-      <p:sp>
-        <p:nvSpPr>
-          <p:cNvPr id="66" name="TextBox 65"/>
-          <p:cNvSpPr txBox="1"/>
-          <p:nvPr/>
-        </p:nvSpPr>
-        <p:spPr>
-          <a:xfrm>
-            <a:off x="11981688" y="7589520"/>
+              <a:t>Infosys-managed spend</a:t>
+            </a:r>
+          </a:p>
+        </p:txBody>
+      </p:sp>
+      <p:sp>
+        <p:nvSpPr>
+          <p:cNvPr id="71" name="TextBox 70"/>
+          <p:cNvSpPr txBox="1"/>
+          <p:nvPr/>
+        </p:nvSpPr>
+        <p:spPr>
+          <a:xfrm>
+            <a:off x="14548103" y="7680960"/>
             <a:ext cx="310896" cy="640080"/>
           </a:xfrm>
           <a:prstGeom prst="rect">
@@ -13964,9 +14552,9 @@
               </a:spcAft>
             </a:pPr>
             <a:r>
-              <a:rPr sz="1800" b="0" i="0">
-                <a:solidFill>
-                  <a:srgbClr val="C4A8F7"/>
+              <a:rPr sz="2000" b="0" i="0">
+                <a:solidFill>
+                  <a:srgbClr val="FFFFFF"/>
                 </a:solidFill>
                 <a:latin typeface="Montserrat"/>
               </a:rPr>
@@ -13977,22 +14565,22 @@
       </p:sp>
       <p:sp>
         <p:nvSpPr>
-          <p:cNvPr id="67" name="Rounded Rectangle 66"/>
+          <p:cNvPr id="72" name="Rounded Rectangle 71"/>
           <p:cNvSpPr/>
           <p:nvPr/>
         </p:nvSpPr>
         <p:spPr>
           <a:xfrm>
-            <a:off x="12274295" y="7040880"/>
-            <a:ext cx="2307336" cy="1737360"/>
+            <a:off x="14840711" y="7223760"/>
+            <a:ext cx="2276856" cy="1554480"/>
           </a:xfrm>
           <a:prstGeom prst="roundRect">
             <a:avLst>
-              <a:gd name="adj" fmla="val 3157"/>
+              <a:gd name="adj" fmla="val 4705"/>
             </a:avLst>
           </a:prstGeom>
           <a:solidFill>
-            <a:srgbClr val="20243B"/>
+            <a:srgbClr val="0B5B55"/>
           </a:solidFill>
           <a:ln>
             <a:noFill/>
@@ -14023,14 +14611,14 @@
       </p:sp>
       <p:sp>
         <p:nvSpPr>
-          <p:cNvPr id="68" name="TextBox 67"/>
-          <p:cNvSpPr txBox="1"/>
-          <p:nvPr/>
-        </p:nvSpPr>
-        <p:spPr>
-          <a:xfrm>
-            <a:off x="12502895" y="7269480"/>
-            <a:ext cx="1850136" cy="228600"/>
+          <p:cNvPr id="73" name="TextBox 72"/>
+          <p:cNvSpPr txBox="1"/>
+          <p:nvPr/>
+        </p:nvSpPr>
+        <p:spPr>
+          <a:xfrm>
+            <a:off x="15096743" y="7461504"/>
+            <a:ext cx="1764792" cy="228600"/>
           </a:xfrm>
           <a:prstGeom prst="rect">
             <a:avLst/>
@@ -14055,27 +14643,27 @@
               </a:spcAft>
             </a:pPr>
             <a:r>
-              <a:rPr sz="1000" b="1" i="0" spc="120">
-                <a:solidFill>
-                  <a:srgbClr val="C4A8F7"/>
+              <a:rPr sz="1050" b="1" i="0" spc="120">
+                <a:solidFill>
+                  <a:srgbClr val="CCFBF1"/>
                 </a:solidFill>
                 <a:latin typeface="Consolas"/>
               </a:rPr>
-              <a:t>NEXT</a:t>
-            </a:r>
-          </a:p>
-        </p:txBody>
-      </p:sp>
-      <p:sp>
-        <p:nvSpPr>
-          <p:cNvPr id="69" name="TextBox 68"/>
-          <p:cNvSpPr txBox="1"/>
-          <p:nvPr/>
-        </p:nvSpPr>
-        <p:spPr>
-          <a:xfrm>
-            <a:off x="12502895" y="7607808"/>
-            <a:ext cx="1850136" cy="502920"/>
+              <a:t>THEN</a:t>
+            </a:r>
+          </a:p>
+        </p:txBody>
+      </p:sp>
+      <p:sp>
+        <p:nvSpPr>
+          <p:cNvPr id="74" name="TextBox 73"/>
+          <p:cNvSpPr txBox="1"/>
+          <p:nvPr/>
+        </p:nvSpPr>
+        <p:spPr>
+          <a:xfrm>
+            <a:off x="15096743" y="7772400"/>
+            <a:ext cx="1764792" cy="502920"/>
           </a:xfrm>
           <a:prstGeom prst="rect">
             <a:avLst/>
@@ -14100,27 +14688,27 @@
               </a:spcAft>
             </a:pPr>
             <a:r>
-              <a:rPr sz="1600" b="0" i="0">
+              <a:rPr sz="1700" b="0" i="0">
                 <a:solidFill>
                   <a:srgbClr val="FFFFFF"/>
                 </a:solidFill>
                 <a:latin typeface="Montserrat Medium"/>
               </a:rPr>
-              <a:t>Marketing &amp; IT</a:t>
-            </a:r>
-          </a:p>
-        </p:txBody>
-      </p:sp>
-      <p:sp>
-        <p:nvSpPr>
-          <p:cNvPr id="70" name="TextBox 69"/>
-          <p:cNvSpPr txBox="1"/>
-          <p:nvPr/>
-        </p:nvSpPr>
-        <p:spPr>
-          <a:xfrm>
-            <a:off x="12502895" y="8211312"/>
-            <a:ext cx="1850136" cy="457200"/>
+              <a:t>Enterprise-wide</a:t>
+            </a:r>
+          </a:p>
+        </p:txBody>
+      </p:sp>
+      <p:sp>
+        <p:nvSpPr>
+          <p:cNvPr id="75" name="TextBox 74"/>
+          <p:cNvSpPr txBox="1"/>
+          <p:nvPr/>
+        </p:nvSpPr>
+        <p:spPr>
+          <a:xfrm>
+            <a:off x="15096743" y="8302752"/>
+            <a:ext cx="1764792" cy="365760"/>
           </a:xfrm>
           <a:prstGeom prst="rect">
             <a:avLst/>
@@ -14135,245 +14723,19 @@
           <a:p>
             <a:pPr algn="l">
               <a:lnSpc>
-                <a:spcPct val="110000"/>
-              </a:lnSpc>
-              <a:spcBef>
-                <a:spcPts val="0"/>
-              </a:spcBef>
-              <a:spcAft>
-                <a:spcPts val="0"/>
-              </a:spcAft>
-            </a:pPr>
-            <a:r>
-              <a:rPr sz="1100" b="0" i="0">
-                <a:solidFill>
-                  <a:srgbClr val="E0CFFA"/>
-                </a:solidFill>
-                <a:latin typeface="Montserrat"/>
-              </a:rPr>
-              <a:t>Infosys-managed spend</a:t>
-            </a:r>
-          </a:p>
-        </p:txBody>
-      </p:sp>
-      <p:sp>
-        <p:nvSpPr>
-          <p:cNvPr id="71" name="TextBox 70"/>
-          <p:cNvSpPr txBox="1"/>
-          <p:nvPr/>
-        </p:nvSpPr>
-        <p:spPr>
-          <a:xfrm>
-            <a:off x="14563344" y="7589520"/>
-            <a:ext cx="310896" cy="640080"/>
-          </a:xfrm>
-          <a:prstGeom prst="rect">
-            <a:avLst/>
-          </a:prstGeom>
-          <a:noFill/>
-        </p:spPr>
-        <p:txBody>
-          <a:bodyPr wrap="square" lIns="0" rIns="0" tIns="0" bIns="0" anchor="ctr">
-            <a:noAutofit/>
-          </a:bodyPr>
-          <a:lstStyle/>
-          <a:p>
-            <a:pPr algn="ctr">
-              <a:lnSpc>
-                <a:spcPct val="100000"/>
-              </a:lnSpc>
-              <a:spcBef>
-                <a:spcPts val="0"/>
-              </a:spcBef>
-              <a:spcAft>
-                <a:spcPts val="0"/>
-              </a:spcAft>
-            </a:pPr>
-            <a:r>
-              <a:rPr sz="1800" b="0" i="0">
-                <a:solidFill>
-                  <a:srgbClr val="C4A8F7"/>
-                </a:solidFill>
-                <a:latin typeface="Montserrat"/>
-              </a:rPr>
-              <a:t>→</a:t>
-            </a:r>
-          </a:p>
-        </p:txBody>
-      </p:sp>
-      <p:sp>
-        <p:nvSpPr>
-          <p:cNvPr id="72" name="Rounded Rectangle 71"/>
-          <p:cNvSpPr/>
-          <p:nvPr/>
-        </p:nvSpPr>
-        <p:spPr>
-          <a:xfrm>
-            <a:off x="14855952" y="7040880"/>
-            <a:ext cx="2307336" cy="1737360"/>
-          </a:xfrm>
-          <a:prstGeom prst="roundRect">
-            <a:avLst>
-              <a:gd name="adj" fmla="val 3157"/>
-            </a:avLst>
-          </a:prstGeom>
-          <a:solidFill>
-            <a:srgbClr val="20243B"/>
-          </a:solidFill>
-          <a:ln>
-            <a:noFill/>
-          </a:ln>
-          <a:effectLst/>
-        </p:spPr>
-        <p:style>
-          <a:lnRef idx="1">
-            <a:schemeClr val="accent1"/>
-          </a:lnRef>
-          <a:fillRef idx="3">
-            <a:schemeClr val="accent1"/>
-          </a:fillRef>
-          <a:effectRef idx="2">
-            <a:schemeClr val="accent1"/>
-          </a:effectRef>
-          <a:fontRef idx="minor">
-            <a:schemeClr val="lt1"/>
-          </a:fontRef>
-        </p:style>
-        <p:txBody>
-          <a:bodyPr rtlCol="0" anchor="ctr"/>
-          <a:lstStyle/>
-          <a:p>
-            <a:pPr algn="ctr"/>
-          </a:p>
-        </p:txBody>
-      </p:sp>
-      <p:sp>
-        <p:nvSpPr>
-          <p:cNvPr id="73" name="TextBox 72"/>
-          <p:cNvSpPr txBox="1"/>
-          <p:nvPr/>
-        </p:nvSpPr>
-        <p:spPr>
-          <a:xfrm>
-            <a:off x="15084552" y="7269480"/>
-            <a:ext cx="1850136" cy="228600"/>
-          </a:xfrm>
-          <a:prstGeom prst="rect">
-            <a:avLst/>
-          </a:prstGeom>
-          <a:noFill/>
-        </p:spPr>
-        <p:txBody>
-          <a:bodyPr wrap="square" lIns="0" rIns="0" tIns="0" bIns="0" anchor="t">
-            <a:noAutofit/>
-          </a:bodyPr>
-          <a:lstStyle/>
-          <a:p>
-            <a:pPr algn="l">
-              <a:lnSpc>
-                <a:spcPct val="100000"/>
-              </a:lnSpc>
-              <a:spcBef>
-                <a:spcPts val="0"/>
-              </a:spcBef>
-              <a:spcAft>
-                <a:spcPts val="0"/>
-              </a:spcAft>
-            </a:pPr>
-            <a:r>
-              <a:rPr sz="1000" b="1" i="0" spc="120">
-                <a:solidFill>
-                  <a:srgbClr val="C4A8F7"/>
-                </a:solidFill>
-                <a:latin typeface="Consolas"/>
-              </a:rPr>
-              <a:t>THEN</a:t>
-            </a:r>
-          </a:p>
-        </p:txBody>
-      </p:sp>
-      <p:sp>
-        <p:nvSpPr>
-          <p:cNvPr id="74" name="TextBox 73"/>
-          <p:cNvSpPr txBox="1"/>
-          <p:nvPr/>
-        </p:nvSpPr>
-        <p:spPr>
-          <a:xfrm>
-            <a:off x="15084552" y="7607808"/>
-            <a:ext cx="1850136" cy="502920"/>
-          </a:xfrm>
-          <a:prstGeom prst="rect">
-            <a:avLst/>
-          </a:prstGeom>
-          <a:noFill/>
-        </p:spPr>
-        <p:txBody>
-          <a:bodyPr wrap="square" lIns="0" rIns="0" tIns="0" bIns="0" anchor="t">
-            <a:noAutofit/>
-          </a:bodyPr>
-          <a:lstStyle/>
-          <a:p>
-            <a:pPr algn="l">
-              <a:lnSpc>
-                <a:spcPct val="100000"/>
-              </a:lnSpc>
-              <a:spcBef>
-                <a:spcPts val="0"/>
-              </a:spcBef>
-              <a:spcAft>
-                <a:spcPts val="0"/>
-              </a:spcAft>
-            </a:pPr>
-            <a:r>
-              <a:rPr sz="1600" b="0" i="0">
-                <a:solidFill>
-                  <a:srgbClr val="FFFFFF"/>
-                </a:solidFill>
-                <a:latin typeface="Montserrat Medium"/>
-              </a:rPr>
-              <a:t>Enterprise-wide</a:t>
-            </a:r>
-          </a:p>
-        </p:txBody>
-      </p:sp>
-      <p:sp>
-        <p:nvSpPr>
-          <p:cNvPr id="75" name="TextBox 74"/>
-          <p:cNvSpPr txBox="1"/>
-          <p:nvPr/>
-        </p:nvSpPr>
-        <p:spPr>
-          <a:xfrm>
-            <a:off x="15084552" y="8211312"/>
-            <a:ext cx="1850136" cy="457200"/>
-          </a:xfrm>
-          <a:prstGeom prst="rect">
-            <a:avLst/>
-          </a:prstGeom>
-          <a:noFill/>
-        </p:spPr>
-        <p:txBody>
-          <a:bodyPr wrap="square" lIns="0" rIns="0" tIns="0" bIns="0" anchor="t">
-            <a:noAutofit/>
-          </a:bodyPr>
-          <a:lstStyle/>
-          <a:p>
-            <a:pPr algn="l">
-              <a:lnSpc>
-                <a:spcPct val="110000"/>
-              </a:lnSpc>
-              <a:spcBef>
-                <a:spcPts val="0"/>
-              </a:spcBef>
-              <a:spcAft>
-                <a:spcPts val="0"/>
-              </a:spcAft>
-            </a:pPr>
-            <a:r>
-              <a:rPr sz="1100" b="0" i="0">
-                <a:solidFill>
-                  <a:srgbClr val="E0CFFA"/>
+                <a:spcPct val="105000"/>
+              </a:lnSpc>
+              <a:spcBef>
+                <a:spcPts val="0"/>
+              </a:spcBef>
+              <a:spcAft>
+                <a:spcPts val="0"/>
+              </a:spcAft>
+            </a:pPr>
+            <a:r>
+              <a:rPr sz="1200" b="0" i="0">
+                <a:solidFill>
+                  <a:srgbClr val="CCFBF1"/>
                 </a:solidFill>
                 <a:latin typeface="Montserrat"/>
               </a:rPr>
@@ -14496,7 +14858,7 @@
               </a:spcAft>
             </a:pPr>
             <a:r>
-              <a:rPr sz="800" b="1" i="0" spc="80">
+              <a:rPr sz="900" b="1" i="0" spc="80">
                 <a:solidFill>
                   <a:srgbClr val="6A707B"/>
                 </a:solidFill>
@@ -14541,7 +14903,7 @@
               </a:spcAft>
             </a:pPr>
             <a:r>
-              <a:rPr sz="800" b="1" i="0" spc="80">
+              <a:rPr sz="900" b="1" i="0" spc="80">
                 <a:solidFill>
                   <a:srgbClr val="6A707B"/>
                 </a:solidFill>

--- a/unilever-aerchain/Unilever_Aerchain_Infosys_Deck.pptx
+++ b/unilever-aerchain/Unilever_Aerchain_Infosys_Deck.pptx
@@ -3239,8 +3239,8 @@
         </p:blipFill>
         <p:spPr>
           <a:xfrm>
-            <a:off x="758952" y="292608"/>
-            <a:ext cx="2542032" cy="365760"/>
+            <a:off x="758952" y="256032"/>
+            <a:ext cx="2660904" cy="384048"/>
           </a:xfrm>
           <a:prstGeom prst="rect">
             <a:avLst/>
@@ -3255,8 +3255,8 @@
         </p:nvSpPr>
         <p:spPr>
           <a:xfrm>
-            <a:off x="3456432" y="0"/>
-            <a:ext cx="457200" cy="960120"/>
+            <a:off x="3474720" y="256032"/>
+            <a:ext cx="502920" cy="384048"/>
           </a:xfrm>
           <a:prstGeom prst="rect">
             <a:avLst/>
@@ -3281,7 +3281,7 @@
               </a:spcAft>
             </a:pPr>
             <a:r>
-              <a:rPr sz="1800" b="0" i="0">
+              <a:rPr sz="2000" b="0" i="0">
                 <a:solidFill>
                   <a:srgbClr val="6A707B"/>
                 </a:solidFill>
@@ -3308,23 +3308,59 @@
         </p:blipFill>
         <p:spPr>
           <a:xfrm>
-            <a:off x="3977639" y="338328"/>
-            <a:ext cx="749808" cy="292608"/>
+            <a:off x="4023360" y="256032"/>
+            <a:ext cx="1188720" cy="466344"/>
           </a:xfrm>
           <a:prstGeom prst="rect">
             <a:avLst/>
           </a:prstGeom>
         </p:spPr>
       </p:pic>
-      <p:sp>
-        <p:nvSpPr>
-          <p:cNvPr id="8" name="TextBox 7"/>
-          <p:cNvSpPr txBox="1"/>
-          <p:nvPr/>
-        </p:nvSpPr>
-        <p:spPr>
-          <a:xfrm>
-            <a:off x="5285232" y="0"/>
+      <p:cxnSp>
+        <p:nvCxnSpPr>
+          <p:cNvPr id="8" name="Connector 7"/>
+          <p:cNvCxnSpPr/>
+          <p:nvPr/>
+        </p:nvCxnSpPr>
+        <p:spPr>
+          <a:xfrm>
+            <a:off x="5468112" y="274320"/>
+            <a:ext cx="0" cy="411480"/>
+          </a:xfrm>
+          <a:prstGeom prst="bentConnector3">
+            <a:avLst/>
+          </a:prstGeom>
+          <a:ln w="9525">
+            <a:solidFill>
+              <a:srgbClr val="E2E4EA"/>
+            </a:solidFill>
+          </a:ln>
+          <a:effectLst/>
+        </p:spPr>
+        <p:style>
+          <a:lnRef idx="2">
+            <a:schemeClr val="accent1"/>
+          </a:lnRef>
+          <a:fillRef idx="0">
+            <a:schemeClr val="accent1"/>
+          </a:fillRef>
+          <a:effectRef idx="1">
+            <a:schemeClr val="accent1"/>
+          </a:effectRef>
+          <a:fontRef idx="minor">
+            <a:schemeClr val="tx1"/>
+          </a:fontRef>
+        </p:style>
+      </p:cxnSp>
+      <p:sp>
+        <p:nvSpPr>
+          <p:cNvPr id="9" name="TextBox 8"/>
+          <p:cNvSpPr txBox="1"/>
+          <p:nvPr/>
+        </p:nvSpPr>
+        <p:spPr>
+          <a:xfrm>
+            <a:off x="5687568" y="0"/>
             <a:ext cx="8229600" cy="960120"/>
           </a:xfrm>
           <a:prstGeom prst="rect">
@@ -3363,14 +3399,14 @@
       </p:sp>
       <p:sp>
         <p:nvSpPr>
-          <p:cNvPr id="9" name="TextBox 8"/>
-          <p:cNvSpPr txBox="1"/>
-          <p:nvPr/>
-        </p:nvSpPr>
-        <p:spPr>
-          <a:xfrm>
-            <a:off x="14996159" y="0"/>
-            <a:ext cx="1645920" cy="960120"/>
+          <p:cNvPr id="10" name="TextBox 9"/>
+          <p:cNvSpPr txBox="1"/>
+          <p:nvPr/>
+        </p:nvSpPr>
+        <p:spPr>
+          <a:xfrm>
+            <a:off x="14356080" y="0"/>
+            <a:ext cx="2103120" cy="960120"/>
           </a:xfrm>
           <a:prstGeom prst="rect">
             <a:avLst/>
@@ -3417,7 +3453,7 @@
       </p:sp>
       <p:pic>
         <p:nvPicPr>
-          <p:cNvPr id="10" name="Picture 9" descr="unilever_blue.png"/>
+          <p:cNvPr id="11" name="Picture 10" descr="unilever_blue.png"/>
           <p:cNvPicPr>
             <a:picLocks noChangeAspect="1"/>
           </p:cNvPicPr>
@@ -3431,8 +3467,8 @@
         </p:blipFill>
         <p:spPr>
           <a:xfrm>
-            <a:off x="16916400" y="256032"/>
-            <a:ext cx="457200" cy="475488"/>
+            <a:off x="16751808" y="155448"/>
+            <a:ext cx="594360" cy="658368"/>
           </a:xfrm>
           <a:prstGeom prst="rect">
             <a:avLst/>
@@ -3441,7 +3477,7 @@
       </p:pic>
       <p:sp>
         <p:nvSpPr>
-          <p:cNvPr id="11" name="TextBox 10"/>
+          <p:cNvPr id="12" name="TextBox 11"/>
           <p:cNvSpPr txBox="1"/>
           <p:nvPr/>
         </p:nvSpPr>
@@ -3495,7 +3531,7 @@
       </p:sp>
       <p:sp>
         <p:nvSpPr>
-          <p:cNvPr id="12" name="TextBox 11"/>
+          <p:cNvPr id="13" name="TextBox 12"/>
           <p:cNvSpPr txBox="1"/>
           <p:nvPr/>
         </p:nvSpPr>
@@ -3584,7 +3620,7 @@
       </p:sp>
       <p:sp>
         <p:nvSpPr>
-          <p:cNvPr id="13" name="TextBox 12"/>
+          <p:cNvPr id="14" name="TextBox 13"/>
           <p:cNvSpPr txBox="1"/>
           <p:nvPr/>
         </p:nvSpPr>
@@ -3629,7 +3665,7 @@
       </p:sp>
       <p:cxnSp>
         <p:nvCxnSpPr>
-          <p:cNvPr id="14" name="Connector 13"/>
+          <p:cNvPr id="15" name="Connector 14"/>
           <p:cNvCxnSpPr/>
           <p:nvPr/>
         </p:nvCxnSpPr>
@@ -3665,7 +3701,7 @@
       </p:cxnSp>
       <p:sp>
         <p:nvSpPr>
-          <p:cNvPr id="15" name="TextBox 14"/>
+          <p:cNvPr id="16" name="TextBox 15"/>
           <p:cNvSpPr txBox="1"/>
           <p:nvPr/>
         </p:nvSpPr>
@@ -3710,7 +3746,7 @@
       </p:sp>
       <p:sp>
         <p:nvSpPr>
-          <p:cNvPr id="16" name="TextBox 15"/>
+          <p:cNvPr id="17" name="TextBox 16"/>
           <p:cNvSpPr txBox="1"/>
           <p:nvPr/>
         </p:nvSpPr>
@@ -3755,7 +3791,7 @@
       </p:sp>
       <p:sp>
         <p:nvSpPr>
-          <p:cNvPr id="17" name="TextBox 16"/>
+          <p:cNvPr id="18" name="TextBox 17"/>
           <p:cNvSpPr txBox="1"/>
           <p:nvPr/>
         </p:nvSpPr>
@@ -3800,7 +3836,7 @@
       </p:sp>
       <p:sp>
         <p:nvSpPr>
-          <p:cNvPr id="18" name="TextBox 17"/>
+          <p:cNvPr id="19" name="TextBox 18"/>
           <p:cNvSpPr txBox="1"/>
           <p:nvPr/>
         </p:nvSpPr>
@@ -3845,7 +3881,7 @@
       </p:sp>
       <p:sp>
         <p:nvSpPr>
-          <p:cNvPr id="19" name="TextBox 18"/>
+          <p:cNvPr id="20" name="TextBox 19"/>
           <p:cNvSpPr txBox="1"/>
           <p:nvPr/>
         </p:nvSpPr>
@@ -3890,7 +3926,7 @@
       </p:sp>
       <p:sp>
         <p:nvSpPr>
-          <p:cNvPr id="20" name="TextBox 19"/>
+          <p:cNvPr id="21" name="TextBox 20"/>
           <p:cNvSpPr txBox="1"/>
           <p:nvPr/>
         </p:nvSpPr>
@@ -3935,7 +3971,7 @@
       </p:sp>
       <p:sp>
         <p:nvSpPr>
-          <p:cNvPr id="21" name="TextBox 20"/>
+          <p:cNvPr id="22" name="TextBox 21"/>
           <p:cNvSpPr txBox="1"/>
           <p:nvPr/>
         </p:nvSpPr>
@@ -3980,7 +4016,7 @@
       </p:sp>
       <p:sp>
         <p:nvSpPr>
-          <p:cNvPr id="22" name="TextBox 21"/>
+          <p:cNvPr id="23" name="TextBox 22"/>
           <p:cNvSpPr txBox="1"/>
           <p:nvPr/>
         </p:nvSpPr>
@@ -4025,7 +4061,7 @@
       </p:sp>
       <p:sp>
         <p:nvSpPr>
-          <p:cNvPr id="23" name="Rectangle 22"/>
+          <p:cNvPr id="24" name="Rectangle 23"/>
           <p:cNvSpPr/>
           <p:nvPr/>
         </p:nvSpPr>
@@ -4069,7 +4105,7 @@
       </p:sp>
       <p:cxnSp>
         <p:nvCxnSpPr>
-          <p:cNvPr id="24" name="Connector 23"/>
+          <p:cNvPr id="25" name="Connector 24"/>
           <p:cNvCxnSpPr/>
           <p:nvPr/>
         </p:nvCxnSpPr>
@@ -4105,7 +4141,7 @@
       </p:cxnSp>
       <p:sp>
         <p:nvSpPr>
-          <p:cNvPr id="25" name="TextBox 24"/>
+          <p:cNvPr id="26" name="TextBox 25"/>
           <p:cNvSpPr txBox="1"/>
           <p:nvPr/>
         </p:nvSpPr>
@@ -4150,7 +4186,7 @@
       </p:sp>
       <p:sp>
         <p:nvSpPr>
-          <p:cNvPr id="26" name="TextBox 25"/>
+          <p:cNvPr id="27" name="TextBox 26"/>
           <p:cNvSpPr txBox="1"/>
           <p:nvPr/>
         </p:nvSpPr>
@@ -4351,8 +4387,8 @@
         </p:blipFill>
         <p:spPr>
           <a:xfrm>
-            <a:off x="758952" y="292608"/>
-            <a:ext cx="2542032" cy="365760"/>
+            <a:off x="758952" y="256032"/>
+            <a:ext cx="2660904" cy="384048"/>
           </a:xfrm>
           <a:prstGeom prst="rect">
             <a:avLst/>
@@ -4367,8 +4403,8 @@
         </p:nvSpPr>
         <p:spPr>
           <a:xfrm>
-            <a:off x="3456432" y="0"/>
-            <a:ext cx="457200" cy="960120"/>
+            <a:off x="3474720" y="256032"/>
+            <a:ext cx="502920" cy="384048"/>
           </a:xfrm>
           <a:prstGeom prst="rect">
             <a:avLst/>
@@ -4393,7 +4429,7 @@
               </a:spcAft>
             </a:pPr>
             <a:r>
-              <a:rPr sz="1800" b="0" i="0">
+              <a:rPr sz="2000" b="0" i="0">
                 <a:solidFill>
                   <a:srgbClr val="6A707B"/>
                 </a:solidFill>
@@ -4420,8 +4456,8 @@
         </p:blipFill>
         <p:spPr>
           <a:xfrm>
-            <a:off x="3977639" y="338328"/>
-            <a:ext cx="749808" cy="292608"/>
+            <a:off x="4023360" y="256032"/>
+            <a:ext cx="1188720" cy="466344"/>
           </a:xfrm>
           <a:prstGeom prst="rect">
             <a:avLst/>
@@ -4436,8 +4472,8 @@
         </p:nvCxnSpPr>
         <p:spPr>
           <a:xfrm>
-            <a:off x="5074920" y="338328"/>
-            <a:ext cx="0" cy="283464"/>
+            <a:off x="5468112" y="274320"/>
+            <a:ext cx="0" cy="411480"/>
           </a:xfrm>
           <a:prstGeom prst="bentConnector3">
             <a:avLst/>
@@ -4472,8 +4508,8 @@
         </p:nvSpPr>
         <p:spPr>
           <a:xfrm>
-            <a:off x="5285232" y="0"/>
-            <a:ext cx="8686800" cy="960120"/>
+            <a:off x="5687568" y="0"/>
+            <a:ext cx="8229600" cy="960120"/>
           </a:xfrm>
           <a:prstGeom prst="rect">
             <a:avLst/>
@@ -4517,8 +4553,8 @@
         </p:nvSpPr>
         <p:spPr>
           <a:xfrm>
-            <a:off x="14996159" y="0"/>
-            <a:ext cx="1645920" cy="960120"/>
+            <a:off x="14356080" y="0"/>
+            <a:ext cx="2103120" cy="960120"/>
           </a:xfrm>
           <a:prstGeom prst="rect">
             <a:avLst/>
@@ -4579,8 +4615,8 @@
         </p:blipFill>
         <p:spPr>
           <a:xfrm>
-            <a:off x="16916400" y="256032"/>
-            <a:ext cx="457200" cy="475488"/>
+            <a:off x="16751808" y="155448"/>
+            <a:ext cx="594360" cy="658368"/>
           </a:xfrm>
           <a:prstGeom prst="rect">
             <a:avLst/>
@@ -6328,10 +6364,10 @@
           <a:gradFill rotWithShape="1">
             <a:gsLst>
               <a:gs pos="0">
-                <a:srgbClr val="0F766E"/>
+                <a:srgbClr val="2E1065"/>
               </a:gs>
               <a:gs pos="100000">
-                <a:srgbClr val="13B5A6"/>
+                <a:srgbClr val="4C1D95"/>
               </a:gs>
             </a:gsLst>
             <a:lin scaled="0" ang="18600000"/>
@@ -6424,7 +6460,7 @@
           </a:prstGeom>
           <a:ln w="9525">
             <a:solidFill>
-              <a:srgbClr val="3FBFB0"/>
+              <a:srgbClr val="7E5BC2"/>
             </a:solidFill>
           </a:ln>
           <a:effectLst/>
@@ -6525,7 +6561,7 @@
             <a:r>
               <a:rPr sz="1300" b="0" i="0">
                 <a:solidFill>
-                  <a:srgbClr val="CCFBF1"/>
+                  <a:srgbClr val="D8C9F5"/>
                 </a:solidFill>
                 <a:latin typeface="Montserrat"/>
               </a:rPr>
@@ -6550,7 +6586,7 @@
           </a:prstGeom>
           <a:ln w="6350">
             <a:solidFill>
-              <a:srgbClr val="3FBFB0"/>
+              <a:srgbClr val="7E5BC2"/>
             </a:solidFill>
           </a:ln>
           <a:effectLst/>
@@ -6651,7 +6687,7 @@
             <a:r>
               <a:rPr sz="1300" b="0" i="0">
                 <a:solidFill>
-                  <a:srgbClr val="CCFBF1"/>
+                  <a:srgbClr val="D8C9F5"/>
                 </a:solidFill>
                 <a:latin typeface="Montserrat"/>
               </a:rPr>
@@ -6676,7 +6712,7 @@
           </a:prstGeom>
           <a:ln w="6350">
             <a:solidFill>
-              <a:srgbClr val="3FBFB0"/>
+              <a:srgbClr val="7E5BC2"/>
             </a:solidFill>
           </a:ln>
           <a:effectLst/>
@@ -6777,7 +6813,7 @@
             <a:r>
               <a:rPr sz="1300" b="0" i="0">
                 <a:solidFill>
-                  <a:srgbClr val="CCFBF1"/>
+                  <a:srgbClr val="D8C9F5"/>
                 </a:solidFill>
                 <a:latin typeface="Montserrat"/>
               </a:rPr>
@@ -7861,8 +7897,8 @@
         </p:blipFill>
         <p:spPr>
           <a:xfrm>
-            <a:off x="758952" y="292608"/>
-            <a:ext cx="2542032" cy="365760"/>
+            <a:off x="758952" y="256032"/>
+            <a:ext cx="2660904" cy="384048"/>
           </a:xfrm>
           <a:prstGeom prst="rect">
             <a:avLst/>
@@ -7877,8 +7913,8 @@
         </p:nvSpPr>
         <p:spPr>
           <a:xfrm>
-            <a:off x="3456432" y="0"/>
-            <a:ext cx="457200" cy="960120"/>
+            <a:off x="3474720" y="256032"/>
+            <a:ext cx="502920" cy="384048"/>
           </a:xfrm>
           <a:prstGeom prst="rect">
             <a:avLst/>
@@ -7903,7 +7939,7 @@
               </a:spcAft>
             </a:pPr>
             <a:r>
-              <a:rPr sz="1800" b="0" i="0">
+              <a:rPr sz="2000" b="0" i="0">
                 <a:solidFill>
                   <a:srgbClr val="6A707B"/>
                 </a:solidFill>
@@ -7930,8 +7966,8 @@
         </p:blipFill>
         <p:spPr>
           <a:xfrm>
-            <a:off x="3977639" y="338328"/>
-            <a:ext cx="749808" cy="292608"/>
+            <a:off x="4023360" y="256032"/>
+            <a:ext cx="1188720" cy="466344"/>
           </a:xfrm>
           <a:prstGeom prst="rect">
             <a:avLst/>
@@ -7946,8 +7982,8 @@
         </p:nvCxnSpPr>
         <p:spPr>
           <a:xfrm>
-            <a:off x="5074920" y="338328"/>
-            <a:ext cx="0" cy="283464"/>
+            <a:off x="5468112" y="274320"/>
+            <a:ext cx="0" cy="411480"/>
           </a:xfrm>
           <a:prstGeom prst="bentConnector3">
             <a:avLst/>
@@ -7982,8 +8018,8 @@
         </p:nvSpPr>
         <p:spPr>
           <a:xfrm>
-            <a:off x="5285232" y="0"/>
-            <a:ext cx="8686800" cy="960120"/>
+            <a:off x="5687568" y="0"/>
+            <a:ext cx="8229600" cy="960120"/>
           </a:xfrm>
           <a:prstGeom prst="rect">
             <a:avLst/>
@@ -8027,8 +8063,8 @@
         </p:nvSpPr>
         <p:spPr>
           <a:xfrm>
-            <a:off x="14996159" y="0"/>
-            <a:ext cx="1645920" cy="960120"/>
+            <a:off x="14356080" y="0"/>
+            <a:ext cx="2103120" cy="960120"/>
           </a:xfrm>
           <a:prstGeom prst="rect">
             <a:avLst/>
@@ -8089,8 +8125,8 @@
         </p:blipFill>
         <p:spPr>
           <a:xfrm>
-            <a:off x="16916400" y="256032"/>
-            <a:ext cx="457200" cy="475488"/>
+            <a:off x="16751808" y="155448"/>
+            <a:ext cx="594360" cy="658368"/>
           </a:xfrm>
           <a:prstGeom prst="rect">
             <a:avLst/>
@@ -8383,8 +8419,8 @@
         </p:nvSpPr>
         <p:spPr>
           <a:xfrm>
-            <a:off x="758952" y="3246120"/>
-            <a:ext cx="3154680" cy="5806440"/>
+            <a:off x="758952" y="3291840"/>
+            <a:ext cx="3154680" cy="4892040"/>
           </a:xfrm>
           <a:prstGeom prst="roundRect">
             <a:avLst>
@@ -8431,7 +8467,7 @@
         </p:nvSpPr>
         <p:spPr>
           <a:xfrm>
-            <a:off x="758952" y="3246120"/>
+            <a:off x="758952" y="3291840"/>
             <a:ext cx="3154680" cy="64008"/>
           </a:xfrm>
           <a:prstGeom prst="rect">
@@ -8475,12 +8511,12 @@
         </p:nvSpPr>
         <p:spPr>
           <a:xfrm>
-            <a:off x="978407" y="3538727"/>
-            <a:ext cx="603504" cy="603504"/>
+            <a:off x="1014983" y="3602736"/>
+            <a:ext cx="658368" cy="658368"/>
           </a:xfrm>
           <a:prstGeom prst="roundRect">
             <a:avLst>
-              <a:gd name="adj" fmla="val 18181"/>
+              <a:gd name="adj" fmla="val 19444"/>
             </a:avLst>
           </a:prstGeom>
           <a:solidFill>
@@ -8529,7 +8565,7 @@
         </p:blipFill>
         <p:spPr>
           <a:xfrm>
-            <a:off x="1097280" y="3657600"/>
+            <a:off x="1161287" y="3749039"/>
             <a:ext cx="365760" cy="365760"/>
           </a:xfrm>
           <a:prstGeom prst="rect">
@@ -8545,8 +8581,8 @@
         </p:nvSpPr>
         <p:spPr>
           <a:xfrm>
-            <a:off x="1691640" y="3557015"/>
-            <a:ext cx="2020824" cy="566928"/>
+            <a:off x="1837943" y="3602736"/>
+            <a:ext cx="1819656" cy="658368"/>
           </a:xfrm>
           <a:prstGeom prst="rect">
             <a:avLst/>
@@ -8590,8 +8626,8 @@
         </p:nvSpPr>
         <p:spPr>
           <a:xfrm>
-            <a:off x="978407" y="4297679"/>
-            <a:ext cx="2715768" cy="457200"/>
+            <a:off x="1014983" y="4480560"/>
+            <a:ext cx="2642616" cy="502920"/>
           </a:xfrm>
           <a:prstGeom prst="rect">
             <a:avLst/>
@@ -8616,13 +8652,13 @@
               </a:spcAft>
             </a:pPr>
             <a:r>
-              <a:rPr sz="2000" b="0" i="0">
+              <a:rPr sz="2500" b="0" i="0">
                 <a:solidFill>
                   <a:srgbClr val="1B1F26"/>
                 </a:solidFill>
                 <a:latin typeface="Montserrat Medium"/>
               </a:rPr>
-              <a:t>Intake Agent</a:t>
+              <a:t>Intake</a:t>
             </a:r>
           </a:p>
         </p:txBody>
@@ -8635,8 +8671,8 @@
         </p:nvSpPr>
         <p:spPr>
           <a:xfrm>
-            <a:off x="978407" y="4818888"/>
-            <a:ext cx="2715768" cy="1097280"/>
+            <a:off x="1014983" y="5120640"/>
+            <a:ext cx="2642616" cy="365760"/>
           </a:xfrm>
           <a:prstGeom prst="rect">
             <a:avLst/>
@@ -8651,63 +8687,73 @@
           <a:p>
             <a:pPr algn="l">
               <a:lnSpc>
-                <a:spcPct val="120000"/>
-              </a:lnSpc>
-              <a:spcBef>
-                <a:spcPts val="0"/>
-              </a:spcBef>
-              <a:spcAft>
-                <a:spcPts val="0"/>
-              </a:spcAft>
-            </a:pPr>
-            <a:r>
-              <a:rPr sz="1300" b="0" i="0">
-                <a:solidFill>
-                  <a:srgbClr val="6A707B"/>
-                </a:solidFill>
-                <a:latin typeface="Montserrat"/>
-              </a:rPr>
-              <a:t>Auto-ingests requests, cleans maverick descriptions, classifies &amp; enriches spend.</a:t>
-            </a:r>
-          </a:p>
-        </p:txBody>
-      </p:sp>
-      <p:cxnSp>
-        <p:nvCxnSpPr>
-          <p:cNvPr id="25" name="Connector 24"/>
-          <p:cNvCxnSpPr/>
-          <p:nvPr/>
-        </p:nvCxnSpPr>
-        <p:spPr>
-          <a:xfrm>
-            <a:off x="978407" y="6035040"/>
-            <a:ext cx="2715769" cy="0"/>
-          </a:xfrm>
-          <a:prstGeom prst="bentConnector3">
-            <a:avLst/>
-          </a:prstGeom>
-          <a:ln w="9525">
-            <a:solidFill>
-              <a:srgbClr val="E2E4EA"/>
-            </a:solidFill>
+                <a:spcPct val="100000"/>
+              </a:lnSpc>
+              <a:spcBef>
+                <a:spcPts val="0"/>
+              </a:spcBef>
+              <a:spcAft>
+                <a:spcPts val="0"/>
+              </a:spcAft>
+            </a:pPr>
+            <a:r>
+              <a:rPr sz="1400" b="0" i="0">
+                <a:solidFill>
+                  <a:srgbClr val="7C3AED"/>
+                </a:solidFill>
+                <a:latin typeface="Montserrat Medium"/>
+              </a:rPr>
+              <a:t>Intake &amp; Enrichment</a:t>
+            </a:r>
+          </a:p>
+        </p:txBody>
+      </p:sp>
+      <p:sp>
+        <p:nvSpPr>
+          <p:cNvPr id="25" name="Rounded Rectangle 24"/>
+          <p:cNvSpPr/>
+          <p:nvPr/>
+        </p:nvSpPr>
+        <p:spPr>
+          <a:xfrm>
+            <a:off x="1014983" y="5687568"/>
+            <a:ext cx="2642616" cy="438912"/>
+          </a:xfrm>
+          <a:prstGeom prst="roundRect">
+            <a:avLst>
+              <a:gd name="adj" fmla="val 50000"/>
+            </a:avLst>
+          </a:prstGeom>
+          <a:solidFill>
+            <a:srgbClr val="F1EAFC"/>
+          </a:solidFill>
+          <a:ln>
+            <a:noFill/>
           </a:ln>
           <a:effectLst/>
         </p:spPr>
         <p:style>
-          <a:lnRef idx="2">
+          <a:lnRef idx="1">
             <a:schemeClr val="accent1"/>
           </a:lnRef>
-          <a:fillRef idx="0">
+          <a:fillRef idx="3">
             <a:schemeClr val="accent1"/>
           </a:fillRef>
-          <a:effectRef idx="1">
+          <a:effectRef idx="2">
             <a:schemeClr val="accent1"/>
           </a:effectRef>
           <a:fontRef idx="minor">
-            <a:schemeClr val="tx1"/>
+            <a:schemeClr val="lt1"/>
           </a:fontRef>
         </p:style>
-      </p:cxnSp>
+        <p:txBody>
+          <a:bodyPr rtlCol="0" anchor="ctr"/>
+          <a:lstStyle/>
+          <a:p>
+            <a:pPr algn="ctr"/>
+          </a:p>
+        </p:txBody>
+      </p:sp>
       <p:sp>
         <p:nvSpPr>
           <p:cNvPr id="26" name="TextBox 25"/>
@@ -8716,21 +8762,21 @@
         </p:nvSpPr>
         <p:spPr>
           <a:xfrm>
-            <a:off x="978407" y="6190488"/>
-            <a:ext cx="2715768" cy="182880"/>
-          </a:xfrm>
-          <a:prstGeom prst="rect">
-            <a:avLst/>
-          </a:prstGeom>
-          <a:noFill/>
-        </p:spPr>
-        <p:txBody>
-          <a:bodyPr wrap="square" lIns="0" rIns="0" tIns="0" bIns="0" anchor="t">
-            <a:noAutofit/>
-          </a:bodyPr>
-          <a:lstStyle/>
-          <a:p>
-            <a:pPr algn="l">
+            <a:off x="1014983" y="5687568"/>
+            <a:ext cx="2642616" cy="438912"/>
+          </a:xfrm>
+          <a:prstGeom prst="rect">
+            <a:avLst/>
+          </a:prstGeom>
+          <a:noFill/>
+        </p:spPr>
+        <p:txBody>
+          <a:bodyPr wrap="square" lIns="0" rIns="0" tIns="0" bIns="0" anchor="ctr">
+            <a:noAutofit/>
+          </a:bodyPr>
+          <a:lstStyle/>
+          <a:p>
+            <a:pPr algn="ctr">
               <a:lnSpc>
                 <a:spcPct val="100000"/>
               </a:lnSpc>
@@ -8742,59 +8788,60 @@
               </a:spcAft>
             </a:pPr>
             <a:r>
-              <a:rPr sz="950" b="1" i="0" spc="60">
-                <a:solidFill>
-                  <a:srgbClr val="6A707B"/>
-                </a:solidFill>
-                <a:latin typeface="Consolas"/>
-              </a:rPr>
-              <a:t>↓ AERCHAIN CAPABILITY</a:t>
-            </a:r>
-          </a:p>
-        </p:txBody>
-      </p:sp>
-      <p:sp>
-        <p:nvSpPr>
-          <p:cNvPr id="27" name="TextBox 26"/>
-          <p:cNvSpPr txBox="1"/>
-          <p:nvPr/>
-        </p:nvSpPr>
-        <p:spPr>
-          <a:xfrm>
-            <a:off x="978407" y="6446520"/>
-            <a:ext cx="2715768" cy="548640"/>
-          </a:xfrm>
-          <a:prstGeom prst="rect">
-            <a:avLst/>
-          </a:prstGeom>
-          <a:noFill/>
-        </p:spPr>
-        <p:txBody>
-          <a:bodyPr wrap="square" lIns="0" rIns="0" tIns="0" bIns="0" anchor="t">
-            <a:noAutofit/>
-          </a:bodyPr>
-          <a:lstStyle/>
-          <a:p>
-            <a:pPr algn="l">
-              <a:lnSpc>
-                <a:spcPct val="105000"/>
-              </a:lnSpc>
-              <a:spcBef>
-                <a:spcPts val="0"/>
-              </a:spcBef>
-              <a:spcAft>
-                <a:spcPts val="0"/>
-              </a:spcAft>
-            </a:pPr>
-            <a:r>
-              <a:rPr sz="1500" b="0" i="0">
-                <a:solidFill>
-                  <a:srgbClr val="7C3AED"/>
-                </a:solidFill>
-                <a:latin typeface="Montserrat Medium"/>
-              </a:rPr>
-              <a:t>Intake &amp; Enrichment</a:t>
-            </a:r>
+              <a:rPr sz="1350" b="0" i="0">
+                <a:solidFill>
+                  <a:srgbClr val="6D28D9"/>
+                </a:solidFill>
+                <a:latin typeface="Montserrat SemiBold"/>
+              </a:rPr>
+              <a:t>Auto-ingest PRs</a:t>
+            </a:r>
+          </a:p>
+        </p:txBody>
+      </p:sp>
+      <p:sp>
+        <p:nvSpPr>
+          <p:cNvPr id="27" name="Rounded Rectangle 26"/>
+          <p:cNvSpPr/>
+          <p:nvPr/>
+        </p:nvSpPr>
+        <p:spPr>
+          <a:xfrm>
+            <a:off x="1014983" y="6236208"/>
+            <a:ext cx="2642616" cy="438912"/>
+          </a:xfrm>
+          <a:prstGeom prst="roundRect">
+            <a:avLst>
+              <a:gd name="adj" fmla="val 50000"/>
+            </a:avLst>
+          </a:prstGeom>
+          <a:solidFill>
+            <a:srgbClr val="F1EAFC"/>
+          </a:solidFill>
+          <a:ln>
+            <a:noFill/>
+          </a:ln>
+          <a:effectLst/>
+        </p:spPr>
+        <p:style>
+          <a:lnRef idx="1">
+            <a:schemeClr val="accent1"/>
+          </a:lnRef>
+          <a:fillRef idx="3">
+            <a:schemeClr val="accent1"/>
+          </a:fillRef>
+          <a:effectRef idx="2">
+            <a:schemeClr val="accent1"/>
+          </a:effectRef>
+          <a:fontRef idx="minor">
+            <a:schemeClr val="lt1"/>
+          </a:fontRef>
+        </p:style>
+        <p:txBody>
+          <a:bodyPr rtlCol="0" anchor="ctr"/>
+          <a:lstStyle/>
+          <a:p>
+            <a:pPr algn="ctr"/>
           </a:p>
         </p:txBody>
       </p:sp>
@@ -8806,39 +8853,39 @@
         </p:nvSpPr>
         <p:spPr>
           <a:xfrm>
-            <a:off x="978407" y="7104888"/>
-            <a:ext cx="2715768" cy="1371600"/>
-          </a:xfrm>
-          <a:prstGeom prst="rect">
-            <a:avLst/>
-          </a:prstGeom>
-          <a:noFill/>
-        </p:spPr>
-        <p:txBody>
-          <a:bodyPr wrap="square" lIns="0" rIns="0" tIns="0" bIns="0" anchor="t">
-            <a:noAutofit/>
-          </a:bodyPr>
-          <a:lstStyle/>
-          <a:p>
-            <a:pPr algn="l">
-              <a:lnSpc>
-                <a:spcPct val="122000"/>
-              </a:lnSpc>
-              <a:spcBef>
-                <a:spcPts val="0"/>
-              </a:spcBef>
-              <a:spcAft>
-                <a:spcPts val="0"/>
-              </a:spcAft>
-            </a:pPr>
-            <a:r>
-              <a:rPr sz="1200" b="0" i="0">
-                <a:solidFill>
-                  <a:srgbClr val="484E59"/>
-                </a:solidFill>
-                <a:latin typeface="Montserrat"/>
-              </a:rPr>
-              <a:t>Parallel sub-agents auto-tag GL, cost centre and taxonomy, and raise clarifying questions before the cycle starts.</a:t>
+            <a:off x="1014983" y="6236208"/>
+            <a:ext cx="2642616" cy="438912"/>
+          </a:xfrm>
+          <a:prstGeom prst="rect">
+            <a:avLst/>
+          </a:prstGeom>
+          <a:noFill/>
+        </p:spPr>
+        <p:txBody>
+          <a:bodyPr wrap="square" lIns="0" rIns="0" tIns="0" bIns="0" anchor="ctr">
+            <a:noAutofit/>
+          </a:bodyPr>
+          <a:lstStyle/>
+          <a:p>
+            <a:pPr algn="ctr">
+              <a:lnSpc>
+                <a:spcPct val="100000"/>
+              </a:lnSpc>
+              <a:spcBef>
+                <a:spcPts val="0"/>
+              </a:spcBef>
+              <a:spcAft>
+                <a:spcPts val="0"/>
+              </a:spcAft>
+            </a:pPr>
+            <a:r>
+              <a:rPr sz="1350" b="0" i="0">
+                <a:solidFill>
+                  <a:srgbClr val="6D28D9"/>
+                </a:solidFill>
+                <a:latin typeface="Montserrat SemiBold"/>
+              </a:rPr>
+              <a:t>Clean &amp; classify</a:t>
             </a:r>
           </a:p>
         </p:txBody>
@@ -8851,12 +8898,103 @@
         </p:nvSpPr>
         <p:spPr>
           <a:xfrm>
-            <a:off x="978407" y="8531352"/>
-            <a:ext cx="2715768" cy="329184"/>
+            <a:off x="1014983" y="6784848"/>
+            <a:ext cx="2642616" cy="438912"/>
           </a:xfrm>
           <a:prstGeom prst="roundRect">
             <a:avLst>
-              <a:gd name="adj" fmla="val 13888"/>
+              <a:gd name="adj" fmla="val 50000"/>
+            </a:avLst>
+          </a:prstGeom>
+          <a:solidFill>
+            <a:srgbClr val="F1EAFC"/>
+          </a:solidFill>
+          <a:ln>
+            <a:noFill/>
+          </a:ln>
+          <a:effectLst/>
+        </p:spPr>
+        <p:style>
+          <a:lnRef idx="1">
+            <a:schemeClr val="accent1"/>
+          </a:lnRef>
+          <a:fillRef idx="3">
+            <a:schemeClr val="accent1"/>
+          </a:fillRef>
+          <a:effectRef idx="2">
+            <a:schemeClr val="accent1"/>
+          </a:effectRef>
+          <a:fontRef idx="minor">
+            <a:schemeClr val="lt1"/>
+          </a:fontRef>
+        </p:style>
+        <p:txBody>
+          <a:bodyPr rtlCol="0" anchor="ctr"/>
+          <a:lstStyle/>
+          <a:p>
+            <a:pPr algn="ctr"/>
+          </a:p>
+        </p:txBody>
+      </p:sp>
+      <p:sp>
+        <p:nvSpPr>
+          <p:cNvPr id="30" name="TextBox 29"/>
+          <p:cNvSpPr txBox="1"/>
+          <p:nvPr/>
+        </p:nvSpPr>
+        <p:spPr>
+          <a:xfrm>
+            <a:off x="1014983" y="6784848"/>
+            <a:ext cx="2642616" cy="438912"/>
+          </a:xfrm>
+          <a:prstGeom prst="rect">
+            <a:avLst/>
+          </a:prstGeom>
+          <a:noFill/>
+        </p:spPr>
+        <p:txBody>
+          <a:bodyPr wrap="square" lIns="0" rIns="0" tIns="0" bIns="0" anchor="ctr">
+            <a:noAutofit/>
+          </a:bodyPr>
+          <a:lstStyle/>
+          <a:p>
+            <a:pPr algn="ctr">
+              <a:lnSpc>
+                <a:spcPct val="100000"/>
+              </a:lnSpc>
+              <a:spcBef>
+                <a:spcPts val="0"/>
+              </a:spcBef>
+              <a:spcAft>
+                <a:spcPts val="0"/>
+              </a:spcAft>
+            </a:pPr>
+            <a:r>
+              <a:rPr sz="1350" b="0" i="0">
+                <a:solidFill>
+                  <a:srgbClr val="6D28D9"/>
+                </a:solidFill>
+                <a:latin typeface="Montserrat SemiBold"/>
+              </a:rPr>
+              <a:t>Enrich &amp; tag spend</a:t>
+            </a:r>
+          </a:p>
+        </p:txBody>
+      </p:sp>
+      <p:sp>
+        <p:nvSpPr>
+          <p:cNvPr id="31" name="Rounded Rectangle 30"/>
+          <p:cNvSpPr/>
+          <p:nvPr/>
+        </p:nvSpPr>
+        <p:spPr>
+          <a:xfrm>
+            <a:off x="1014983" y="7516368"/>
+            <a:ext cx="2642616" cy="420624"/>
+          </a:xfrm>
+          <a:prstGeom prst="roundRect">
+            <a:avLst>
+              <a:gd name="adj" fmla="val 50000"/>
             </a:avLst>
           </a:prstGeom>
           <a:solidFill>
@@ -8893,14 +9031,14 @@
       </p:sp>
       <p:sp>
         <p:nvSpPr>
-          <p:cNvPr id="30" name="TextBox 29"/>
-          <p:cNvSpPr txBox="1"/>
-          <p:nvPr/>
-        </p:nvSpPr>
-        <p:spPr>
-          <a:xfrm>
-            <a:off x="978407" y="8531352"/>
-            <a:ext cx="2715768" cy="329184"/>
+          <p:cNvPr id="32" name="TextBox 31"/>
+          <p:cNvSpPr txBox="1"/>
+          <p:nvPr/>
+        </p:nvSpPr>
+        <p:spPr>
+          <a:xfrm>
+            <a:off x="1014983" y="7516368"/>
+            <a:ext cx="2642616" cy="420624"/>
           </a:xfrm>
           <a:prstGeom prst="rect">
             <a:avLst/>
@@ -8925,7 +9063,7 @@
               </a:spcAft>
             </a:pPr>
             <a:r>
-              <a:rPr sz="1100" b="1" i="0" spc="80">
+              <a:rPr sz="1100" b="0" i="0" spc="80">
                 <a:solidFill>
                   <a:srgbClr val="146B3F"/>
                 </a:solidFill>
@@ -8938,14 +9076,14 @@
       </p:sp>
       <p:sp>
         <p:nvSpPr>
-          <p:cNvPr id="31" name="Rounded Rectangle 30"/>
+          <p:cNvPr id="33" name="Rounded Rectangle 32"/>
           <p:cNvSpPr/>
           <p:nvPr/>
         </p:nvSpPr>
         <p:spPr>
           <a:xfrm>
-            <a:off x="4069080" y="3246120"/>
-            <a:ext cx="3154680" cy="5806440"/>
+            <a:off x="4069080" y="3291840"/>
+            <a:ext cx="3154680" cy="4892040"/>
           </a:xfrm>
           <a:prstGeom prst="roundRect">
             <a:avLst>
@@ -8986,13 +9124,13 @@
       </p:sp>
       <p:sp>
         <p:nvSpPr>
-          <p:cNvPr id="32" name="Rectangle 31"/>
+          <p:cNvPr id="34" name="Rectangle 33"/>
           <p:cNvSpPr/>
           <p:nvPr/>
         </p:nvSpPr>
         <p:spPr>
           <a:xfrm>
-            <a:off x="4069080" y="3246120"/>
+            <a:off x="4069080" y="3291840"/>
             <a:ext cx="3154680" cy="64008"/>
           </a:xfrm>
           <a:prstGeom prst="rect">
@@ -9030,18 +9168,18 @@
       </p:sp>
       <p:sp>
         <p:nvSpPr>
-          <p:cNvPr id="33" name="Rounded Rectangle 32"/>
+          <p:cNvPr id="35" name="Rounded Rectangle 34"/>
           <p:cNvSpPr/>
           <p:nvPr/>
         </p:nvSpPr>
         <p:spPr>
           <a:xfrm>
-            <a:off x="4288536" y="3538727"/>
-            <a:ext cx="603504" cy="603504"/>
+            <a:off x="4325112" y="3602736"/>
+            <a:ext cx="658368" cy="658368"/>
           </a:xfrm>
           <a:prstGeom prst="roundRect">
             <a:avLst>
-              <a:gd name="adj" fmla="val 18181"/>
+              <a:gd name="adj" fmla="val 19444"/>
             </a:avLst>
           </a:prstGeom>
           <a:solidFill>
@@ -9076,7 +9214,7 @@
       </p:sp>
       <p:pic>
         <p:nvPicPr>
-          <p:cNvPr id="34" name="Picture 33" descr="icon_sourcing_purple.png"/>
+          <p:cNvPr id="36" name="Picture 35" descr="icon_sourcing_purple.png"/>
           <p:cNvPicPr>
             <a:picLocks noChangeAspect="1"/>
           </p:cNvPicPr>
@@ -9090,7 +9228,7 @@
         </p:blipFill>
         <p:spPr>
           <a:xfrm>
-            <a:off x="4407408" y="3657600"/>
+            <a:off x="4471416" y="3749039"/>
             <a:ext cx="365760" cy="365760"/>
           </a:xfrm>
           <a:prstGeom prst="rect">
@@ -9100,14 +9238,14 @@
       </p:pic>
       <p:sp>
         <p:nvSpPr>
-          <p:cNvPr id="35" name="TextBox 34"/>
-          <p:cNvSpPr txBox="1"/>
-          <p:nvPr/>
-        </p:nvSpPr>
-        <p:spPr>
-          <a:xfrm>
-            <a:off x="5001768" y="3557015"/>
-            <a:ext cx="2020824" cy="566928"/>
+          <p:cNvPr id="37" name="TextBox 36"/>
+          <p:cNvSpPr txBox="1"/>
+          <p:nvPr/>
+        </p:nvSpPr>
+        <p:spPr>
+          <a:xfrm>
+            <a:off x="5148072" y="3602736"/>
+            <a:ext cx="1819656" cy="658368"/>
           </a:xfrm>
           <a:prstGeom prst="rect">
             <a:avLst/>
@@ -9145,14 +9283,14 @@
       </p:sp>
       <p:sp>
         <p:nvSpPr>
-          <p:cNvPr id="36" name="TextBox 35"/>
-          <p:cNvSpPr txBox="1"/>
-          <p:nvPr/>
-        </p:nvSpPr>
-        <p:spPr>
-          <a:xfrm>
-            <a:off x="4288536" y="4297679"/>
-            <a:ext cx="2715768" cy="457200"/>
+          <p:cNvPr id="38" name="TextBox 37"/>
+          <p:cNvSpPr txBox="1"/>
+          <p:nvPr/>
+        </p:nvSpPr>
+        <p:spPr>
+          <a:xfrm>
+            <a:off x="4325112" y="4480560"/>
+            <a:ext cx="2642616" cy="502920"/>
           </a:xfrm>
           <a:prstGeom prst="rect">
             <a:avLst/>
@@ -9177,27 +9315,27 @@
               </a:spcAft>
             </a:pPr>
             <a:r>
-              <a:rPr sz="2000" b="0" i="0">
+              <a:rPr sz="2500" b="0" i="0">
                 <a:solidFill>
                   <a:srgbClr val="1B1F26"/>
                 </a:solidFill>
                 <a:latin typeface="Montserrat Medium"/>
               </a:rPr>
-              <a:t>Sourcing Agent</a:t>
-            </a:r>
-          </a:p>
-        </p:txBody>
-      </p:sp>
-      <p:sp>
-        <p:nvSpPr>
-          <p:cNvPr id="37" name="TextBox 36"/>
-          <p:cNvSpPr txBox="1"/>
-          <p:nvPr/>
-        </p:nvSpPr>
-        <p:spPr>
-          <a:xfrm>
-            <a:off x="4288536" y="4818888"/>
-            <a:ext cx="2715768" cy="1097280"/>
+              <a:t>Sourcing</a:t>
+            </a:r>
+          </a:p>
+        </p:txBody>
+      </p:sp>
+      <p:sp>
+        <p:nvSpPr>
+          <p:cNvPr id="39" name="TextBox 38"/>
+          <p:cNvSpPr txBox="1"/>
+          <p:nvPr/>
+        </p:nvSpPr>
+        <p:spPr>
+          <a:xfrm>
+            <a:off x="4325112" y="5120640"/>
+            <a:ext cx="2642616" cy="365760"/>
           </a:xfrm>
           <a:prstGeom prst="rect">
             <a:avLst/>
@@ -9212,86 +9350,96 @@
           <a:p>
             <a:pPr algn="l">
               <a:lnSpc>
-                <a:spcPct val="120000"/>
-              </a:lnSpc>
-              <a:spcBef>
-                <a:spcPts val="0"/>
-              </a:spcBef>
-              <a:spcAft>
-                <a:spcPts val="0"/>
-              </a:spcAft>
-            </a:pPr>
-            <a:r>
-              <a:rPr sz="1300" b="0" i="0">
-                <a:solidFill>
-                  <a:srgbClr val="6A707B"/>
-                </a:solidFill>
-                <a:latin typeface="Montserrat"/>
-              </a:rPr>
-              <a:t>Scouts the market and runs outreach across the existing supplier base.</a:t>
-            </a:r>
-          </a:p>
-        </p:txBody>
-      </p:sp>
-      <p:cxnSp>
-        <p:nvCxnSpPr>
-          <p:cNvPr id="38" name="Connector 37"/>
-          <p:cNvCxnSpPr/>
-          <p:nvPr/>
-        </p:nvCxnSpPr>
-        <p:spPr>
-          <a:xfrm>
-            <a:off x="4288536" y="6035040"/>
-            <a:ext cx="2715768" cy="0"/>
-          </a:xfrm>
-          <a:prstGeom prst="bentConnector3">
-            <a:avLst/>
-          </a:prstGeom>
-          <a:ln w="9525">
-            <a:solidFill>
-              <a:srgbClr val="E2E4EA"/>
-            </a:solidFill>
+                <a:spcPct val="100000"/>
+              </a:lnSpc>
+              <a:spcBef>
+                <a:spcPts val="0"/>
+              </a:spcBef>
+              <a:spcAft>
+                <a:spcPts val="0"/>
+              </a:spcAft>
+            </a:pPr>
+            <a:r>
+              <a:rPr sz="1400" b="0" i="0">
+                <a:solidFill>
+                  <a:srgbClr val="7C3AED"/>
+                </a:solidFill>
+                <a:latin typeface="Montserrat Medium"/>
+              </a:rPr>
+              <a:t>Multi-Agent RFQ</a:t>
+            </a:r>
+          </a:p>
+        </p:txBody>
+      </p:sp>
+      <p:sp>
+        <p:nvSpPr>
+          <p:cNvPr id="40" name="Rounded Rectangle 39"/>
+          <p:cNvSpPr/>
+          <p:nvPr/>
+        </p:nvSpPr>
+        <p:spPr>
+          <a:xfrm>
+            <a:off x="4325112" y="5687568"/>
+            <a:ext cx="2642616" cy="438912"/>
+          </a:xfrm>
+          <a:prstGeom prst="roundRect">
+            <a:avLst>
+              <a:gd name="adj" fmla="val 50000"/>
+            </a:avLst>
+          </a:prstGeom>
+          <a:solidFill>
+            <a:srgbClr val="F1EAFC"/>
+          </a:solidFill>
+          <a:ln>
+            <a:noFill/>
           </a:ln>
           <a:effectLst/>
         </p:spPr>
         <p:style>
-          <a:lnRef idx="2">
+          <a:lnRef idx="1">
             <a:schemeClr val="accent1"/>
           </a:lnRef>
-          <a:fillRef idx="0">
+          <a:fillRef idx="3">
             <a:schemeClr val="accent1"/>
           </a:fillRef>
-          <a:effectRef idx="1">
+          <a:effectRef idx="2">
             <a:schemeClr val="accent1"/>
           </a:effectRef>
           <a:fontRef idx="minor">
-            <a:schemeClr val="tx1"/>
+            <a:schemeClr val="lt1"/>
           </a:fontRef>
         </p:style>
-      </p:cxnSp>
-      <p:sp>
-        <p:nvSpPr>
-          <p:cNvPr id="39" name="TextBox 38"/>
-          <p:cNvSpPr txBox="1"/>
-          <p:nvPr/>
-        </p:nvSpPr>
-        <p:spPr>
-          <a:xfrm>
-            <a:off x="4288536" y="6190488"/>
-            <a:ext cx="2715768" cy="182880"/>
-          </a:xfrm>
-          <a:prstGeom prst="rect">
-            <a:avLst/>
-          </a:prstGeom>
-          <a:noFill/>
-        </p:spPr>
-        <p:txBody>
-          <a:bodyPr wrap="square" lIns="0" rIns="0" tIns="0" bIns="0" anchor="t">
-            <a:noAutofit/>
-          </a:bodyPr>
-          <a:lstStyle/>
-          <a:p>
-            <a:pPr algn="l">
+        <p:txBody>
+          <a:bodyPr rtlCol="0" anchor="ctr"/>
+          <a:lstStyle/>
+          <a:p>
+            <a:pPr algn="ctr"/>
+          </a:p>
+        </p:txBody>
+      </p:sp>
+      <p:sp>
+        <p:nvSpPr>
+          <p:cNvPr id="41" name="TextBox 40"/>
+          <p:cNvSpPr txBox="1"/>
+          <p:nvPr/>
+        </p:nvSpPr>
+        <p:spPr>
+          <a:xfrm>
+            <a:off x="4325112" y="5687568"/>
+            <a:ext cx="2642616" cy="438912"/>
+          </a:xfrm>
+          <a:prstGeom prst="rect">
+            <a:avLst/>
+          </a:prstGeom>
+          <a:noFill/>
+        </p:spPr>
+        <p:txBody>
+          <a:bodyPr wrap="square" lIns="0" rIns="0" tIns="0" bIns="0" anchor="ctr">
+            <a:noAutofit/>
+          </a:bodyPr>
+          <a:lstStyle/>
+          <a:p>
+            <a:pPr algn="ctr">
               <a:lnSpc>
                 <a:spcPct val="100000"/>
               </a:lnSpc>
@@ -9303,103 +9451,13 @@
               </a:spcAft>
             </a:pPr>
             <a:r>
-              <a:rPr sz="950" b="1" i="0" spc="60">
-                <a:solidFill>
-                  <a:srgbClr val="6A707B"/>
-                </a:solidFill>
-                <a:latin typeface="Consolas"/>
-              </a:rPr>
-              <a:t>↓ AERCHAIN CAPABILITY</a:t>
-            </a:r>
-          </a:p>
-        </p:txBody>
-      </p:sp>
-      <p:sp>
-        <p:nvSpPr>
-          <p:cNvPr id="40" name="TextBox 39"/>
-          <p:cNvSpPr txBox="1"/>
-          <p:nvPr/>
-        </p:nvSpPr>
-        <p:spPr>
-          <a:xfrm>
-            <a:off x="4288536" y="6446520"/>
-            <a:ext cx="2715768" cy="548640"/>
-          </a:xfrm>
-          <a:prstGeom prst="rect">
-            <a:avLst/>
-          </a:prstGeom>
-          <a:noFill/>
-        </p:spPr>
-        <p:txBody>
-          <a:bodyPr wrap="square" lIns="0" rIns="0" tIns="0" bIns="0" anchor="t">
-            <a:noAutofit/>
-          </a:bodyPr>
-          <a:lstStyle/>
-          <a:p>
-            <a:pPr algn="l">
-              <a:lnSpc>
-                <a:spcPct val="105000"/>
-              </a:lnSpc>
-              <a:spcBef>
-                <a:spcPts val="0"/>
-              </a:spcBef>
-              <a:spcAft>
-                <a:spcPts val="0"/>
-              </a:spcAft>
-            </a:pPr>
-            <a:r>
-              <a:rPr sz="1500" b="0" i="0">
-                <a:solidFill>
-                  <a:srgbClr val="7C3AED"/>
-                </a:solidFill>
-                <a:latin typeface="Montserrat Medium"/>
-              </a:rPr>
-              <a:t>Multi-Agent RFQ</a:t>
-            </a:r>
-          </a:p>
-        </p:txBody>
-      </p:sp>
-      <p:sp>
-        <p:nvSpPr>
-          <p:cNvPr id="41" name="TextBox 40"/>
-          <p:cNvSpPr txBox="1"/>
-          <p:nvPr/>
-        </p:nvSpPr>
-        <p:spPr>
-          <a:xfrm>
-            <a:off x="4288536" y="7104888"/>
-            <a:ext cx="2715768" cy="1371600"/>
-          </a:xfrm>
-          <a:prstGeom prst="rect">
-            <a:avLst/>
-          </a:prstGeom>
-          <a:noFill/>
-        </p:spPr>
-        <p:txBody>
-          <a:bodyPr wrap="square" lIns="0" rIns="0" tIns="0" bIns="0" anchor="t">
-            <a:noAutofit/>
-          </a:bodyPr>
-          <a:lstStyle/>
-          <a:p>
-            <a:pPr algn="l">
-              <a:lnSpc>
-                <a:spcPct val="122000"/>
-              </a:lnSpc>
-              <a:spcBef>
-                <a:spcPts val="0"/>
-              </a:spcBef>
-              <a:spcAft>
-                <a:spcPts val="0"/>
-              </a:spcAft>
-            </a:pPr>
-            <a:r>
-              <a:rPr sz="1200" b="0" i="0">
-                <a:solidFill>
-                  <a:srgbClr val="484E59"/>
-                </a:solidFill>
-                <a:latin typeface="Montserrat"/>
-              </a:rPr>
-              <a:t>Auto-builds SOW, scope and T&amp;Cs, then runs outreach, follow-up, query clarification and bid extraction autonomously.</a:t>
+              <a:rPr sz="1350" b="0" i="0">
+                <a:solidFill>
+                  <a:srgbClr val="6D28D9"/>
+                </a:solidFill>
+                <a:latin typeface="Montserrat SemiBold"/>
+              </a:rPr>
+              <a:t>Build RFQ pack</a:t>
             </a:r>
           </a:p>
         </p:txBody>
@@ -9412,12 +9470,194 @@
         </p:nvSpPr>
         <p:spPr>
           <a:xfrm>
-            <a:off x="4288536" y="8531352"/>
-            <a:ext cx="2715768" cy="329184"/>
+            <a:off x="4325112" y="6236208"/>
+            <a:ext cx="2642616" cy="438912"/>
           </a:xfrm>
           <a:prstGeom prst="roundRect">
             <a:avLst>
-              <a:gd name="adj" fmla="val 13888"/>
+              <a:gd name="adj" fmla="val 50000"/>
+            </a:avLst>
+          </a:prstGeom>
+          <a:solidFill>
+            <a:srgbClr val="F1EAFC"/>
+          </a:solidFill>
+          <a:ln>
+            <a:noFill/>
+          </a:ln>
+          <a:effectLst/>
+        </p:spPr>
+        <p:style>
+          <a:lnRef idx="1">
+            <a:schemeClr val="accent1"/>
+          </a:lnRef>
+          <a:fillRef idx="3">
+            <a:schemeClr val="accent1"/>
+          </a:fillRef>
+          <a:effectRef idx="2">
+            <a:schemeClr val="accent1"/>
+          </a:effectRef>
+          <a:fontRef idx="minor">
+            <a:schemeClr val="lt1"/>
+          </a:fontRef>
+        </p:style>
+        <p:txBody>
+          <a:bodyPr rtlCol="0" anchor="ctr"/>
+          <a:lstStyle/>
+          <a:p>
+            <a:pPr algn="ctr"/>
+          </a:p>
+        </p:txBody>
+      </p:sp>
+      <p:sp>
+        <p:nvSpPr>
+          <p:cNvPr id="43" name="TextBox 42"/>
+          <p:cNvSpPr txBox="1"/>
+          <p:nvPr/>
+        </p:nvSpPr>
+        <p:spPr>
+          <a:xfrm>
+            <a:off x="4325112" y="6236208"/>
+            <a:ext cx="2642616" cy="438912"/>
+          </a:xfrm>
+          <a:prstGeom prst="rect">
+            <a:avLst/>
+          </a:prstGeom>
+          <a:noFill/>
+        </p:spPr>
+        <p:txBody>
+          <a:bodyPr wrap="square" lIns="0" rIns="0" tIns="0" bIns="0" anchor="ctr">
+            <a:noAutofit/>
+          </a:bodyPr>
+          <a:lstStyle/>
+          <a:p>
+            <a:pPr algn="ctr">
+              <a:lnSpc>
+                <a:spcPct val="100000"/>
+              </a:lnSpc>
+              <a:spcBef>
+                <a:spcPts val="0"/>
+              </a:spcBef>
+              <a:spcAft>
+                <a:spcPts val="0"/>
+              </a:spcAft>
+            </a:pPr>
+            <a:r>
+              <a:rPr sz="1350" b="0" i="0">
+                <a:solidFill>
+                  <a:srgbClr val="6D28D9"/>
+                </a:solidFill>
+                <a:latin typeface="Montserrat SemiBold"/>
+              </a:rPr>
+              <a:t>Run outreach</a:t>
+            </a:r>
+          </a:p>
+        </p:txBody>
+      </p:sp>
+      <p:sp>
+        <p:nvSpPr>
+          <p:cNvPr id="44" name="Rounded Rectangle 43"/>
+          <p:cNvSpPr/>
+          <p:nvPr/>
+        </p:nvSpPr>
+        <p:spPr>
+          <a:xfrm>
+            <a:off x="4325112" y="6784848"/>
+            <a:ext cx="2642616" cy="438912"/>
+          </a:xfrm>
+          <a:prstGeom prst="roundRect">
+            <a:avLst>
+              <a:gd name="adj" fmla="val 50000"/>
+            </a:avLst>
+          </a:prstGeom>
+          <a:solidFill>
+            <a:srgbClr val="F1EAFC"/>
+          </a:solidFill>
+          <a:ln>
+            <a:noFill/>
+          </a:ln>
+          <a:effectLst/>
+        </p:spPr>
+        <p:style>
+          <a:lnRef idx="1">
+            <a:schemeClr val="accent1"/>
+          </a:lnRef>
+          <a:fillRef idx="3">
+            <a:schemeClr val="accent1"/>
+          </a:fillRef>
+          <a:effectRef idx="2">
+            <a:schemeClr val="accent1"/>
+          </a:effectRef>
+          <a:fontRef idx="minor">
+            <a:schemeClr val="lt1"/>
+          </a:fontRef>
+        </p:style>
+        <p:txBody>
+          <a:bodyPr rtlCol="0" anchor="ctr"/>
+          <a:lstStyle/>
+          <a:p>
+            <a:pPr algn="ctr"/>
+          </a:p>
+        </p:txBody>
+      </p:sp>
+      <p:sp>
+        <p:nvSpPr>
+          <p:cNvPr id="45" name="TextBox 44"/>
+          <p:cNvSpPr txBox="1"/>
+          <p:nvPr/>
+        </p:nvSpPr>
+        <p:spPr>
+          <a:xfrm>
+            <a:off x="4325112" y="6784848"/>
+            <a:ext cx="2642616" cy="438912"/>
+          </a:xfrm>
+          <a:prstGeom prst="rect">
+            <a:avLst/>
+          </a:prstGeom>
+          <a:noFill/>
+        </p:spPr>
+        <p:txBody>
+          <a:bodyPr wrap="square" lIns="0" rIns="0" tIns="0" bIns="0" anchor="ctr">
+            <a:noAutofit/>
+          </a:bodyPr>
+          <a:lstStyle/>
+          <a:p>
+            <a:pPr algn="ctr">
+              <a:lnSpc>
+                <a:spcPct val="100000"/>
+              </a:lnSpc>
+              <a:spcBef>
+                <a:spcPts val="0"/>
+              </a:spcBef>
+              <a:spcAft>
+                <a:spcPts val="0"/>
+              </a:spcAft>
+            </a:pPr>
+            <a:r>
+              <a:rPr sz="1350" b="0" i="0">
+                <a:solidFill>
+                  <a:srgbClr val="6D28D9"/>
+                </a:solidFill>
+                <a:latin typeface="Montserrat SemiBold"/>
+              </a:rPr>
+              <a:t>Extract bids</a:t>
+            </a:r>
+          </a:p>
+        </p:txBody>
+      </p:sp>
+      <p:sp>
+        <p:nvSpPr>
+          <p:cNvPr id="46" name="Rounded Rectangle 45"/>
+          <p:cNvSpPr/>
+          <p:nvPr/>
+        </p:nvSpPr>
+        <p:spPr>
+          <a:xfrm>
+            <a:off x="4325112" y="7516368"/>
+            <a:ext cx="2642616" cy="420624"/>
+          </a:xfrm>
+          <a:prstGeom prst="roundRect">
+            <a:avLst>
+              <a:gd name="adj" fmla="val 50000"/>
             </a:avLst>
           </a:prstGeom>
           <a:solidFill>
@@ -9454,14 +9694,14 @@
       </p:sp>
       <p:sp>
         <p:nvSpPr>
-          <p:cNvPr id="43" name="TextBox 42"/>
-          <p:cNvSpPr txBox="1"/>
-          <p:nvPr/>
-        </p:nvSpPr>
-        <p:spPr>
-          <a:xfrm>
-            <a:off x="4288536" y="8531352"/>
-            <a:ext cx="2715768" cy="329184"/>
+          <p:cNvPr id="47" name="TextBox 46"/>
+          <p:cNvSpPr txBox="1"/>
+          <p:nvPr/>
+        </p:nvSpPr>
+        <p:spPr>
+          <a:xfrm>
+            <a:off x="4325112" y="7516368"/>
+            <a:ext cx="2642616" cy="420624"/>
           </a:xfrm>
           <a:prstGeom prst="rect">
             <a:avLst/>
@@ -9486,7 +9726,7 @@
               </a:spcAft>
             </a:pPr>
             <a:r>
-              <a:rPr sz="1100" b="1" i="0" spc="80">
+              <a:rPr sz="1100" b="0" i="0" spc="80">
                 <a:solidFill>
                   <a:srgbClr val="146B3F"/>
                 </a:solidFill>
@@ -9499,14 +9739,14 @@
       </p:sp>
       <p:sp>
         <p:nvSpPr>
-          <p:cNvPr id="44" name="Rounded Rectangle 43"/>
+          <p:cNvPr id="48" name="Rounded Rectangle 47"/>
           <p:cNvSpPr/>
           <p:nvPr/>
         </p:nvSpPr>
         <p:spPr>
           <a:xfrm>
-            <a:off x="7379208" y="3246120"/>
-            <a:ext cx="3154680" cy="5806440"/>
+            <a:off x="7379208" y="3291840"/>
+            <a:ext cx="3154680" cy="4892040"/>
           </a:xfrm>
           <a:prstGeom prst="roundRect">
             <a:avLst>
@@ -9547,13 +9787,13 @@
       </p:sp>
       <p:sp>
         <p:nvSpPr>
-          <p:cNvPr id="45" name="Rectangle 44"/>
+          <p:cNvPr id="49" name="Rectangle 48"/>
           <p:cNvSpPr/>
           <p:nvPr/>
         </p:nvSpPr>
         <p:spPr>
           <a:xfrm>
-            <a:off x="7379208" y="3246120"/>
+            <a:off x="7379208" y="3291840"/>
             <a:ext cx="3154680" cy="64008"/>
           </a:xfrm>
           <a:prstGeom prst="rect">
@@ -9591,18 +9831,18 @@
       </p:sp>
       <p:sp>
         <p:nvSpPr>
-          <p:cNvPr id="46" name="Rounded Rectangle 45"/>
+          <p:cNvPr id="50" name="Rounded Rectangle 49"/>
           <p:cNvSpPr/>
           <p:nvPr/>
         </p:nvSpPr>
         <p:spPr>
           <a:xfrm>
-            <a:off x="7598664" y="3538727"/>
-            <a:ext cx="603504" cy="603504"/>
+            <a:off x="7635240" y="3602736"/>
+            <a:ext cx="658368" cy="658368"/>
           </a:xfrm>
           <a:prstGeom prst="roundRect">
             <a:avLst>
-              <a:gd name="adj" fmla="val 18181"/>
+              <a:gd name="adj" fmla="val 19444"/>
             </a:avLst>
           </a:prstGeom>
           <a:solidFill>
@@ -9637,7 +9877,7 @@
       </p:sp>
       <p:pic>
         <p:nvPicPr>
-          <p:cNvPr id="47" name="Picture 46" descr="icon_negotiation_purple.png"/>
+          <p:cNvPr id="51" name="Picture 50" descr="icon_negotiation_purple.png"/>
           <p:cNvPicPr>
             <a:picLocks noChangeAspect="1"/>
           </p:cNvPicPr>
@@ -9651,7 +9891,7 @@
         </p:blipFill>
         <p:spPr>
           <a:xfrm>
-            <a:off x="7717536" y="3657600"/>
+            <a:off x="7781544" y="3749039"/>
             <a:ext cx="365760" cy="365760"/>
           </a:xfrm>
           <a:prstGeom prst="rect">
@@ -9661,14 +9901,14 @@
       </p:pic>
       <p:sp>
         <p:nvSpPr>
-          <p:cNvPr id="48" name="TextBox 47"/>
-          <p:cNvSpPr txBox="1"/>
-          <p:nvPr/>
-        </p:nvSpPr>
-        <p:spPr>
-          <a:xfrm>
-            <a:off x="8311896" y="3557015"/>
-            <a:ext cx="2020824" cy="566928"/>
+          <p:cNvPr id="52" name="TextBox 51"/>
+          <p:cNvSpPr txBox="1"/>
+          <p:nvPr/>
+        </p:nvSpPr>
+        <p:spPr>
+          <a:xfrm>
+            <a:off x="8458200" y="3602736"/>
+            <a:ext cx="1819656" cy="658368"/>
           </a:xfrm>
           <a:prstGeom prst="rect">
             <a:avLst/>
@@ -9706,14 +9946,14 @@
       </p:sp>
       <p:sp>
         <p:nvSpPr>
-          <p:cNvPr id="49" name="TextBox 48"/>
-          <p:cNvSpPr txBox="1"/>
-          <p:nvPr/>
-        </p:nvSpPr>
-        <p:spPr>
-          <a:xfrm>
-            <a:off x="7598664" y="4297679"/>
-            <a:ext cx="2715768" cy="457200"/>
+          <p:cNvPr id="53" name="TextBox 52"/>
+          <p:cNvSpPr txBox="1"/>
+          <p:nvPr/>
+        </p:nvSpPr>
+        <p:spPr>
+          <a:xfrm>
+            <a:off x="7635240" y="4480560"/>
+            <a:ext cx="2642616" cy="502920"/>
           </a:xfrm>
           <a:prstGeom prst="rect">
             <a:avLst/>
@@ -9738,27 +9978,27 @@
               </a:spcAft>
             </a:pPr>
             <a:r>
-              <a:rPr sz="2000" b="0" i="0">
+              <a:rPr sz="2500" b="0" i="0">
                 <a:solidFill>
                   <a:srgbClr val="1B1F26"/>
                 </a:solidFill>
                 <a:latin typeface="Montserrat Medium"/>
               </a:rPr>
-              <a:t>Negotiation Agent</a:t>
-            </a:r>
-          </a:p>
-        </p:txBody>
-      </p:sp>
-      <p:sp>
-        <p:nvSpPr>
-          <p:cNvPr id="50" name="TextBox 49"/>
-          <p:cNvSpPr txBox="1"/>
-          <p:nvPr/>
-        </p:nvSpPr>
-        <p:spPr>
-          <a:xfrm>
-            <a:off x="7598664" y="4818888"/>
-            <a:ext cx="2715768" cy="1097280"/>
+              <a:t>Negotiation</a:t>
+            </a:r>
+          </a:p>
+        </p:txBody>
+      </p:sp>
+      <p:sp>
+        <p:nvSpPr>
+          <p:cNvPr id="54" name="TextBox 53"/>
+          <p:cNvSpPr txBox="1"/>
+          <p:nvPr/>
+        </p:nvSpPr>
+        <p:spPr>
+          <a:xfrm>
+            <a:off x="7635240" y="5120640"/>
+            <a:ext cx="2642616" cy="365760"/>
           </a:xfrm>
           <a:prstGeom prst="rect">
             <a:avLst/>
@@ -9773,86 +10013,96 @@
           <a:p>
             <a:pPr algn="l">
               <a:lnSpc>
-                <a:spcPct val="120000"/>
-              </a:lnSpc>
-              <a:spcBef>
-                <a:spcPts val="0"/>
-              </a:spcBef>
-              <a:spcAft>
-                <a:spcPts val="0"/>
-              </a:spcAft>
-            </a:pPr>
-            <a:r>
-              <a:rPr sz="1300" b="0" i="0">
-                <a:solidFill>
-                  <a:srgbClr val="6A707B"/>
-                </a:solidFill>
-                <a:latin typeface="Montserrat"/>
-              </a:rPr>
-              <a:t>Multi-parameter, asynchronous negotiation across price, terms &amp; lead time.</a:t>
-            </a:r>
-          </a:p>
-        </p:txBody>
-      </p:sp>
-      <p:cxnSp>
-        <p:nvCxnSpPr>
-          <p:cNvPr id="51" name="Connector 50"/>
-          <p:cNvCxnSpPr/>
-          <p:nvPr/>
-        </p:nvCxnSpPr>
-        <p:spPr>
-          <a:xfrm>
-            <a:off x="7598664" y="6035040"/>
-            <a:ext cx="2715768" cy="0"/>
-          </a:xfrm>
-          <a:prstGeom prst="bentConnector3">
-            <a:avLst/>
-          </a:prstGeom>
-          <a:ln w="9525">
-            <a:solidFill>
-              <a:srgbClr val="E2E4EA"/>
-            </a:solidFill>
+                <a:spcPct val="100000"/>
+              </a:lnSpc>
+              <a:spcBef>
+                <a:spcPts val="0"/>
+              </a:spcBef>
+              <a:spcAft>
+                <a:spcPts val="0"/>
+              </a:spcAft>
+            </a:pPr>
+            <a:r>
+              <a:rPr sz="1400" b="0" i="0">
+                <a:solidFill>
+                  <a:srgbClr val="7C3AED"/>
+                </a:solidFill>
+                <a:latin typeface="Montserrat Medium"/>
+              </a:rPr>
+              <a:t>AI Negotiation</a:t>
+            </a:r>
+          </a:p>
+        </p:txBody>
+      </p:sp>
+      <p:sp>
+        <p:nvSpPr>
+          <p:cNvPr id="55" name="Rounded Rectangle 54"/>
+          <p:cNvSpPr/>
+          <p:nvPr/>
+        </p:nvSpPr>
+        <p:spPr>
+          <a:xfrm>
+            <a:off x="7635240" y="5687568"/>
+            <a:ext cx="2642616" cy="438912"/>
+          </a:xfrm>
+          <a:prstGeom prst="roundRect">
+            <a:avLst>
+              <a:gd name="adj" fmla="val 50000"/>
+            </a:avLst>
+          </a:prstGeom>
+          <a:solidFill>
+            <a:srgbClr val="F1EAFC"/>
+          </a:solidFill>
+          <a:ln>
+            <a:noFill/>
           </a:ln>
           <a:effectLst/>
         </p:spPr>
         <p:style>
-          <a:lnRef idx="2">
+          <a:lnRef idx="1">
             <a:schemeClr val="accent1"/>
           </a:lnRef>
-          <a:fillRef idx="0">
+          <a:fillRef idx="3">
             <a:schemeClr val="accent1"/>
           </a:fillRef>
-          <a:effectRef idx="1">
+          <a:effectRef idx="2">
             <a:schemeClr val="accent1"/>
           </a:effectRef>
           <a:fontRef idx="minor">
-            <a:schemeClr val="tx1"/>
+            <a:schemeClr val="lt1"/>
           </a:fontRef>
         </p:style>
-      </p:cxnSp>
-      <p:sp>
-        <p:nvSpPr>
-          <p:cNvPr id="52" name="TextBox 51"/>
-          <p:cNvSpPr txBox="1"/>
-          <p:nvPr/>
-        </p:nvSpPr>
-        <p:spPr>
-          <a:xfrm>
-            <a:off x="7598664" y="6190488"/>
-            <a:ext cx="2715768" cy="182880"/>
-          </a:xfrm>
-          <a:prstGeom prst="rect">
-            <a:avLst/>
-          </a:prstGeom>
-          <a:noFill/>
-        </p:spPr>
-        <p:txBody>
-          <a:bodyPr wrap="square" lIns="0" rIns="0" tIns="0" bIns="0" anchor="t">
-            <a:noAutofit/>
-          </a:bodyPr>
-          <a:lstStyle/>
-          <a:p>
-            <a:pPr algn="l">
+        <p:txBody>
+          <a:bodyPr rtlCol="0" anchor="ctr"/>
+          <a:lstStyle/>
+          <a:p>
+            <a:pPr algn="ctr"/>
+          </a:p>
+        </p:txBody>
+      </p:sp>
+      <p:sp>
+        <p:nvSpPr>
+          <p:cNvPr id="56" name="TextBox 55"/>
+          <p:cNvSpPr txBox="1"/>
+          <p:nvPr/>
+        </p:nvSpPr>
+        <p:spPr>
+          <a:xfrm>
+            <a:off x="7635240" y="5687568"/>
+            <a:ext cx="2642616" cy="438912"/>
+          </a:xfrm>
+          <a:prstGeom prst="rect">
+            <a:avLst/>
+          </a:prstGeom>
+          <a:noFill/>
+        </p:spPr>
+        <p:txBody>
+          <a:bodyPr wrap="square" lIns="0" rIns="0" tIns="0" bIns="0" anchor="ctr">
+            <a:noAutofit/>
+          </a:bodyPr>
+          <a:lstStyle/>
+          <a:p>
+            <a:pPr algn="ctr">
               <a:lnSpc>
                 <a:spcPct val="100000"/>
               </a:lnSpc>
@@ -9864,121 +10114,213 @@
               </a:spcAft>
             </a:pPr>
             <a:r>
-              <a:rPr sz="950" b="1" i="0" spc="60">
-                <a:solidFill>
-                  <a:srgbClr val="6A707B"/>
-                </a:solidFill>
-                <a:latin typeface="Consolas"/>
-              </a:rPr>
-              <a:t>↓ AERCHAIN CAPABILITY</a:t>
-            </a:r>
-          </a:p>
-        </p:txBody>
-      </p:sp>
-      <p:sp>
-        <p:nvSpPr>
-          <p:cNvPr id="53" name="TextBox 52"/>
-          <p:cNvSpPr txBox="1"/>
-          <p:nvPr/>
-        </p:nvSpPr>
-        <p:spPr>
-          <a:xfrm>
-            <a:off x="7598664" y="6446520"/>
-            <a:ext cx="2715768" cy="548640"/>
-          </a:xfrm>
-          <a:prstGeom prst="rect">
-            <a:avLst/>
-          </a:prstGeom>
-          <a:noFill/>
-        </p:spPr>
-        <p:txBody>
-          <a:bodyPr wrap="square" lIns="0" rIns="0" tIns="0" bIns="0" anchor="t">
-            <a:noAutofit/>
-          </a:bodyPr>
-          <a:lstStyle/>
-          <a:p>
-            <a:pPr algn="l">
-              <a:lnSpc>
-                <a:spcPct val="105000"/>
-              </a:lnSpc>
-              <a:spcBef>
-                <a:spcPts val="0"/>
-              </a:spcBef>
-              <a:spcAft>
-                <a:spcPts val="0"/>
-              </a:spcAft>
-            </a:pPr>
-            <a:r>
-              <a:rPr sz="1500" b="0" i="0">
-                <a:solidFill>
-                  <a:srgbClr val="7C3AED"/>
-                </a:solidFill>
-                <a:latin typeface="Montserrat Medium"/>
-              </a:rPr>
-              <a:t>AI Negotiation</a:t>
-            </a:r>
-          </a:p>
-        </p:txBody>
-      </p:sp>
-      <p:sp>
-        <p:nvSpPr>
-          <p:cNvPr id="54" name="TextBox 53"/>
-          <p:cNvSpPr txBox="1"/>
-          <p:nvPr/>
-        </p:nvSpPr>
-        <p:spPr>
-          <a:xfrm>
-            <a:off x="7598664" y="7104888"/>
-            <a:ext cx="2715768" cy="1371600"/>
-          </a:xfrm>
-          <a:prstGeom prst="rect">
-            <a:avLst/>
-          </a:prstGeom>
-          <a:noFill/>
-        </p:spPr>
-        <p:txBody>
-          <a:bodyPr wrap="square" lIns="0" rIns="0" tIns="0" bIns="0" anchor="t">
-            <a:noAutofit/>
-          </a:bodyPr>
-          <a:lstStyle/>
-          <a:p>
-            <a:pPr algn="l">
-              <a:lnSpc>
-                <a:spcPct val="122000"/>
-              </a:lnSpc>
-              <a:spcBef>
-                <a:spcPts val="0"/>
-              </a:spcBef>
-              <a:spcAft>
-                <a:spcPts val="0"/>
-              </a:spcAft>
-            </a:pPr>
-            <a:r>
-              <a:rPr sz="1200" b="0" i="0">
-                <a:solidFill>
-                  <a:srgbClr val="484E59"/>
-                </a:solidFill>
-                <a:latin typeface="Montserrat"/>
-              </a:rPr>
-              <a:t>Multi-round, configurable-autonomy negotiations with price loading and total-cost normalisation across regions.</a:t>
-            </a:r>
-          </a:p>
-        </p:txBody>
-      </p:sp>
-      <p:sp>
-        <p:nvSpPr>
-          <p:cNvPr id="55" name="Rounded Rectangle 54"/>
+              <a:rPr sz="1350" b="0" i="0">
+                <a:solidFill>
+                  <a:srgbClr val="6D28D9"/>
+                </a:solidFill>
+                <a:latin typeface="Montserrat SemiBold"/>
+              </a:rPr>
+              <a:t>Multi-round</a:t>
+            </a:r>
+          </a:p>
+        </p:txBody>
+      </p:sp>
+      <p:sp>
+        <p:nvSpPr>
+          <p:cNvPr id="57" name="Rounded Rectangle 56"/>
           <p:cNvSpPr/>
           <p:nvPr/>
         </p:nvSpPr>
         <p:spPr>
           <a:xfrm>
-            <a:off x="7598664" y="8531352"/>
-            <a:ext cx="2715768" cy="329184"/>
+            <a:off x="7635240" y="6236208"/>
+            <a:ext cx="2642616" cy="438912"/>
           </a:xfrm>
           <a:prstGeom prst="roundRect">
             <a:avLst>
-              <a:gd name="adj" fmla="val 13888"/>
+              <a:gd name="adj" fmla="val 50000"/>
+            </a:avLst>
+          </a:prstGeom>
+          <a:solidFill>
+            <a:srgbClr val="F1EAFC"/>
+          </a:solidFill>
+          <a:ln>
+            <a:noFill/>
+          </a:ln>
+          <a:effectLst/>
+        </p:spPr>
+        <p:style>
+          <a:lnRef idx="1">
+            <a:schemeClr val="accent1"/>
+          </a:lnRef>
+          <a:fillRef idx="3">
+            <a:schemeClr val="accent1"/>
+          </a:fillRef>
+          <a:effectRef idx="2">
+            <a:schemeClr val="accent1"/>
+          </a:effectRef>
+          <a:fontRef idx="minor">
+            <a:schemeClr val="lt1"/>
+          </a:fontRef>
+        </p:style>
+        <p:txBody>
+          <a:bodyPr rtlCol="0" anchor="ctr"/>
+          <a:lstStyle/>
+          <a:p>
+            <a:pPr algn="ctr"/>
+          </a:p>
+        </p:txBody>
+      </p:sp>
+      <p:sp>
+        <p:nvSpPr>
+          <p:cNvPr id="58" name="TextBox 57"/>
+          <p:cNvSpPr txBox="1"/>
+          <p:nvPr/>
+        </p:nvSpPr>
+        <p:spPr>
+          <a:xfrm>
+            <a:off x="7635240" y="6236208"/>
+            <a:ext cx="2642616" cy="438912"/>
+          </a:xfrm>
+          <a:prstGeom prst="rect">
+            <a:avLst/>
+          </a:prstGeom>
+          <a:noFill/>
+        </p:spPr>
+        <p:txBody>
+          <a:bodyPr wrap="square" lIns="0" rIns="0" tIns="0" bIns="0" anchor="ctr">
+            <a:noAutofit/>
+          </a:bodyPr>
+          <a:lstStyle/>
+          <a:p>
+            <a:pPr algn="ctr">
+              <a:lnSpc>
+                <a:spcPct val="100000"/>
+              </a:lnSpc>
+              <a:spcBef>
+                <a:spcPts val="0"/>
+              </a:spcBef>
+              <a:spcAft>
+                <a:spcPts val="0"/>
+              </a:spcAft>
+            </a:pPr>
+            <a:r>
+              <a:rPr sz="1350" b="0" i="0">
+                <a:solidFill>
+                  <a:srgbClr val="6D28D9"/>
+                </a:solidFill>
+                <a:latin typeface="Montserrat SemiBold"/>
+              </a:rPr>
+              <a:t>Price &amp; terms</a:t>
+            </a:r>
+          </a:p>
+        </p:txBody>
+      </p:sp>
+      <p:sp>
+        <p:nvSpPr>
+          <p:cNvPr id="59" name="Rounded Rectangle 58"/>
+          <p:cNvSpPr/>
+          <p:nvPr/>
+        </p:nvSpPr>
+        <p:spPr>
+          <a:xfrm>
+            <a:off x="7635240" y="6784848"/>
+            <a:ext cx="2642616" cy="438912"/>
+          </a:xfrm>
+          <a:prstGeom prst="roundRect">
+            <a:avLst>
+              <a:gd name="adj" fmla="val 50000"/>
+            </a:avLst>
+          </a:prstGeom>
+          <a:solidFill>
+            <a:srgbClr val="F1EAFC"/>
+          </a:solidFill>
+          <a:ln>
+            <a:noFill/>
+          </a:ln>
+          <a:effectLst/>
+        </p:spPr>
+        <p:style>
+          <a:lnRef idx="1">
+            <a:schemeClr val="accent1"/>
+          </a:lnRef>
+          <a:fillRef idx="3">
+            <a:schemeClr val="accent1"/>
+          </a:fillRef>
+          <a:effectRef idx="2">
+            <a:schemeClr val="accent1"/>
+          </a:effectRef>
+          <a:fontRef idx="minor">
+            <a:schemeClr val="lt1"/>
+          </a:fontRef>
+        </p:style>
+        <p:txBody>
+          <a:bodyPr rtlCol="0" anchor="ctr"/>
+          <a:lstStyle/>
+          <a:p>
+            <a:pPr algn="ctr"/>
+          </a:p>
+        </p:txBody>
+      </p:sp>
+      <p:sp>
+        <p:nvSpPr>
+          <p:cNvPr id="60" name="TextBox 59"/>
+          <p:cNvSpPr txBox="1"/>
+          <p:nvPr/>
+        </p:nvSpPr>
+        <p:spPr>
+          <a:xfrm>
+            <a:off x="7635240" y="6784848"/>
+            <a:ext cx="2642616" cy="438912"/>
+          </a:xfrm>
+          <a:prstGeom prst="rect">
+            <a:avLst/>
+          </a:prstGeom>
+          <a:noFill/>
+        </p:spPr>
+        <p:txBody>
+          <a:bodyPr wrap="square" lIns="0" rIns="0" tIns="0" bIns="0" anchor="ctr">
+            <a:noAutofit/>
+          </a:bodyPr>
+          <a:lstStyle/>
+          <a:p>
+            <a:pPr algn="ctr">
+              <a:lnSpc>
+                <a:spcPct val="100000"/>
+              </a:lnSpc>
+              <a:spcBef>
+                <a:spcPts val="0"/>
+              </a:spcBef>
+              <a:spcAft>
+                <a:spcPts val="0"/>
+              </a:spcAft>
+            </a:pPr>
+            <a:r>
+              <a:rPr sz="1350" b="0" i="0">
+                <a:solidFill>
+                  <a:srgbClr val="6D28D9"/>
+                </a:solidFill>
+                <a:latin typeface="Montserrat SemiBold"/>
+              </a:rPr>
+              <a:t>Auto-negotiate</a:t>
+            </a:r>
+          </a:p>
+        </p:txBody>
+      </p:sp>
+      <p:sp>
+        <p:nvSpPr>
+          <p:cNvPr id="61" name="Rounded Rectangle 60"/>
+          <p:cNvSpPr/>
+          <p:nvPr/>
+        </p:nvSpPr>
+        <p:spPr>
+          <a:xfrm>
+            <a:off x="7635240" y="7516368"/>
+            <a:ext cx="2642616" cy="420624"/>
+          </a:xfrm>
+          <a:prstGeom prst="roundRect">
+            <a:avLst>
+              <a:gd name="adj" fmla="val 50000"/>
             </a:avLst>
           </a:prstGeom>
           <a:solidFill>
@@ -10015,14 +10357,14 @@
       </p:sp>
       <p:sp>
         <p:nvSpPr>
-          <p:cNvPr id="56" name="TextBox 55"/>
-          <p:cNvSpPr txBox="1"/>
-          <p:nvPr/>
-        </p:nvSpPr>
-        <p:spPr>
-          <a:xfrm>
-            <a:off x="7598664" y="8531352"/>
-            <a:ext cx="2715768" cy="329184"/>
+          <p:cNvPr id="62" name="TextBox 61"/>
+          <p:cNvSpPr txBox="1"/>
+          <p:nvPr/>
+        </p:nvSpPr>
+        <p:spPr>
+          <a:xfrm>
+            <a:off x="7635240" y="7516368"/>
+            <a:ext cx="2642616" cy="420624"/>
           </a:xfrm>
           <a:prstGeom prst="rect">
             <a:avLst/>
@@ -10047,7 +10389,7 @@
               </a:spcAft>
             </a:pPr>
             <a:r>
-              <a:rPr sz="1100" b="1" i="0" spc="80">
+              <a:rPr sz="1100" b="0" i="0" spc="80">
                 <a:solidFill>
                   <a:srgbClr val="146B3F"/>
                 </a:solidFill>
@@ -10060,14 +10402,14 @@
       </p:sp>
       <p:sp>
         <p:nvSpPr>
-          <p:cNvPr id="57" name="Rounded Rectangle 56"/>
+          <p:cNvPr id="63" name="Rounded Rectangle 62"/>
           <p:cNvSpPr/>
           <p:nvPr/>
         </p:nvSpPr>
         <p:spPr>
           <a:xfrm>
-            <a:off x="10689336" y="3246120"/>
-            <a:ext cx="3154680" cy="5806440"/>
+            <a:off x="10689336" y="3291840"/>
+            <a:ext cx="3154680" cy="4892040"/>
           </a:xfrm>
           <a:prstGeom prst="roundRect">
             <a:avLst>
@@ -10108,13 +10450,13 @@
       </p:sp>
       <p:sp>
         <p:nvSpPr>
-          <p:cNvPr id="58" name="Rectangle 57"/>
+          <p:cNvPr id="64" name="Rectangle 63"/>
           <p:cNvSpPr/>
           <p:nvPr/>
         </p:nvSpPr>
         <p:spPr>
           <a:xfrm>
-            <a:off x="10689336" y="3246120"/>
+            <a:off x="10689336" y="3291840"/>
             <a:ext cx="3154680" cy="64008"/>
           </a:xfrm>
           <a:prstGeom prst="rect">
@@ -10152,18 +10494,18 @@
       </p:sp>
       <p:sp>
         <p:nvSpPr>
-          <p:cNvPr id="59" name="Rounded Rectangle 58"/>
+          <p:cNvPr id="65" name="Rounded Rectangle 64"/>
           <p:cNvSpPr/>
           <p:nvPr/>
         </p:nvSpPr>
         <p:spPr>
           <a:xfrm>
-            <a:off x="10908792" y="3538727"/>
-            <a:ext cx="603504" cy="603504"/>
+            <a:off x="10945367" y="3602736"/>
+            <a:ext cx="658368" cy="658368"/>
           </a:xfrm>
           <a:prstGeom prst="roundRect">
             <a:avLst>
-              <a:gd name="adj" fmla="val 18181"/>
+              <a:gd name="adj" fmla="val 19444"/>
             </a:avLst>
           </a:prstGeom>
           <a:solidFill>
@@ -10198,7 +10540,7 @@
       </p:sp>
       <p:pic>
         <p:nvPicPr>
-          <p:cNvPr id="60" name="Picture 59" descr="icon_evaluation_purple.png"/>
+          <p:cNvPr id="66" name="Picture 65" descr="icon_evaluation_purple.png"/>
           <p:cNvPicPr>
             <a:picLocks noChangeAspect="1"/>
           </p:cNvPicPr>
@@ -10212,7 +10554,7 @@
         </p:blipFill>
         <p:spPr>
           <a:xfrm>
-            <a:off x="11027663" y="3657600"/>
+            <a:off x="11091672" y="3749039"/>
             <a:ext cx="365760" cy="365760"/>
           </a:xfrm>
           <a:prstGeom prst="rect">
@@ -10222,14 +10564,14 @@
       </p:pic>
       <p:sp>
         <p:nvSpPr>
-          <p:cNvPr id="61" name="TextBox 60"/>
-          <p:cNvSpPr txBox="1"/>
-          <p:nvPr/>
-        </p:nvSpPr>
-        <p:spPr>
-          <a:xfrm>
-            <a:off x="11622024" y="3557015"/>
-            <a:ext cx="2020824" cy="566928"/>
+          <p:cNvPr id="67" name="TextBox 66"/>
+          <p:cNvSpPr txBox="1"/>
+          <p:nvPr/>
+        </p:nvSpPr>
+        <p:spPr>
+          <a:xfrm>
+            <a:off x="11768328" y="3602736"/>
+            <a:ext cx="1819656" cy="658368"/>
           </a:xfrm>
           <a:prstGeom prst="rect">
             <a:avLst/>
@@ -10267,14 +10609,14 @@
       </p:sp>
       <p:sp>
         <p:nvSpPr>
-          <p:cNvPr id="62" name="TextBox 61"/>
-          <p:cNvSpPr txBox="1"/>
-          <p:nvPr/>
-        </p:nvSpPr>
-        <p:spPr>
-          <a:xfrm>
-            <a:off x="10908792" y="4297679"/>
-            <a:ext cx="2715768" cy="457200"/>
+          <p:cNvPr id="68" name="TextBox 67"/>
+          <p:cNvSpPr txBox="1"/>
+          <p:nvPr/>
+        </p:nvSpPr>
+        <p:spPr>
+          <a:xfrm>
+            <a:off x="10945367" y="4480560"/>
+            <a:ext cx="2642616" cy="502920"/>
           </a:xfrm>
           <a:prstGeom prst="rect">
             <a:avLst/>
@@ -10299,27 +10641,27 @@
               </a:spcAft>
             </a:pPr>
             <a:r>
-              <a:rPr sz="2000" b="0" i="0">
+              <a:rPr sz="2500" b="0" i="0">
                 <a:solidFill>
                   <a:srgbClr val="1B1F26"/>
                 </a:solidFill>
                 <a:latin typeface="Montserrat Medium"/>
               </a:rPr>
-              <a:t>Evaluation Agent</a:t>
-            </a:r>
-          </a:p>
-        </p:txBody>
-      </p:sp>
-      <p:sp>
-        <p:nvSpPr>
-          <p:cNvPr id="63" name="TextBox 62"/>
-          <p:cNvSpPr txBox="1"/>
-          <p:nvPr/>
-        </p:nvSpPr>
-        <p:spPr>
-          <a:xfrm>
-            <a:off x="10908792" y="4818888"/>
-            <a:ext cx="2715768" cy="1097280"/>
+              <a:t>Evaluation</a:t>
+            </a:r>
+          </a:p>
+        </p:txBody>
+      </p:sp>
+      <p:sp>
+        <p:nvSpPr>
+          <p:cNvPr id="69" name="TextBox 68"/>
+          <p:cNvSpPr txBox="1"/>
+          <p:nvPr/>
+        </p:nvSpPr>
+        <p:spPr>
+          <a:xfrm>
+            <a:off x="10945367" y="5120640"/>
+            <a:ext cx="2642616" cy="365760"/>
           </a:xfrm>
           <a:prstGeom prst="rect">
             <a:avLst/>
@@ -10334,86 +10676,96 @@
           <a:p>
             <a:pPr algn="l">
               <a:lnSpc>
-                <a:spcPct val="120000"/>
-              </a:lnSpc>
-              <a:spcBef>
-                <a:spcPts val="0"/>
-              </a:spcBef>
-              <a:spcAft>
-                <a:spcPts val="0"/>
-              </a:spcAft>
-            </a:pPr>
-            <a:r>
-              <a:rPr sz="1300" b="0" i="0">
-                <a:solidFill>
-                  <a:srgbClr val="6A707B"/>
-                </a:solidFill>
-                <a:latin typeface="Montserrat"/>
-              </a:rPr>
-              <a:t>Scores every bid; runs compliance and risk checks silently in the background.</a:t>
-            </a:r>
-          </a:p>
-        </p:txBody>
-      </p:sp>
-      <p:cxnSp>
-        <p:nvCxnSpPr>
-          <p:cNvPr id="64" name="Connector 63"/>
-          <p:cNvCxnSpPr/>
-          <p:nvPr/>
-        </p:nvCxnSpPr>
-        <p:spPr>
-          <a:xfrm>
-            <a:off x="10908792" y="6035040"/>
-            <a:ext cx="2715768" cy="0"/>
-          </a:xfrm>
-          <a:prstGeom prst="bentConnector3">
-            <a:avLst/>
-          </a:prstGeom>
-          <a:ln w="9525">
-            <a:solidFill>
-              <a:srgbClr val="E2E4EA"/>
-            </a:solidFill>
+                <a:spcPct val="100000"/>
+              </a:lnSpc>
+              <a:spcBef>
+                <a:spcPts val="0"/>
+              </a:spcBef>
+              <a:spcAft>
+                <a:spcPts val="0"/>
+              </a:spcAft>
+            </a:pPr>
+            <a:r>
+              <a:rPr sz="1400" b="0" i="0">
+                <a:solidFill>
+                  <a:srgbClr val="7C3AED"/>
+                </a:solidFill>
+                <a:latin typeface="Montserrat Medium"/>
+              </a:rPr>
+              <a:t>Eval + Compliance</a:t>
+            </a:r>
+          </a:p>
+        </p:txBody>
+      </p:sp>
+      <p:sp>
+        <p:nvSpPr>
+          <p:cNvPr id="70" name="Rounded Rectangle 69"/>
+          <p:cNvSpPr/>
+          <p:nvPr/>
+        </p:nvSpPr>
+        <p:spPr>
+          <a:xfrm>
+            <a:off x="10945367" y="5687568"/>
+            <a:ext cx="2642616" cy="438912"/>
+          </a:xfrm>
+          <a:prstGeom prst="roundRect">
+            <a:avLst>
+              <a:gd name="adj" fmla="val 50000"/>
+            </a:avLst>
+          </a:prstGeom>
+          <a:solidFill>
+            <a:srgbClr val="F1EAFC"/>
+          </a:solidFill>
+          <a:ln>
+            <a:noFill/>
           </a:ln>
           <a:effectLst/>
         </p:spPr>
         <p:style>
-          <a:lnRef idx="2">
+          <a:lnRef idx="1">
             <a:schemeClr val="accent1"/>
           </a:lnRef>
-          <a:fillRef idx="0">
+          <a:fillRef idx="3">
             <a:schemeClr val="accent1"/>
           </a:fillRef>
-          <a:effectRef idx="1">
+          <a:effectRef idx="2">
             <a:schemeClr val="accent1"/>
           </a:effectRef>
           <a:fontRef idx="minor">
-            <a:schemeClr val="tx1"/>
+            <a:schemeClr val="lt1"/>
           </a:fontRef>
         </p:style>
-      </p:cxnSp>
-      <p:sp>
-        <p:nvSpPr>
-          <p:cNvPr id="65" name="TextBox 64"/>
-          <p:cNvSpPr txBox="1"/>
-          <p:nvPr/>
-        </p:nvSpPr>
-        <p:spPr>
-          <a:xfrm>
-            <a:off x="10908792" y="6190488"/>
-            <a:ext cx="2715768" cy="182880"/>
-          </a:xfrm>
-          <a:prstGeom prst="rect">
-            <a:avLst/>
-          </a:prstGeom>
-          <a:noFill/>
-        </p:spPr>
-        <p:txBody>
-          <a:bodyPr wrap="square" lIns="0" rIns="0" tIns="0" bIns="0" anchor="t">
-            <a:noAutofit/>
-          </a:bodyPr>
-          <a:lstStyle/>
-          <a:p>
-            <a:pPr algn="l">
+        <p:txBody>
+          <a:bodyPr rtlCol="0" anchor="ctr"/>
+          <a:lstStyle/>
+          <a:p>
+            <a:pPr algn="ctr"/>
+          </a:p>
+        </p:txBody>
+      </p:sp>
+      <p:sp>
+        <p:nvSpPr>
+          <p:cNvPr id="71" name="TextBox 70"/>
+          <p:cNvSpPr txBox="1"/>
+          <p:nvPr/>
+        </p:nvSpPr>
+        <p:spPr>
+          <a:xfrm>
+            <a:off x="10945367" y="5687568"/>
+            <a:ext cx="2642616" cy="438912"/>
+          </a:xfrm>
+          <a:prstGeom prst="rect">
+            <a:avLst/>
+          </a:prstGeom>
+          <a:noFill/>
+        </p:spPr>
+        <p:txBody>
+          <a:bodyPr wrap="square" lIns="0" rIns="0" tIns="0" bIns="0" anchor="ctr">
+            <a:noAutofit/>
+          </a:bodyPr>
+          <a:lstStyle/>
+          <a:p>
+            <a:pPr algn="ctr">
               <a:lnSpc>
                 <a:spcPct val="100000"/>
               </a:lnSpc>
@@ -10425,121 +10777,213 @@
               </a:spcAft>
             </a:pPr>
             <a:r>
-              <a:rPr sz="950" b="1" i="0" spc="60">
-                <a:solidFill>
-                  <a:srgbClr val="6A707B"/>
-                </a:solidFill>
-                <a:latin typeface="Consolas"/>
-              </a:rPr>
-              <a:t>↓ AERCHAIN CAPABILITY</a:t>
-            </a:r>
-          </a:p>
-        </p:txBody>
-      </p:sp>
-      <p:sp>
-        <p:nvSpPr>
-          <p:cNvPr id="66" name="TextBox 65"/>
-          <p:cNvSpPr txBox="1"/>
-          <p:nvPr/>
-        </p:nvSpPr>
-        <p:spPr>
-          <a:xfrm>
-            <a:off x="10908792" y="6446520"/>
-            <a:ext cx="2715768" cy="548640"/>
-          </a:xfrm>
-          <a:prstGeom prst="rect">
-            <a:avLst/>
-          </a:prstGeom>
-          <a:noFill/>
-        </p:spPr>
-        <p:txBody>
-          <a:bodyPr wrap="square" lIns="0" rIns="0" tIns="0" bIns="0" anchor="t">
-            <a:noAutofit/>
-          </a:bodyPr>
-          <a:lstStyle/>
-          <a:p>
-            <a:pPr algn="l">
-              <a:lnSpc>
-                <a:spcPct val="105000"/>
-              </a:lnSpc>
-              <a:spcBef>
-                <a:spcPts val="0"/>
-              </a:spcBef>
-              <a:spcAft>
-                <a:spcPts val="0"/>
-              </a:spcAft>
-            </a:pPr>
-            <a:r>
-              <a:rPr sz="1500" b="0" i="0">
-                <a:solidFill>
-                  <a:srgbClr val="7C3AED"/>
-                </a:solidFill>
-                <a:latin typeface="Montserrat Medium"/>
-              </a:rPr>
-              <a:t>Eval + Compliance</a:t>
-            </a:r>
-          </a:p>
-        </p:txBody>
-      </p:sp>
-      <p:sp>
-        <p:nvSpPr>
-          <p:cNvPr id="67" name="TextBox 66"/>
-          <p:cNvSpPr txBox="1"/>
-          <p:nvPr/>
-        </p:nvSpPr>
-        <p:spPr>
-          <a:xfrm>
-            <a:off x="10908792" y="7104888"/>
-            <a:ext cx="2715768" cy="1371600"/>
-          </a:xfrm>
-          <a:prstGeom prst="rect">
-            <a:avLst/>
-          </a:prstGeom>
-          <a:noFill/>
-        </p:spPr>
-        <p:txBody>
-          <a:bodyPr wrap="square" lIns="0" rIns="0" tIns="0" bIns="0" anchor="t">
-            <a:noAutofit/>
-          </a:bodyPr>
-          <a:lstStyle/>
-          <a:p>
-            <a:pPr algn="l">
-              <a:lnSpc>
-                <a:spcPct val="122000"/>
-              </a:lnSpc>
-              <a:spcBef>
-                <a:spcPts val="0"/>
-              </a:spcBef>
-              <a:spcAft>
-                <a:spcPts val="0"/>
-              </a:spcAft>
-            </a:pPr>
-            <a:r>
-              <a:rPr sz="1200" b="0" i="0">
-                <a:solidFill>
-                  <a:srgbClr val="484E59"/>
-                </a:solidFill>
-                <a:latin typeface="Montserrat"/>
-              </a:rPr>
-              <a:t>Configurable scoring per category. Compliance runs as a subroutine — single decision surface, single audit entry.</a:t>
-            </a:r>
-          </a:p>
-        </p:txBody>
-      </p:sp>
-      <p:sp>
-        <p:nvSpPr>
-          <p:cNvPr id="68" name="Rounded Rectangle 67"/>
+              <a:rPr sz="1350" b="0" i="0">
+                <a:solidFill>
+                  <a:srgbClr val="6D28D9"/>
+                </a:solidFill>
+                <a:latin typeface="Montserrat SemiBold"/>
+              </a:rPr>
+              <a:t>Score every bid</a:t>
+            </a:r>
+          </a:p>
+        </p:txBody>
+      </p:sp>
+      <p:sp>
+        <p:nvSpPr>
+          <p:cNvPr id="72" name="Rounded Rectangle 71"/>
           <p:cNvSpPr/>
           <p:nvPr/>
         </p:nvSpPr>
         <p:spPr>
           <a:xfrm>
-            <a:off x="10908792" y="8531352"/>
-            <a:ext cx="2715768" cy="329184"/>
+            <a:off x="10945367" y="6236208"/>
+            <a:ext cx="2642616" cy="438912"/>
           </a:xfrm>
           <a:prstGeom prst="roundRect">
             <a:avLst>
-              <a:gd name="adj" fmla="val 13888"/>
+              <a:gd name="adj" fmla="val 50000"/>
+            </a:avLst>
+          </a:prstGeom>
+          <a:solidFill>
+            <a:srgbClr val="F1EAFC"/>
+          </a:solidFill>
+          <a:ln>
+            <a:noFill/>
+          </a:ln>
+          <a:effectLst/>
+        </p:spPr>
+        <p:style>
+          <a:lnRef idx="1">
+            <a:schemeClr val="accent1"/>
+          </a:lnRef>
+          <a:fillRef idx="3">
+            <a:schemeClr val="accent1"/>
+          </a:fillRef>
+          <a:effectRef idx="2">
+            <a:schemeClr val="accent1"/>
+          </a:effectRef>
+          <a:fontRef idx="minor">
+            <a:schemeClr val="lt1"/>
+          </a:fontRef>
+        </p:style>
+        <p:txBody>
+          <a:bodyPr rtlCol="0" anchor="ctr"/>
+          <a:lstStyle/>
+          <a:p>
+            <a:pPr algn="ctr"/>
+          </a:p>
+        </p:txBody>
+      </p:sp>
+      <p:sp>
+        <p:nvSpPr>
+          <p:cNvPr id="73" name="TextBox 72"/>
+          <p:cNvSpPr txBox="1"/>
+          <p:nvPr/>
+        </p:nvSpPr>
+        <p:spPr>
+          <a:xfrm>
+            <a:off x="10945367" y="6236208"/>
+            <a:ext cx="2642616" cy="438912"/>
+          </a:xfrm>
+          <a:prstGeom prst="rect">
+            <a:avLst/>
+          </a:prstGeom>
+          <a:noFill/>
+        </p:spPr>
+        <p:txBody>
+          <a:bodyPr wrap="square" lIns="0" rIns="0" tIns="0" bIns="0" anchor="ctr">
+            <a:noAutofit/>
+          </a:bodyPr>
+          <a:lstStyle/>
+          <a:p>
+            <a:pPr algn="ctr">
+              <a:lnSpc>
+                <a:spcPct val="100000"/>
+              </a:lnSpc>
+              <a:spcBef>
+                <a:spcPts val="0"/>
+              </a:spcBef>
+              <a:spcAft>
+                <a:spcPts val="0"/>
+              </a:spcAft>
+            </a:pPr>
+            <a:r>
+              <a:rPr sz="1350" b="0" i="0">
+                <a:solidFill>
+                  <a:srgbClr val="6D28D9"/>
+                </a:solidFill>
+                <a:latin typeface="Montserrat SemiBold"/>
+              </a:rPr>
+              <a:t>Compliance check</a:t>
+            </a:r>
+          </a:p>
+        </p:txBody>
+      </p:sp>
+      <p:sp>
+        <p:nvSpPr>
+          <p:cNvPr id="74" name="Rounded Rectangle 73"/>
+          <p:cNvSpPr/>
+          <p:nvPr/>
+        </p:nvSpPr>
+        <p:spPr>
+          <a:xfrm>
+            <a:off x="10945367" y="6784848"/>
+            <a:ext cx="2642616" cy="438912"/>
+          </a:xfrm>
+          <a:prstGeom prst="roundRect">
+            <a:avLst>
+              <a:gd name="adj" fmla="val 50000"/>
+            </a:avLst>
+          </a:prstGeom>
+          <a:solidFill>
+            <a:srgbClr val="F1EAFC"/>
+          </a:solidFill>
+          <a:ln>
+            <a:noFill/>
+          </a:ln>
+          <a:effectLst/>
+        </p:spPr>
+        <p:style>
+          <a:lnRef idx="1">
+            <a:schemeClr val="accent1"/>
+          </a:lnRef>
+          <a:fillRef idx="3">
+            <a:schemeClr val="accent1"/>
+          </a:fillRef>
+          <a:effectRef idx="2">
+            <a:schemeClr val="accent1"/>
+          </a:effectRef>
+          <a:fontRef idx="minor">
+            <a:schemeClr val="lt1"/>
+          </a:fontRef>
+        </p:style>
+        <p:txBody>
+          <a:bodyPr rtlCol="0" anchor="ctr"/>
+          <a:lstStyle/>
+          <a:p>
+            <a:pPr algn="ctr"/>
+          </a:p>
+        </p:txBody>
+      </p:sp>
+      <p:sp>
+        <p:nvSpPr>
+          <p:cNvPr id="75" name="TextBox 74"/>
+          <p:cNvSpPr txBox="1"/>
+          <p:nvPr/>
+        </p:nvSpPr>
+        <p:spPr>
+          <a:xfrm>
+            <a:off x="10945367" y="6784848"/>
+            <a:ext cx="2642616" cy="438912"/>
+          </a:xfrm>
+          <a:prstGeom prst="rect">
+            <a:avLst/>
+          </a:prstGeom>
+          <a:noFill/>
+        </p:spPr>
+        <p:txBody>
+          <a:bodyPr wrap="square" lIns="0" rIns="0" tIns="0" bIns="0" anchor="ctr">
+            <a:noAutofit/>
+          </a:bodyPr>
+          <a:lstStyle/>
+          <a:p>
+            <a:pPr algn="ctr">
+              <a:lnSpc>
+                <a:spcPct val="100000"/>
+              </a:lnSpc>
+              <a:spcBef>
+                <a:spcPts val="0"/>
+              </a:spcBef>
+              <a:spcAft>
+                <a:spcPts val="0"/>
+              </a:spcAft>
+            </a:pPr>
+            <a:r>
+              <a:rPr sz="1350" b="0" i="0">
+                <a:solidFill>
+                  <a:srgbClr val="6D28D9"/>
+                </a:solidFill>
+                <a:latin typeface="Montserrat SemiBold"/>
+              </a:rPr>
+              <a:t>Rank &amp; recommend</a:t>
+            </a:r>
+          </a:p>
+        </p:txBody>
+      </p:sp>
+      <p:sp>
+        <p:nvSpPr>
+          <p:cNvPr id="76" name="Rounded Rectangle 75"/>
+          <p:cNvSpPr/>
+          <p:nvPr/>
+        </p:nvSpPr>
+        <p:spPr>
+          <a:xfrm>
+            <a:off x="10945367" y="7516368"/>
+            <a:ext cx="2642616" cy="420624"/>
+          </a:xfrm>
+          <a:prstGeom prst="roundRect">
+            <a:avLst>
+              <a:gd name="adj" fmla="val 50000"/>
             </a:avLst>
           </a:prstGeom>
           <a:solidFill>
@@ -10576,14 +11020,14 @@
       </p:sp>
       <p:sp>
         <p:nvSpPr>
-          <p:cNvPr id="69" name="TextBox 68"/>
-          <p:cNvSpPr txBox="1"/>
-          <p:nvPr/>
-        </p:nvSpPr>
-        <p:spPr>
-          <a:xfrm>
-            <a:off x="10908792" y="8531352"/>
-            <a:ext cx="2715768" cy="329184"/>
+          <p:cNvPr id="77" name="TextBox 76"/>
+          <p:cNvSpPr txBox="1"/>
+          <p:nvPr/>
+        </p:nvSpPr>
+        <p:spPr>
+          <a:xfrm>
+            <a:off x="10945367" y="7516368"/>
+            <a:ext cx="2642616" cy="420624"/>
           </a:xfrm>
           <a:prstGeom prst="rect">
             <a:avLst/>
@@ -10608,7 +11052,7 @@
               </a:spcAft>
             </a:pPr>
             <a:r>
-              <a:rPr sz="1100" b="1" i="0" spc="80">
+              <a:rPr sz="1100" b="0" i="0" spc="80">
                 <a:solidFill>
                   <a:srgbClr val="146B3F"/>
                 </a:solidFill>
@@ -10621,14 +11065,14 @@
       </p:sp>
       <p:sp>
         <p:nvSpPr>
-          <p:cNvPr id="70" name="Rounded Rectangle 69"/>
+          <p:cNvPr id="78" name="Rounded Rectangle 77"/>
           <p:cNvSpPr/>
           <p:nvPr/>
         </p:nvSpPr>
         <p:spPr>
           <a:xfrm>
-            <a:off x="13999464" y="3246120"/>
-            <a:ext cx="3154680" cy="5806440"/>
+            <a:off x="13999464" y="3291840"/>
+            <a:ext cx="3154680" cy="4892040"/>
           </a:xfrm>
           <a:prstGeom prst="roundRect">
             <a:avLst>
@@ -10669,13 +11113,13 @@
       </p:sp>
       <p:sp>
         <p:nvSpPr>
-          <p:cNvPr id="71" name="Rectangle 70"/>
+          <p:cNvPr id="79" name="Rectangle 78"/>
           <p:cNvSpPr/>
           <p:nvPr/>
         </p:nvSpPr>
         <p:spPr>
           <a:xfrm>
-            <a:off x="13999464" y="3246120"/>
+            <a:off x="13999464" y="3291840"/>
             <a:ext cx="3154680" cy="64008"/>
           </a:xfrm>
           <a:prstGeom prst="rect">
@@ -10713,18 +11157,18 @@
       </p:sp>
       <p:sp>
         <p:nvSpPr>
-          <p:cNvPr id="72" name="Rounded Rectangle 71"/>
+          <p:cNvPr id="80" name="Rounded Rectangle 79"/>
           <p:cNvSpPr/>
           <p:nvPr/>
         </p:nvSpPr>
         <p:spPr>
           <a:xfrm>
-            <a:off x="14218920" y="3538727"/>
-            <a:ext cx="603504" cy="603504"/>
+            <a:off x="14255496" y="3602736"/>
+            <a:ext cx="658368" cy="658368"/>
           </a:xfrm>
           <a:prstGeom prst="roundRect">
             <a:avLst>
-              <a:gd name="adj" fmla="val 18181"/>
+              <a:gd name="adj" fmla="val 19444"/>
             </a:avLst>
           </a:prstGeom>
           <a:solidFill>
@@ -10759,7 +11203,7 @@
       </p:sp>
       <p:pic>
         <p:nvPicPr>
-          <p:cNvPr id="73" name="Picture 72" descr="icon_award_purple.png"/>
+          <p:cNvPr id="81" name="Picture 80" descr="icon_award_purple.png"/>
           <p:cNvPicPr>
             <a:picLocks noChangeAspect="1"/>
           </p:cNvPicPr>
@@ -10773,7 +11217,7 @@
         </p:blipFill>
         <p:spPr>
           <a:xfrm>
-            <a:off x="14337792" y="3657600"/>
+            <a:off x="14401800" y="3749039"/>
             <a:ext cx="365760" cy="365760"/>
           </a:xfrm>
           <a:prstGeom prst="rect">
@@ -10783,14 +11227,14 @@
       </p:pic>
       <p:sp>
         <p:nvSpPr>
-          <p:cNvPr id="74" name="TextBox 73"/>
-          <p:cNvSpPr txBox="1"/>
-          <p:nvPr/>
-        </p:nvSpPr>
-        <p:spPr>
-          <a:xfrm>
-            <a:off x="14932152" y="3557015"/>
-            <a:ext cx="2020824" cy="566928"/>
+          <p:cNvPr id="82" name="TextBox 81"/>
+          <p:cNvSpPr txBox="1"/>
+          <p:nvPr/>
+        </p:nvSpPr>
+        <p:spPr>
+          <a:xfrm>
+            <a:off x="15078455" y="3602736"/>
+            <a:ext cx="1819656" cy="658368"/>
           </a:xfrm>
           <a:prstGeom prst="rect">
             <a:avLst/>
@@ -10828,14 +11272,14 @@
       </p:sp>
       <p:sp>
         <p:nvSpPr>
-          <p:cNvPr id="75" name="TextBox 74"/>
-          <p:cNvSpPr txBox="1"/>
-          <p:nvPr/>
-        </p:nvSpPr>
-        <p:spPr>
-          <a:xfrm>
-            <a:off x="14218920" y="4297679"/>
-            <a:ext cx="2715768" cy="457200"/>
+          <p:cNvPr id="83" name="TextBox 82"/>
+          <p:cNvSpPr txBox="1"/>
+          <p:nvPr/>
+        </p:nvSpPr>
+        <p:spPr>
+          <a:xfrm>
+            <a:off x="14255496" y="4480560"/>
+            <a:ext cx="2642616" cy="502920"/>
           </a:xfrm>
           <a:prstGeom prst="rect">
             <a:avLst/>
@@ -10860,27 +11304,27 @@
               </a:spcAft>
             </a:pPr>
             <a:r>
-              <a:rPr sz="2000" b="0" i="0">
+              <a:rPr sz="2500" b="0" i="0">
                 <a:solidFill>
                   <a:srgbClr val="1B1F26"/>
                 </a:solidFill>
                 <a:latin typeface="Montserrat Medium"/>
               </a:rPr>
-              <a:t>Award Agent</a:t>
-            </a:r>
-          </a:p>
-        </p:txBody>
-      </p:sp>
-      <p:sp>
-        <p:nvSpPr>
-          <p:cNvPr id="76" name="TextBox 75"/>
-          <p:cNvSpPr txBox="1"/>
-          <p:nvPr/>
-        </p:nvSpPr>
-        <p:spPr>
-          <a:xfrm>
-            <a:off x="14218920" y="4818888"/>
-            <a:ext cx="2715768" cy="1097280"/>
+              <a:t>Award</a:t>
+            </a:r>
+          </a:p>
+        </p:txBody>
+      </p:sp>
+      <p:sp>
+        <p:nvSpPr>
+          <p:cNvPr id="84" name="TextBox 83"/>
+          <p:cNvSpPr txBox="1"/>
+          <p:nvPr/>
+        </p:nvSpPr>
+        <p:spPr>
+          <a:xfrm>
+            <a:off x="14255496" y="5120640"/>
+            <a:ext cx="2642616" cy="365760"/>
           </a:xfrm>
           <a:prstGeom prst="rect">
             <a:avLst/>
@@ -10895,86 +11339,96 @@
           <a:p>
             <a:pPr algn="l">
               <a:lnSpc>
-                <a:spcPct val="120000"/>
-              </a:lnSpc>
-              <a:spcBef>
-                <a:spcPts val="0"/>
-              </a:spcBef>
-              <a:spcAft>
-                <a:spcPts val="0"/>
-              </a:spcAft>
-            </a:pPr>
-            <a:r>
-              <a:rPr sz="1300" b="0" i="0">
-                <a:solidFill>
-                  <a:srgbClr val="6A707B"/>
-                </a:solidFill>
-                <a:latin typeface="Montserrat"/>
-              </a:rPr>
-              <a:t>Generates award scenarios and recommends the optimal allocation.</a:t>
-            </a:r>
-          </a:p>
-        </p:txBody>
-      </p:sp>
-      <p:cxnSp>
-        <p:nvCxnSpPr>
-          <p:cNvPr id="77" name="Connector 76"/>
-          <p:cNvCxnSpPr/>
-          <p:nvPr/>
-        </p:nvCxnSpPr>
-        <p:spPr>
-          <a:xfrm>
-            <a:off x="14218920" y="6035040"/>
-            <a:ext cx="2715768" cy="0"/>
-          </a:xfrm>
-          <a:prstGeom prst="bentConnector3">
-            <a:avLst/>
-          </a:prstGeom>
-          <a:ln w="9525">
-            <a:solidFill>
-              <a:srgbClr val="E2E4EA"/>
-            </a:solidFill>
+                <a:spcPct val="100000"/>
+              </a:lnSpc>
+              <a:spcBef>
+                <a:spcPts val="0"/>
+              </a:spcBef>
+              <a:spcAft>
+                <a:spcPts val="0"/>
+              </a:spcAft>
+            </a:pPr>
+            <a:r>
+              <a:rPr sz="1400" b="0" i="0">
+                <a:solidFill>
+                  <a:srgbClr val="7C3AED"/>
+                </a:solidFill>
+                <a:latin typeface="Montserrat Medium"/>
+              </a:rPr>
+              <a:t>Scenario + Writeback</a:t>
+            </a:r>
+          </a:p>
+        </p:txBody>
+      </p:sp>
+      <p:sp>
+        <p:nvSpPr>
+          <p:cNvPr id="85" name="Rounded Rectangle 84"/>
+          <p:cNvSpPr/>
+          <p:nvPr/>
+        </p:nvSpPr>
+        <p:spPr>
+          <a:xfrm>
+            <a:off x="14255496" y="5687568"/>
+            <a:ext cx="2642616" cy="438912"/>
+          </a:xfrm>
+          <a:prstGeom prst="roundRect">
+            <a:avLst>
+              <a:gd name="adj" fmla="val 50000"/>
+            </a:avLst>
+          </a:prstGeom>
+          <a:solidFill>
+            <a:srgbClr val="F1EAFC"/>
+          </a:solidFill>
+          <a:ln>
+            <a:noFill/>
           </a:ln>
           <a:effectLst/>
         </p:spPr>
         <p:style>
-          <a:lnRef idx="2">
+          <a:lnRef idx="1">
             <a:schemeClr val="accent1"/>
           </a:lnRef>
-          <a:fillRef idx="0">
+          <a:fillRef idx="3">
             <a:schemeClr val="accent1"/>
           </a:fillRef>
-          <a:effectRef idx="1">
+          <a:effectRef idx="2">
             <a:schemeClr val="accent1"/>
           </a:effectRef>
           <a:fontRef idx="minor">
-            <a:schemeClr val="tx1"/>
+            <a:schemeClr val="lt1"/>
           </a:fontRef>
         </p:style>
-      </p:cxnSp>
-      <p:sp>
-        <p:nvSpPr>
-          <p:cNvPr id="78" name="TextBox 77"/>
-          <p:cNvSpPr txBox="1"/>
-          <p:nvPr/>
-        </p:nvSpPr>
-        <p:spPr>
-          <a:xfrm>
-            <a:off x="14218920" y="6190488"/>
-            <a:ext cx="2715768" cy="182880"/>
-          </a:xfrm>
-          <a:prstGeom prst="rect">
-            <a:avLst/>
-          </a:prstGeom>
-          <a:noFill/>
-        </p:spPr>
-        <p:txBody>
-          <a:bodyPr wrap="square" lIns="0" rIns="0" tIns="0" bIns="0" anchor="t">
-            <a:noAutofit/>
-          </a:bodyPr>
-          <a:lstStyle/>
-          <a:p>
-            <a:pPr algn="l">
+        <p:txBody>
+          <a:bodyPr rtlCol="0" anchor="ctr"/>
+          <a:lstStyle/>
+          <a:p>
+            <a:pPr algn="ctr"/>
+          </a:p>
+        </p:txBody>
+      </p:sp>
+      <p:sp>
+        <p:nvSpPr>
+          <p:cNvPr id="86" name="TextBox 85"/>
+          <p:cNvSpPr txBox="1"/>
+          <p:nvPr/>
+        </p:nvSpPr>
+        <p:spPr>
+          <a:xfrm>
+            <a:off x="14255496" y="5687568"/>
+            <a:ext cx="2642616" cy="438912"/>
+          </a:xfrm>
+          <a:prstGeom prst="rect">
+            <a:avLst/>
+          </a:prstGeom>
+          <a:noFill/>
+        </p:spPr>
+        <p:txBody>
+          <a:bodyPr wrap="square" lIns="0" rIns="0" tIns="0" bIns="0" anchor="ctr">
+            <a:noAutofit/>
+          </a:bodyPr>
+          <a:lstStyle/>
+          <a:p>
+            <a:pPr algn="ctr">
               <a:lnSpc>
                 <a:spcPct val="100000"/>
               </a:lnSpc>
@@ -10986,121 +11440,213 @@
               </a:spcAft>
             </a:pPr>
             <a:r>
-              <a:rPr sz="950" b="1" i="0" spc="60">
-                <a:solidFill>
-                  <a:srgbClr val="6A707B"/>
-                </a:solidFill>
-                <a:latin typeface="Consolas"/>
-              </a:rPr>
-              <a:t>↓ AERCHAIN CAPABILITY</a:t>
-            </a:r>
-          </a:p>
-        </p:txBody>
-      </p:sp>
-      <p:sp>
-        <p:nvSpPr>
-          <p:cNvPr id="79" name="TextBox 78"/>
-          <p:cNvSpPr txBox="1"/>
-          <p:nvPr/>
-        </p:nvSpPr>
-        <p:spPr>
-          <a:xfrm>
-            <a:off x="14218920" y="6446520"/>
-            <a:ext cx="2715768" cy="548640"/>
-          </a:xfrm>
-          <a:prstGeom prst="rect">
-            <a:avLst/>
-          </a:prstGeom>
-          <a:noFill/>
-        </p:spPr>
-        <p:txBody>
-          <a:bodyPr wrap="square" lIns="0" rIns="0" tIns="0" bIns="0" anchor="t">
-            <a:noAutofit/>
-          </a:bodyPr>
-          <a:lstStyle/>
-          <a:p>
-            <a:pPr algn="l">
-              <a:lnSpc>
-                <a:spcPct val="105000"/>
-              </a:lnSpc>
-              <a:spcBef>
-                <a:spcPts val="0"/>
-              </a:spcBef>
-              <a:spcAft>
-                <a:spcPts val="0"/>
-              </a:spcAft>
-            </a:pPr>
-            <a:r>
-              <a:rPr sz="1500" b="0" i="0">
-                <a:solidFill>
-                  <a:srgbClr val="7C3AED"/>
-                </a:solidFill>
-                <a:latin typeface="Montserrat Medium"/>
-              </a:rPr>
-              <a:t>Scenario + Writeback</a:t>
-            </a:r>
-          </a:p>
-        </p:txBody>
-      </p:sp>
-      <p:sp>
-        <p:nvSpPr>
-          <p:cNvPr id="80" name="TextBox 79"/>
-          <p:cNvSpPr txBox="1"/>
-          <p:nvPr/>
-        </p:nvSpPr>
-        <p:spPr>
-          <a:xfrm>
-            <a:off x="14218920" y="7104888"/>
-            <a:ext cx="2715768" cy="1371600"/>
-          </a:xfrm>
-          <a:prstGeom prst="rect">
-            <a:avLst/>
-          </a:prstGeom>
-          <a:noFill/>
-        </p:spPr>
-        <p:txBody>
-          <a:bodyPr wrap="square" lIns="0" rIns="0" tIns="0" bIns="0" anchor="t">
-            <a:noAutofit/>
-          </a:bodyPr>
-          <a:lstStyle/>
-          <a:p>
-            <a:pPr algn="l">
-              <a:lnSpc>
-                <a:spcPct val="122000"/>
-              </a:lnSpc>
-              <a:spcBef>
-                <a:spcPts val="0"/>
-              </a:spcBef>
-              <a:spcAft>
-                <a:spcPts val="0"/>
-              </a:spcAft>
-            </a:pPr>
-            <a:r>
-              <a:rPr sz="1200" b="0" i="0">
-                <a:solidFill>
-                  <a:srgbClr val="484E59"/>
-                </a:solidFill>
-                <a:latin typeface="Montserrat"/>
-              </a:rPr>
-              <a:t>Constraint-aware allocation factors landed cost, capacity and terms; the approved award writes back to the ERP of record.</a:t>
-            </a:r>
-          </a:p>
-        </p:txBody>
-      </p:sp>
-      <p:sp>
-        <p:nvSpPr>
-          <p:cNvPr id="81" name="Rounded Rectangle 80"/>
+              <a:rPr sz="1350" b="0" i="0">
+                <a:solidFill>
+                  <a:srgbClr val="6D28D9"/>
+                </a:solidFill>
+                <a:latin typeface="Montserrat SemiBold"/>
+              </a:rPr>
+              <a:t>Build scenarios</a:t>
+            </a:r>
+          </a:p>
+        </p:txBody>
+      </p:sp>
+      <p:sp>
+        <p:nvSpPr>
+          <p:cNvPr id="87" name="Rounded Rectangle 86"/>
           <p:cNvSpPr/>
           <p:nvPr/>
         </p:nvSpPr>
         <p:spPr>
           <a:xfrm>
-            <a:off x="14218920" y="8531352"/>
-            <a:ext cx="2715768" cy="329184"/>
+            <a:off x="14255496" y="6236208"/>
+            <a:ext cx="2642616" cy="438912"/>
           </a:xfrm>
           <a:prstGeom prst="roundRect">
             <a:avLst>
-              <a:gd name="adj" fmla="val 13888"/>
+              <a:gd name="adj" fmla="val 50000"/>
+            </a:avLst>
+          </a:prstGeom>
+          <a:solidFill>
+            <a:srgbClr val="F1EAFC"/>
+          </a:solidFill>
+          <a:ln>
+            <a:noFill/>
+          </a:ln>
+          <a:effectLst/>
+        </p:spPr>
+        <p:style>
+          <a:lnRef idx="1">
+            <a:schemeClr val="accent1"/>
+          </a:lnRef>
+          <a:fillRef idx="3">
+            <a:schemeClr val="accent1"/>
+          </a:fillRef>
+          <a:effectRef idx="2">
+            <a:schemeClr val="accent1"/>
+          </a:effectRef>
+          <a:fontRef idx="minor">
+            <a:schemeClr val="lt1"/>
+          </a:fontRef>
+        </p:style>
+        <p:txBody>
+          <a:bodyPr rtlCol="0" anchor="ctr"/>
+          <a:lstStyle/>
+          <a:p>
+            <a:pPr algn="ctr"/>
+          </a:p>
+        </p:txBody>
+      </p:sp>
+      <p:sp>
+        <p:nvSpPr>
+          <p:cNvPr id="88" name="TextBox 87"/>
+          <p:cNvSpPr txBox="1"/>
+          <p:nvPr/>
+        </p:nvSpPr>
+        <p:spPr>
+          <a:xfrm>
+            <a:off x="14255496" y="6236208"/>
+            <a:ext cx="2642616" cy="438912"/>
+          </a:xfrm>
+          <a:prstGeom prst="rect">
+            <a:avLst/>
+          </a:prstGeom>
+          <a:noFill/>
+        </p:spPr>
+        <p:txBody>
+          <a:bodyPr wrap="square" lIns="0" rIns="0" tIns="0" bIns="0" anchor="ctr">
+            <a:noAutofit/>
+          </a:bodyPr>
+          <a:lstStyle/>
+          <a:p>
+            <a:pPr algn="ctr">
+              <a:lnSpc>
+                <a:spcPct val="100000"/>
+              </a:lnSpc>
+              <a:spcBef>
+                <a:spcPts val="0"/>
+              </a:spcBef>
+              <a:spcAft>
+                <a:spcPts val="0"/>
+              </a:spcAft>
+            </a:pPr>
+            <a:r>
+              <a:rPr sz="1350" b="0" i="0">
+                <a:solidFill>
+                  <a:srgbClr val="6D28D9"/>
+                </a:solidFill>
+                <a:latin typeface="Montserrat SemiBold"/>
+              </a:rPr>
+              <a:t>Optimal allocation</a:t>
+            </a:r>
+          </a:p>
+        </p:txBody>
+      </p:sp>
+      <p:sp>
+        <p:nvSpPr>
+          <p:cNvPr id="89" name="Rounded Rectangle 88"/>
+          <p:cNvSpPr/>
+          <p:nvPr/>
+        </p:nvSpPr>
+        <p:spPr>
+          <a:xfrm>
+            <a:off x="14255496" y="6784848"/>
+            <a:ext cx="2642616" cy="438912"/>
+          </a:xfrm>
+          <a:prstGeom prst="roundRect">
+            <a:avLst>
+              <a:gd name="adj" fmla="val 50000"/>
+            </a:avLst>
+          </a:prstGeom>
+          <a:solidFill>
+            <a:srgbClr val="F1EAFC"/>
+          </a:solidFill>
+          <a:ln>
+            <a:noFill/>
+          </a:ln>
+          <a:effectLst/>
+        </p:spPr>
+        <p:style>
+          <a:lnRef idx="1">
+            <a:schemeClr val="accent1"/>
+          </a:lnRef>
+          <a:fillRef idx="3">
+            <a:schemeClr val="accent1"/>
+          </a:fillRef>
+          <a:effectRef idx="2">
+            <a:schemeClr val="accent1"/>
+          </a:effectRef>
+          <a:fontRef idx="minor">
+            <a:schemeClr val="lt1"/>
+          </a:fontRef>
+        </p:style>
+        <p:txBody>
+          <a:bodyPr rtlCol="0" anchor="ctr"/>
+          <a:lstStyle/>
+          <a:p>
+            <a:pPr algn="ctr"/>
+          </a:p>
+        </p:txBody>
+      </p:sp>
+      <p:sp>
+        <p:nvSpPr>
+          <p:cNvPr id="90" name="TextBox 89"/>
+          <p:cNvSpPr txBox="1"/>
+          <p:nvPr/>
+        </p:nvSpPr>
+        <p:spPr>
+          <a:xfrm>
+            <a:off x="14255496" y="6784848"/>
+            <a:ext cx="2642616" cy="438912"/>
+          </a:xfrm>
+          <a:prstGeom prst="rect">
+            <a:avLst/>
+          </a:prstGeom>
+          <a:noFill/>
+        </p:spPr>
+        <p:txBody>
+          <a:bodyPr wrap="square" lIns="0" rIns="0" tIns="0" bIns="0" anchor="ctr">
+            <a:noAutofit/>
+          </a:bodyPr>
+          <a:lstStyle/>
+          <a:p>
+            <a:pPr algn="ctr">
+              <a:lnSpc>
+                <a:spcPct val="100000"/>
+              </a:lnSpc>
+              <a:spcBef>
+                <a:spcPts val="0"/>
+              </a:spcBef>
+              <a:spcAft>
+                <a:spcPts val="0"/>
+              </a:spcAft>
+            </a:pPr>
+            <a:r>
+              <a:rPr sz="1350" b="0" i="0">
+                <a:solidFill>
+                  <a:srgbClr val="6D28D9"/>
+                </a:solidFill>
+                <a:latin typeface="Montserrat SemiBold"/>
+              </a:rPr>
+              <a:t>Write back to ERP</a:t>
+            </a:r>
+          </a:p>
+        </p:txBody>
+      </p:sp>
+      <p:sp>
+        <p:nvSpPr>
+          <p:cNvPr id="91" name="Rounded Rectangle 90"/>
+          <p:cNvSpPr/>
+          <p:nvPr/>
+        </p:nvSpPr>
+        <p:spPr>
+          <a:xfrm>
+            <a:off x="14255496" y="7516368"/>
+            <a:ext cx="2642616" cy="420624"/>
+          </a:xfrm>
+          <a:prstGeom prst="roundRect">
+            <a:avLst>
+              <a:gd name="adj" fmla="val 50000"/>
             </a:avLst>
           </a:prstGeom>
           <a:solidFill>
@@ -11137,14 +11683,14 @@
       </p:sp>
       <p:sp>
         <p:nvSpPr>
-          <p:cNvPr id="82" name="TextBox 81"/>
-          <p:cNvSpPr txBox="1"/>
-          <p:nvPr/>
-        </p:nvSpPr>
-        <p:spPr>
-          <a:xfrm>
-            <a:off x="14218920" y="8531352"/>
-            <a:ext cx="2715768" cy="329184"/>
+          <p:cNvPr id="92" name="TextBox 91"/>
+          <p:cNvSpPr txBox="1"/>
+          <p:nvPr/>
+        </p:nvSpPr>
+        <p:spPr>
+          <a:xfrm>
+            <a:off x="14255496" y="7516368"/>
+            <a:ext cx="2642616" cy="420624"/>
           </a:xfrm>
           <a:prstGeom prst="rect">
             <a:avLst/>
@@ -11169,7 +11715,7 @@
               </a:spcAft>
             </a:pPr>
             <a:r>
-              <a:rPr sz="1100" b="1" i="0" spc="80">
+              <a:rPr sz="1100" b="0" i="0" spc="80">
                 <a:solidFill>
                   <a:srgbClr val="146B3F"/>
                 </a:solidFill>
@@ -11182,61 +11728,680 @@
       </p:sp>
       <p:sp>
         <p:nvSpPr>
-          <p:cNvPr id="83" name="TextBox 82"/>
-          <p:cNvSpPr txBox="1"/>
-          <p:nvPr/>
-        </p:nvSpPr>
-        <p:spPr>
-          <a:xfrm>
-            <a:off x="758952" y="9281160"/>
-            <a:ext cx="16770096" cy="457200"/>
-          </a:xfrm>
-          <a:prstGeom prst="rect">
-            <a:avLst/>
-          </a:prstGeom>
-          <a:noFill/>
-        </p:spPr>
-        <p:txBody>
-          <a:bodyPr wrap="square" lIns="0" rIns="0" tIns="0" bIns="0" anchor="t">
+          <p:cNvPr id="93" name="Rounded Rectangle 92"/>
+          <p:cNvSpPr/>
+          <p:nvPr/>
+        </p:nvSpPr>
+        <p:spPr>
+          <a:xfrm>
+            <a:off x="758952" y="8503920"/>
+            <a:ext cx="16770096" cy="960120"/>
+          </a:xfrm>
+          <a:prstGeom prst="roundRect">
+            <a:avLst>
+              <a:gd name="adj" fmla="val 9523"/>
+            </a:avLst>
+          </a:prstGeom>
+          <a:solidFill>
+            <a:srgbClr val="FFFFFF"/>
+          </a:solidFill>
+          <a:ln w="9525">
+            <a:solidFill>
+              <a:srgbClr val="E2E4EA"/>
+            </a:solidFill>
+          </a:ln>
+          <a:effectLst/>
+        </p:spPr>
+        <p:style>
+          <a:lnRef idx="1">
+            <a:schemeClr val="accent1"/>
+          </a:lnRef>
+          <a:fillRef idx="3">
+            <a:schemeClr val="accent1"/>
+          </a:fillRef>
+          <a:effectRef idx="2">
+            <a:schemeClr val="accent1"/>
+          </a:effectRef>
+          <a:fontRef idx="minor">
+            <a:schemeClr val="lt1"/>
+          </a:fontRef>
+        </p:style>
+        <p:txBody>
+          <a:bodyPr rtlCol="0" anchor="ctr"/>
+          <a:lstStyle/>
+          <a:p>
+            <a:pPr algn="ctr"/>
+          </a:p>
+        </p:txBody>
+      </p:sp>
+      <p:sp>
+        <p:nvSpPr>
+          <p:cNvPr id="94" name="TextBox 93"/>
+          <p:cNvSpPr txBox="1"/>
+          <p:nvPr/>
+        </p:nvSpPr>
+        <p:spPr>
+          <a:xfrm>
+            <a:off x="1051560" y="8503920"/>
+            <a:ext cx="2834640" cy="960120"/>
+          </a:xfrm>
+          <a:prstGeom prst="rect">
+            <a:avLst/>
+          </a:prstGeom>
+          <a:noFill/>
+        </p:spPr>
+        <p:txBody>
+          <a:bodyPr wrap="square" lIns="0" rIns="0" tIns="0" bIns="0" anchor="ctr">
             <a:noAutofit/>
           </a:bodyPr>
           <a:lstStyle/>
           <a:p>
             <a:pPr algn="l">
               <a:lnSpc>
-                <a:spcPct val="120000"/>
-              </a:lnSpc>
-              <a:spcBef>
-                <a:spcPts val="0"/>
-              </a:spcBef>
-              <a:spcAft>
-                <a:spcPts val="0"/>
-              </a:spcAft>
-            </a:pPr>
-            <a:r>
-              <a:rPr sz="1450" b="0" i="0">
+                <a:spcPct val="125000"/>
+              </a:lnSpc>
+              <a:spcBef>
+                <a:spcPts val="0"/>
+              </a:spcBef>
+              <a:spcAft>
+                <a:spcPts val="300"/>
+              </a:spcAft>
+            </a:pPr>
+            <a:r>
+              <a:rPr sz="1300" b="1" i="0" spc="120">
+                <a:solidFill>
+                  <a:srgbClr val="7C3AED"/>
+                </a:solidFill>
+                <a:latin typeface="Consolas"/>
+              </a:rPr>
+              <a:t>GUARDRAILS</a:t>
+            </a:r>
+          </a:p>
+          <a:p>
+            <a:pPr algn="l">
+              <a:lnSpc>
+                <a:spcPct val="125000"/>
+              </a:lnSpc>
+              <a:spcBef>
+                <a:spcPts val="0"/>
+              </a:spcBef>
+              <a:spcAft>
+                <a:spcPts val="300"/>
+              </a:spcAft>
+            </a:pPr>
+            <a:r>
+              <a:rPr sz="1150" b="0" i="0">
+                <a:solidFill>
+                  <a:srgbClr val="6A707B"/>
+                </a:solidFill>
+                <a:latin typeface="Montserrat"/>
+              </a:rPr>
+              <a:t>Every step · per category</a:t>
+            </a:r>
+          </a:p>
+        </p:txBody>
+      </p:sp>
+      <p:sp>
+        <p:nvSpPr>
+          <p:cNvPr id="95" name="Rounded Rectangle 94"/>
+          <p:cNvSpPr/>
+          <p:nvPr/>
+        </p:nvSpPr>
+        <p:spPr>
+          <a:xfrm>
+            <a:off x="4114800" y="8796528"/>
+            <a:ext cx="2072640" cy="384048"/>
+          </a:xfrm>
+          <a:prstGeom prst="roundRect">
+            <a:avLst>
+              <a:gd name="adj" fmla="val 50000"/>
+            </a:avLst>
+          </a:prstGeom>
+          <a:solidFill>
+            <a:srgbClr val="FAFBFC"/>
+          </a:solidFill>
+          <a:ln w="9525">
+            <a:solidFill>
+              <a:srgbClr val="E2E4EA"/>
+            </a:solidFill>
+          </a:ln>
+          <a:effectLst/>
+        </p:spPr>
+        <p:style>
+          <a:lnRef idx="1">
+            <a:schemeClr val="accent1"/>
+          </a:lnRef>
+          <a:fillRef idx="3">
+            <a:schemeClr val="accent1"/>
+          </a:fillRef>
+          <a:effectRef idx="2">
+            <a:schemeClr val="accent1"/>
+          </a:effectRef>
+          <a:fontRef idx="minor">
+            <a:schemeClr val="lt1"/>
+          </a:fontRef>
+        </p:style>
+        <p:txBody>
+          <a:bodyPr rtlCol="0" anchor="ctr"/>
+          <a:lstStyle/>
+          <a:p>
+            <a:pPr algn="ctr"/>
+          </a:p>
+        </p:txBody>
+      </p:sp>
+      <p:sp>
+        <p:nvSpPr>
+          <p:cNvPr id="96" name="TextBox 95"/>
+          <p:cNvSpPr txBox="1"/>
+          <p:nvPr/>
+        </p:nvSpPr>
+        <p:spPr>
+          <a:xfrm>
+            <a:off x="4114800" y="8796528"/>
+            <a:ext cx="2072640" cy="384048"/>
+          </a:xfrm>
+          <a:prstGeom prst="rect">
+            <a:avLst/>
+          </a:prstGeom>
+          <a:noFill/>
+        </p:spPr>
+        <p:txBody>
+          <a:bodyPr wrap="square" lIns="0" rIns="0" tIns="0" bIns="0" anchor="ctr">
+            <a:noAutofit/>
+          </a:bodyPr>
+          <a:lstStyle/>
+          <a:p>
+            <a:pPr algn="ctr">
+              <a:lnSpc>
+                <a:spcPct val="100000"/>
+              </a:lnSpc>
+              <a:spcBef>
+                <a:spcPts val="0"/>
+              </a:spcBef>
+              <a:spcAft>
+                <a:spcPts val="0"/>
+              </a:spcAft>
+            </a:pPr>
+            <a:r>
+              <a:rPr sz="1150" b="0" i="0">
                 <a:solidFill>
                   <a:srgbClr val="1B1F26"/>
                 </a:solidFill>
                 <a:latin typeface="Montserrat SemiBold"/>
               </a:rPr>
-              <a:t>Delivery posture.  </a:t>
-            </a:r>
-            <a:r>
-              <a:rPr sz="1450" b="0" i="0">
-                <a:solidFill>
-                  <a:srgbClr val="484E59"/>
-                </a:solidFill>
-                <a:latin typeface="Montserrat"/>
-              </a:rPr>
-              <a:t>All five agents are in production today — Intake, Sourcing, Negotiation, Evaluation and Award — orchestrated end-to-end, with the ERP kept as the system of record.</a:t>
-            </a:r>
-          </a:p>
-        </p:txBody>
-      </p:sp>
-      <p:sp>
-        <p:nvSpPr>
-          <p:cNvPr id="84" name="Rectangle 83"/>
+              <a:t>Hard limits</a:t>
+            </a:r>
+          </a:p>
+        </p:txBody>
+      </p:sp>
+      <p:sp>
+        <p:nvSpPr>
+          <p:cNvPr id="97" name="Rounded Rectangle 96"/>
+          <p:cNvSpPr/>
+          <p:nvPr/>
+        </p:nvSpPr>
+        <p:spPr>
+          <a:xfrm>
+            <a:off x="6352032" y="8796528"/>
+            <a:ext cx="2072640" cy="384048"/>
+          </a:xfrm>
+          <a:prstGeom prst="roundRect">
+            <a:avLst>
+              <a:gd name="adj" fmla="val 50000"/>
+            </a:avLst>
+          </a:prstGeom>
+          <a:solidFill>
+            <a:srgbClr val="FAFBFC"/>
+          </a:solidFill>
+          <a:ln w="9525">
+            <a:solidFill>
+              <a:srgbClr val="E2E4EA"/>
+            </a:solidFill>
+          </a:ln>
+          <a:effectLst/>
+        </p:spPr>
+        <p:style>
+          <a:lnRef idx="1">
+            <a:schemeClr val="accent1"/>
+          </a:lnRef>
+          <a:fillRef idx="3">
+            <a:schemeClr val="accent1"/>
+          </a:fillRef>
+          <a:effectRef idx="2">
+            <a:schemeClr val="accent1"/>
+          </a:effectRef>
+          <a:fontRef idx="minor">
+            <a:schemeClr val="lt1"/>
+          </a:fontRef>
+        </p:style>
+        <p:txBody>
+          <a:bodyPr rtlCol="0" anchor="ctr"/>
+          <a:lstStyle/>
+          <a:p>
+            <a:pPr algn="ctr"/>
+          </a:p>
+        </p:txBody>
+      </p:sp>
+      <p:sp>
+        <p:nvSpPr>
+          <p:cNvPr id="98" name="TextBox 97"/>
+          <p:cNvSpPr txBox="1"/>
+          <p:nvPr/>
+        </p:nvSpPr>
+        <p:spPr>
+          <a:xfrm>
+            <a:off x="6352032" y="8796528"/>
+            <a:ext cx="2072640" cy="384048"/>
+          </a:xfrm>
+          <a:prstGeom prst="rect">
+            <a:avLst/>
+          </a:prstGeom>
+          <a:noFill/>
+        </p:spPr>
+        <p:txBody>
+          <a:bodyPr wrap="square" lIns="0" rIns="0" tIns="0" bIns="0" anchor="ctr">
+            <a:noAutofit/>
+          </a:bodyPr>
+          <a:lstStyle/>
+          <a:p>
+            <a:pPr algn="ctr">
+              <a:lnSpc>
+                <a:spcPct val="100000"/>
+              </a:lnSpc>
+              <a:spcBef>
+                <a:spcPts val="0"/>
+              </a:spcBef>
+              <a:spcAft>
+                <a:spcPts val="0"/>
+              </a:spcAft>
+            </a:pPr>
+            <a:r>
+              <a:rPr sz="1150" b="0" i="0">
+                <a:solidFill>
+                  <a:srgbClr val="1B1F26"/>
+                </a:solidFill>
+                <a:latin typeface="Montserrat SemiBold"/>
+              </a:rPr>
+              <a:t>&gt;5% deviation</a:t>
+            </a:r>
+          </a:p>
+        </p:txBody>
+      </p:sp>
+      <p:sp>
+        <p:nvSpPr>
+          <p:cNvPr id="99" name="Rounded Rectangle 98"/>
+          <p:cNvSpPr/>
+          <p:nvPr/>
+        </p:nvSpPr>
+        <p:spPr>
+          <a:xfrm>
+            <a:off x="8589264" y="8796528"/>
+            <a:ext cx="2072640" cy="384048"/>
+          </a:xfrm>
+          <a:prstGeom prst="roundRect">
+            <a:avLst>
+              <a:gd name="adj" fmla="val 50000"/>
+            </a:avLst>
+          </a:prstGeom>
+          <a:solidFill>
+            <a:srgbClr val="FAFBFC"/>
+          </a:solidFill>
+          <a:ln w="9525">
+            <a:solidFill>
+              <a:srgbClr val="E2E4EA"/>
+            </a:solidFill>
+          </a:ln>
+          <a:effectLst/>
+        </p:spPr>
+        <p:style>
+          <a:lnRef idx="1">
+            <a:schemeClr val="accent1"/>
+          </a:lnRef>
+          <a:fillRef idx="3">
+            <a:schemeClr val="accent1"/>
+          </a:fillRef>
+          <a:effectRef idx="2">
+            <a:schemeClr val="accent1"/>
+          </a:effectRef>
+          <a:fontRef idx="minor">
+            <a:schemeClr val="lt1"/>
+          </a:fontRef>
+        </p:style>
+        <p:txBody>
+          <a:bodyPr rtlCol="0" anchor="ctr"/>
+          <a:lstStyle/>
+          <a:p>
+            <a:pPr algn="ctr"/>
+          </a:p>
+        </p:txBody>
+      </p:sp>
+      <p:sp>
+        <p:nvSpPr>
+          <p:cNvPr id="100" name="TextBox 99"/>
+          <p:cNvSpPr txBox="1"/>
+          <p:nvPr/>
+        </p:nvSpPr>
+        <p:spPr>
+          <a:xfrm>
+            <a:off x="8589264" y="8796528"/>
+            <a:ext cx="2072640" cy="384048"/>
+          </a:xfrm>
+          <a:prstGeom prst="rect">
+            <a:avLst/>
+          </a:prstGeom>
+          <a:noFill/>
+        </p:spPr>
+        <p:txBody>
+          <a:bodyPr wrap="square" lIns="0" rIns="0" tIns="0" bIns="0" anchor="ctr">
+            <a:noAutofit/>
+          </a:bodyPr>
+          <a:lstStyle/>
+          <a:p>
+            <a:pPr algn="ctr">
+              <a:lnSpc>
+                <a:spcPct val="100000"/>
+              </a:lnSpc>
+              <a:spcBef>
+                <a:spcPts val="0"/>
+              </a:spcBef>
+              <a:spcAft>
+                <a:spcPts val="0"/>
+              </a:spcAft>
+            </a:pPr>
+            <a:r>
+              <a:rPr sz="1150" b="0" i="0">
+                <a:solidFill>
+                  <a:srgbClr val="1B1F26"/>
+                </a:solidFill>
+                <a:latin typeface="Montserrat SemiBold"/>
+              </a:rPr>
+              <a:t>SoD matrix</a:t>
+            </a:r>
+          </a:p>
+        </p:txBody>
+      </p:sp>
+      <p:sp>
+        <p:nvSpPr>
+          <p:cNvPr id="101" name="Rounded Rectangle 100"/>
+          <p:cNvSpPr/>
+          <p:nvPr/>
+        </p:nvSpPr>
+        <p:spPr>
+          <a:xfrm>
+            <a:off x="10826496" y="8796528"/>
+            <a:ext cx="2072640" cy="384048"/>
+          </a:xfrm>
+          <a:prstGeom prst="roundRect">
+            <a:avLst>
+              <a:gd name="adj" fmla="val 50000"/>
+            </a:avLst>
+          </a:prstGeom>
+          <a:solidFill>
+            <a:srgbClr val="FAFBFC"/>
+          </a:solidFill>
+          <a:ln w="9525">
+            <a:solidFill>
+              <a:srgbClr val="E2E4EA"/>
+            </a:solidFill>
+          </a:ln>
+          <a:effectLst/>
+        </p:spPr>
+        <p:style>
+          <a:lnRef idx="1">
+            <a:schemeClr val="accent1"/>
+          </a:lnRef>
+          <a:fillRef idx="3">
+            <a:schemeClr val="accent1"/>
+          </a:fillRef>
+          <a:effectRef idx="2">
+            <a:schemeClr val="accent1"/>
+          </a:effectRef>
+          <a:fontRef idx="minor">
+            <a:schemeClr val="lt1"/>
+          </a:fontRef>
+        </p:style>
+        <p:txBody>
+          <a:bodyPr rtlCol="0" anchor="ctr"/>
+          <a:lstStyle/>
+          <a:p>
+            <a:pPr algn="ctr"/>
+          </a:p>
+        </p:txBody>
+      </p:sp>
+      <p:sp>
+        <p:nvSpPr>
+          <p:cNvPr id="102" name="TextBox 101"/>
+          <p:cNvSpPr txBox="1"/>
+          <p:nvPr/>
+        </p:nvSpPr>
+        <p:spPr>
+          <a:xfrm>
+            <a:off x="10826496" y="8796528"/>
+            <a:ext cx="2072640" cy="384048"/>
+          </a:xfrm>
+          <a:prstGeom prst="rect">
+            <a:avLst/>
+          </a:prstGeom>
+          <a:noFill/>
+        </p:spPr>
+        <p:txBody>
+          <a:bodyPr wrap="square" lIns="0" rIns="0" tIns="0" bIns="0" anchor="ctr">
+            <a:noAutofit/>
+          </a:bodyPr>
+          <a:lstStyle/>
+          <a:p>
+            <a:pPr algn="ctr">
+              <a:lnSpc>
+                <a:spcPct val="100000"/>
+              </a:lnSpc>
+              <a:spcBef>
+                <a:spcPts val="0"/>
+              </a:spcBef>
+              <a:spcAft>
+                <a:spcPts val="0"/>
+              </a:spcAft>
+            </a:pPr>
+            <a:r>
+              <a:rPr sz="1150" b="0" i="0">
+                <a:solidFill>
+                  <a:srgbClr val="1B1F26"/>
+                </a:solidFill>
+                <a:latin typeface="Montserrat SemiBold"/>
+              </a:rPr>
+              <a:t>Immutable audit log</a:t>
+            </a:r>
+          </a:p>
+        </p:txBody>
+      </p:sp>
+      <p:sp>
+        <p:nvSpPr>
+          <p:cNvPr id="103" name="Rounded Rectangle 102"/>
+          <p:cNvSpPr/>
+          <p:nvPr/>
+        </p:nvSpPr>
+        <p:spPr>
+          <a:xfrm>
+            <a:off x="13063728" y="8796528"/>
+            <a:ext cx="2072640" cy="384048"/>
+          </a:xfrm>
+          <a:prstGeom prst="roundRect">
+            <a:avLst>
+              <a:gd name="adj" fmla="val 50000"/>
+            </a:avLst>
+          </a:prstGeom>
+          <a:solidFill>
+            <a:srgbClr val="FAFBFC"/>
+          </a:solidFill>
+          <a:ln w="9525">
+            <a:solidFill>
+              <a:srgbClr val="E2E4EA"/>
+            </a:solidFill>
+          </a:ln>
+          <a:effectLst/>
+        </p:spPr>
+        <p:style>
+          <a:lnRef idx="1">
+            <a:schemeClr val="accent1"/>
+          </a:lnRef>
+          <a:fillRef idx="3">
+            <a:schemeClr val="accent1"/>
+          </a:fillRef>
+          <a:effectRef idx="2">
+            <a:schemeClr val="accent1"/>
+          </a:effectRef>
+          <a:fontRef idx="minor">
+            <a:schemeClr val="lt1"/>
+          </a:fontRef>
+        </p:style>
+        <p:txBody>
+          <a:bodyPr rtlCol="0" anchor="ctr"/>
+          <a:lstStyle/>
+          <a:p>
+            <a:pPr algn="ctr"/>
+          </a:p>
+        </p:txBody>
+      </p:sp>
+      <p:sp>
+        <p:nvSpPr>
+          <p:cNvPr id="104" name="TextBox 103"/>
+          <p:cNvSpPr txBox="1"/>
+          <p:nvPr/>
+        </p:nvSpPr>
+        <p:spPr>
+          <a:xfrm>
+            <a:off x="13063728" y="8796528"/>
+            <a:ext cx="2072640" cy="384048"/>
+          </a:xfrm>
+          <a:prstGeom prst="rect">
+            <a:avLst/>
+          </a:prstGeom>
+          <a:noFill/>
+        </p:spPr>
+        <p:txBody>
+          <a:bodyPr wrap="square" lIns="0" rIns="0" tIns="0" bIns="0" anchor="ctr">
+            <a:noAutofit/>
+          </a:bodyPr>
+          <a:lstStyle/>
+          <a:p>
+            <a:pPr algn="ctr">
+              <a:lnSpc>
+                <a:spcPct val="100000"/>
+              </a:lnSpc>
+              <a:spcBef>
+                <a:spcPts val="0"/>
+              </a:spcBef>
+              <a:spcAft>
+                <a:spcPts val="0"/>
+              </a:spcAft>
+            </a:pPr>
+            <a:r>
+              <a:rPr sz="1150" b="0" i="0">
+                <a:solidFill>
+                  <a:srgbClr val="1B1F26"/>
+                </a:solidFill>
+                <a:latin typeface="Montserrat SemiBold"/>
+              </a:rPr>
+              <a:t>Auto-blacklist</a:t>
+            </a:r>
+          </a:p>
+        </p:txBody>
+      </p:sp>
+      <p:sp>
+        <p:nvSpPr>
+          <p:cNvPr id="105" name="Rounded Rectangle 104"/>
+          <p:cNvSpPr/>
+          <p:nvPr/>
+        </p:nvSpPr>
+        <p:spPr>
+          <a:xfrm>
+            <a:off x="15300960" y="8796528"/>
+            <a:ext cx="2072640" cy="384048"/>
+          </a:xfrm>
+          <a:prstGeom prst="roundRect">
+            <a:avLst>
+              <a:gd name="adj" fmla="val 50000"/>
+            </a:avLst>
+          </a:prstGeom>
+          <a:solidFill>
+            <a:srgbClr val="FAFBFC"/>
+          </a:solidFill>
+          <a:ln w="9525">
+            <a:solidFill>
+              <a:srgbClr val="E2E4EA"/>
+            </a:solidFill>
+          </a:ln>
+          <a:effectLst/>
+        </p:spPr>
+        <p:style>
+          <a:lnRef idx="1">
+            <a:schemeClr val="accent1"/>
+          </a:lnRef>
+          <a:fillRef idx="3">
+            <a:schemeClr val="accent1"/>
+          </a:fillRef>
+          <a:effectRef idx="2">
+            <a:schemeClr val="accent1"/>
+          </a:effectRef>
+          <a:fontRef idx="minor">
+            <a:schemeClr val="lt1"/>
+          </a:fontRef>
+        </p:style>
+        <p:txBody>
+          <a:bodyPr rtlCol="0" anchor="ctr"/>
+          <a:lstStyle/>
+          <a:p>
+            <a:pPr algn="ctr"/>
+          </a:p>
+        </p:txBody>
+      </p:sp>
+      <p:sp>
+        <p:nvSpPr>
+          <p:cNvPr id="106" name="TextBox 105"/>
+          <p:cNvSpPr txBox="1"/>
+          <p:nvPr/>
+        </p:nvSpPr>
+        <p:spPr>
+          <a:xfrm>
+            <a:off x="15300960" y="8796528"/>
+            <a:ext cx="2072640" cy="384048"/>
+          </a:xfrm>
+          <a:prstGeom prst="rect">
+            <a:avLst/>
+          </a:prstGeom>
+          <a:noFill/>
+        </p:spPr>
+        <p:txBody>
+          <a:bodyPr wrap="square" lIns="0" rIns="0" tIns="0" bIns="0" anchor="ctr">
+            <a:noAutofit/>
+          </a:bodyPr>
+          <a:lstStyle/>
+          <a:p>
+            <a:pPr algn="ctr">
+              <a:lnSpc>
+                <a:spcPct val="100000"/>
+              </a:lnSpc>
+              <a:spcBef>
+                <a:spcPts val="0"/>
+              </a:spcBef>
+              <a:spcAft>
+                <a:spcPts val="0"/>
+              </a:spcAft>
+            </a:pPr>
+            <a:r>
+              <a:rPr sz="1150" b="0" i="0">
+                <a:solidFill>
+                  <a:srgbClr val="1B1F26"/>
+                </a:solidFill>
+                <a:latin typeface="Montserrat SemiBold"/>
+              </a:rPr>
+              <a:t>Human-in-the-loop</a:t>
+            </a:r>
+          </a:p>
+        </p:txBody>
+      </p:sp>
+      <p:sp>
+        <p:nvSpPr>
+          <p:cNvPr id="107" name="Rectangle 106"/>
           <p:cNvSpPr/>
           <p:nvPr/>
         </p:nvSpPr>
@@ -11280,7 +12445,7 @@
       </p:sp>
       <p:cxnSp>
         <p:nvCxnSpPr>
-          <p:cNvPr id="85" name="Connector 84"/>
+          <p:cNvPr id="108" name="Connector 107"/>
           <p:cNvCxnSpPr/>
           <p:nvPr/>
         </p:nvCxnSpPr>
@@ -11316,7 +12481,7 @@
       </p:cxnSp>
       <p:sp>
         <p:nvSpPr>
-          <p:cNvPr id="86" name="TextBox 85"/>
+          <p:cNvPr id="109" name="TextBox 108"/>
           <p:cNvSpPr txBox="1"/>
           <p:nvPr/>
         </p:nvSpPr>
@@ -11361,7 +12526,7 @@
       </p:sp>
       <p:sp>
         <p:nvSpPr>
-          <p:cNvPr id="87" name="TextBox 86"/>
+          <p:cNvPr id="110" name="TextBox 109"/>
           <p:cNvSpPr txBox="1"/>
           <p:nvPr/>
         </p:nvSpPr>
@@ -11562,8 +12727,8 @@
         </p:blipFill>
         <p:spPr>
           <a:xfrm>
-            <a:off x="758952" y="292608"/>
-            <a:ext cx="2542032" cy="365760"/>
+            <a:off x="758952" y="256032"/>
+            <a:ext cx="2660904" cy="384048"/>
           </a:xfrm>
           <a:prstGeom prst="rect">
             <a:avLst/>
@@ -11578,8 +12743,8 @@
         </p:nvSpPr>
         <p:spPr>
           <a:xfrm>
-            <a:off x="3456432" y="0"/>
-            <a:ext cx="457200" cy="960120"/>
+            <a:off x="3474720" y="256032"/>
+            <a:ext cx="502920" cy="384048"/>
           </a:xfrm>
           <a:prstGeom prst="rect">
             <a:avLst/>
@@ -11604,7 +12769,7 @@
               </a:spcAft>
             </a:pPr>
             <a:r>
-              <a:rPr sz="1800" b="0" i="0">
+              <a:rPr sz="2000" b="0" i="0">
                 <a:solidFill>
                   <a:srgbClr val="6A707B"/>
                 </a:solidFill>
@@ -11631,8 +12796,8 @@
         </p:blipFill>
         <p:spPr>
           <a:xfrm>
-            <a:off x="3977639" y="338328"/>
-            <a:ext cx="749808" cy="292608"/>
+            <a:off x="4023360" y="256032"/>
+            <a:ext cx="1188720" cy="466344"/>
           </a:xfrm>
           <a:prstGeom prst="rect">
             <a:avLst/>
@@ -11647,8 +12812,8 @@
         </p:nvCxnSpPr>
         <p:spPr>
           <a:xfrm>
-            <a:off x="5074920" y="338328"/>
-            <a:ext cx="0" cy="283464"/>
+            <a:off x="5468112" y="274320"/>
+            <a:ext cx="0" cy="411480"/>
           </a:xfrm>
           <a:prstGeom prst="bentConnector3">
             <a:avLst/>
@@ -11683,8 +12848,8 @@
         </p:nvSpPr>
         <p:spPr>
           <a:xfrm>
-            <a:off x="5285232" y="0"/>
-            <a:ext cx="8686800" cy="960120"/>
+            <a:off x="5687568" y="0"/>
+            <a:ext cx="8229600" cy="960120"/>
           </a:xfrm>
           <a:prstGeom prst="rect">
             <a:avLst/>
@@ -11728,8 +12893,8 @@
         </p:nvSpPr>
         <p:spPr>
           <a:xfrm>
-            <a:off x="14996159" y="0"/>
-            <a:ext cx="1645920" cy="960120"/>
+            <a:off x="14356080" y="0"/>
+            <a:ext cx="2103120" cy="960120"/>
           </a:xfrm>
           <a:prstGeom prst="rect">
             <a:avLst/>
@@ -11790,8 +12955,8 @@
         </p:blipFill>
         <p:spPr>
           <a:xfrm>
-            <a:off x="16916400" y="256032"/>
-            <a:ext cx="457200" cy="475488"/>
+            <a:off x="16751808" y="155448"/>
+            <a:ext cx="594360" cy="658368"/>
           </a:xfrm>
           <a:prstGeom prst="rect">
             <a:avLst/>
@@ -14031,10 +15196,10 @@
           <a:gradFill rotWithShape="1">
             <a:gsLst>
               <a:gs pos="0">
-                <a:srgbClr val="0F766E"/>
+                <a:srgbClr val="2E1065"/>
               </a:gs>
               <a:gs pos="100000">
-                <a:srgbClr val="13B5A6"/>
+                <a:srgbClr val="4C1D95"/>
               </a:gs>
             </a:gsLst>
             <a:lin scaled="0" ang="18600000"/>
@@ -14102,7 +15267,7 @@
             <a:r>
               <a:rPr sz="1200" b="1" i="0" spc="120">
                 <a:solidFill>
-                  <a:srgbClr val="CCFBF1"/>
+                  <a:srgbClr val="D8C9F5"/>
                 </a:solidFill>
                 <a:latin typeface="Consolas"/>
               </a:rPr>
@@ -14128,7 +15293,7 @@
             </a:avLst>
           </a:prstGeom>
           <a:solidFill>
-            <a:srgbClr val="0B5B55"/>
+            <a:srgbClr val="3B1A6B"/>
           </a:solidFill>
           <a:ln>
             <a:noFill/>
@@ -14193,7 +15358,7 @@
             <a:r>
               <a:rPr sz="1050" b="1" i="0" spc="120">
                 <a:solidFill>
-                  <a:srgbClr val="CCFBF1"/>
+                  <a:srgbClr val="D8C9F5"/>
                 </a:solidFill>
                 <a:latin typeface="Consolas"/>
               </a:rPr>
@@ -14283,7 +15448,7 @@
             <a:r>
               <a:rPr sz="1200" b="0" i="0">
                 <a:solidFill>
-                  <a:srgbClr val="CCFBF1"/>
+                  <a:srgbClr val="D8C9F5"/>
                 </a:solidFill>
                 <a:latin typeface="Montserrat"/>
               </a:rPr>
@@ -14354,7 +15519,7 @@
             </a:avLst>
           </a:prstGeom>
           <a:solidFill>
-            <a:srgbClr val="0B5B55"/>
+            <a:srgbClr val="3B1A6B"/>
           </a:solidFill>
           <a:ln>
             <a:noFill/>
@@ -14419,7 +15584,7 @@
             <a:r>
               <a:rPr sz="1050" b="1" i="0" spc="120">
                 <a:solidFill>
-                  <a:srgbClr val="CCFBF1"/>
+                  <a:srgbClr val="D8C9F5"/>
                 </a:solidFill>
                 <a:latin typeface="Consolas"/>
               </a:rPr>
@@ -14509,7 +15674,7 @@
             <a:r>
               <a:rPr sz="1200" b="0" i="0">
                 <a:solidFill>
-                  <a:srgbClr val="CCFBF1"/>
+                  <a:srgbClr val="D8C9F5"/>
                 </a:solidFill>
                 <a:latin typeface="Montserrat"/>
               </a:rPr>
@@ -14580,7 +15745,7 @@
             </a:avLst>
           </a:prstGeom>
           <a:solidFill>
-            <a:srgbClr val="0B5B55"/>
+            <a:srgbClr val="3B1A6B"/>
           </a:solidFill>
           <a:ln>
             <a:noFill/>
@@ -14645,7 +15810,7 @@
             <a:r>
               <a:rPr sz="1050" b="1" i="0" spc="120">
                 <a:solidFill>
-                  <a:srgbClr val="CCFBF1"/>
+                  <a:srgbClr val="D8C9F5"/>
                 </a:solidFill>
                 <a:latin typeface="Consolas"/>
               </a:rPr>
@@ -14735,7 +15900,7 @@
             <a:r>
               <a:rPr sz="1200" b="0" i="0">
                 <a:solidFill>
-                  <a:srgbClr val="CCFBF1"/>
+                  <a:srgbClr val="D8C9F5"/>
                 </a:solidFill>
                 <a:latin typeface="Montserrat"/>
               </a:rPr>

--- a/unilever-aerchain/Unilever_Aerchain_Infosys_Deck.pptx
+++ b/unilever-aerchain/Unilever_Aerchain_Infosys_Deck.pptx
@@ -8520,7 +8520,7 @@
             </a:avLst>
           </a:prstGeom>
           <a:solidFill>
-            <a:srgbClr val="ECE3FF"/>
+            <a:srgbClr val="F1EAFC"/>
           </a:solidFill>
           <a:ln>
             <a:noFill/>
@@ -9183,7 +9183,7 @@
             </a:avLst>
           </a:prstGeom>
           <a:solidFill>
-            <a:srgbClr val="ECE3FF"/>
+            <a:srgbClr val="F1EAFC"/>
           </a:solidFill>
           <a:ln>
             <a:noFill/>
@@ -9846,7 +9846,7 @@
             </a:avLst>
           </a:prstGeom>
           <a:solidFill>
-            <a:srgbClr val="ECE3FF"/>
+            <a:srgbClr val="F1EAFC"/>
           </a:solidFill>
           <a:ln>
             <a:noFill/>
@@ -10509,7 +10509,7 @@
             </a:avLst>
           </a:prstGeom>
           <a:solidFill>
-            <a:srgbClr val="ECE3FF"/>
+            <a:srgbClr val="F1EAFC"/>
           </a:solidFill>
           <a:ln>
             <a:noFill/>
@@ -11172,7 +11172,7 @@
             </a:avLst>
           </a:prstGeom>
           <a:solidFill>
-            <a:srgbClr val="ECE3FF"/>
+            <a:srgbClr val="F1EAFC"/>
           </a:solidFill>
           <a:ln>
             <a:noFill/>
